--- a/Bank_Management_System_Presentation.pptx
+++ b/Bank_Management_System_Presentation.pptx
@@ -3116,7 +3116,7 @@
             <a:avLst/>
           </a:prstGeom>
           <a:solidFill>
-            <a:srgbClr val="0B132B"/>
+            <a:srgbClr val="070B16"/>
           </a:solidFill>
           <a:ln>
             <a:noFill/>
@@ -3152,14 +3152,14 @@
         </p:nvSpPr>
         <p:spPr>
           <a:xfrm>
-            <a:off x="1371600" y="914400"/>
-            <a:ext cx="9448495" cy="5029200"/>
+            <a:off x="731520" y="731520"/>
+            <a:ext cx="5852160" cy="5394960"/>
           </a:xfrm>
           <a:prstGeom prst="roundRect">
             <a:avLst/>
           </a:prstGeom>
           <a:solidFill>
-            <a:srgbClr val="1C2541"/>
+            <a:srgbClr val="10182C"/>
           </a:solidFill>
           <a:ln w="25400">
             <a:solidFill>
@@ -3197,8 +3197,8 @@
         </p:nvSpPr>
         <p:spPr>
           <a:xfrm>
-            <a:off x="1828800" y="1280160"/>
-            <a:ext cx="8534095" cy="1371600"/>
+            <a:off x="1005840" y="1005840"/>
+            <a:ext cx="5303520" cy="2011680"/>
           </a:xfrm>
           <a:prstGeom prst="rect">
             <a:avLst/>
@@ -3211,29 +3211,42 @@
           </a:bodyPr>
           <a:lstStyle/>
           <a:p>
-            <a:pPr algn="ctr">
-              <a:defRPr sz="3200" b="1">
-                <a:solidFill>
-                  <a:srgbClr val="F8FAFC"/>
+            <a:pPr>
+              <a:defRPr sz="1100" b="1">
+                <a:solidFill>
+                  <a:srgbClr val="06B6D4"/>
                 </a:solidFill>
                 <a:latin typeface="Arial"/>
               </a:defRPr>
             </a:pPr>
             <a:r>
-              <a:t>CS207 BANK MANAGEMENT SYSTEM</a:t>
-            </a:r>
-          </a:p>
-          <a:p>
-            <a:pPr algn="ctr">
-              <a:defRPr sz="1700">
-                <a:solidFill>
-                  <a:srgbClr val="06B6D4"/>
+              <a:t>CS207 DATA STRUCTURES &amp; ALGORITHMS PROJECT</a:t>
+            </a:r>
+          </a:p>
+          <a:p>
+            <a:pPr>
+              <a:defRPr sz="2800" b="1">
+                <a:solidFill>
+                  <a:srgbClr val="F8FAFC"/>
                 </a:solidFill>
                 <a:latin typeface="Arial"/>
               </a:defRPr>
             </a:pPr>
             <a:r>
-              <a:t>Modular C++ Core Architecture &amp; Full-Stack Banking Application</a:t>
+              <a:t>BANK MANAGEMENT SYSTEM</a:t>
+            </a:r>
+          </a:p>
+          <a:p>
+            <a:pPr>
+              <a:defRPr sz="1400">
+                <a:solidFill>
+                  <a:srgbClr val="F59E0B"/>
+                </a:solidFill>
+                <a:latin typeface="Arial"/>
+              </a:defRPr>
+            </a:pPr>
+            <a:r>
+              <a:t>Full-Stack C++ Engine &amp; Cloud Architecture</a:t>
             </a:r>
           </a:p>
         </p:txBody>
@@ -3246,14 +3259,14 @@
         </p:nvSpPr>
         <p:spPr>
           <a:xfrm>
-            <a:off x="4114800" y="2926080"/>
-            <a:ext cx="3962095" cy="36576"/>
+            <a:off x="1005840" y="2971800"/>
+            <a:ext cx="5303520" cy="18288"/>
           </a:xfrm>
           <a:prstGeom prst="rect">
             <a:avLst/>
           </a:prstGeom>
           <a:solidFill>
-            <a:srgbClr val="F59E0B"/>
+            <a:srgbClr val="1A2644"/>
           </a:solidFill>
           <a:ln>
             <a:noFill/>
@@ -3289,8 +3302,8 @@
         </p:nvSpPr>
         <p:spPr>
           <a:xfrm>
-            <a:off x="1828800" y="3200400"/>
-            <a:ext cx="8534095" cy="2377440"/>
+            <a:off x="1005840" y="3154680"/>
+            <a:ext cx="5303520" cy="2834640"/>
           </a:xfrm>
           <a:prstGeom prst="rect">
             <a:avLst/>
@@ -3303,84 +3316,142 @@
           </a:bodyPr>
           <a:lstStyle/>
           <a:p>
-            <a:pPr algn="ctr">
-              <a:defRPr sz="1400" b="1">
+            <a:pPr>
+              <a:defRPr sz="1300" b="1">
                 <a:solidFill>
                   <a:srgbClr val="10B981"/>
                 </a:solidFill>
+                <a:latin typeface="Arial"/>
               </a:defRPr>
             </a:pPr>
             <a:r>
-              <a:t>Group Project Presentation • 5 Student Module Division</a:t>
-            </a:r>
-          </a:p>
-          <a:p>
-            <a:pPr algn="ctr">
-              <a:defRPr sz="1200">
+              <a:t>PROJECT GROUP MEMBERS:</a:t>
+            </a:r>
+          </a:p>
+          <a:p>
+            <a:r>
+              <a:rPr b="1" sz="1200">
+                <a:solidFill>
+                  <a:srgbClr val="F8FAFC"/>
+                </a:solidFill>
+              </a:rPr>
+              <a:t>• 1. Manikanta  </a:t>
+            </a:r>
+            <a:r>
+              <a:rPr sz="1100">
                 <a:solidFill>
                   <a:srgbClr val="94A3B8"/>
                 </a:solidFill>
-              </a:defRPr>
-            </a:pPr>
-            <a:r>
-              <a:t>• Student 1: Account Management &amp; Nested Data Structures</a:t>
-            </a:r>
-          </a:p>
-          <a:p>
-            <a:pPr algn="ctr">
-              <a:defRPr sz="1200">
+              </a:rPr>
+              <a:t>(Student 1)</a:t>
+            </a:r>
+          </a:p>
+          <a:p>
+            <a:r>
+              <a:rPr b="1" sz="1200">
+                <a:solidFill>
+                  <a:srgbClr val="F8FAFC"/>
+                </a:solidFill>
+              </a:rPr>
+              <a:t>• 2. Lokesh  </a:t>
+            </a:r>
+            <a:r>
+              <a:rPr sz="1100">
                 <a:solidFill>
                   <a:srgbClr val="94A3B8"/>
                 </a:solidFill>
-              </a:defRPr>
-            </a:pPr>
-            <a:r>
-              <a:t>• Student 2: Financial Transactions &amp; Linear / Binary Search</a:t>
-            </a:r>
-          </a:p>
-          <a:p>
-            <a:pPr algn="ctr">
-              <a:defRPr sz="1200">
+              </a:rPr>
+              <a:t>(Student 2)</a:t>
+            </a:r>
+          </a:p>
+          <a:p>
+            <a:r>
+              <a:rPr b="1" sz="1200">
+                <a:solidFill>
+                  <a:srgbClr val="F8FAFC"/>
+                </a:solidFill>
+              </a:rPr>
+              <a:t>• 3. Anil  </a:t>
+            </a:r>
+            <a:r>
+              <a:rPr sz="1100">
                 <a:solidFill>
                   <a:srgbClr val="94A3B8"/>
                 </a:solidFill>
-              </a:defRPr>
-            </a:pPr>
-            <a:r>
-              <a:t>• Student 3: Insertion Sort &amp; 2D Array Matrix Operations</a:t>
-            </a:r>
-          </a:p>
-          <a:p>
-            <a:pPr algn="ctr">
-              <a:defRPr sz="1200">
+              </a:rPr>
+              <a:t>(Student 3)</a:t>
+            </a:r>
+          </a:p>
+          <a:p>
+            <a:r>
+              <a:rPr b="1" sz="1200">
+                <a:solidFill>
+                  <a:srgbClr val="F8FAFC"/>
+                </a:solidFill>
+              </a:rPr>
+              <a:t>• 4. Shishira  </a:t>
+            </a:r>
+            <a:r>
+              <a:rPr sz="1100">
                 <a:solidFill>
                   <a:srgbClr val="94A3B8"/>
                 </a:solidFill>
-              </a:defRPr>
-            </a:pPr>
-            <a:r>
-              <a:t>• Student 4: String Algorithms &amp; Stack ADT Parenthesis Checking</a:t>
-            </a:r>
-          </a:p>
-          <a:p>
-            <a:pPr algn="ctr">
-              <a:defRPr sz="1200">
+              </a:rPr>
+              <a:t>(Student 4)</a:t>
+            </a:r>
+          </a:p>
+          <a:p>
+            <a:r>
+              <a:rPr b="1" sz="1200">
+                <a:solidFill>
+                  <a:srgbClr val="F8FAFC"/>
+                </a:solidFill>
+              </a:rPr>
+              <a:t>• 5. Chathwik  </a:t>
+            </a:r>
+            <a:r>
+              <a:rPr sz="1100">
                 <a:solidFill>
                   <a:srgbClr val="94A3B8"/>
                 </a:solidFill>
-              </a:defRPr>
-            </a:pPr>
-            <a:r>
-              <a:t>• Student 5: Queue ADT (Linear &amp; Circular), STL Containers &amp; Main Controller</a:t>
-            </a:r>
-          </a:p>
-        </p:txBody>
-      </p:sp>
+              </a:rPr>
+              <a:t>(Student 5)</a:t>
+            </a:r>
+          </a:p>
+        </p:txBody>
+      </p:sp>
+      <p:pic>
+        <p:nvPicPr>
+          <p:cNvPr id="7" name="Picture 6" descr="banking_hero_3d_1791045817805.jpg"/>
+          <p:cNvPicPr>
+            <a:picLocks noChangeAspect="1"/>
+          </p:cNvPicPr>
+          <p:nvPr/>
+        </p:nvPicPr>
+        <p:blipFill>
+          <a:blip r:embed="rId2"/>
+          <a:stretch>
+            <a:fillRect/>
+          </a:stretch>
+        </p:blipFill>
+        <p:spPr>
+          <a:xfrm>
+            <a:off x="6858000" y="731520"/>
+            <a:ext cx="4602175" cy="5394960"/>
+          </a:xfrm>
+          <a:prstGeom prst="rect">
+            <a:avLst/>
+          </a:prstGeom>
+        </p:spPr>
+      </p:pic>
     </p:spTree>
   </p:cSld>
   <p:clrMapOvr>
     <a:masterClrMapping/>
   </p:clrMapOvr>
+  <p:transition spd="med">
+    <p:fade/>
+  </p:transition>
 </p:sld>
 </file>
 
@@ -3409,7 +3480,7 @@
             <a:avLst/>
           </a:prstGeom>
           <a:solidFill>
-            <a:srgbClr val="0B132B"/>
+            <a:srgbClr val="070B16"/>
           </a:solidFill>
           <a:ln>
             <a:noFill/>
@@ -3445,7 +3516,7 @@
         </p:nvSpPr>
         <p:spPr>
           <a:xfrm>
-            <a:off x="731520" y="365760"/>
+            <a:off x="731520" y="347472"/>
             <a:ext cx="10728655" cy="36576"/>
           </a:xfrm>
           <a:prstGeom prst="rect">
@@ -3488,8 +3559,8 @@
         </p:nvSpPr>
         <p:spPr>
           <a:xfrm>
-            <a:off x="731520" y="438912"/>
-            <a:ext cx="10728655" cy="320040"/>
+            <a:off x="731520" y="411480"/>
+            <a:ext cx="10728655" cy="274320"/>
           </a:xfrm>
           <a:prstGeom prst="rect">
             <a:avLst/>
@@ -3511,7 +3582,7 @@
               </a:defRPr>
             </a:pPr>
             <a:r>
-              <a:t>FULL-STACK IMPLEMENTATION (REACT 19 + VITE 8)</a:t>
+              <a:t>VISUAL ALGORITHMIC MAPPING</a:t>
             </a:r>
           </a:p>
         </p:txBody>
@@ -3524,8 +3595,8 @@
         </p:nvSpPr>
         <p:spPr>
           <a:xfrm>
-            <a:off x="731520" y="713232"/>
-            <a:ext cx="10728655" cy="640080"/>
+            <a:off x="731520" y="685800"/>
+            <a:ext cx="10728655" cy="594360"/>
           </a:xfrm>
           <a:prstGeom prst="rect">
             <a:avLst/>
@@ -3539,7 +3610,7 @@
           <a:lstStyle/>
           <a:p>
             <a:pPr>
-              <a:defRPr sz="2600" b="1">
+              <a:defRPr sz="2400" b="1">
                 <a:solidFill>
                   <a:srgbClr val="F8FAFC"/>
                 </a:solidFill>
@@ -3547,7 +3618,7 @@
               </a:defRPr>
             </a:pPr>
             <a:r>
-              <a:t>Modern Web Dashboard &amp; User Experience</a:t>
+              <a:t>Data Structures &amp; Algorithmic Architecture</a:t>
             </a:r>
           </a:p>
         </p:txBody>
@@ -3560,18 +3631,18 @@
         </p:nvSpPr>
         <p:spPr>
           <a:xfrm>
-            <a:off x="731520" y="1463040"/>
-            <a:ext cx="3200400" cy="4846320"/>
+            <a:off x="731520" y="1371600"/>
+            <a:ext cx="5120640" cy="4937760"/>
           </a:xfrm>
           <a:prstGeom prst="roundRect">
             <a:avLst/>
           </a:prstGeom>
           <a:solidFill>
-            <a:srgbClr val="1C2541"/>
+            <a:srgbClr val="10182C"/>
           </a:solidFill>
           <a:ln w="19050">
             <a:solidFill>
-              <a:srgbClr val="263255"/>
+              <a:srgbClr val="1A2644"/>
             </a:solidFill>
           </a:ln>
         </p:spPr>
@@ -3605,8 +3676,8 @@
         </p:nvSpPr>
         <p:spPr>
           <a:xfrm>
-            <a:off x="914400" y="1600200"/>
-            <a:ext cx="2834640" cy="365760"/>
+            <a:off x="914400" y="1508760"/>
+            <a:ext cx="4754880" cy="365760"/>
           </a:xfrm>
           <a:prstGeom prst="rect">
             <a:avLst/>
@@ -3622,13 +3693,13 @@
             <a:pPr>
               <a:defRPr sz="1500" b="1">
                 <a:solidFill>
-                  <a:srgbClr val="6366F1"/>
+                  <a:srgbClr val="06B6D4"/>
                 </a:solidFill>
                 <a:latin typeface="Arial"/>
               </a:defRPr>
             </a:pPr>
             <a:r>
-              <a:t>Accounts Portfolio &amp; Visibility Control</a:t>
+              <a:t>Core Algorithmic Foundations</a:t>
             </a:r>
           </a:p>
         </p:txBody>
@@ -3641,8 +3712,8 @@
         </p:nvSpPr>
         <p:spPr>
           <a:xfrm>
-            <a:off x="868680" y="2103120"/>
-            <a:ext cx="2926080" cy="3931920"/>
+            <a:off x="914400" y="1920240"/>
+            <a:ext cx="4754880" cy="4206240"/>
           </a:xfrm>
           <a:prstGeom prst="rect">
             <a:avLst/>
@@ -3656,366 +3727,111 @@
           <a:lstStyle/>
           <a:p/>
           <a:p>
-            <a:pPr>
-              <a:defRPr sz="1200">
+            <a:r>
+              <a:rPr b="1" sz="1300">
                 <a:solidFill>
                   <a:srgbClr val="F8FAFC"/>
                 </a:solidFill>
-              </a:defRPr>
-            </a:pPr>
-            <a:r>
-              <a:t>• Initial 6-Account Display: Limits clutter by showing only first 6 accounts on load.</a:t>
-            </a:r>
-          </a:p>
-          <a:p>
-            <a:pPr>
-              <a:defRPr sz="1200">
+              </a:rPr>
+              <a:t>• Binary Search Tree Logic: </a:t>
+            </a:r>
+            <a:r>
+              <a:rPr sz="1300">
+                <a:solidFill>
+                  <a:srgbClr val="94A3B8"/>
+                </a:solidFill>
+              </a:rPr>
+              <a:t>Fast divide-and-conquer lookups guaranteeing O(log n) performance for customer identification.</a:t>
+            </a:r>
+          </a:p>
+          <a:p>
+            <a:r>
+              <a:rPr b="1" sz="1300">
                 <a:solidFill>
                   <a:srgbClr val="F8FAFC"/>
                 </a:solidFill>
-              </a:defRPr>
-            </a:pPr>
-            <a:r>
-              <a:t>• Interactive 'Show More' Toggle: Expands to reveal all remaining accounts upon clicking.</a:t>
-            </a:r>
-          </a:p>
-          <a:p>
-            <a:pPr>
-              <a:defRPr sz="1200">
+              </a:rPr>
+              <a:t>• LIFO Stack Primitives: </a:t>
+            </a:r>
+            <a:r>
+              <a:rPr sz="1300">
+                <a:solidFill>
+                  <a:srgbClr val="94A3B8"/>
+                </a:solidFill>
+              </a:rPr>
+              <a:t>Memory-safe push and pop execution for financial formula validation.</a:t>
+            </a:r>
+          </a:p>
+          <a:p>
+            <a:r>
+              <a:rPr b="1" sz="1300">
                 <a:solidFill>
                   <a:srgbClr val="F8FAFC"/>
                 </a:solidFill>
-              </a:defRPr>
-            </a:pPr>
-            <a:r>
-              <a:t>• 'Show Less' Collapse: Returns to compact view on demand.</a:t>
-            </a:r>
-          </a:p>
-          <a:p>
-            <a:pPr>
-              <a:defRPr sz="1200">
+              </a:rPr>
+              <a:t>• FIFO &amp; Circular Queues: </a:t>
+            </a:r>
+            <a:r>
+              <a:rPr sz="1300">
+                <a:solidFill>
+                  <a:srgbClr val="94A3B8"/>
+                </a:solidFill>
+              </a:rPr>
+              <a:t>Modulo wrap-around token dispatching for zero memory wastage.</a:t>
+            </a:r>
+          </a:p>
+          <a:p>
+            <a:r>
+              <a:rPr b="1" sz="1300">
                 <a:solidFill>
                   <a:srgbClr val="F8FAFC"/>
                 </a:solidFill>
-              </a:defRPr>
-            </a:pPr>
-            <a:r>
-              <a:t>• Live search filtering across Name, Phone, Account Number, and ID.</a:t>
-            </a:r>
-          </a:p>
-        </p:txBody>
-      </p:sp>
-      <p:sp>
-        <p:nvSpPr>
-          <p:cNvPr id="9" name="Rounded Rectangle 8"/>
-          <p:cNvSpPr/>
-          <p:nvPr/>
-        </p:nvSpPr>
-        <p:spPr>
-          <a:xfrm>
-            <a:off x="4114800" y="1463040"/>
-            <a:ext cx="3200400" cy="4846320"/>
-          </a:xfrm>
-          <a:prstGeom prst="roundRect">
-            <a:avLst/>
-          </a:prstGeom>
-          <a:solidFill>
-            <a:srgbClr val="1C2541"/>
-          </a:solidFill>
-          <a:ln w="19050">
-            <a:solidFill>
-              <a:srgbClr val="263255"/>
-            </a:solidFill>
-          </a:ln>
-        </p:spPr>
-        <p:style>
-          <a:lnRef idx="1">
-            <a:schemeClr val="accent1"/>
-          </a:lnRef>
-          <a:fillRef idx="3">
-            <a:schemeClr val="accent1"/>
-          </a:fillRef>
-          <a:effectRef idx="2">
-            <a:schemeClr val="accent1"/>
-          </a:effectRef>
-          <a:fontRef idx="minor">
-            <a:schemeClr val="lt1"/>
-          </a:fontRef>
-        </p:style>
-        <p:txBody>
-          <a:bodyPr rtlCol="0" anchor="ctr"/>
-          <a:lstStyle/>
-          <a:p>
-            <a:pPr algn="ctr"/>
-          </a:p>
-        </p:txBody>
-      </p:sp>
-      <p:sp>
-        <p:nvSpPr>
-          <p:cNvPr id="10" name="TextBox 9"/>
-          <p:cNvSpPr txBox="1"/>
-          <p:nvPr/>
-        </p:nvSpPr>
-        <p:spPr>
-          <a:xfrm>
-            <a:off x="4297680" y="1600200"/>
-            <a:ext cx="2834640" cy="365760"/>
+              </a:rPr>
+              <a:t>• STL Red-Black Tree Maps: </a:t>
+            </a:r>
+            <a:r>
+              <a:rPr sz="1300">
+                <a:solidFill>
+                  <a:srgbClr val="94A3B8"/>
+                </a:solidFill>
+              </a:rPr>
+              <a:t>High-speed key-value lookups linking account numbers directly to customer names.</a:t>
+            </a:r>
+          </a:p>
+        </p:txBody>
+      </p:sp>
+      <p:pic>
+        <p:nvPicPr>
+          <p:cNvPr id="9" name="Picture 8" descr="dsa_algorithms_3d_1791045841436.jpg"/>
+          <p:cNvPicPr>
+            <a:picLocks noChangeAspect="1"/>
+          </p:cNvPicPr>
+          <p:nvPr/>
+        </p:nvPicPr>
+        <p:blipFill>
+          <a:blip r:embed="rId2"/>
+          <a:stretch>
+            <a:fillRect/>
+          </a:stretch>
+        </p:blipFill>
+        <p:spPr>
+          <a:xfrm>
+            <a:off x="6309360" y="1371600"/>
+            <a:ext cx="5120640" cy="4937760"/>
           </a:xfrm>
           <a:prstGeom prst="rect">
             <a:avLst/>
           </a:prstGeom>
-          <a:noFill/>
-        </p:spPr>
-        <p:txBody>
-          <a:bodyPr wrap="square">
-            <a:spAutoFit/>
-          </a:bodyPr>
-          <a:lstStyle/>
-          <a:p>
-            <a:pPr>
-              <a:defRPr sz="1500" b="1">
-                <a:solidFill>
-                  <a:srgbClr val="10B981"/>
-                </a:solidFill>
-                <a:latin typeface="Arial"/>
-              </a:defRPr>
-            </a:pPr>
-            <a:r>
-              <a:t>Money Studio &amp; Transaction Flow</a:t>
-            </a:r>
-          </a:p>
-        </p:txBody>
-      </p:sp>
-      <p:sp>
-        <p:nvSpPr>
-          <p:cNvPr id="11" name="TextBox 10"/>
-          <p:cNvSpPr txBox="1"/>
-          <p:nvPr/>
-        </p:nvSpPr>
-        <p:spPr>
-          <a:xfrm>
-            <a:off x="4251960" y="2103120"/>
-            <a:ext cx="2926080" cy="3931920"/>
-          </a:xfrm>
-          <a:prstGeom prst="rect">
-            <a:avLst/>
-          </a:prstGeom>
-          <a:noFill/>
-        </p:spPr>
-        <p:txBody>
-          <a:bodyPr wrap="square">
-            <a:spAutoFit/>
-          </a:bodyPr>
-          <a:lstStyle/>
-          <a:p/>
-          <a:p>
-            <a:pPr>
-              <a:defRPr sz="1200">
-                <a:solidFill>
-                  <a:srgbClr val="F8FAFC"/>
-                </a:solidFill>
-              </a:defRPr>
-            </a:pPr>
-            <a:r>
-              <a:t>• Deposit Card: Quick preset buttons (+₹500, +₹1,000, +₹5,000, +₹10,000).</a:t>
-            </a:r>
-          </a:p>
-          <a:p>
-            <a:pPr>
-              <a:defRPr sz="1200">
-                <a:solidFill>
-                  <a:srgbClr val="F8FAFC"/>
-                </a:solidFill>
-              </a:defRPr>
-            </a:pPr>
-            <a:r>
-              <a:t>• Withdrawal Card: Automatic minimum ₹500 balance enforcement.</a:t>
-            </a:r>
-          </a:p>
-          <a:p>
-            <a:pPr>
-              <a:defRPr sz="1200">
-                <a:solidFill>
-                  <a:srgbClr val="F8FAFC"/>
-                </a:solidFill>
-              </a:defRPr>
-            </a:pPr>
-            <a:r>
-              <a:t>• Confetti Celebration Animation upon successful account creation or deposit.</a:t>
-            </a:r>
-          </a:p>
-          <a:p>
-            <a:pPr>
-              <a:defRPr sz="1200">
-                <a:solidFill>
-                  <a:srgbClr val="F8FAFC"/>
-                </a:solidFill>
-              </a:defRPr>
-            </a:pPr>
-            <a:r>
-              <a:t>• Floating toast notification system for instant feedback.</a:t>
-            </a:r>
-          </a:p>
-        </p:txBody>
-      </p:sp>
-      <p:sp>
-        <p:nvSpPr>
-          <p:cNvPr id="12" name="Rounded Rectangle 11"/>
-          <p:cNvSpPr/>
-          <p:nvPr/>
-        </p:nvSpPr>
-        <p:spPr>
-          <a:xfrm>
-            <a:off x="7498079" y="1463040"/>
-            <a:ext cx="3200400" cy="4846320"/>
-          </a:xfrm>
-          <a:prstGeom prst="roundRect">
-            <a:avLst/>
-          </a:prstGeom>
-          <a:solidFill>
-            <a:srgbClr val="1C2541"/>
-          </a:solidFill>
-          <a:ln w="19050">
-            <a:solidFill>
-              <a:srgbClr val="263255"/>
-            </a:solidFill>
-          </a:ln>
-        </p:spPr>
-        <p:style>
-          <a:lnRef idx="1">
-            <a:schemeClr val="accent1"/>
-          </a:lnRef>
-          <a:fillRef idx="3">
-            <a:schemeClr val="accent1"/>
-          </a:fillRef>
-          <a:effectRef idx="2">
-            <a:schemeClr val="accent1"/>
-          </a:effectRef>
-          <a:fontRef idx="minor">
-            <a:schemeClr val="lt1"/>
-          </a:fontRef>
-        </p:style>
-        <p:txBody>
-          <a:bodyPr rtlCol="0" anchor="ctr"/>
-          <a:lstStyle/>
-          <a:p>
-            <a:pPr algn="ctr"/>
-          </a:p>
-        </p:txBody>
-      </p:sp>
-      <p:sp>
-        <p:nvSpPr>
-          <p:cNvPr id="13" name="TextBox 12"/>
-          <p:cNvSpPr txBox="1"/>
-          <p:nvPr/>
-        </p:nvSpPr>
-        <p:spPr>
-          <a:xfrm>
-            <a:off x="7680959" y="1600200"/>
-            <a:ext cx="2834640" cy="365760"/>
-          </a:xfrm>
-          <a:prstGeom prst="rect">
-            <a:avLst/>
-          </a:prstGeom>
-          <a:noFill/>
-        </p:spPr>
-        <p:txBody>
-          <a:bodyPr wrap="square">
-            <a:spAutoFit/>
-          </a:bodyPr>
-          <a:lstStyle/>
-          <a:p>
-            <a:pPr>
-              <a:defRPr sz="1500" b="1">
-                <a:solidFill>
-                  <a:srgbClr val="F59E0B"/>
-                </a:solidFill>
-                <a:latin typeface="Arial"/>
-              </a:defRPr>
-            </a:pPr>
-            <a:r>
-              <a:t>Audit History Ledger &amp; Metrics</a:t>
-            </a:r>
-          </a:p>
-        </p:txBody>
-      </p:sp>
-      <p:sp>
-        <p:nvSpPr>
-          <p:cNvPr id="14" name="TextBox 13"/>
-          <p:cNvSpPr txBox="1"/>
-          <p:nvPr/>
-        </p:nvSpPr>
-        <p:spPr>
-          <a:xfrm>
-            <a:off x="7635239" y="2103120"/>
-            <a:ext cx="2926080" cy="3931920"/>
-          </a:xfrm>
-          <a:prstGeom prst="rect">
-            <a:avLst/>
-          </a:prstGeom>
-          <a:noFill/>
-        </p:spPr>
-        <p:txBody>
-          <a:bodyPr wrap="square">
-            <a:spAutoFit/>
-          </a:bodyPr>
-          <a:lstStyle/>
-          <a:p/>
-          <a:p>
-            <a:pPr>
-              <a:defRPr sz="1200">
-                <a:solidFill>
-                  <a:srgbClr val="F8FAFC"/>
-                </a:solidFill>
-              </a:defRPr>
-            </a:pPr>
-            <a:r>
-              <a:t>• Real-time Vault Balance card aggregating total integer paise.</a:t>
-            </a:r>
-          </a:p>
-          <a:p>
-            <a:pPr>
-              <a:defRPr sz="1200">
-                <a:solidFill>
-                  <a:srgbClr val="F8FAFC"/>
-                </a:solidFill>
-              </a:defRPr>
-            </a:pPr>
-            <a:r>
-              <a:t>• Account distribution ratio (Savings vs Current accounts).</a:t>
-            </a:r>
-          </a:p>
-          <a:p>
-            <a:pPr>
-              <a:defRPr sz="1200">
-                <a:solidFill>
-                  <a:srgbClr val="F8FAFC"/>
-                </a:solidFill>
-              </a:defRPr>
-            </a:pPr>
-            <a:r>
-              <a:t>• Full chronological ledger search by account number.</a:t>
-            </a:r>
-          </a:p>
-          <a:p>
-            <a:pPr>
-              <a:defRPr sz="1200">
-                <a:solidFill>
-                  <a:srgbClr val="F8FAFC"/>
-                </a:solidFill>
-              </a:defRPr>
-            </a:pPr>
-            <a:r>
-              <a:t>• One-click instant MongoDB Atlas dual-sync reconnect button.</a:t>
-            </a:r>
-          </a:p>
-        </p:txBody>
-      </p:sp>
+        </p:spPr>
+      </p:pic>
     </p:spTree>
   </p:cSld>
   <p:clrMapOvr>
     <a:masterClrMapping/>
   </p:clrMapOvr>
+  <p:transition spd="fast">
+    <p:wheel spokes="4"/>
+  </p:transition>
 </p:sld>
 </file>
 
@@ -4044,7 +3860,7 @@
             <a:avLst/>
           </a:prstGeom>
           <a:solidFill>
-            <a:srgbClr val="0B132B"/>
+            <a:srgbClr val="070B16"/>
           </a:solidFill>
           <a:ln>
             <a:noFill/>
@@ -4080,7 +3896,7 @@
         </p:nvSpPr>
         <p:spPr>
           <a:xfrm>
-            <a:off x="731520" y="365760"/>
+            <a:off x="731520" y="347472"/>
             <a:ext cx="10728655" cy="36576"/>
           </a:xfrm>
           <a:prstGeom prst="rect">
@@ -4123,8 +3939,8 @@
         </p:nvSpPr>
         <p:spPr>
           <a:xfrm>
-            <a:off x="731520" y="438912"/>
-            <a:ext cx="10728655" cy="320040"/>
+            <a:off x="731520" y="411480"/>
+            <a:ext cx="10728655" cy="274320"/>
           </a:xfrm>
           <a:prstGeom prst="rect">
             <a:avLst/>
@@ -4146,7 +3962,7 @@
               </a:defRPr>
             </a:pPr>
             <a:r>
-              <a:t>BACKEND ARCHITECTURE (NODE.JS &amp; MONGODB ATLAS)</a:t>
+              <a:t>REACT 19 + VITE 8 UI ENGINEERING</a:t>
             </a:r>
           </a:p>
         </p:txBody>
@@ -4159,8 +3975,8 @@
         </p:nvSpPr>
         <p:spPr>
           <a:xfrm>
-            <a:off x="731520" y="713232"/>
-            <a:ext cx="10728655" cy="640080"/>
+            <a:off x="731520" y="685800"/>
+            <a:ext cx="10728655" cy="594360"/>
           </a:xfrm>
           <a:prstGeom prst="rect">
             <a:avLst/>
@@ -4174,7 +3990,7 @@
           <a:lstStyle/>
           <a:p>
             <a:pPr>
-              <a:defRPr sz="2600" b="1">
+              <a:defRPr sz="2400" b="1">
                 <a:solidFill>
                   <a:srgbClr val="F8FAFC"/>
                 </a:solidFill>
@@ -4182,7 +3998,7 @@
               </a:defRPr>
             </a:pPr>
             <a:r>
-              <a:t>Database Persistence &amp; Dual-Sync Engine</a:t>
+              <a:t>Modern Web Dashboard &amp; User Experience</a:t>
             </a:r>
           </a:p>
         </p:txBody>
@@ -4195,18 +4011,18 @@
         </p:nvSpPr>
         <p:spPr>
           <a:xfrm>
-            <a:off x="731520" y="1463040"/>
-            <a:ext cx="5120640" cy="4846320"/>
+            <a:off x="731520" y="1371600"/>
+            <a:ext cx="5120640" cy="4937760"/>
           </a:xfrm>
           <a:prstGeom prst="roundRect">
             <a:avLst/>
           </a:prstGeom>
           <a:solidFill>
-            <a:srgbClr val="1C2541"/>
+            <a:srgbClr val="10182C"/>
           </a:solidFill>
           <a:ln w="19050">
             <a:solidFill>
-              <a:srgbClr val="263255"/>
+              <a:srgbClr val="1A2644"/>
             </a:solidFill>
           </a:ln>
         </p:spPr>
@@ -4240,7 +4056,7 @@
         </p:nvSpPr>
         <p:spPr>
           <a:xfrm>
-            <a:off x="914400" y="1600200"/>
+            <a:off x="914400" y="1508760"/>
             <a:ext cx="4754880" cy="365760"/>
           </a:xfrm>
           <a:prstGeom prst="rect">
@@ -4257,13 +4073,13 @@
             <a:pPr>
               <a:defRPr sz="1500" b="1">
                 <a:solidFill>
-                  <a:srgbClr val="10B981"/>
+                  <a:srgbClr val="F59E0B"/>
                 </a:solidFill>
                 <a:latin typeface="Arial"/>
               </a:defRPr>
             </a:pPr>
             <a:r>
-              <a:t>MongoDB Atlas Cloud Architecture</a:t>
+              <a:t>User Experience Innovations</a:t>
             </a:r>
           </a:p>
         </p:txBody>
@@ -4276,8 +4092,8 @@
         </p:nvSpPr>
         <p:spPr>
           <a:xfrm>
-            <a:off x="914400" y="2011680"/>
-            <a:ext cx="4754880" cy="4114800"/>
+            <a:off x="914400" y="1920240"/>
+            <a:ext cx="4754880" cy="4206240"/>
           </a:xfrm>
           <a:prstGeom prst="rect">
             <a:avLst/>
@@ -4297,7 +4113,7 @@
                   <a:srgbClr val="F8FAFC"/>
                 </a:solidFill>
               </a:rPr>
-              <a:t>• Cloud Collections: </a:t>
+              <a:t>• Initial 6-Account Pagination: </a:t>
             </a:r>
             <a:r>
               <a:rPr sz="1300">
@@ -4305,7 +4121,7 @@
                   <a:srgbClr val="94A3B8"/>
                 </a:solidFill>
               </a:rPr>
-              <a:t>Hosted on MongoDB Atlas with dedicated `customers`, `transactions`, and `users` Mongoose schema collections.</a:t>
+              <a:t>Renders first 6 accounts on load (`slice(0, 6)`) to maintain clean visual balance.</a:t>
             </a:r>
           </a:p>
           <a:p>
@@ -4315,7 +4131,7 @@
                   <a:srgbClr val="F8FAFC"/>
                 </a:solidFill>
               </a:rPr>
-              <a:t>• Integer Paise Precision: </a:t>
+              <a:t>• Interactive 'Show More' Toggle: </a:t>
             </a:r>
             <a:r>
               <a:rPr sz="1300">
@@ -4323,7 +4139,7 @@
                   <a:srgbClr val="94A3B8"/>
                 </a:solidFill>
               </a:rPr>
-              <a:t>Stores currency as integer `balancePaise` (₹1.00 = 100 paise) eliminating binary IEEE-754 floating point rounding inaccuracies.</a:t>
+              <a:t>Expands to show all remaining accounts upon click and toggles to 'Show Less' to collapse.</a:t>
             </a:r>
           </a:p>
           <a:p>
@@ -4333,7 +4149,7 @@
                   <a:srgbClr val="F8FAFC"/>
                 </a:solidFill>
               </a:rPr>
-              <a:t>• Cascade Deletion: </a:t>
+              <a:t>• Money Studio &amp; Presets: </a:t>
             </a:r>
             <a:r>
               <a:rPr sz="1300">
@@ -4341,7 +4157,7 @@
                   <a:srgbClr val="94A3B8"/>
                 </a:solidFill>
               </a:rPr>
-              <a:t>Closing an account automatically cascades and cleanses associated audit logs from the database.</a:t>
+              <a:t>Dedicated deposit/withdrawal cards with quick presets (+₹500, +₹1,000, +₹5,000, +₹10,000).</a:t>
             </a:r>
           </a:p>
           <a:p>
@@ -4351,7 +4167,7 @@
                   <a:srgbClr val="F8FAFC"/>
                 </a:solidFill>
               </a:rPr>
-              <a:t>• Health Check Endpoint: </a:t>
+              <a:t>• Confetti &amp; Feedback: </a:t>
             </a:r>
             <a:r>
               <a:rPr sz="1300">
@@ -4359,175 +4175,43 @@
                   <a:srgbClr val="94A3B8"/>
                 </a:solidFill>
               </a:rPr>
-              <a:t>`/api/health` continuously monitors database connection heartbeat.</a:t>
-            </a:r>
-          </a:p>
-        </p:txBody>
-      </p:sp>
-      <p:sp>
-        <p:nvSpPr>
-          <p:cNvPr id="9" name="Rounded Rectangle 8"/>
-          <p:cNvSpPr/>
-          <p:nvPr/>
-        </p:nvSpPr>
-        <p:spPr>
-          <a:xfrm>
-            <a:off x="6309360" y="1463040"/>
-            <a:ext cx="5120640" cy="4846320"/>
-          </a:xfrm>
-          <a:prstGeom prst="roundRect">
-            <a:avLst/>
-          </a:prstGeom>
-          <a:solidFill>
-            <a:srgbClr val="1C2541"/>
-          </a:solidFill>
-          <a:ln w="19050">
-            <a:solidFill>
-              <a:srgbClr val="263255"/>
-            </a:solidFill>
-          </a:ln>
-        </p:spPr>
-        <p:style>
-          <a:lnRef idx="1">
-            <a:schemeClr val="accent1"/>
-          </a:lnRef>
-          <a:fillRef idx="3">
-            <a:schemeClr val="accent1"/>
-          </a:fillRef>
-          <a:effectRef idx="2">
-            <a:schemeClr val="accent1"/>
-          </a:effectRef>
-          <a:fontRef idx="minor">
-            <a:schemeClr val="lt1"/>
-          </a:fontRef>
-        </p:style>
-        <p:txBody>
-          <a:bodyPr rtlCol="0" anchor="ctr"/>
-          <a:lstStyle/>
-          <a:p>
-            <a:pPr algn="ctr"/>
-          </a:p>
-        </p:txBody>
-      </p:sp>
-      <p:sp>
-        <p:nvSpPr>
-          <p:cNvPr id="10" name="TextBox 9"/>
-          <p:cNvSpPr txBox="1"/>
-          <p:nvPr/>
-        </p:nvSpPr>
-        <p:spPr>
-          <a:xfrm>
-            <a:off x="6492240" y="1600200"/>
-            <a:ext cx="4754880" cy="365760"/>
+              <a:t>Interactive particle celebrations on successful transactions and floating toast alert alerts.</a:t>
+            </a:r>
+          </a:p>
+        </p:txBody>
+      </p:sp>
+      <p:pic>
+        <p:nvPicPr>
+          <p:cNvPr id="9" name="Picture 8" descr="web_dashboard_3d_1791045891344.jpg"/>
+          <p:cNvPicPr>
+            <a:picLocks noChangeAspect="1"/>
+          </p:cNvPicPr>
+          <p:nvPr/>
+        </p:nvPicPr>
+        <p:blipFill>
+          <a:blip r:embed="rId2"/>
+          <a:stretch>
+            <a:fillRect/>
+          </a:stretch>
+        </p:blipFill>
+        <p:spPr>
+          <a:xfrm>
+            <a:off x="6309360" y="1371600"/>
+            <a:ext cx="5120640" cy="4937760"/>
           </a:xfrm>
           <a:prstGeom prst="rect">
             <a:avLst/>
           </a:prstGeom>
-          <a:noFill/>
-        </p:spPr>
-        <p:txBody>
-          <a:bodyPr wrap="square">
-            <a:spAutoFit/>
-          </a:bodyPr>
-          <a:lstStyle/>
-          <a:p>
-            <a:pPr>
-              <a:defRPr sz="1500" b="1">
-                <a:solidFill>
-                  <a:srgbClr val="06B6D4"/>
-                </a:solidFill>
-                <a:latin typeface="Arial"/>
-              </a:defRPr>
-            </a:pPr>
-            <a:r>
-              <a:t>Localhost High-Availability Fallback</a:t>
-            </a:r>
-          </a:p>
-        </p:txBody>
-      </p:sp>
-      <p:sp>
-        <p:nvSpPr>
-          <p:cNvPr id="11" name="TextBox 10"/>
-          <p:cNvSpPr txBox="1"/>
-          <p:nvPr/>
-        </p:nvSpPr>
-        <p:spPr>
-          <a:xfrm>
-            <a:off x="6492240" y="2011680"/>
-            <a:ext cx="4754880" cy="4114800"/>
-          </a:xfrm>
-          <a:prstGeom prst="rect">
-            <a:avLst/>
-          </a:prstGeom>
-          <a:noFill/>
-        </p:spPr>
-        <p:txBody>
-          <a:bodyPr wrap="square">
-            <a:spAutoFit/>
-          </a:bodyPr>
-          <a:lstStyle/>
-          <a:p/>
-          <a:p>
-            <a:r>
-              <a:rPr b="1" sz="1300">
-                <a:solidFill>
-                  <a:srgbClr val="F8FAFC"/>
-                </a:solidFill>
-              </a:rPr>
-              <a:t>• Seamless Dual-Sync: </a:t>
-            </a:r>
-            <a:r>
-              <a:rPr sz="1300">
-                <a:solidFill>
-                  <a:srgbClr val="94A3B8"/>
-                </a:solidFill>
-              </a:rPr>
-              <a:t>If MongoDB Atlas connection fails or internet is unavailable, backend automatically switches to local `data.json` persistence.</a:t>
-            </a:r>
-          </a:p>
-          <a:p>
-            <a:r>
-              <a:rPr b="1" sz="1300">
-                <a:solidFill>
-                  <a:srgbClr val="F8FAFC"/>
-                </a:solidFill>
-              </a:rPr>
-              <a:t>• Zero Downtime: </a:t>
-            </a:r>
-            <a:r>
-              <a:rPr sz="1300">
-                <a:solidFill>
-                  <a:srgbClr val="94A3B8"/>
-                </a:solidFill>
-              </a:rPr>
-              <a:t>The web interface continues operating with full read/write capabilities without crashing or throwing unhandled errors.</a:t>
-            </a:r>
-          </a:p>
-          <a:p>
-            <a:r>
-              <a:rPr b="1" sz="1300">
-                <a:solidFill>
-                  <a:srgbClr val="F8FAFC"/>
-                </a:solidFill>
-              </a:rPr>
-              <a:t>• Instant Reconnect: </a:t>
-            </a:r>
-            <a:r>
-              <a:rPr sz="1300">
-                <a:solidFill>
-                  <a:srgbClr val="94A3B8"/>
-                </a:solidFill>
-              </a:rPr>
-              <a:t>The `/api/reconnect` endpoint re-attempts cloud cluster connection and synchronizes local modifications to the cloud cluster upon recovery.</a:t>
-            </a:r>
-          </a:p>
-        </p:txBody>
-      </p:sp>
+        </p:spPr>
+      </p:pic>
     </p:spTree>
   </p:cSld>
   <p:clrMapOvr>
     <a:masterClrMapping/>
   </p:clrMapOvr>
+  <p:transition spd="fast">
+    <p:push dir="l"/>
+  </p:transition>
 </p:sld>
 </file>
 
@@ -4556,7 +4240,7 @@
             <a:avLst/>
           </a:prstGeom>
           <a:solidFill>
-            <a:srgbClr val="0B132B"/>
+            <a:srgbClr val="070B16"/>
           </a:solidFill>
           <a:ln>
             <a:noFill/>
@@ -4592,7 +4276,7 @@
         </p:nvSpPr>
         <p:spPr>
           <a:xfrm>
-            <a:off x="731520" y="365760"/>
+            <a:off x="731520" y="347472"/>
             <a:ext cx="10728655" cy="36576"/>
           </a:xfrm>
           <a:prstGeom prst="rect">
@@ -4635,8 +4319,8 @@
         </p:nvSpPr>
         <p:spPr>
           <a:xfrm>
-            <a:off x="731520" y="438912"/>
-            <a:ext cx="10728655" cy="320040"/>
+            <a:off x="731520" y="411480"/>
+            <a:ext cx="10728655" cy="274320"/>
           </a:xfrm>
           <a:prstGeom prst="rect">
             <a:avLst/>
@@ -4658,7 +4342,7 @@
               </a:defRPr>
             </a:pPr>
             <a:r>
-              <a:t>MODULE VII — THEORETICAL &amp; PRACTICAL BENCHMARKS</a:t>
+              <a:t>MONGODB ATLAS &amp; LOCALHOST FALLBACK</a:t>
             </a:r>
           </a:p>
         </p:txBody>
@@ -4671,8 +4355,8 @@
         </p:nvSpPr>
         <p:spPr>
           <a:xfrm>
-            <a:off x="731520" y="713232"/>
-            <a:ext cx="10728655" cy="640080"/>
+            <a:off x="731520" y="685800"/>
+            <a:ext cx="10728655" cy="594360"/>
           </a:xfrm>
           <a:prstGeom prst="rect">
             <a:avLst/>
@@ -4686,7 +4370,387 @@
           <a:lstStyle/>
           <a:p>
             <a:pPr>
-              <a:defRPr sz="2600" b="1">
+              <a:defRPr sz="2400" b="1">
+                <a:solidFill>
+                  <a:srgbClr val="F8FAFC"/>
+                </a:solidFill>
+                <a:latin typeface="Arial"/>
+              </a:defRPr>
+            </a:pPr>
+            <a:r>
+              <a:t>Cloud Persistence &amp; Dual-Sync Engine</a:t>
+            </a:r>
+          </a:p>
+        </p:txBody>
+      </p:sp>
+      <p:sp>
+        <p:nvSpPr>
+          <p:cNvPr id="6" name="Rounded Rectangle 5"/>
+          <p:cNvSpPr/>
+          <p:nvPr/>
+        </p:nvSpPr>
+        <p:spPr>
+          <a:xfrm>
+            <a:off x="731520" y="1371600"/>
+            <a:ext cx="5120640" cy="4937760"/>
+          </a:xfrm>
+          <a:prstGeom prst="roundRect">
+            <a:avLst/>
+          </a:prstGeom>
+          <a:solidFill>
+            <a:srgbClr val="10182C"/>
+          </a:solidFill>
+          <a:ln w="19050">
+            <a:solidFill>
+              <a:srgbClr val="1A2644"/>
+            </a:solidFill>
+          </a:ln>
+        </p:spPr>
+        <p:style>
+          <a:lnRef idx="1">
+            <a:schemeClr val="accent1"/>
+          </a:lnRef>
+          <a:fillRef idx="3">
+            <a:schemeClr val="accent1"/>
+          </a:fillRef>
+          <a:effectRef idx="2">
+            <a:schemeClr val="accent1"/>
+          </a:effectRef>
+          <a:fontRef idx="minor">
+            <a:schemeClr val="lt1"/>
+          </a:fontRef>
+        </p:style>
+        <p:txBody>
+          <a:bodyPr rtlCol="0" anchor="ctr"/>
+          <a:lstStyle/>
+          <a:p>
+            <a:pPr algn="ctr"/>
+          </a:p>
+        </p:txBody>
+      </p:sp>
+      <p:sp>
+        <p:nvSpPr>
+          <p:cNvPr id="7" name="TextBox 6"/>
+          <p:cNvSpPr txBox="1"/>
+          <p:nvPr/>
+        </p:nvSpPr>
+        <p:spPr>
+          <a:xfrm>
+            <a:off x="914400" y="1508760"/>
+            <a:ext cx="4754880" cy="365760"/>
+          </a:xfrm>
+          <a:prstGeom prst="rect">
+            <a:avLst/>
+          </a:prstGeom>
+          <a:noFill/>
+        </p:spPr>
+        <p:txBody>
+          <a:bodyPr wrap="square">
+            <a:spAutoFit/>
+          </a:bodyPr>
+          <a:lstStyle/>
+          <a:p>
+            <a:pPr>
+              <a:defRPr sz="1500" b="1">
+                <a:solidFill>
+                  <a:srgbClr val="10B981"/>
+                </a:solidFill>
+                <a:latin typeface="Arial"/>
+              </a:defRPr>
+            </a:pPr>
+            <a:r>
+              <a:t>Dual-Persistence Architecture</a:t>
+            </a:r>
+          </a:p>
+        </p:txBody>
+      </p:sp>
+      <p:sp>
+        <p:nvSpPr>
+          <p:cNvPr id="8" name="TextBox 7"/>
+          <p:cNvSpPr txBox="1"/>
+          <p:nvPr/>
+        </p:nvSpPr>
+        <p:spPr>
+          <a:xfrm>
+            <a:off x="914400" y="1920240"/>
+            <a:ext cx="4754880" cy="4206240"/>
+          </a:xfrm>
+          <a:prstGeom prst="rect">
+            <a:avLst/>
+          </a:prstGeom>
+          <a:noFill/>
+        </p:spPr>
+        <p:txBody>
+          <a:bodyPr wrap="square">
+            <a:spAutoFit/>
+          </a:bodyPr>
+          <a:lstStyle/>
+          <a:p/>
+          <a:p>
+            <a:r>
+              <a:rPr b="1" sz="1300">
+                <a:solidFill>
+                  <a:srgbClr val="F8FAFC"/>
+                </a:solidFill>
+              </a:rPr>
+              <a:t>• MongoDB Atlas Cloud: </a:t>
+            </a:r>
+            <a:r>
+              <a:rPr sz="1300">
+                <a:solidFill>
+                  <a:srgbClr val="94A3B8"/>
+                </a:solidFill>
+              </a:rPr>
+              <a:t>Primary cloud cluster storing accounts and transaction audit history with Mongoose schema validation.</a:t>
+            </a:r>
+          </a:p>
+          <a:p>
+            <a:r>
+              <a:rPr b="1" sz="1300">
+                <a:solidFill>
+                  <a:srgbClr val="F8FAFC"/>
+                </a:solidFill>
+              </a:rPr>
+              <a:t>• Zero-Downtime Fallback: </a:t>
+            </a:r>
+            <a:r>
+              <a:rPr sz="1300">
+                <a:solidFill>
+                  <a:srgbClr val="94A3B8"/>
+                </a:solidFill>
+              </a:rPr>
+              <a:t>If cloud is unreachable, backend auto-switches to local `data.json` without interrupting user transactions.</a:t>
+            </a:r>
+          </a:p>
+          <a:p>
+            <a:r>
+              <a:rPr b="1" sz="1300">
+                <a:solidFill>
+                  <a:srgbClr val="F8FAFC"/>
+                </a:solidFill>
+              </a:rPr>
+              <a:t>• Integer Currency Accuracy: </a:t>
+            </a:r>
+            <a:r>
+              <a:rPr sz="1300">
+                <a:solidFill>
+                  <a:srgbClr val="94A3B8"/>
+                </a:solidFill>
+              </a:rPr>
+              <a:t>Calculates in integer paise (`balancePaise`) to eliminate floating-point rounding errors.</a:t>
+            </a:r>
+          </a:p>
+          <a:p>
+            <a:r>
+              <a:rPr b="1" sz="1300">
+                <a:solidFill>
+                  <a:srgbClr val="F8FAFC"/>
+                </a:solidFill>
+              </a:rPr>
+              <a:t>• Instant Reconnect: </a:t>
+            </a:r>
+            <a:r>
+              <a:rPr sz="1300">
+                <a:solidFill>
+                  <a:srgbClr val="94A3B8"/>
+                </a:solidFill>
+              </a:rPr>
+              <a:t>One-click reconnect button on dashboard to re-synchronize local data with MongoDB Atlas.</a:t>
+            </a:r>
+          </a:p>
+        </p:txBody>
+      </p:sp>
+      <p:pic>
+        <p:nvPicPr>
+          <p:cNvPr id="9" name="Picture 8" descr="cloud_database_3d_1791045866367.jpg"/>
+          <p:cNvPicPr>
+            <a:picLocks noChangeAspect="1"/>
+          </p:cNvPicPr>
+          <p:nvPr/>
+        </p:nvPicPr>
+        <p:blipFill>
+          <a:blip r:embed="rId2"/>
+          <a:stretch>
+            <a:fillRect/>
+          </a:stretch>
+        </p:blipFill>
+        <p:spPr>
+          <a:xfrm>
+            <a:off x="6309360" y="1371600"/>
+            <a:ext cx="5120640" cy="4937760"/>
+          </a:xfrm>
+          <a:prstGeom prst="rect">
+            <a:avLst/>
+          </a:prstGeom>
+        </p:spPr>
+      </p:pic>
+    </p:spTree>
+  </p:cSld>
+  <p:clrMapOvr>
+    <a:masterClrMapping/>
+  </p:clrMapOvr>
+  <p:transition spd="fast">
+    <p:push dir="l"/>
+  </p:transition>
+</p:sld>
+</file>
+
+<file path=ppt/slides/slide13.xml><?xml version="1.0" encoding="utf-8"?>
+<p:sld xmlns:a="http://schemas.openxmlformats.org/drawingml/2006/main" xmlns:p="http://schemas.openxmlformats.org/presentationml/2006/main" xmlns:r="http://schemas.openxmlformats.org/officeDocument/2006/relationships">
+  <p:cSld>
+    <p:spTree>
+      <p:nvGrpSpPr>
+        <p:cNvPr id="1" name=""/>
+        <p:cNvGrpSpPr/>
+        <p:nvPr/>
+      </p:nvGrpSpPr>
+      <p:grpSpPr/>
+      <p:sp>
+        <p:nvSpPr>
+          <p:cNvPr id="2" name="Rectangle 1"/>
+          <p:cNvSpPr/>
+          <p:nvPr/>
+        </p:nvSpPr>
+        <p:spPr>
+          <a:xfrm>
+            <a:off x="0" y="0"/>
+            <a:ext cx="12191695" cy="6858000"/>
+          </a:xfrm>
+          <a:prstGeom prst="rect">
+            <a:avLst/>
+          </a:prstGeom>
+          <a:solidFill>
+            <a:srgbClr val="070B16"/>
+          </a:solidFill>
+          <a:ln>
+            <a:noFill/>
+          </a:ln>
+        </p:spPr>
+        <p:style>
+          <a:lnRef idx="1">
+            <a:schemeClr val="accent1"/>
+          </a:lnRef>
+          <a:fillRef idx="3">
+            <a:schemeClr val="accent1"/>
+          </a:fillRef>
+          <a:effectRef idx="2">
+            <a:schemeClr val="accent1"/>
+          </a:effectRef>
+          <a:fontRef idx="minor">
+            <a:schemeClr val="lt1"/>
+          </a:fontRef>
+        </p:style>
+        <p:txBody>
+          <a:bodyPr rtlCol="0" anchor="ctr"/>
+          <a:lstStyle/>
+          <a:p>
+            <a:pPr algn="ctr"/>
+          </a:p>
+        </p:txBody>
+      </p:sp>
+      <p:sp>
+        <p:nvSpPr>
+          <p:cNvPr id="3" name="Rectangle 2"/>
+          <p:cNvSpPr/>
+          <p:nvPr/>
+        </p:nvSpPr>
+        <p:spPr>
+          <a:xfrm>
+            <a:off x="731520" y="347472"/>
+            <a:ext cx="10728655" cy="36576"/>
+          </a:xfrm>
+          <a:prstGeom prst="rect">
+            <a:avLst/>
+          </a:prstGeom>
+          <a:solidFill>
+            <a:srgbClr val="6366F1"/>
+          </a:solidFill>
+          <a:ln>
+            <a:noFill/>
+          </a:ln>
+        </p:spPr>
+        <p:style>
+          <a:lnRef idx="1">
+            <a:schemeClr val="accent1"/>
+          </a:lnRef>
+          <a:fillRef idx="3">
+            <a:schemeClr val="accent1"/>
+          </a:fillRef>
+          <a:effectRef idx="2">
+            <a:schemeClr val="accent1"/>
+          </a:effectRef>
+          <a:fontRef idx="minor">
+            <a:schemeClr val="lt1"/>
+          </a:fontRef>
+        </p:style>
+        <p:txBody>
+          <a:bodyPr rtlCol="0" anchor="ctr"/>
+          <a:lstStyle/>
+          <a:p>
+            <a:pPr algn="ctr"/>
+          </a:p>
+        </p:txBody>
+      </p:sp>
+      <p:sp>
+        <p:nvSpPr>
+          <p:cNvPr id="4" name="TextBox 3"/>
+          <p:cNvSpPr txBox="1"/>
+          <p:nvPr/>
+        </p:nvSpPr>
+        <p:spPr>
+          <a:xfrm>
+            <a:off x="731520" y="411480"/>
+            <a:ext cx="10728655" cy="274320"/>
+          </a:xfrm>
+          <a:prstGeom prst="rect">
+            <a:avLst/>
+          </a:prstGeom>
+          <a:noFill/>
+        </p:spPr>
+        <p:txBody>
+          <a:bodyPr wrap="square">
+            <a:spAutoFit/>
+          </a:bodyPr>
+          <a:lstStyle/>
+          <a:p>
+            <a:pPr>
+              <a:defRPr sz="1100" b="1">
+                <a:solidFill>
+                  <a:srgbClr val="06B6D4"/>
+                </a:solidFill>
+                <a:latin typeface="Arial"/>
+              </a:defRPr>
+            </a:pPr>
+            <a:r>
+              <a:t>MODULE VII — THEORETICAL &amp; PRACTICAL BENCHMARKS</a:t>
+            </a:r>
+          </a:p>
+        </p:txBody>
+      </p:sp>
+      <p:sp>
+        <p:nvSpPr>
+          <p:cNvPr id="5" name="TextBox 4"/>
+          <p:cNvSpPr txBox="1"/>
+          <p:nvPr/>
+        </p:nvSpPr>
+        <p:spPr>
+          <a:xfrm>
+            <a:off x="731520" y="685800"/>
+            <a:ext cx="10728655" cy="594360"/>
+          </a:xfrm>
+          <a:prstGeom prst="rect">
+            <a:avLst/>
+          </a:prstGeom>
+          <a:noFill/>
+        </p:spPr>
+        <p:txBody>
+          <a:bodyPr wrap="square">
+            <a:spAutoFit/>
+          </a:bodyPr>
+          <a:lstStyle/>
+          <a:p>
+            <a:pPr>
+              <a:defRPr sz="2400" b="1">
                 <a:solidFill>
                   <a:srgbClr val="F8FAFC"/>
                 </a:solidFill>
@@ -4708,8 +4772,8 @@
           <p:nvPr/>
         </p:nvGraphicFramePr>
         <p:xfrm>
-          <a:off x="731520" y="1463040"/>
-          <a:ext cx="10728655" cy="4754880"/>
+          <a:off x="731520" y="1371600"/>
+          <a:ext cx="10728655" cy="4937760"/>
         </p:xfrm>
         <a:graphic>
           <a:graphicData uri="http://schemas.openxmlformats.org/drawingml/2006/table">
@@ -4724,7 +4788,7 @@
                 <a:gridCol w="1645920"/>
                 <a:gridCol w="2681935"/>
               </a:tblGrid>
-              <a:tr h="679268">
+              <a:tr h="705394">
                 <a:tc>
                   <a:txBody>
                     <a:bodyPr/>
@@ -4841,7 +4905,7 @@
                   </a:tcPr>
                 </a:tc>
               </a:tr>
-              <a:tr h="679268">
+              <a:tr h="705394">
                 <a:tc>
                   <a:txBody>
                     <a:bodyPr/>
@@ -4861,7 +4925,7 @@
                   </a:txBody>
                   <a:tcPr>
                     <a:solidFill>
-                      <a:srgbClr val="1C2541"/>
+                      <a:srgbClr val="10182C"/>
                     </a:solidFill>
                   </a:tcPr>
                 </a:tc>
@@ -4884,7 +4948,7 @@
                   </a:txBody>
                   <a:tcPr>
                     <a:solidFill>
-                      <a:srgbClr val="1C2541"/>
+                      <a:srgbClr val="10182C"/>
                     </a:solidFill>
                   </a:tcPr>
                 </a:tc>
@@ -4907,7 +4971,7 @@
                   </a:txBody>
                   <a:tcPr>
                     <a:solidFill>
-                      <a:srgbClr val="1C2541"/>
+                      <a:srgbClr val="10182C"/>
                     </a:solidFill>
                   </a:tcPr>
                 </a:tc>
@@ -4930,7 +4994,7 @@
                   </a:txBody>
                   <a:tcPr>
                     <a:solidFill>
-                      <a:srgbClr val="1C2541"/>
+                      <a:srgbClr val="10182C"/>
                     </a:solidFill>
                   </a:tcPr>
                 </a:tc>
@@ -4947,18 +5011,18 @@
                         </a:defRPr>
                       </a:pPr>
                       <a:r>
-                        <a:t>Checking duplicate phone numbers</a:t>
+                        <a:t>Duplicate phone validation</a:t>
                       </a:r>
                     </a:p>
                   </a:txBody>
                   <a:tcPr>
                     <a:solidFill>
-                      <a:srgbClr val="1C2541"/>
+                      <a:srgbClr val="10182C"/>
                     </a:solidFill>
                   </a:tcPr>
                 </a:tc>
               </a:tr>
-              <a:tr h="679268">
+              <a:tr h="705394">
                 <a:tc>
                   <a:txBody>
                     <a:bodyPr/>
@@ -4978,7 +5042,7 @@
                   </a:txBody>
                   <a:tcPr>
                     <a:solidFill>
-                      <a:srgbClr val="263255"/>
+                      <a:srgbClr val="1A2644"/>
                     </a:solidFill>
                   </a:tcPr>
                 </a:tc>
@@ -5001,7 +5065,7 @@
                   </a:txBody>
                   <a:tcPr>
                     <a:solidFill>
-                      <a:srgbClr val="263255"/>
+                      <a:srgbClr val="1A2644"/>
                     </a:solidFill>
                   </a:tcPr>
                 </a:tc>
@@ -5024,7 +5088,7 @@
                   </a:txBody>
                   <a:tcPr>
                     <a:solidFill>
-                      <a:srgbClr val="263255"/>
+                      <a:srgbClr val="1A2644"/>
                     </a:solidFill>
                   </a:tcPr>
                 </a:tc>
@@ -5047,7 +5111,7 @@
                   </a:txBody>
                   <a:tcPr>
                     <a:solidFill>
-                      <a:srgbClr val="263255"/>
+                      <a:srgbClr val="1A2644"/>
                     </a:solidFill>
                   </a:tcPr>
                 </a:tc>
@@ -5070,12 +5134,12 @@
                   </a:txBody>
                   <a:tcPr>
                     <a:solidFill>
-                      <a:srgbClr val="263255"/>
+                      <a:srgbClr val="1A2644"/>
                     </a:solidFill>
                   </a:tcPr>
                 </a:tc>
               </a:tr>
-              <a:tr h="679268">
+              <a:tr h="705394">
                 <a:tc>
                   <a:txBody>
                     <a:bodyPr/>
@@ -5095,7 +5159,7 @@
                   </a:txBody>
                   <a:tcPr>
                     <a:solidFill>
-                      <a:srgbClr val="1C2541"/>
+                      <a:srgbClr val="10182C"/>
                     </a:solidFill>
                   </a:tcPr>
                 </a:tc>
@@ -5118,7 +5182,7 @@
                   </a:txBody>
                   <a:tcPr>
                     <a:solidFill>
-                      <a:srgbClr val="1C2541"/>
+                      <a:srgbClr val="10182C"/>
                     </a:solidFill>
                   </a:tcPr>
                 </a:tc>
@@ -5141,7 +5205,7 @@
                   </a:txBody>
                   <a:tcPr>
                     <a:solidFill>
-                      <a:srgbClr val="1C2541"/>
+                      <a:srgbClr val="10182C"/>
                     </a:solidFill>
                   </a:tcPr>
                 </a:tc>
@@ -5164,7 +5228,7 @@
                   </a:txBody>
                   <a:tcPr>
                     <a:solidFill>
-                      <a:srgbClr val="1C2541"/>
+                      <a:srgbClr val="10182C"/>
                     </a:solidFill>
                   </a:tcPr>
                 </a:tc>
@@ -5181,18 +5245,18 @@
                         </a:defRPr>
                       </a:pPr>
                       <a:r>
-                        <a:t>Sorting customer portfolio list</a:t>
+                        <a:t>Portfolio balance sorting</a:t>
                       </a:r>
                     </a:p>
                   </a:txBody>
                   <a:tcPr>
                     <a:solidFill>
-                      <a:srgbClr val="1C2541"/>
+                      <a:srgbClr val="10182C"/>
                     </a:solidFill>
                   </a:tcPr>
                 </a:tc>
               </a:tr>
-              <a:tr h="679268">
+              <a:tr h="705394">
                 <a:tc>
                   <a:txBody>
                     <a:bodyPr/>
@@ -5212,7 +5276,7 @@
                   </a:txBody>
                   <a:tcPr>
                     <a:solidFill>
-                      <a:srgbClr val="263255"/>
+                      <a:srgbClr val="1A2644"/>
                     </a:solidFill>
                   </a:tcPr>
                 </a:tc>
@@ -5235,7 +5299,7 @@
                   </a:txBody>
                   <a:tcPr>
                     <a:solidFill>
-                      <a:srgbClr val="263255"/>
+                      <a:srgbClr val="1A2644"/>
                     </a:solidFill>
                   </a:tcPr>
                 </a:tc>
@@ -5258,7 +5322,7 @@
                   </a:txBody>
                   <a:tcPr>
                     <a:solidFill>
-                      <a:srgbClr val="263255"/>
+                      <a:srgbClr val="1A2644"/>
                     </a:solidFill>
                   </a:tcPr>
                 </a:tc>
@@ -5281,7 +5345,7 @@
                   </a:txBody>
                   <a:tcPr>
                     <a:solidFill>
-                      <a:srgbClr val="263255"/>
+                      <a:srgbClr val="1A2644"/>
                     </a:solidFill>
                   </a:tcPr>
                 </a:tc>
@@ -5298,18 +5362,18 @@
                         </a:defRPr>
                       </a:pPr>
                       <a:r>
-                        <a:t>Branch cash flow &amp; liquidity</a:t>
+                        <a:t>Branch cash flow simulation</a:t>
                       </a:r>
                     </a:p>
                   </a:txBody>
                   <a:tcPr>
                     <a:solidFill>
-                      <a:srgbClr val="263255"/>
+                      <a:srgbClr val="1A2644"/>
                     </a:solidFill>
                   </a:tcPr>
                 </a:tc>
               </a:tr>
-              <a:tr h="679268">
+              <a:tr h="705394">
                 <a:tc>
                   <a:txBody>
                     <a:bodyPr/>
@@ -5329,7 +5393,7 @@
                   </a:txBody>
                   <a:tcPr>
                     <a:solidFill>
-                      <a:srgbClr val="1C2541"/>
+                      <a:srgbClr val="10182C"/>
                     </a:solidFill>
                   </a:tcPr>
                 </a:tc>
@@ -5352,7 +5416,7 @@
                   </a:txBody>
                   <a:tcPr>
                     <a:solidFill>
-                      <a:srgbClr val="1C2541"/>
+                      <a:srgbClr val="10182C"/>
                     </a:solidFill>
                   </a:tcPr>
                 </a:tc>
@@ -5375,7 +5439,7 @@
                   </a:txBody>
                   <a:tcPr>
                     <a:solidFill>
-                      <a:srgbClr val="1C2541"/>
+                      <a:srgbClr val="10182C"/>
                     </a:solidFill>
                   </a:tcPr>
                 </a:tc>
@@ -5398,7 +5462,7 @@
                   </a:txBody>
                   <a:tcPr>
                     <a:solidFill>
-                      <a:srgbClr val="1C2541"/>
+                      <a:srgbClr val="10182C"/>
                     </a:solidFill>
                   </a:tcPr>
                 </a:tc>
@@ -5421,12 +5485,12 @@
                   </a:txBody>
                   <a:tcPr>
                     <a:solidFill>
-                      <a:srgbClr val="1C2541"/>
+                      <a:srgbClr val="10182C"/>
                     </a:solidFill>
                   </a:tcPr>
                 </a:tc>
               </a:tr>
-              <a:tr h="679272">
+              <a:tr h="705396">
                 <a:tc>
                   <a:txBody>
                     <a:bodyPr/>
@@ -5446,7 +5510,7 @@
                   </a:txBody>
                   <a:tcPr>
                     <a:solidFill>
-                      <a:srgbClr val="263255"/>
+                      <a:srgbClr val="1A2644"/>
                     </a:solidFill>
                   </a:tcPr>
                 </a:tc>
@@ -5469,7 +5533,7 @@
                   </a:txBody>
                   <a:tcPr>
                     <a:solidFill>
-                      <a:srgbClr val="263255"/>
+                      <a:srgbClr val="1A2644"/>
                     </a:solidFill>
                   </a:tcPr>
                 </a:tc>
@@ -5492,7 +5556,7 @@
                   </a:txBody>
                   <a:tcPr>
                     <a:solidFill>
-                      <a:srgbClr val="263255"/>
+                      <a:srgbClr val="1A2644"/>
                     </a:solidFill>
                   </a:tcPr>
                 </a:tc>
@@ -5515,7 +5579,7 @@
                   </a:txBody>
                   <a:tcPr>
                     <a:solidFill>
-                      <a:srgbClr val="263255"/>
+                      <a:srgbClr val="1A2644"/>
                     </a:solidFill>
                   </a:tcPr>
                 </a:tc>
@@ -5538,7 +5602,7 @@
                   </a:txBody>
                   <a:tcPr>
                     <a:solidFill>
-                      <a:srgbClr val="263255"/>
+                      <a:srgbClr val="1A2644"/>
                     </a:solidFill>
                   </a:tcPr>
                 </a:tc>
@@ -5552,605 +5616,9 @@
   <p:clrMapOvr>
     <a:masterClrMapping/>
   </p:clrMapOvr>
-</p:sld>
-</file>
-
-<file path=ppt/slides/slide13.xml><?xml version="1.0" encoding="utf-8"?>
-<p:sld xmlns:a="http://schemas.openxmlformats.org/drawingml/2006/main" xmlns:p="http://schemas.openxmlformats.org/presentationml/2006/main" xmlns:r="http://schemas.openxmlformats.org/officeDocument/2006/relationships">
-  <p:cSld>
-    <p:spTree>
-      <p:nvGrpSpPr>
-        <p:cNvPr id="1" name=""/>
-        <p:cNvGrpSpPr/>
-        <p:nvPr/>
-      </p:nvGrpSpPr>
-      <p:grpSpPr/>
-      <p:sp>
-        <p:nvSpPr>
-          <p:cNvPr id="2" name="Rectangle 1"/>
-          <p:cNvSpPr/>
-          <p:nvPr/>
-        </p:nvSpPr>
-        <p:spPr>
-          <a:xfrm>
-            <a:off x="0" y="0"/>
-            <a:ext cx="12191695" cy="6858000"/>
-          </a:xfrm>
-          <a:prstGeom prst="rect">
-            <a:avLst/>
-          </a:prstGeom>
-          <a:solidFill>
-            <a:srgbClr val="0B132B"/>
-          </a:solidFill>
-          <a:ln>
-            <a:noFill/>
-          </a:ln>
-        </p:spPr>
-        <p:style>
-          <a:lnRef idx="1">
-            <a:schemeClr val="accent1"/>
-          </a:lnRef>
-          <a:fillRef idx="3">
-            <a:schemeClr val="accent1"/>
-          </a:fillRef>
-          <a:effectRef idx="2">
-            <a:schemeClr val="accent1"/>
-          </a:effectRef>
-          <a:fontRef idx="minor">
-            <a:schemeClr val="lt1"/>
-          </a:fontRef>
-        </p:style>
-        <p:txBody>
-          <a:bodyPr rtlCol="0" anchor="ctr"/>
-          <a:lstStyle/>
-          <a:p>
-            <a:pPr algn="ctr"/>
-          </a:p>
-        </p:txBody>
-      </p:sp>
-      <p:sp>
-        <p:nvSpPr>
-          <p:cNvPr id="3" name="Rectangle 2"/>
-          <p:cNvSpPr/>
-          <p:nvPr/>
-        </p:nvSpPr>
-        <p:spPr>
-          <a:xfrm>
-            <a:off x="731520" y="365760"/>
-            <a:ext cx="10728655" cy="36576"/>
-          </a:xfrm>
-          <a:prstGeom prst="rect">
-            <a:avLst/>
-          </a:prstGeom>
-          <a:solidFill>
-            <a:srgbClr val="6366F1"/>
-          </a:solidFill>
-          <a:ln>
-            <a:noFill/>
-          </a:ln>
-        </p:spPr>
-        <p:style>
-          <a:lnRef idx="1">
-            <a:schemeClr val="accent1"/>
-          </a:lnRef>
-          <a:fillRef idx="3">
-            <a:schemeClr val="accent1"/>
-          </a:fillRef>
-          <a:effectRef idx="2">
-            <a:schemeClr val="accent1"/>
-          </a:effectRef>
-          <a:fontRef idx="minor">
-            <a:schemeClr val="lt1"/>
-          </a:fontRef>
-        </p:style>
-        <p:txBody>
-          <a:bodyPr rtlCol="0" anchor="ctr"/>
-          <a:lstStyle/>
-          <a:p>
-            <a:pPr algn="ctr"/>
-          </a:p>
-        </p:txBody>
-      </p:sp>
-      <p:sp>
-        <p:nvSpPr>
-          <p:cNvPr id="4" name="TextBox 3"/>
-          <p:cNvSpPr txBox="1"/>
-          <p:nvPr/>
-        </p:nvSpPr>
-        <p:spPr>
-          <a:xfrm>
-            <a:off x="731520" y="438912"/>
-            <a:ext cx="10728655" cy="320040"/>
-          </a:xfrm>
-          <a:prstGeom prst="rect">
-            <a:avLst/>
-          </a:prstGeom>
-          <a:noFill/>
-        </p:spPr>
-        <p:txBody>
-          <a:bodyPr wrap="square">
-            <a:spAutoFit/>
-          </a:bodyPr>
-          <a:lstStyle/>
-          <a:p>
-            <a:pPr>
-              <a:defRPr sz="1100" b="1">
-                <a:solidFill>
-                  <a:srgbClr val="06B6D4"/>
-                </a:solidFill>
-                <a:latin typeface="Arial"/>
-              </a:defRPr>
-            </a:pPr>
-            <a:r>
-              <a:t>SUMMARY &amp; PROJECT IMPACT</a:t>
-            </a:r>
-          </a:p>
-        </p:txBody>
-      </p:sp>
-      <p:sp>
-        <p:nvSpPr>
-          <p:cNvPr id="5" name="TextBox 4"/>
-          <p:cNvSpPr txBox="1"/>
-          <p:nvPr/>
-        </p:nvSpPr>
-        <p:spPr>
-          <a:xfrm>
-            <a:off x="731520" y="713232"/>
-            <a:ext cx="10728655" cy="640080"/>
-          </a:xfrm>
-          <a:prstGeom prst="rect">
-            <a:avLst/>
-          </a:prstGeom>
-          <a:noFill/>
-        </p:spPr>
-        <p:txBody>
-          <a:bodyPr wrap="square">
-            <a:spAutoFit/>
-          </a:bodyPr>
-          <a:lstStyle/>
-          <a:p>
-            <a:pPr>
-              <a:defRPr sz="2600" b="1">
-                <a:solidFill>
-                  <a:srgbClr val="F8FAFC"/>
-                </a:solidFill>
-                <a:latin typeface="Arial"/>
-              </a:defRPr>
-            </a:pPr>
-            <a:r>
-              <a:t>Key Achievements &amp; Technical Learnings</a:t>
-            </a:r>
-          </a:p>
-        </p:txBody>
-      </p:sp>
-      <p:sp>
-        <p:nvSpPr>
-          <p:cNvPr id="6" name="Rounded Rectangle 5"/>
-          <p:cNvSpPr/>
-          <p:nvPr/>
-        </p:nvSpPr>
-        <p:spPr>
-          <a:xfrm>
-            <a:off x="731520" y="1463040"/>
-            <a:ext cx="3200400" cy="4846320"/>
-          </a:xfrm>
-          <a:prstGeom prst="roundRect">
-            <a:avLst/>
-          </a:prstGeom>
-          <a:solidFill>
-            <a:srgbClr val="1C2541"/>
-          </a:solidFill>
-          <a:ln w="19050">
-            <a:solidFill>
-              <a:srgbClr val="263255"/>
-            </a:solidFill>
-          </a:ln>
-        </p:spPr>
-        <p:style>
-          <a:lnRef idx="1">
-            <a:schemeClr val="accent1"/>
-          </a:lnRef>
-          <a:fillRef idx="3">
-            <a:schemeClr val="accent1"/>
-          </a:fillRef>
-          <a:effectRef idx="2">
-            <a:schemeClr val="accent1"/>
-          </a:effectRef>
-          <a:fontRef idx="minor">
-            <a:schemeClr val="lt1"/>
-          </a:fontRef>
-        </p:style>
-        <p:txBody>
-          <a:bodyPr rtlCol="0" anchor="ctr"/>
-          <a:lstStyle/>
-          <a:p>
-            <a:pPr algn="ctr"/>
-          </a:p>
-        </p:txBody>
-      </p:sp>
-      <p:sp>
-        <p:nvSpPr>
-          <p:cNvPr id="7" name="TextBox 6"/>
-          <p:cNvSpPr txBox="1"/>
-          <p:nvPr/>
-        </p:nvSpPr>
-        <p:spPr>
-          <a:xfrm>
-            <a:off x="914400" y="1600200"/>
-            <a:ext cx="2834640" cy="365760"/>
-          </a:xfrm>
-          <a:prstGeom prst="rect">
-            <a:avLst/>
-          </a:prstGeom>
-          <a:noFill/>
-        </p:spPr>
-        <p:txBody>
-          <a:bodyPr wrap="square">
-            <a:spAutoFit/>
-          </a:bodyPr>
-          <a:lstStyle/>
-          <a:p>
-            <a:pPr>
-              <a:defRPr sz="1500" b="1">
-                <a:solidFill>
-                  <a:srgbClr val="06B6D4"/>
-                </a:solidFill>
-                <a:latin typeface="Arial"/>
-              </a:defRPr>
-            </a:pPr>
-            <a:r>
-              <a:t>1. Comprehensive Syllabus Integration</a:t>
-            </a:r>
-          </a:p>
-        </p:txBody>
-      </p:sp>
-      <p:sp>
-        <p:nvSpPr>
-          <p:cNvPr id="8" name="TextBox 7"/>
-          <p:cNvSpPr txBox="1"/>
-          <p:nvPr/>
-        </p:nvSpPr>
-        <p:spPr>
-          <a:xfrm>
-            <a:off x="868680" y="2103120"/>
-            <a:ext cx="2926080" cy="3931920"/>
-          </a:xfrm>
-          <a:prstGeom prst="rect">
-            <a:avLst/>
-          </a:prstGeom>
-          <a:noFill/>
-        </p:spPr>
-        <p:txBody>
-          <a:bodyPr wrap="square">
-            <a:spAutoFit/>
-          </a:bodyPr>
-          <a:lstStyle/>
-          <a:p/>
-          <a:p>
-            <a:pPr>
-              <a:defRPr sz="1200">
-                <a:solidFill>
-                  <a:srgbClr val="F8FAFC"/>
-                </a:solidFill>
-              </a:defRPr>
-            </a:pPr>
-            <a:r>
-              <a:t>• Successfully mapped all 10 CS207 Data Structures modules to practical bank features.</a:t>
-            </a:r>
-          </a:p>
-          <a:p>
-            <a:pPr>
-              <a:defRPr sz="1200">
-                <a:solidFill>
-                  <a:srgbClr val="F8FAFC"/>
-                </a:solidFill>
-              </a:defRPr>
-            </a:pPr>
-            <a:r>
-              <a:t>• Balanced procedural memory logic with modern Object-Oriented paradigms.</a:t>
-            </a:r>
-          </a:p>
-          <a:p>
-            <a:pPr>
-              <a:defRPr sz="1200">
-                <a:solidFill>
-                  <a:srgbClr val="F8FAFC"/>
-                </a:solidFill>
-              </a:defRPr>
-            </a:pPr>
-            <a:r>
-              <a:t>• Zero memory corruption or uninitialized pointer vulnerabilities.</a:t>
-            </a:r>
-          </a:p>
-        </p:txBody>
-      </p:sp>
-      <p:sp>
-        <p:nvSpPr>
-          <p:cNvPr id="9" name="Rounded Rectangle 8"/>
-          <p:cNvSpPr/>
-          <p:nvPr/>
-        </p:nvSpPr>
-        <p:spPr>
-          <a:xfrm>
-            <a:off x="4114800" y="1463040"/>
-            <a:ext cx="3200400" cy="4846320"/>
-          </a:xfrm>
-          <a:prstGeom prst="roundRect">
-            <a:avLst/>
-          </a:prstGeom>
-          <a:solidFill>
-            <a:srgbClr val="1C2541"/>
-          </a:solidFill>
-          <a:ln w="19050">
-            <a:solidFill>
-              <a:srgbClr val="263255"/>
-            </a:solidFill>
-          </a:ln>
-        </p:spPr>
-        <p:style>
-          <a:lnRef idx="1">
-            <a:schemeClr val="accent1"/>
-          </a:lnRef>
-          <a:fillRef idx="3">
-            <a:schemeClr val="accent1"/>
-          </a:fillRef>
-          <a:effectRef idx="2">
-            <a:schemeClr val="accent1"/>
-          </a:effectRef>
-          <a:fontRef idx="minor">
-            <a:schemeClr val="lt1"/>
-          </a:fontRef>
-        </p:style>
-        <p:txBody>
-          <a:bodyPr rtlCol="0" anchor="ctr"/>
-          <a:lstStyle/>
-          <a:p>
-            <a:pPr algn="ctr"/>
-          </a:p>
-        </p:txBody>
-      </p:sp>
-      <p:sp>
-        <p:nvSpPr>
-          <p:cNvPr id="10" name="TextBox 9"/>
-          <p:cNvSpPr txBox="1"/>
-          <p:nvPr/>
-        </p:nvSpPr>
-        <p:spPr>
-          <a:xfrm>
-            <a:off x="4297680" y="1600200"/>
-            <a:ext cx="2834640" cy="365760"/>
-          </a:xfrm>
-          <a:prstGeom prst="rect">
-            <a:avLst/>
-          </a:prstGeom>
-          <a:noFill/>
-        </p:spPr>
-        <p:txBody>
-          <a:bodyPr wrap="square">
-            <a:spAutoFit/>
-          </a:bodyPr>
-          <a:lstStyle/>
-          <a:p>
-            <a:pPr>
-              <a:defRPr sz="1500" b="1">
-                <a:solidFill>
-                  <a:srgbClr val="10B981"/>
-                </a:solidFill>
-                <a:latin typeface="Arial"/>
-              </a:defRPr>
-            </a:pPr>
-            <a:r>
-              <a:t>2. Collaborative Multi-Developer Workflow</a:t>
-            </a:r>
-          </a:p>
-        </p:txBody>
-      </p:sp>
-      <p:sp>
-        <p:nvSpPr>
-          <p:cNvPr id="11" name="TextBox 10"/>
-          <p:cNvSpPr txBox="1"/>
-          <p:nvPr/>
-        </p:nvSpPr>
-        <p:spPr>
-          <a:xfrm>
-            <a:off x="4251960" y="2103120"/>
-            <a:ext cx="2926080" cy="3931920"/>
-          </a:xfrm>
-          <a:prstGeom prst="rect">
-            <a:avLst/>
-          </a:prstGeom>
-          <a:noFill/>
-        </p:spPr>
-        <p:txBody>
-          <a:bodyPr wrap="square">
-            <a:spAutoFit/>
-          </a:bodyPr>
-          <a:lstStyle/>
-          <a:p/>
-          <a:p>
-            <a:pPr>
-              <a:defRPr sz="1200">
-                <a:solidFill>
-                  <a:srgbClr val="F8FAFC"/>
-                </a:solidFill>
-              </a:defRPr>
-            </a:pPr>
-            <a:r>
-              <a:t>• Divided across 5 independent student compilation units (`student1.cpp` – `student5.cpp`).</a:t>
-            </a:r>
-          </a:p>
-          <a:p>
-            <a:pPr>
-              <a:defRPr sz="1200">
-                <a:solidFill>
-                  <a:srgbClr val="F8FAFC"/>
-                </a:solidFill>
-              </a:defRPr>
-            </a:pPr>
-            <a:r>
-              <a:t>• Linked via single `bank.h` header with clean `extern` scoping.</a:t>
-            </a:r>
-          </a:p>
-          <a:p>
-            <a:pPr>
-              <a:defRPr sz="1200">
-                <a:solidFill>
-                  <a:srgbClr val="F8FAFC"/>
-                </a:solidFill>
-              </a:defRPr>
-            </a:pPr>
-            <a:r>
-              <a:t>• Allowed 5 developers to work concurrently with zero merge conflicts.</a:t>
-            </a:r>
-          </a:p>
-        </p:txBody>
-      </p:sp>
-      <p:sp>
-        <p:nvSpPr>
-          <p:cNvPr id="12" name="Rounded Rectangle 11"/>
-          <p:cNvSpPr/>
-          <p:nvPr/>
-        </p:nvSpPr>
-        <p:spPr>
-          <a:xfrm>
-            <a:off x="7498079" y="1463040"/>
-            <a:ext cx="3200400" cy="4846320"/>
-          </a:xfrm>
-          <a:prstGeom prst="roundRect">
-            <a:avLst/>
-          </a:prstGeom>
-          <a:solidFill>
-            <a:srgbClr val="1C2541"/>
-          </a:solidFill>
-          <a:ln w="19050">
-            <a:solidFill>
-              <a:srgbClr val="263255"/>
-            </a:solidFill>
-          </a:ln>
-        </p:spPr>
-        <p:style>
-          <a:lnRef idx="1">
-            <a:schemeClr val="accent1"/>
-          </a:lnRef>
-          <a:fillRef idx="3">
-            <a:schemeClr val="accent1"/>
-          </a:fillRef>
-          <a:effectRef idx="2">
-            <a:schemeClr val="accent1"/>
-          </a:effectRef>
-          <a:fontRef idx="minor">
-            <a:schemeClr val="lt1"/>
-          </a:fontRef>
-        </p:style>
-        <p:txBody>
-          <a:bodyPr rtlCol="0" anchor="ctr"/>
-          <a:lstStyle/>
-          <a:p>
-            <a:pPr algn="ctr"/>
-          </a:p>
-        </p:txBody>
-      </p:sp>
-      <p:sp>
-        <p:nvSpPr>
-          <p:cNvPr id="13" name="TextBox 12"/>
-          <p:cNvSpPr txBox="1"/>
-          <p:nvPr/>
-        </p:nvSpPr>
-        <p:spPr>
-          <a:xfrm>
-            <a:off x="7680959" y="1600200"/>
-            <a:ext cx="2834640" cy="365760"/>
-          </a:xfrm>
-          <a:prstGeom prst="rect">
-            <a:avLst/>
-          </a:prstGeom>
-          <a:noFill/>
-        </p:spPr>
-        <p:txBody>
-          <a:bodyPr wrap="square">
-            <a:spAutoFit/>
-          </a:bodyPr>
-          <a:lstStyle/>
-          <a:p>
-            <a:pPr>
-              <a:defRPr sz="1500" b="1">
-                <a:solidFill>
-                  <a:srgbClr val="F59E0B"/>
-                </a:solidFill>
-                <a:latin typeface="Arial"/>
-              </a:defRPr>
-            </a:pPr>
-            <a:r>
-              <a:t>3. Industrial Standard Full-Stack Architecture</a:t>
-            </a:r>
-          </a:p>
-        </p:txBody>
-      </p:sp>
-      <p:sp>
-        <p:nvSpPr>
-          <p:cNvPr id="14" name="TextBox 13"/>
-          <p:cNvSpPr txBox="1"/>
-          <p:nvPr/>
-        </p:nvSpPr>
-        <p:spPr>
-          <a:xfrm>
-            <a:off x="7635239" y="2103120"/>
-            <a:ext cx="2926080" cy="3931920"/>
-          </a:xfrm>
-          <a:prstGeom prst="rect">
-            <a:avLst/>
-          </a:prstGeom>
-          <a:noFill/>
-        </p:spPr>
-        <p:txBody>
-          <a:bodyPr wrap="square">
-            <a:spAutoFit/>
-          </a:bodyPr>
-          <a:lstStyle/>
-          <a:p/>
-          <a:p>
-            <a:pPr>
-              <a:defRPr sz="1200">
-                <a:solidFill>
-                  <a:srgbClr val="F8FAFC"/>
-                </a:solidFill>
-              </a:defRPr>
-            </a:pPr>
-            <a:r>
-              <a:t>• Bridged low-level C++ algorithms with high-level React &amp; Node.js cloud APIs.</a:t>
-            </a:r>
-          </a:p>
-          <a:p>
-            <a:pPr>
-              <a:defRPr sz="1200">
-                <a:solidFill>
-                  <a:srgbClr val="F8FAFC"/>
-                </a:solidFill>
-              </a:defRPr>
-            </a:pPr>
-            <a:r>
-              <a:t>• Solved real-world financial issues (integer paise precision, audit journaling).</a:t>
-            </a:r>
-          </a:p>
-          <a:p>
-            <a:pPr>
-              <a:defRPr sz="1200">
-                <a:solidFill>
-                  <a:srgbClr val="F8FAFC"/>
-                </a:solidFill>
-              </a:defRPr>
-            </a:pPr>
-            <a:r>
-              <a:t>• Live production deployment ready on cloud platforms.</a:t>
-            </a:r>
-          </a:p>
-        </p:txBody>
-      </p:sp>
-    </p:spTree>
-  </p:cSld>
-  <p:clrMapOvr>
-    <a:masterClrMapping/>
-  </p:clrMapOvr>
+  <p:transition spd="fast">
+    <p:wipe dir="r"/>
+  </p:transition>
 </p:sld>
 </file>
 
@@ -6179,7 +5647,7 @@
             <a:avLst/>
           </a:prstGeom>
           <a:solidFill>
-            <a:srgbClr val="0B132B"/>
+            <a:srgbClr val="070B16"/>
           </a:solidFill>
           <a:ln>
             <a:noFill/>
@@ -6215,7 +5683,7 @@
         </p:nvSpPr>
         <p:spPr>
           <a:xfrm>
-            <a:off x="731520" y="365760"/>
+            <a:off x="731520" y="347472"/>
             <a:ext cx="10728655" cy="36576"/>
           </a:xfrm>
           <a:prstGeom prst="rect">
@@ -6258,8 +5726,8 @@
         </p:nvSpPr>
         <p:spPr>
           <a:xfrm>
-            <a:off x="731520" y="438912"/>
-            <a:ext cx="10728655" cy="320040"/>
+            <a:off x="731520" y="411480"/>
+            <a:ext cx="10728655" cy="274320"/>
           </a:xfrm>
           <a:prstGeom prst="rect">
             <a:avLst/>
@@ -6281,7 +5749,7 @@
               </a:defRPr>
             </a:pPr>
             <a:r>
-              <a:t>FINAL ASSESSMENT &amp; QUESTION / ANSWER SESSION</a:t>
+              <a:t>SUMMARY &amp; EVALUATION Q&amp;A</a:t>
             </a:r>
           </a:p>
         </p:txBody>
@@ -6294,8 +5762,8 @@
         </p:nvSpPr>
         <p:spPr>
           <a:xfrm>
-            <a:off x="731520" y="713232"/>
-            <a:ext cx="10728655" cy="640080"/>
+            <a:off x="731520" y="685800"/>
+            <a:ext cx="10728655" cy="594360"/>
           </a:xfrm>
           <a:prstGeom prst="rect">
             <a:avLst/>
@@ -6309,7 +5777,7 @@
           <a:lstStyle/>
           <a:p>
             <a:pPr>
-              <a:defRPr sz="2600" b="1">
+              <a:defRPr sz="2400" b="1">
                 <a:solidFill>
                   <a:srgbClr val="F8FAFC"/>
                 </a:solidFill>
@@ -6330,18 +5798,18 @@
         </p:nvSpPr>
         <p:spPr>
           <a:xfrm>
-            <a:off x="731520" y="1463040"/>
-            <a:ext cx="5120640" cy="4846320"/>
+            <a:off x="731520" y="1371600"/>
+            <a:ext cx="5120640" cy="4937760"/>
           </a:xfrm>
           <a:prstGeom prst="roundRect">
             <a:avLst/>
           </a:prstGeom>
           <a:solidFill>
-            <a:srgbClr val="1C2541"/>
+            <a:srgbClr val="10182C"/>
           </a:solidFill>
           <a:ln w="19050">
             <a:solidFill>
-              <a:srgbClr val="263255"/>
+              <a:srgbClr val="1A2644"/>
             </a:solidFill>
           </a:ln>
         </p:spPr>
@@ -6375,7 +5843,7 @@
         </p:nvSpPr>
         <p:spPr>
           <a:xfrm>
-            <a:off x="914400" y="1600200"/>
+            <a:off x="914400" y="1508760"/>
             <a:ext cx="4754880" cy="365760"/>
           </a:xfrm>
           <a:prstGeom prst="rect">
@@ -6411,8 +5879,8 @@
         </p:nvSpPr>
         <p:spPr>
           <a:xfrm>
-            <a:off x="914400" y="2011680"/>
-            <a:ext cx="4754880" cy="4114800"/>
+            <a:off x="914400" y="1920240"/>
+            <a:ext cx="4754880" cy="4206240"/>
           </a:xfrm>
           <a:prstGeom prst="rect">
             <a:avLst/>
@@ -6432,7 +5900,7 @@
                   <a:srgbClr val="F8FAFC"/>
                 </a:solidFill>
               </a:rPr>
-              <a:t>• Tree-Based Indexing: </a:t>
+              <a:t>• AVL / B-Tree Indexing: </a:t>
             </a:r>
             <a:r>
               <a:rPr sz="1300">
@@ -6440,7 +5908,7 @@
                   <a:srgbClr val="94A3B8"/>
                 </a:solidFill>
               </a:rPr>
-              <a:t>Implement AVL Trees and B+ Trees for O(log n) multi-key database indexing on high-volume account clusters.</a:t>
+              <a:t>Integrate self-balancing B+ Trees for large-scale disk-based account index lookups.</a:t>
             </a:r>
           </a:p>
           <a:p>
@@ -6458,7 +5926,7 @@
                   <a:srgbClr val="94A3B8"/>
                 </a:solidFill>
               </a:rPr>
-              <a:t>Introduce POSIX threads / C++11 std::mutex locks for multi-teller concurrent transaction safety.</a:t>
+              <a:t>Implement POSIX mutex locking for multi-teller transaction safety.</a:t>
             </a:r>
           </a:p>
           <a:p>
@@ -6468,7 +5936,7 @@
                   <a:srgbClr val="F8FAFC"/>
                 </a:solidFill>
               </a:rPr>
-              <a:t>• Fraud Detection AI: </a:t>
+              <a:t>• AI Anomaly Detection: </a:t>
             </a:r>
             <a:r>
               <a:rPr sz="1300">
@@ -6476,7 +5944,7 @@
                   <a:srgbClr val="94A3B8"/>
                 </a:solidFill>
               </a:rPr>
-              <a:t>Integrate graph data structures and anomaly detection algorithms to identify suspicious withdrawal patterns.</a:t>
+              <a:t>Deploy graph algorithms to detect fraudulent transaction spikes.</a:t>
             </a:r>
           </a:p>
         </p:txBody>
@@ -6489,18 +5957,18 @@
         </p:nvSpPr>
         <p:spPr>
           <a:xfrm>
-            <a:off x="6309360" y="1463040"/>
-            <a:ext cx="5120640" cy="4846320"/>
+            <a:off x="6309360" y="1371600"/>
+            <a:ext cx="5120640" cy="4937760"/>
           </a:xfrm>
           <a:prstGeom prst="roundRect">
             <a:avLst/>
           </a:prstGeom>
           <a:solidFill>
-            <a:srgbClr val="1C2541"/>
+            <a:srgbClr val="10182C"/>
           </a:solidFill>
           <a:ln w="19050">
             <a:solidFill>
-              <a:srgbClr val="263255"/>
+              <a:srgbClr val="1A2644"/>
             </a:solidFill>
           </a:ln>
         </p:spPr>
@@ -6534,7 +6002,7 @@
         </p:nvSpPr>
         <p:spPr>
           <a:xfrm>
-            <a:off x="6492240" y="1600200"/>
+            <a:off x="6492240" y="1508760"/>
             <a:ext cx="4754880" cy="365760"/>
           </a:xfrm>
           <a:prstGeom prst="rect">
@@ -6557,7 +6025,7 @@
               </a:defRPr>
             </a:pPr>
             <a:r>
-              <a:t>Thank You &amp; Evaluation Q&amp;A</a:t>
+              <a:t>Thank You &amp; Group Evaluation</a:t>
             </a:r>
           </a:p>
         </p:txBody>
@@ -6570,8 +6038,8 @@
         </p:nvSpPr>
         <p:spPr>
           <a:xfrm>
-            <a:off x="6492240" y="2011680"/>
-            <a:ext cx="4754880" cy="4114800"/>
+            <a:off x="6492240" y="1920240"/>
+            <a:ext cx="4754880" cy="4206240"/>
           </a:xfrm>
           <a:prstGeom prst="rect">
             <a:avLst/>
@@ -6585,14 +6053,14 @@
           <a:lstStyle/>
           <a:p>
             <a:pPr>
-              <a:defRPr b="1" sz="1500">
+              <a:defRPr b="1" sz="1400">
                 <a:solidFill>
                   <a:srgbClr val="F59E0B"/>
                 </a:solidFill>
               </a:defRPr>
             </a:pPr>
             <a:r>
-              <a:t>Project Summary:</a:t>
+              <a:t>Presented by:</a:t>
             </a:r>
           </a:p>
           <a:p>
@@ -6602,7 +6070,7 @@
                   <a:srgbClr val="F8FAFC"/>
                 </a:solidFill>
               </a:rPr>
-              <a:t>• GitHub Repository: </a:t>
+              <a:t>• Group Members: </a:t>
             </a:r>
             <a:r>
               <a:rPr sz="1300">
@@ -6610,6 +6078,24 @@
                   <a:srgbClr val="94A3B8"/>
                 </a:solidFill>
               </a:rPr>
+              <a:t>Manikanta, Lokesh, Anil, Shishira, Chathwik</a:t>
+            </a:r>
+          </a:p>
+          <a:p>
+            <a:r>
+              <a:rPr b="1" sz="1300">
+                <a:solidFill>
+                  <a:srgbClr val="F8FAFC"/>
+                </a:solidFill>
+              </a:rPr>
+              <a:t>• Source Code: </a:t>
+            </a:r>
+            <a:r>
+              <a:rPr sz="1300">
+                <a:solidFill>
+                  <a:srgbClr val="94A3B8"/>
+                </a:solidFill>
+              </a:rPr>
               <a:t>github.com/manikantareddemoni-glitch/bank-management-system</a:t>
             </a:r>
           </a:p>
@@ -6620,7 +6106,7 @@
                   <a:srgbClr val="F8FAFC"/>
                 </a:solidFill>
               </a:rPr>
-              <a:t>• Live Web Deployment: </a:t>
+              <a:t>• Live Deployment: </a:t>
             </a:r>
             <a:r>
               <a:rPr sz="1300">
@@ -6628,7 +6114,7 @@
                   <a:srgbClr val="94A3B8"/>
                 </a:solidFill>
               </a:rPr>
-              <a:t>Vercel &amp; Render Cloud Dual-Sync</a:t>
+              <a:t>Dual-Sync Cloud Web Engine</a:t>
             </a:r>
           </a:p>
           <a:p>
@@ -6638,7 +6124,7 @@
                   <a:srgbClr val="F8FAFC"/>
                 </a:solidFill>
               </a:rPr>
-              <a:t>• Languages Used: </a:t>
+              <a:t>• Open Floor: </a:t>
             </a:r>
             <a:r>
               <a:rPr sz="1300">
@@ -6646,25 +6132,7 @@
                   <a:srgbClr val="94A3B8"/>
                 </a:solidFill>
               </a:rPr>
-              <a:t>C++20, JavaScript (ES6+), Node.js, HTML5/CSS3</a:t>
-            </a:r>
-          </a:p>
-          <a:p>
-            <a:r>
-              <a:rPr b="1" sz="1300">
-                <a:solidFill>
-                  <a:srgbClr val="F8FAFC"/>
-                </a:solidFill>
-              </a:rPr>
-              <a:t>• Open Floor: </a:t>
-            </a:r>
-            <a:r>
-              <a:rPr sz="1300">
-                <a:solidFill>
-                  <a:srgbClr val="94A3B8"/>
-                </a:solidFill>
-              </a:rPr>
-              <a:t>We welcome any questions, faculty feedback, and algorithmic evaluations!</a:t>
+              <a:t>We welcome your questions and algorithmic evaluation!</a:t>
             </a:r>
           </a:p>
         </p:txBody>
@@ -6674,6 +6142,9 @@
   <p:clrMapOvr>
     <a:masterClrMapping/>
   </p:clrMapOvr>
+  <p:transition spd="med">
+    <p:fade/>
+  </p:transition>
 </p:sld>
 </file>
 
@@ -6702,7 +6173,7 @@
             <a:avLst/>
           </a:prstGeom>
           <a:solidFill>
-            <a:srgbClr val="0B132B"/>
+            <a:srgbClr val="070B16"/>
           </a:solidFill>
           <a:ln>
             <a:noFill/>
@@ -6738,7 +6209,7 @@
         </p:nvSpPr>
         <p:spPr>
           <a:xfrm>
-            <a:off x="731520" y="365760"/>
+            <a:off x="731520" y="347472"/>
             <a:ext cx="10728655" cy="36576"/>
           </a:xfrm>
           <a:prstGeom prst="rect">
@@ -6781,8 +6252,8 @@
         </p:nvSpPr>
         <p:spPr>
           <a:xfrm>
-            <a:off x="731520" y="438912"/>
-            <a:ext cx="10728655" cy="320040"/>
+            <a:off x="731520" y="411480"/>
+            <a:ext cx="10728655" cy="274320"/>
           </a:xfrm>
           <a:prstGeom prst="rect">
             <a:avLst/>
@@ -6817,8 +6288,8 @@
         </p:nvSpPr>
         <p:spPr>
           <a:xfrm>
-            <a:off x="731520" y="713232"/>
-            <a:ext cx="10728655" cy="640080"/>
+            <a:off x="731520" y="685800"/>
+            <a:ext cx="10728655" cy="594360"/>
           </a:xfrm>
           <a:prstGeom prst="rect">
             <a:avLst/>
@@ -6832,7 +6303,7 @@
           <a:lstStyle/>
           <a:p>
             <a:pPr>
-              <a:defRPr sz="2600" b="1">
+              <a:defRPr sz="2400" b="1">
                 <a:solidFill>
                   <a:srgbClr val="F8FAFC"/>
                 </a:solidFill>
@@ -6853,18 +6324,18 @@
         </p:nvSpPr>
         <p:spPr>
           <a:xfrm>
-            <a:off x="731520" y="1463040"/>
-            <a:ext cx="5120640" cy="4846320"/>
+            <a:off x="731520" y="1371600"/>
+            <a:ext cx="5120640" cy="4937760"/>
           </a:xfrm>
           <a:prstGeom prst="roundRect">
             <a:avLst/>
           </a:prstGeom>
           <a:solidFill>
-            <a:srgbClr val="1C2541"/>
+            <a:srgbClr val="10182C"/>
           </a:solidFill>
           <a:ln w="19050">
             <a:solidFill>
-              <a:srgbClr val="263255"/>
+              <a:srgbClr val="1A2644"/>
             </a:solidFill>
           </a:ln>
         </p:spPr>
@@ -6898,7 +6369,7 @@
         </p:nvSpPr>
         <p:spPr>
           <a:xfrm>
-            <a:off x="914400" y="1600200"/>
+            <a:off x="914400" y="1508760"/>
             <a:ext cx="4754880" cy="365760"/>
           </a:xfrm>
           <a:prstGeom prst="rect">
@@ -6921,7 +6392,7 @@
               </a:defRPr>
             </a:pPr>
             <a:r>
-              <a:t>1. Problem Statement &amp; Challenge</a:t>
+              <a:t>1. Problem Statement &amp; Motivation</a:t>
             </a:r>
           </a:p>
         </p:txBody>
@@ -6934,8 +6405,8 @@
         </p:nvSpPr>
         <p:spPr>
           <a:xfrm>
-            <a:off x="914400" y="2011680"/>
-            <a:ext cx="4754880" cy="4114800"/>
+            <a:off x="914400" y="1920240"/>
+            <a:ext cx="4754880" cy="4206240"/>
           </a:xfrm>
           <a:prstGeom prst="rect">
             <a:avLst/>
@@ -6955,7 +6426,7 @@
                   <a:srgbClr val="F8FAFC"/>
                 </a:solidFill>
               </a:rPr>
-              <a:t>• Theoretical Isolation: </a:t>
+              <a:t>• Bridging Theory and Practice: </a:t>
             </a:r>
             <a:r>
               <a:rPr sz="1300">
@@ -6963,7 +6434,7 @@
                   <a:srgbClr val="94A3B8"/>
                 </a:solidFill>
               </a:rPr>
-              <a:t>Academic data structures are often taught with isolated toy examples rather than unified real-world software.</a:t>
+              <a:t>Traditional academic DSA assignments are often isolated code snippets. This project binds all concepts into a unified banking software ecosystem.</a:t>
             </a:r>
           </a:p>
           <a:p>
@@ -6973,7 +6444,7 @@
                   <a:srgbClr val="F8FAFC"/>
                 </a:solidFill>
               </a:rPr>
-              <a:t>• Concurrency &amp; Consistency: </a:t>
+              <a:t>• Financial Precision: </a:t>
             </a:r>
             <a:r>
               <a:rPr sz="1300">
@@ -6981,7 +6452,7 @@
                   <a:srgbClr val="94A3B8"/>
                 </a:solidFill>
               </a:rPr>
-              <a:t>Financial systems require absolute precision (zero floating-point errors) and atomic balance updates.</a:t>
+              <a:t>Eliminates floating-point rounding errors by utilizing integer paise calculations (`balancePaise`) for exact currency accounting.</a:t>
             </a:r>
           </a:p>
           <a:p>
@@ -6991,7 +6462,7 @@
                   <a:srgbClr val="F8FAFC"/>
                 </a:solidFill>
               </a:rPr>
-              <a:t>• Multi-Member Coordination: </a:t>
+              <a:t>• Multi-Developer Synergy: </a:t>
             </a:r>
             <a:r>
               <a:rPr sz="1300">
@@ -6999,7 +6470,7 @@
                   <a:srgbClr val="94A3B8"/>
                 </a:solidFill>
               </a:rPr>
-              <a:t>Dividing a cohesive codebase among 5 developers requires robust modular encapsulation without variable collisions.</a:t>
+              <a:t>Modularized across 5 team members with zero variable pollution or header compilation collisions.</a:t>
             </a:r>
           </a:p>
         </p:txBody>
@@ -7012,18 +6483,18 @@
         </p:nvSpPr>
         <p:spPr>
           <a:xfrm>
-            <a:off x="6309360" y="1463040"/>
-            <a:ext cx="5120640" cy="4846320"/>
+            <a:off x="6309360" y="1371600"/>
+            <a:ext cx="5120640" cy="4937760"/>
           </a:xfrm>
           <a:prstGeom prst="roundRect">
             <a:avLst/>
           </a:prstGeom>
           <a:solidFill>
-            <a:srgbClr val="1C2541"/>
+            <a:srgbClr val="10182C"/>
           </a:solidFill>
           <a:ln w="19050">
             <a:solidFill>
-              <a:srgbClr val="263255"/>
+              <a:srgbClr val="1A2644"/>
             </a:solidFill>
           </a:ln>
         </p:spPr>
@@ -7057,7 +6528,7 @@
         </p:nvSpPr>
         <p:spPr>
           <a:xfrm>
-            <a:off x="6492240" y="1600200"/>
+            <a:off x="6492240" y="1508760"/>
             <a:ext cx="4754880" cy="365760"/>
           </a:xfrm>
           <a:prstGeom prst="rect">
@@ -7080,7 +6551,7 @@
               </a:defRPr>
             </a:pPr>
             <a:r>
-              <a:t>2. The Bank Management System Solution</a:t>
+              <a:t>2. Core Deliverables &amp; Highlights</a:t>
             </a:r>
           </a:p>
         </p:txBody>
@@ -7093,8 +6564,8 @@
         </p:nvSpPr>
         <p:spPr>
           <a:xfrm>
-            <a:off x="6492240" y="2011680"/>
-            <a:ext cx="4754880" cy="4114800"/>
+            <a:off x="6492240" y="1920240"/>
+            <a:ext cx="4754880" cy="4206240"/>
           </a:xfrm>
           <a:prstGeom prst="rect">
             <a:avLst/>
@@ -7114,7 +6585,7 @@
                   <a:srgbClr val="F8FAFC"/>
                 </a:solidFill>
               </a:rPr>
-              <a:t>• Modular C++ Engine: </a:t>
+              <a:t>• 100% Syllabus Coverage: </a:t>
             </a:r>
             <a:r>
               <a:rPr sz="1300">
@@ -7122,7 +6593,7 @@
                   <a:srgbClr val="94A3B8"/>
                 </a:solidFill>
               </a:rPr>
-              <a:t>Structured across 5 distinct student units linked via a clean shared interface (`bank.h`).</a:t>
+              <a:t>Covers Arrays, Structs, Linear/Binary Search, Insertion Sort, 2D Matrices, Strings, Stacks, Queues, and STL Containers.</a:t>
             </a:r>
           </a:p>
           <a:p>
@@ -7132,7 +6603,7 @@
                   <a:srgbClr val="F8FAFC"/>
                 </a:solidFill>
               </a:rPr>
-              <a:t>• 100% Syllabus Coverage: </a:t>
+              <a:t>• Modular Multi-File C++: </a:t>
             </a:r>
             <a:r>
               <a:rPr sz="1300">
@@ -7140,7 +6611,7 @@
                   <a:srgbClr val="94A3B8"/>
                 </a:solidFill>
               </a:rPr>
-              <a:t>Integrates Arrays, Nested Structs, Searching, Sorting, 2D Matrices, Strings, Stacks, Queues, and STL.</a:t>
+              <a:t>Organized into `bank.h` and `student1.cpp` through `student5.cpp` for individual student evaluation.</a:t>
             </a:r>
           </a:p>
           <a:p>
@@ -7150,7 +6621,7 @@
                   <a:srgbClr val="F8FAFC"/>
                 </a:solidFill>
               </a:rPr>
-              <a:t>• Dual-Sync Web Platform: </a:t>
+              <a:t>• Full-Stack Web Interface: </a:t>
             </a:r>
             <a:r>
               <a:rPr sz="1300">
@@ -7158,25 +6629,7 @@
                   <a:srgbClr val="94A3B8"/>
                 </a:solidFill>
               </a:rPr>
-              <a:t>Augmented with a modern React + Vite dashboard and Node.js REST API with cloud MongoDB dual persistence.</a:t>
-            </a:r>
-          </a:p>
-          <a:p>
-            <a:r>
-              <a:rPr b="1" sz="1300">
-                <a:solidFill>
-                  <a:srgbClr val="F8FAFC"/>
-                </a:solidFill>
-              </a:rPr>
-              <a:t>• Strict Business Rules: </a:t>
-            </a:r>
-            <a:r>
-              <a:rPr sz="1300">
-                <a:solidFill>
-                  <a:srgbClr val="94A3B8"/>
-                </a:solidFill>
-              </a:rPr>
-              <a:t>₹500 minimum balance enforcement for Savings accounts and automated transaction audit journaling.</a:t>
+              <a:t>Paired with a modern React Vite dashboard, REST backend, and MongoDB Atlas dual-sync persistence.</a:t>
             </a:r>
           </a:p>
         </p:txBody>
@@ -7186,6 +6639,9 @@
   <p:clrMapOvr>
     <a:masterClrMapping/>
   </p:clrMapOvr>
+  <p:transition spd="fast">
+    <p:push dir="l"/>
+  </p:transition>
 </p:sld>
 </file>
 
@@ -7214,7 +6670,7 @@
             <a:avLst/>
           </a:prstGeom>
           <a:solidFill>
-            <a:srgbClr val="0B132B"/>
+            <a:srgbClr val="070B16"/>
           </a:solidFill>
           <a:ln>
             <a:noFill/>
@@ -7250,7 +6706,7 @@
         </p:nvSpPr>
         <p:spPr>
           <a:xfrm>
-            <a:off x="731520" y="365760"/>
+            <a:off x="731520" y="347472"/>
             <a:ext cx="10728655" cy="36576"/>
           </a:xfrm>
           <a:prstGeom prst="rect">
@@ -7293,8 +6749,8 @@
         </p:nvSpPr>
         <p:spPr>
           <a:xfrm>
-            <a:off x="731520" y="438912"/>
-            <a:ext cx="10728655" cy="320040"/>
+            <a:off x="731520" y="411480"/>
+            <a:ext cx="10728655" cy="274320"/>
           </a:xfrm>
           <a:prstGeom prst="rect">
             <a:avLst/>
@@ -7316,7 +6772,7 @@
               </a:defRPr>
             </a:pPr>
             <a:r>
-              <a:t>SYSTEM DESIGN &amp; TECHNOLOGY STACK</a:t>
+              <a:t>ARCHITECTURE &amp; TECHNOLOGY LAYERS</a:t>
             </a:r>
           </a:p>
         </p:txBody>
@@ -7329,8 +6785,8 @@
         </p:nvSpPr>
         <p:spPr>
           <a:xfrm>
-            <a:off x="731520" y="713232"/>
-            <a:ext cx="10728655" cy="640080"/>
+            <a:off x="731520" y="685800"/>
+            <a:ext cx="10728655" cy="594360"/>
           </a:xfrm>
           <a:prstGeom prst="rect">
             <a:avLst/>
@@ -7344,7 +6800,7 @@
           <a:lstStyle/>
           <a:p>
             <a:pPr>
-              <a:defRPr sz="2600" b="1">
+              <a:defRPr sz="2400" b="1">
                 <a:solidFill>
                   <a:srgbClr val="F8FAFC"/>
                 </a:solidFill>
@@ -7352,7 +6808,7 @@
               </a:defRPr>
             </a:pPr>
             <a:r>
-              <a:t>Full-Stack System Architecture</a:t>
+              <a:t>Full-Stack System Architecture &amp; Tech Stack</a:t>
             </a:r>
           </a:p>
         </p:txBody>
@@ -7365,18 +6821,18 @@
         </p:nvSpPr>
         <p:spPr>
           <a:xfrm>
-            <a:off x="731520" y="1463040"/>
-            <a:ext cx="2514600" cy="4846320"/>
+            <a:off x="731520" y="1371600"/>
+            <a:ext cx="2514600" cy="4937760"/>
           </a:xfrm>
           <a:prstGeom prst="roundRect">
             <a:avLst/>
           </a:prstGeom>
           <a:solidFill>
-            <a:srgbClr val="1C2541"/>
+            <a:srgbClr val="10182C"/>
           </a:solidFill>
           <a:ln w="19050">
             <a:solidFill>
-              <a:srgbClr val="263255"/>
+              <a:srgbClr val="1A2644"/>
             </a:solidFill>
           </a:ln>
         </p:spPr>
@@ -7410,7 +6866,7 @@
         </p:nvSpPr>
         <p:spPr>
           <a:xfrm>
-            <a:off x="914400" y="1600200"/>
+            <a:off x="914400" y="1508760"/>
             <a:ext cx="2148840" cy="365760"/>
           </a:xfrm>
           <a:prstGeom prst="rect">
@@ -7446,8 +6902,8 @@
         </p:nvSpPr>
         <p:spPr>
           <a:xfrm>
-            <a:off x="868680" y="2103120"/>
-            <a:ext cx="2240280" cy="3931920"/>
+            <a:off x="868680" y="1920240"/>
+            <a:ext cx="2240280" cy="4114800"/>
           </a:xfrm>
           <a:prstGeom prst="rect">
             <a:avLst/>
@@ -7469,7 +6925,7 @@
               </a:defRPr>
             </a:pPr>
             <a:r>
-              <a:t>• Modular Multi-file Architecture</a:t>
+              <a:t>• Modular 5-file C++ build</a:t>
             </a:r>
           </a:p>
           <a:p>
@@ -7493,7 +6949,7 @@
               </a:defRPr>
             </a:pPr>
             <a:r>
-              <a:t>• Fast in-memory algorithmic execution</a:t>
+              <a:t>• In-memory Data Structures</a:t>
             </a:r>
           </a:p>
           <a:p>
@@ -7505,7 +6961,7 @@
               </a:defRPr>
             </a:pPr>
             <a:r>
-              <a:t>• Zero memory leak pointer safety</a:t>
+              <a:t>• Fast O(1) / O(log n) logic</a:t>
             </a:r>
           </a:p>
           <a:p>
@@ -7517,7 +6973,7 @@
               </a:defRPr>
             </a:pPr>
             <a:r>
-              <a:t>• O(1) &amp; O(log n) real-time lookups</a:t>
+              <a:t>• Zero memory leak safety</a:t>
             </a:r>
           </a:p>
         </p:txBody>
@@ -7530,18 +6986,18 @@
         </p:nvSpPr>
         <p:spPr>
           <a:xfrm>
-            <a:off x="3520440" y="1463040"/>
-            <a:ext cx="2514600" cy="4846320"/>
+            <a:off x="3520440" y="1371600"/>
+            <a:ext cx="2514600" cy="4937760"/>
           </a:xfrm>
           <a:prstGeom prst="roundRect">
             <a:avLst/>
           </a:prstGeom>
           <a:solidFill>
-            <a:srgbClr val="1C2541"/>
+            <a:srgbClr val="10182C"/>
           </a:solidFill>
           <a:ln w="19050">
             <a:solidFill>
-              <a:srgbClr val="263255"/>
+              <a:srgbClr val="1A2644"/>
             </a:solidFill>
           </a:ln>
         </p:spPr>
@@ -7575,7 +7031,7 @@
         </p:nvSpPr>
         <p:spPr>
           <a:xfrm>
-            <a:off x="3703320" y="1600200"/>
+            <a:off x="3703320" y="1508760"/>
             <a:ext cx="2148840" cy="365760"/>
           </a:xfrm>
           <a:prstGeom prst="rect">
@@ -7598,7 +7054,7 @@
               </a:defRPr>
             </a:pPr>
             <a:r>
-              <a:t>REST API Layer</a:t>
+              <a:t>Node.js REST API</a:t>
             </a:r>
           </a:p>
         </p:txBody>
@@ -7611,8 +7067,8 @@
         </p:nvSpPr>
         <p:spPr>
           <a:xfrm>
-            <a:off x="3657600" y="2103120"/>
-            <a:ext cx="2240280" cy="3931920"/>
+            <a:off x="3657600" y="1920240"/>
+            <a:ext cx="2240280" cy="4114800"/>
           </a:xfrm>
           <a:prstGeom prst="rect">
             <a:avLst/>
@@ -7634,7 +7090,7 @@
               </a:defRPr>
             </a:pPr>
             <a:r>
-              <a:t>• Node.js &amp; Express Server</a:t>
+              <a:t>• Express Server Architecture</a:t>
             </a:r>
           </a:p>
           <a:p>
@@ -7646,7 +7102,7 @@
               </a:defRPr>
             </a:pPr>
             <a:r>
-              <a:t>• Atomic Deposit &amp; Withdraw endpoints</a:t>
+              <a:t>• REST API CRUD routes</a:t>
             </a:r>
           </a:p>
           <a:p>
@@ -7658,7 +7114,7 @@
               </a:defRPr>
             </a:pPr>
             <a:r>
-              <a:t>• Account CRUD operations</a:t>
+              <a:t>• Atomic Deposit &amp; Withdraw</a:t>
             </a:r>
           </a:p>
           <a:p>
@@ -7670,7 +7126,7 @@
               </a:defRPr>
             </a:pPr>
             <a:r>
-              <a:t>• Transaction ledger streaming</a:t>
+              <a:t>• Ledger Audit log dispatch</a:t>
             </a:r>
           </a:p>
           <a:p>
@@ -7682,7 +7138,7 @@
               </a:defRPr>
             </a:pPr>
             <a:r>
-              <a:t>• Dual-Sync sync controller</a:t>
+              <a:t>• Auto-reconnect controller</a:t>
             </a:r>
           </a:p>
         </p:txBody>
@@ -7695,18 +7151,18 @@
         </p:nvSpPr>
         <p:spPr>
           <a:xfrm>
-            <a:off x="6309360" y="1463040"/>
-            <a:ext cx="2514600" cy="4846320"/>
+            <a:off x="6309360" y="1371600"/>
+            <a:ext cx="2514600" cy="4937760"/>
           </a:xfrm>
           <a:prstGeom prst="roundRect">
             <a:avLst/>
           </a:prstGeom>
           <a:solidFill>
-            <a:srgbClr val="1C2541"/>
+            <a:srgbClr val="10182C"/>
           </a:solidFill>
           <a:ln w="19050">
             <a:solidFill>
-              <a:srgbClr val="263255"/>
+              <a:srgbClr val="1A2644"/>
             </a:solidFill>
           </a:ln>
         </p:spPr>
@@ -7740,7 +7196,7 @@
         </p:nvSpPr>
         <p:spPr>
           <a:xfrm>
-            <a:off x="6492240" y="1600200"/>
+            <a:off x="6492240" y="1508760"/>
             <a:ext cx="2148840" cy="365760"/>
           </a:xfrm>
           <a:prstGeom prst="rect">
@@ -7763,7 +7219,7 @@
               </a:defRPr>
             </a:pPr>
             <a:r>
-              <a:t>Web Frontend UI</a:t>
+              <a:t>React Web Dashboard</a:t>
             </a:r>
           </a:p>
         </p:txBody>
@@ -7776,8 +7232,8 @@
         </p:nvSpPr>
         <p:spPr>
           <a:xfrm>
-            <a:off x="6446520" y="2103120"/>
-            <a:ext cx="2240280" cy="3931920"/>
+            <a:off x="6446520" y="1920240"/>
+            <a:ext cx="2240280" cy="4114800"/>
           </a:xfrm>
           <a:prstGeom prst="rect">
             <a:avLst/>
@@ -7811,7 +7267,7 @@
               </a:defRPr>
             </a:pPr>
             <a:r>
-              <a:t>• Glassmorphic Dark Dashboard</a:t>
+              <a:t>• Glassmorphic Dark UI</a:t>
             </a:r>
           </a:p>
           <a:p>
@@ -7823,7 +7279,7 @@
               </a:defRPr>
             </a:pPr>
             <a:r>
-              <a:t>• Initial 6 Accounts Pagination</a:t>
+              <a:t>• 6-Account Pagination</a:t>
             </a:r>
           </a:p>
           <a:p>
@@ -7835,7 +7291,7 @@
               </a:defRPr>
             </a:pPr>
             <a:r>
-              <a:t>• Live interactive transaction studio</a:t>
+              <a:t>• Money Studio deposit flow</a:t>
             </a:r>
           </a:p>
           <a:p>
@@ -7847,7 +7303,7 @@
               </a:defRPr>
             </a:pPr>
             <a:r>
-              <a:t>• Toast alerts &amp; Confetti effects</a:t>
+              <a:t>• Real-time Toast Alerts</a:t>
             </a:r>
           </a:p>
         </p:txBody>
@@ -7860,18 +7316,18 @@
         </p:nvSpPr>
         <p:spPr>
           <a:xfrm>
-            <a:off x="9098280" y="1463040"/>
-            <a:ext cx="2514600" cy="4846320"/>
+            <a:off x="9098280" y="1371600"/>
+            <a:ext cx="2514600" cy="4937760"/>
           </a:xfrm>
           <a:prstGeom prst="roundRect">
             <a:avLst/>
           </a:prstGeom>
           <a:solidFill>
-            <a:srgbClr val="1C2541"/>
+            <a:srgbClr val="10182C"/>
           </a:solidFill>
           <a:ln w="19050">
             <a:solidFill>
-              <a:srgbClr val="263255"/>
+              <a:srgbClr val="1A2644"/>
             </a:solidFill>
           </a:ln>
         </p:spPr>
@@ -7905,7 +7361,7 @@
         </p:nvSpPr>
         <p:spPr>
           <a:xfrm>
-            <a:off x="9281160" y="1600200"/>
+            <a:off x="9281160" y="1508760"/>
             <a:ext cx="2148840" cy="365760"/>
           </a:xfrm>
           <a:prstGeom prst="rect">
@@ -7928,7 +7384,7 @@
               </a:defRPr>
             </a:pPr>
             <a:r>
-              <a:t>Persistence Tier</a:t>
+              <a:t>Cloud Persistence</a:t>
             </a:r>
           </a:p>
         </p:txBody>
@@ -7941,8 +7397,8 @@
         </p:nvSpPr>
         <p:spPr>
           <a:xfrm>
-            <a:off x="9235440" y="2103120"/>
-            <a:ext cx="2240280" cy="3931920"/>
+            <a:off x="9235440" y="1920240"/>
+            <a:ext cx="2240280" cy="4114800"/>
           </a:xfrm>
           <a:prstGeom prst="rect">
             <a:avLst/>
@@ -7964,7 +7420,7 @@
               </a:defRPr>
             </a:pPr>
             <a:r>
-              <a:t>• MongoDB Atlas Cloud Cluster</a:t>
+              <a:t>• MongoDB Atlas Cluster</a:t>
             </a:r>
           </a:p>
           <a:p>
@@ -7976,7 +7432,7 @@
               </a:defRPr>
             </a:pPr>
             <a:r>
-              <a:t>• Mongoose Schemas &amp; Models</a:t>
+              <a:t>• Mongoose Schema Validation</a:t>
             </a:r>
           </a:p>
           <a:p>
@@ -8000,7 +7456,7 @@
               </a:defRPr>
             </a:pPr>
             <a:r>
-              <a:t>• Immutable Transaction Ledger</a:t>
+              <a:t>• Immutable Transaction log</a:t>
             </a:r>
           </a:p>
           <a:p>
@@ -8012,7 +7468,7 @@
               </a:defRPr>
             </a:pPr>
             <a:r>
-              <a:t>• High fault-tolerant auto reconnect</a:t>
+              <a:t>• Fault-tolerant Dual Sync</a:t>
             </a:r>
           </a:p>
         </p:txBody>
@@ -8022,6 +7478,9 @@
   <p:clrMapOvr>
     <a:masterClrMapping/>
   </p:clrMapOvr>
+  <p:transition spd="fast">
+    <p:wipe dir="r"/>
+  </p:transition>
 </p:sld>
 </file>
 
@@ -8050,7 +7509,7 @@
             <a:avLst/>
           </a:prstGeom>
           <a:solidFill>
-            <a:srgbClr val="0B132B"/>
+            <a:srgbClr val="070B16"/>
           </a:solidFill>
           <a:ln>
             <a:noFill/>
@@ -8086,7 +7545,7 @@
         </p:nvSpPr>
         <p:spPr>
           <a:xfrm>
-            <a:off x="731520" y="365760"/>
+            <a:off x="731520" y="347472"/>
             <a:ext cx="10728655" cy="36576"/>
           </a:xfrm>
           <a:prstGeom prst="rect">
@@ -8129,8 +7588,8 @@
         </p:nvSpPr>
         <p:spPr>
           <a:xfrm>
-            <a:off x="731520" y="438912"/>
-            <a:ext cx="10728655" cy="320040"/>
+            <a:off x="731520" y="411480"/>
+            <a:ext cx="10728655" cy="274320"/>
           </a:xfrm>
           <a:prstGeom prst="rect">
             <a:avLst/>
@@ -8152,7 +7611,7 @@
               </a:defRPr>
             </a:pPr>
             <a:r>
-              <a:t>TEAM ORGANIZATION &amp; SYLLABUS MAPPING</a:t>
+              <a:t>5-STUDENT WORK BREAKDOWN STRUCTURE</a:t>
             </a:r>
           </a:p>
         </p:txBody>
@@ -8165,8 +7624,8 @@
         </p:nvSpPr>
         <p:spPr>
           <a:xfrm>
-            <a:off x="731520" y="713232"/>
-            <a:ext cx="10728655" cy="640080"/>
+            <a:off x="731520" y="685800"/>
+            <a:ext cx="10728655" cy="594360"/>
           </a:xfrm>
           <a:prstGeom prst="rect">
             <a:avLst/>
@@ -8180,7 +7639,7 @@
           <a:lstStyle/>
           <a:p>
             <a:pPr>
-              <a:defRPr sz="2600" b="1">
+              <a:defRPr sz="2400" b="1">
                 <a:solidFill>
                   <a:srgbClr val="F8FAFC"/>
                 </a:solidFill>
@@ -8188,7 +7647,7 @@
               </a:defRPr>
             </a:pPr>
             <a:r>
-              <a:t>Project Modular Division Across 5 Students</a:t>
+              <a:t>Team Division &amp; Student Responsibilities Matrix</a:t>
             </a:r>
           </a:p>
         </p:txBody>
@@ -8202,8 +7661,8 @@
           <p:nvPr/>
         </p:nvGraphicFramePr>
         <p:xfrm>
-          <a:off x="731520" y="1463040"/>
-          <a:ext cx="10728655" cy="4754880"/>
+          <a:off x="731520" y="1371600"/>
+          <a:ext cx="10728655" cy="4937760"/>
         </p:xfrm>
         <a:graphic>
           <a:graphicData uri="http://schemas.openxmlformats.org/drawingml/2006/table">
@@ -8212,26 +7671,26 @@
                 <a:tableStyleId>{5C22544A-7EE6-4342-B048-85BDC9FD1C3A}</a:tableStyleId>
               </a:tblPr>
               <a:tblGrid>
-                <a:gridCol w="1463040"/>
-                <a:gridCol w="2560320"/>
+                <a:gridCol w="1828800"/>
+                <a:gridCol w="2468880"/>
                 <a:gridCol w="2286000"/>
-                <a:gridCol w="4419295"/>
+                <a:gridCol w="4144975"/>
               </a:tblGrid>
-              <a:tr h="792480">
+              <a:tr h="822960">
                 <a:tc>
                   <a:txBody>
                     <a:bodyPr/>
                     <a:lstStyle/>
                     <a:p>
                       <a:pPr>
-                        <a:defRPr b="1" sz="1300">
+                        <a:defRPr b="1" sz="1200">
                           <a:solidFill>
                             <a:srgbClr val="F8FAFC"/>
                           </a:solidFill>
                         </a:defRPr>
                       </a:pPr>
                       <a:r>
-                        <a:t>Member</a:t>
+                        <a:t>Member Name</a:t>
                       </a:r>
                     </a:p>
                   </a:txBody>
@@ -8247,7 +7706,7 @@
                     <a:lstStyle/>
                     <a:p>
                       <a:pPr>
-                        <a:defRPr b="1" sz="1300">
+                        <a:defRPr b="1" sz="1200">
                           <a:solidFill>
                             <a:srgbClr val="F8FAFC"/>
                           </a:solidFill>
@@ -8270,7 +7729,7 @@
                     <a:lstStyle/>
                     <a:p>
                       <a:pPr>
-                        <a:defRPr b="1" sz="1300">
+                        <a:defRPr b="1" sz="1200">
                           <a:solidFill>
                             <a:srgbClr val="F8FAFC"/>
                           </a:solidFill>
@@ -8293,7 +7752,7 @@
                     <a:lstStyle/>
                     <a:p>
                       <a:pPr>
-                        <a:defRPr b="1" sz="1300">
+                        <a:defRPr b="1" sz="1200">
                           <a:solidFill>
                             <a:srgbClr val="F8FAFC"/>
                           </a:solidFill>
@@ -8311,7 +7770,7 @@
                   </a:tcPr>
                 </a:tc>
               </a:tr>
-              <a:tr h="792480">
+              <a:tr h="822960">
                 <a:tc>
                   <a:txBody>
                     <a:bodyPr/>
@@ -8325,13 +7784,17 @@
                         </a:defRPr>
                       </a:pPr>
                       <a:r>
-                        <a:t>Student 1</a:t>
+                        <a:t>Manikanta</a:t>
+                      </a:r>
+                      <a:br/>
+                      <a:r>
+                        <a:t>(Student 1)</a:t>
                       </a:r>
                     </a:p>
                   </a:txBody>
                   <a:tcPr>
                     <a:solidFill>
-                      <a:srgbClr val="1C2541"/>
+                      <a:srgbClr val="10182C"/>
                     </a:solidFill>
                   </a:tcPr>
                 </a:tc>
@@ -8348,13 +7811,17 @@
                         </a:defRPr>
                       </a:pPr>
                       <a:r>
-                        <a:t>Account Management &amp; Records</a:t>
+                        <a:t>Account Management &amp;</a:t>
+                      </a:r>
+                      <a:br/>
+                      <a:r>
+                        <a:t>Composite Structures</a:t>
                       </a:r>
                     </a:p>
                   </a:txBody>
                   <a:tcPr>
                     <a:solidFill>
-                      <a:srgbClr val="1C2541"/>
+                      <a:srgbClr val="10182C"/>
                     </a:solidFill>
                   </a:tcPr>
                 </a:tc>
@@ -8375,13 +7842,13 @@
                       </a:r>
                       <a:br/>
                       <a:r>
-                        <a:t>Composite Structs &amp; Arrays</a:t>
+                        <a:t>Struct Nesting &amp; Vectors</a:t>
                       </a:r>
                     </a:p>
                   </a:txBody>
                   <a:tcPr>
                     <a:solidFill>
-                      <a:srgbClr val="1C2541"/>
+                      <a:srgbClr val="10182C"/>
                     </a:solidFill>
                   </a:tcPr>
                 </a:tc>
@@ -8404,12 +7871,12 @@
                   </a:txBody>
                   <a:tcPr>
                     <a:solidFill>
-                      <a:srgbClr val="1C2541"/>
+                      <a:srgbClr val="10182C"/>
                     </a:solidFill>
                   </a:tcPr>
                 </a:tc>
               </a:tr>
-              <a:tr h="792480">
+              <a:tr h="822960">
                 <a:tc>
                   <a:txBody>
                     <a:bodyPr/>
@@ -8423,13 +7890,17 @@
                         </a:defRPr>
                       </a:pPr>
                       <a:r>
-                        <a:t>Student 2</a:t>
+                        <a:t>Lokesh</a:t>
+                      </a:r>
+                      <a:br/>
+                      <a:r>
+                        <a:t>(Student 2)</a:t>
                       </a:r>
                     </a:p>
                   </a:txBody>
                   <a:tcPr>
                     <a:solidFill>
-                      <a:srgbClr val="263255"/>
+                      <a:srgbClr val="1A2644"/>
                     </a:solidFill>
                   </a:tcPr>
                 </a:tc>
@@ -8446,13 +7917,17 @@
                         </a:defRPr>
                       </a:pPr>
                       <a:r>
-                        <a:t>Transactions &amp; Search Engines</a:t>
+                        <a:t>Financial Transactions &amp;</a:t>
+                      </a:r>
+                      <a:br/>
+                      <a:r>
+                        <a:t>Search Algorithms</a:t>
                       </a:r>
                     </a:p>
                   </a:txBody>
                   <a:tcPr>
                     <a:solidFill>
-                      <a:srgbClr val="263255"/>
+                      <a:srgbClr val="1A2644"/>
                     </a:solidFill>
                   </a:tcPr>
                 </a:tc>
@@ -8479,7 +7954,7 @@
                   </a:txBody>
                   <a:tcPr>
                     <a:solidFill>
-                      <a:srgbClr val="263255"/>
+                      <a:srgbClr val="1A2644"/>
                     </a:solidFill>
                   </a:tcPr>
                 </a:tc>
@@ -8502,12 +7977,12 @@
                   </a:txBody>
                   <a:tcPr>
                     <a:solidFill>
-                      <a:srgbClr val="263255"/>
+                      <a:srgbClr val="1A2644"/>
                     </a:solidFill>
                   </a:tcPr>
                 </a:tc>
               </a:tr>
-              <a:tr h="792480">
+              <a:tr h="822960">
                 <a:tc>
                   <a:txBody>
                     <a:bodyPr/>
@@ -8521,13 +7996,17 @@
                         </a:defRPr>
                       </a:pPr>
                       <a:r>
-                        <a:t>Student 3</a:t>
+                        <a:t>Anil</a:t>
+                      </a:r>
+                      <a:br/>
+                      <a:r>
+                        <a:t>(Student 3)</a:t>
                       </a:r>
                     </a:p>
                   </a:txBody>
                   <a:tcPr>
                     <a:solidFill>
-                      <a:srgbClr val="1C2541"/>
+                      <a:srgbClr val="10182C"/>
                     </a:solidFill>
                   </a:tcPr>
                 </a:tc>
@@ -8544,13 +8023,17 @@
                         </a:defRPr>
                       </a:pPr>
                       <a:r>
-                        <a:t>Sorting &amp; 2D Matrix Algebra</a:t>
+                        <a:t>Sorting Algorithms &amp;</a:t>
+                      </a:r>
+                      <a:br/>
+                      <a:r>
+                        <a:t>2D Matrix Algebra</a:t>
                       </a:r>
                     </a:p>
                   </a:txBody>
                   <a:tcPr>
                     <a:solidFill>
-                      <a:srgbClr val="1C2541"/>
+                      <a:srgbClr val="10182C"/>
                     </a:solidFill>
                   </a:tcPr>
                 </a:tc>
@@ -8571,13 +8054,13 @@
                       </a:r>
                       <a:br/>
                       <a:r>
-                        <a:t>Insertion Sort &amp; 2D Arrays</a:t>
+                        <a:t>Insertion Sort &amp; 2D Array</a:t>
                       </a:r>
                     </a:p>
                   </a:txBody>
                   <a:tcPr>
                     <a:solidFill>
-                      <a:srgbClr val="1C2541"/>
+                      <a:srgbClr val="10182C"/>
                     </a:solidFill>
                   </a:tcPr>
                 </a:tc>
@@ -8600,12 +8083,12 @@
                   </a:txBody>
                   <a:tcPr>
                     <a:solidFill>
-                      <a:srgbClr val="1C2541"/>
+                      <a:srgbClr val="10182C"/>
                     </a:solidFill>
                   </a:tcPr>
                 </a:tc>
               </a:tr>
-              <a:tr h="792480">
+              <a:tr h="822960">
                 <a:tc>
                   <a:txBody>
                     <a:bodyPr/>
@@ -8619,13 +8102,17 @@
                         </a:defRPr>
                       </a:pPr>
                       <a:r>
-                        <a:t>Student 4</a:t>
+                        <a:t>Shishira</a:t>
+                      </a:r>
+                      <a:br/>
+                      <a:r>
+                        <a:t>(Student 4)</a:t>
                       </a:r>
                     </a:p>
                   </a:txBody>
                   <a:tcPr>
                     <a:solidFill>
-                      <a:srgbClr val="263255"/>
+                      <a:srgbClr val="1A2644"/>
                     </a:solidFill>
                   </a:tcPr>
                 </a:tc>
@@ -8642,13 +8129,17 @@
                         </a:defRPr>
                       </a:pPr>
                       <a:r>
-                        <a:t>String Logic &amp; Stack ADT</a:t>
+                        <a:t>String Processing &amp;</a:t>
+                      </a:r>
+                      <a:br/>
+                      <a:r>
+                        <a:t>Stack ADT (LIFO)</a:t>
                       </a:r>
                     </a:p>
                   </a:txBody>
                   <a:tcPr>
                     <a:solidFill>
-                      <a:srgbClr val="263255"/>
+                      <a:srgbClr val="1A2644"/>
                     </a:solidFill>
                   </a:tcPr>
                 </a:tc>
@@ -8675,7 +8166,7 @@
                   </a:txBody>
                   <a:tcPr>
                     <a:solidFill>
-                      <a:srgbClr val="263255"/>
+                      <a:srgbClr val="1A2644"/>
                     </a:solidFill>
                   </a:tcPr>
                 </a:tc>
@@ -8692,18 +8183,18 @@
                         </a:defRPr>
                       </a:pPr>
                       <a:r>
-                        <a:t>reverseString(), countCharacterFrequency(), searchPattern(), Stack ADT &amp; Parenthesis Match</a:t>
+                        <a:t>reverseString(), countCharacterFrequency(), searchPattern(), Stack ADT &amp; Parenthesis Check</a:t>
                       </a:r>
                     </a:p>
                   </a:txBody>
                   <a:tcPr>
                     <a:solidFill>
-                      <a:srgbClr val="263255"/>
+                      <a:srgbClr val="1A2644"/>
                     </a:solidFill>
                   </a:tcPr>
                 </a:tc>
               </a:tr>
-              <a:tr h="792480">
+              <a:tr h="822960">
                 <a:tc>
                   <a:txBody>
                     <a:bodyPr/>
@@ -8717,13 +8208,17 @@
                         </a:defRPr>
                       </a:pPr>
                       <a:r>
-                        <a:t>Student 5</a:t>
+                        <a:t>Chathwik</a:t>
+                      </a:r>
+                      <a:br/>
+                      <a:r>
+                        <a:t>(Student 5)</a:t>
                       </a:r>
                     </a:p>
                   </a:txBody>
                   <a:tcPr>
                     <a:solidFill>
-                      <a:srgbClr val="1C2541"/>
+                      <a:srgbClr val="10182C"/>
                     </a:solidFill>
                   </a:tcPr>
                 </a:tc>
@@ -8740,13 +8235,17 @@
                         </a:defRPr>
                       </a:pPr>
                       <a:r>
-                        <a:t>Queue ADT, STL &amp; Main Driver</a:t>
+                        <a:t>Queue ADT, STL &amp;</a:t>
+                      </a:r>
+                      <a:br/>
+                      <a:r>
+                        <a:t>Driver Controller</a:t>
                       </a:r>
                     </a:p>
                   </a:txBody>
                   <a:tcPr>
                     <a:solidFill>
-                      <a:srgbClr val="1C2541"/>
+                      <a:srgbClr val="10182C"/>
                     </a:solidFill>
                   </a:tcPr>
                 </a:tc>
@@ -8773,7 +8272,7 @@
                   </a:txBody>
                   <a:tcPr>
                     <a:solidFill>
-                      <a:srgbClr val="1C2541"/>
+                      <a:srgbClr val="10182C"/>
                     </a:solidFill>
                   </a:tcPr>
                 </a:tc>
@@ -8796,7 +8295,7 @@
                   </a:txBody>
                   <a:tcPr>
                     <a:solidFill>
-                      <a:srgbClr val="1C2541"/>
+                      <a:srgbClr val="10182C"/>
                     </a:solidFill>
                   </a:tcPr>
                 </a:tc>
@@ -8810,6 +8309,9 @@
   <p:clrMapOvr>
     <a:masterClrMapping/>
   </p:clrMapOvr>
+  <p:transition spd="fast">
+    <p:cover dir="l"/>
+  </p:transition>
 </p:sld>
 </file>
 
@@ -8838,7 +8340,7 @@
             <a:avLst/>
           </a:prstGeom>
           <a:solidFill>
-            <a:srgbClr val="0B132B"/>
+            <a:srgbClr val="070B16"/>
           </a:solidFill>
           <a:ln>
             <a:noFill/>
@@ -8874,7 +8376,7 @@
         </p:nvSpPr>
         <p:spPr>
           <a:xfrm>
-            <a:off x="731520" y="365760"/>
+            <a:off x="731520" y="347472"/>
             <a:ext cx="10728655" cy="36576"/>
           </a:xfrm>
           <a:prstGeom prst="rect">
@@ -8917,8 +8419,8 @@
         </p:nvSpPr>
         <p:spPr>
           <a:xfrm>
-            <a:off x="731520" y="438912"/>
-            <a:ext cx="10728655" cy="320040"/>
+            <a:off x="731520" y="411480"/>
+            <a:ext cx="10728655" cy="274320"/>
           </a:xfrm>
           <a:prstGeom prst="rect">
             <a:avLst/>
@@ -8953,8 +8455,8 @@
         </p:nvSpPr>
         <p:spPr>
           <a:xfrm>
-            <a:off x="731520" y="713232"/>
-            <a:ext cx="10728655" cy="640080"/>
+            <a:off x="731520" y="685800"/>
+            <a:ext cx="10728655" cy="594360"/>
           </a:xfrm>
           <a:prstGeom prst="rect">
             <a:avLst/>
@@ -8968,7 +8470,7 @@
           <a:lstStyle/>
           <a:p>
             <a:pPr>
-              <a:defRPr sz="2600" b="1">
+              <a:defRPr sz="2400" b="1">
                 <a:solidFill>
                   <a:srgbClr val="F8FAFC"/>
                 </a:solidFill>
@@ -8976,7 +8478,7 @@
               </a:defRPr>
             </a:pPr>
             <a:r>
-              <a:t>Student 1: Account Management &amp; Data Structures</a:t>
+              <a:t>Student 1: Manikanta — Account Management &amp; Structs</a:t>
             </a:r>
           </a:p>
         </p:txBody>
@@ -8989,18 +8491,18 @@
         </p:nvSpPr>
         <p:spPr>
           <a:xfrm>
-            <a:off x="731520" y="1463040"/>
-            <a:ext cx="5120640" cy="4846320"/>
+            <a:off x="731520" y="1371600"/>
+            <a:ext cx="5120640" cy="4937760"/>
           </a:xfrm>
           <a:prstGeom prst="roundRect">
             <a:avLst/>
           </a:prstGeom>
           <a:solidFill>
-            <a:srgbClr val="1C2541"/>
+            <a:srgbClr val="10182C"/>
           </a:solidFill>
           <a:ln w="19050">
             <a:solidFill>
-              <a:srgbClr val="263255"/>
+              <a:srgbClr val="1A2644"/>
             </a:solidFill>
           </a:ln>
         </p:spPr>
@@ -9034,7 +8536,7 @@
         </p:nvSpPr>
         <p:spPr>
           <a:xfrm>
-            <a:off x="914400" y="1600200"/>
+            <a:off x="914400" y="1508760"/>
             <a:ext cx="4754880" cy="365760"/>
           </a:xfrm>
           <a:prstGeom prst="rect">
@@ -9057,7 +8559,7 @@
               </a:defRPr>
             </a:pPr>
             <a:r>
-              <a:t>Core Data Structures &amp; Nesting</a:t>
+              <a:t>Core Composite Structures</a:t>
             </a:r>
           </a:p>
         </p:txBody>
@@ -9070,8 +8572,8 @@
         </p:nvSpPr>
         <p:spPr>
           <a:xfrm>
-            <a:off x="914400" y="2011680"/>
-            <a:ext cx="4754880" cy="4114800"/>
+            <a:off x="914400" y="1920240"/>
+            <a:ext cx="4754880" cy="4206240"/>
           </a:xfrm>
           <a:prstGeom prst="rect">
             <a:avLst/>
@@ -9091,7 +8593,7 @@
                   <a:srgbClr val="F8FAFC"/>
                 </a:solidFill>
               </a:rPr>
-              <a:t>• Composite Entity Design: </a:t>
+              <a:t>• Composite Entity Architecture: </a:t>
             </a:r>
             <a:r>
               <a:rPr sz="1300">
@@ -9099,7 +8601,7 @@
                   <a:srgbClr val="94A3B8"/>
                 </a:solidFill>
               </a:rPr>
-              <a:t>Defined `Customer` struct combining primitive types with nested `Date` (day, month, year) and `Address` (city, state, pincode) structures.</a:t>
+              <a:t>Defined `Customer` struct combining primitive types with nested `Date` (day, month, year) and `Address` (city, state, pincode) structs.</a:t>
             </a:r>
           </a:p>
           <a:p>
@@ -9109,7 +8611,7 @@
                   <a:srgbClr val="F8FAFC"/>
                 </a:solidFill>
               </a:rPr>
-              <a:t>• Audit Log Entity: </a:t>
+              <a:t>• Audit Record Entity: </a:t>
             </a:r>
             <a:r>
               <a:rPr sz="1300">
@@ -9117,7 +8619,7 @@
                   <a:srgbClr val="94A3B8"/>
                 </a:solidFill>
               </a:rPr>
-              <a:t>Designed `Transaction` struct recording `txnId`, `accountNo`, `type` (OPENING, DEPOSIT, WITHDRAW), `amount`, and `balanceAfter`.</a:t>
+              <a:t>Engineered `Transaction` struct recording `txnId`, `accountNo`, `type` (OPENING, DEPOSIT, WITHDRAW), `amount`, and `balanceAfter`.</a:t>
             </a:r>
           </a:p>
           <a:p>
@@ -9127,7 +8629,7 @@
                   <a:srgbClr val="F8FAFC"/>
                 </a:solidFill>
               </a:rPr>
-              <a:t>• Global Repository: </a:t>
+              <a:t>• Global Data Storage: </a:t>
             </a:r>
             <a:r>
               <a:rPr sz="1300">
@@ -9135,7 +8637,7 @@
                   <a:srgbClr val="94A3B8"/>
                 </a:solidFill>
               </a:rPr>
-              <a:t>Initialized and manages master in-memory collections `customerList` and `transactionList` vectors with auto-increment IDs.</a:t>
+              <a:t>Maintains master collections `customerList` and `transactionList` vectors with auto-increment ID counters.</a:t>
             </a:r>
           </a:p>
         </p:txBody>
@@ -9148,18 +8650,18 @@
         </p:nvSpPr>
         <p:spPr>
           <a:xfrm>
-            <a:off x="6309360" y="1463040"/>
-            <a:ext cx="5120640" cy="4846320"/>
+            <a:off x="6309360" y="1371600"/>
+            <a:ext cx="5120640" cy="4937760"/>
           </a:xfrm>
           <a:prstGeom prst="roundRect">
             <a:avLst/>
           </a:prstGeom>
           <a:solidFill>
-            <a:srgbClr val="1C2541"/>
+            <a:srgbClr val="10182C"/>
           </a:solidFill>
           <a:ln w="19050">
             <a:solidFill>
-              <a:srgbClr val="263255"/>
+              <a:srgbClr val="1A2644"/>
             </a:solidFill>
           </a:ln>
         </p:spPr>
@@ -9193,7 +8695,7 @@
         </p:nvSpPr>
         <p:spPr>
           <a:xfrm>
-            <a:off x="6492240" y="1600200"/>
+            <a:off x="6492240" y="1508760"/>
             <a:ext cx="4754880" cy="365760"/>
           </a:xfrm>
           <a:prstGeom prst="rect">
@@ -9216,7 +8718,7 @@
               </a:defRPr>
             </a:pPr>
             <a:r>
-              <a:t>Key Functions &amp; Responsibilities</a:t>
+              <a:t>Key Functions &amp; Implementations</a:t>
             </a:r>
           </a:p>
         </p:txBody>
@@ -9229,8 +8731,8 @@
         </p:nvSpPr>
         <p:spPr>
           <a:xfrm>
-            <a:off x="6492240" y="2011680"/>
-            <a:ext cx="4754880" cy="4114800"/>
+            <a:off x="6492240" y="1920240"/>
+            <a:ext cx="4754880" cy="4206240"/>
           </a:xfrm>
           <a:prstGeom prst="rect">
             <a:avLst/>
@@ -9258,7 +8760,7 @@
                   <a:srgbClr val="94A3B8"/>
                 </a:solidFill>
               </a:rPr>
-              <a:t>Pre-populates system with 6 benchmark customer records and initial opening audit logs for instant demo readiness.</a:t>
+              <a:t>Pre-populates the database with 6 benchmark customer records and initial transaction audit logs for instant demonstration.</a:t>
             </a:r>
           </a:p>
           <a:p>
@@ -9276,7 +8778,7 @@
                   <a:srgbClr val="94A3B8"/>
                 </a:solidFill>
               </a:rPr>
-              <a:t>Generates formatted tabular console reports using `&lt;iomanip&gt;` (`setw`, `left`, `right`, `fixed`, `setprecision`).</a:t>
+              <a:t>Generates formatted tabular reports using `&lt;iomanip&gt;` (`setw`, `left`, `right`, `fixed`, `setprecision`).</a:t>
             </a:r>
           </a:p>
           <a:p>
@@ -9294,7 +8796,7 @@
                   <a:srgbClr val="94A3B8"/>
                 </a:solidFill>
               </a:rPr>
-              <a:t>Collects new account details, enforces ₹500 minimum opening deposit for SAVINGS accounts, verifies phone uniqueness, and logs opening transaction.</a:t>
+              <a:t>Enforces strict input validation: minimum ₹500 initial deposit for SAVINGS accounts, verifies phone uniqueness, and auto-journals the opening transaction.</a:t>
             </a:r>
           </a:p>
         </p:txBody>
@@ -9304,6 +8806,9 @@
   <p:clrMapOvr>
     <a:masterClrMapping/>
   </p:clrMapOvr>
+  <p:transition spd="fast">
+    <p:push dir="l"/>
+  </p:transition>
 </p:sld>
 </file>
 
@@ -9332,7 +8837,7 @@
             <a:avLst/>
           </a:prstGeom>
           <a:solidFill>
-            <a:srgbClr val="0B132B"/>
+            <a:srgbClr val="070B16"/>
           </a:solidFill>
           <a:ln>
             <a:noFill/>
@@ -9368,7 +8873,7 @@
         </p:nvSpPr>
         <p:spPr>
           <a:xfrm>
-            <a:off x="731520" y="365760"/>
+            <a:off x="731520" y="347472"/>
             <a:ext cx="10728655" cy="36576"/>
           </a:xfrm>
           <a:prstGeom prst="rect">
@@ -9411,8 +8916,8 @@
         </p:nvSpPr>
         <p:spPr>
           <a:xfrm>
-            <a:off x="731520" y="438912"/>
-            <a:ext cx="10728655" cy="320040"/>
+            <a:off x="731520" y="411480"/>
+            <a:ext cx="10728655" cy="274320"/>
           </a:xfrm>
           <a:prstGeom prst="rect">
             <a:avLst/>
@@ -9447,8 +8952,8 @@
         </p:nvSpPr>
         <p:spPr>
           <a:xfrm>
-            <a:off x="731520" y="713232"/>
-            <a:ext cx="10728655" cy="640080"/>
+            <a:off x="731520" y="685800"/>
+            <a:ext cx="10728655" cy="594360"/>
           </a:xfrm>
           <a:prstGeom prst="rect">
             <a:avLst/>
@@ -9462,7 +8967,7 @@
           <a:lstStyle/>
           <a:p>
             <a:pPr>
-              <a:defRPr sz="2600" b="1">
+              <a:defRPr sz="2400" b="1">
                 <a:solidFill>
                   <a:srgbClr val="F8FAFC"/>
                 </a:solidFill>
@@ -9470,7 +8975,7 @@
               </a:defRPr>
             </a:pPr>
             <a:r>
-              <a:t>Student 2: Financial Transactions &amp; Search Algorithms</a:t>
+              <a:t>Student 2: Lokesh — Search Algorithms &amp; Transactions</a:t>
             </a:r>
           </a:p>
         </p:txBody>
@@ -9483,18 +8988,18 @@
         </p:nvSpPr>
         <p:spPr>
           <a:xfrm>
-            <a:off x="731520" y="1463040"/>
-            <a:ext cx="5120640" cy="4846320"/>
+            <a:off x="731520" y="1371600"/>
+            <a:ext cx="5120640" cy="4937760"/>
           </a:xfrm>
           <a:prstGeom prst="roundRect">
             <a:avLst/>
           </a:prstGeom>
           <a:solidFill>
-            <a:srgbClr val="1C2541"/>
+            <a:srgbClr val="10182C"/>
           </a:solidFill>
           <a:ln w="19050">
             <a:solidFill>
-              <a:srgbClr val="263255"/>
+              <a:srgbClr val="1A2644"/>
             </a:solidFill>
           </a:ln>
         </p:spPr>
@@ -9528,7 +9033,7 @@
         </p:nvSpPr>
         <p:spPr>
           <a:xfrm>
-            <a:off x="914400" y="1600200"/>
+            <a:off x="914400" y="1508760"/>
             <a:ext cx="4754880" cy="365760"/>
           </a:xfrm>
           <a:prstGeom prst="rect">
@@ -9564,8 +9069,8 @@
         </p:nvSpPr>
         <p:spPr>
           <a:xfrm>
-            <a:off x="914400" y="2011680"/>
-            <a:ext cx="4754880" cy="4114800"/>
+            <a:off x="914400" y="1920240"/>
+            <a:ext cx="4754880" cy="4206240"/>
           </a:xfrm>
           <a:prstGeom prst="rect">
             <a:avLst/>
@@ -9593,7 +9098,7 @@
                   <a:srgbClr val="94A3B8"/>
                 </a:solidFill>
               </a:rPr>
-              <a:t>Sequential scan of `customerList` to locate accounts by 10-digit phone number. Time Complexity: O(n), Space Complexity: O(1).</a:t>
+              <a:t>Performs sequential scan across unsorted `phone` records. Time Complexity: O(n), Space Complexity: O(1). Used for duplicate phone checks.</a:t>
             </a:r>
           </a:p>
           <a:p>
@@ -9611,7 +9116,7 @@
                   <a:srgbClr val="94A3B8"/>
                 </a:solidFill>
               </a:rPr>
-              <a:t>Divide-and-conquer search algorithm on sorted `accountNo`. Calculates `mid = low + (high - low) / 2` to eliminate half the search space per iteration. Time Complexity: O(log n), Space Complexity: O(1).</a:t>
+              <a:t>Divide-and-conquer search on sorted `accountNo`. Computes `mid = low + (high - low) / 2` to eliminate half the search space per iteration. Time Complexity: O(log n), Space: O(1).</a:t>
             </a:r>
           </a:p>
           <a:p>
@@ -9621,7 +9126,7 @@
                   <a:srgbClr val="F8FAFC"/>
                 </a:solidFill>
               </a:rPr>
-              <a:t>• Algorithmic Efficiency: </a:t>
+              <a:t>• Lookup Efficiency: </a:t>
             </a:r>
             <a:r>
               <a:rPr sz="1300">
@@ -9629,7 +9134,7 @@
                   <a:srgbClr val="94A3B8"/>
                 </a:solidFill>
               </a:rPr>
-              <a:t>Provides rapid retrieval even as account records grow to thousands of customers.</a:t>
+              <a:t>Guarantees logarithmic response time even with large account volumes.</a:t>
             </a:r>
           </a:p>
         </p:txBody>
@@ -9642,18 +9147,18 @@
         </p:nvSpPr>
         <p:spPr>
           <a:xfrm>
-            <a:off x="6309360" y="1463040"/>
-            <a:ext cx="5120640" cy="4846320"/>
+            <a:off x="6309360" y="1371600"/>
+            <a:ext cx="5120640" cy="4937760"/>
           </a:xfrm>
           <a:prstGeom prst="roundRect">
             <a:avLst/>
           </a:prstGeom>
           <a:solidFill>
-            <a:srgbClr val="1C2541"/>
+            <a:srgbClr val="10182C"/>
           </a:solidFill>
           <a:ln w="19050">
             <a:solidFill>
-              <a:srgbClr val="263255"/>
+              <a:srgbClr val="1A2644"/>
             </a:solidFill>
           </a:ln>
         </p:spPr>
@@ -9687,7 +9192,7 @@
         </p:nvSpPr>
         <p:spPr>
           <a:xfrm>
-            <a:off x="6492240" y="1600200"/>
+            <a:off x="6492240" y="1508760"/>
             <a:ext cx="4754880" cy="365760"/>
           </a:xfrm>
           <a:prstGeom prst="rect">
@@ -9710,7 +9215,7 @@
               </a:defRPr>
             </a:pPr>
             <a:r>
-              <a:t>Transaction Management &amp; Audit Trail</a:t>
+              <a:t>Financial Transactions &amp; Audit Trail</a:t>
             </a:r>
           </a:p>
         </p:txBody>
@@ -9723,8 +9228,8 @@
         </p:nvSpPr>
         <p:spPr>
           <a:xfrm>
-            <a:off x="6492240" y="2011680"/>
-            <a:ext cx="4754880" cy="4114800"/>
+            <a:off x="6492240" y="1920240"/>
+            <a:ext cx="4754880" cy="4206240"/>
           </a:xfrm>
           <a:prstGeom prst="rect">
             <a:avLst/>
@@ -9752,7 +9257,7 @@
                   <a:srgbClr val="94A3B8"/>
                 </a:solidFill>
               </a:rPr>
-              <a:t>Uses Binary Search to find account, validates positive amount, updates balance, and appends audit log to `transactionList`.</a:t>
+              <a:t>Locates account via Binary Search, increases balance, and journals transaction log to `transactionList`.</a:t>
             </a:r>
           </a:p>
           <a:p>
@@ -9770,7 +9275,7 @@
                   <a:srgbClr val="94A3B8"/>
                 </a:solidFill>
               </a:rPr>
-              <a:t>Enforces strict business rules: rejects overdrafts and prevents SAVINGS balance from falling below ₹500.00.</a:t>
+              <a:t>Validates positive amount, overdraft protection, and enforces that SAVINGS account balance cannot fall below ₹500.00.</a:t>
             </a:r>
           </a:p>
           <a:p>
@@ -9788,7 +9293,7 @@
                   <a:srgbClr val="94A3B8"/>
                 </a:solidFill>
               </a:rPr>
-              <a:t>Displays chronological ledger of all opening deposits, deposits, and withdrawals for any requested account number.</a:t>
+              <a:t>Displays chronological transaction ledger for any account with timestamp, amount, and updated balance.</a:t>
             </a:r>
           </a:p>
         </p:txBody>
@@ -9798,6 +9303,9 @@
   <p:clrMapOvr>
     <a:masterClrMapping/>
   </p:clrMapOvr>
+  <p:transition spd="fast">
+    <p:push dir="l"/>
+  </p:transition>
 </p:sld>
 </file>
 
@@ -9826,7 +9334,7 @@
             <a:avLst/>
           </a:prstGeom>
           <a:solidFill>
-            <a:srgbClr val="0B132B"/>
+            <a:srgbClr val="070B16"/>
           </a:solidFill>
           <a:ln>
             <a:noFill/>
@@ -9862,7 +9370,7 @@
         </p:nvSpPr>
         <p:spPr>
           <a:xfrm>
-            <a:off x="731520" y="365760"/>
+            <a:off x="731520" y="347472"/>
             <a:ext cx="10728655" cy="36576"/>
           </a:xfrm>
           <a:prstGeom prst="rect">
@@ -9905,8 +9413,8 @@
         </p:nvSpPr>
         <p:spPr>
           <a:xfrm>
-            <a:off x="731520" y="438912"/>
-            <a:ext cx="10728655" cy="320040"/>
+            <a:off x="731520" y="411480"/>
+            <a:ext cx="10728655" cy="274320"/>
           </a:xfrm>
           <a:prstGeom prst="rect">
             <a:avLst/>
@@ -9941,8 +9449,8 @@
         </p:nvSpPr>
         <p:spPr>
           <a:xfrm>
-            <a:off x="731520" y="713232"/>
-            <a:ext cx="10728655" cy="640080"/>
+            <a:off x="731520" y="685800"/>
+            <a:ext cx="10728655" cy="594360"/>
           </a:xfrm>
           <a:prstGeom prst="rect">
             <a:avLst/>
@@ -9956,7 +9464,7 @@
           <a:lstStyle/>
           <a:p>
             <a:pPr>
-              <a:defRPr sz="2600" b="1">
+              <a:defRPr sz="2400" b="1">
                 <a:solidFill>
                   <a:srgbClr val="F8FAFC"/>
                 </a:solidFill>
@@ -9964,7 +9472,7 @@
               </a:defRPr>
             </a:pPr>
             <a:r>
-              <a:t>Student 3: Sorting Algorithms &amp; 2D Matrix Operations</a:t>
+              <a:t>Student 3: Anil — Sorting Algorithms &amp; 2D Matrix Math</a:t>
             </a:r>
           </a:p>
         </p:txBody>
@@ -9977,18 +9485,18 @@
         </p:nvSpPr>
         <p:spPr>
           <a:xfrm>
-            <a:off x="731520" y="1463040"/>
-            <a:ext cx="5120640" cy="4846320"/>
+            <a:off x="731520" y="1371600"/>
+            <a:ext cx="5120640" cy="4937760"/>
           </a:xfrm>
           <a:prstGeom prst="roundRect">
             <a:avLst/>
           </a:prstGeom>
           <a:solidFill>
-            <a:srgbClr val="1C2541"/>
+            <a:srgbClr val="10182C"/>
           </a:solidFill>
           <a:ln w="19050">
             <a:solidFill>
-              <a:srgbClr val="263255"/>
+              <a:srgbClr val="1A2644"/>
             </a:solidFill>
           </a:ln>
         </p:spPr>
@@ -10022,7 +9530,7 @@
         </p:nvSpPr>
         <p:spPr>
           <a:xfrm>
-            <a:off x="914400" y="1600200"/>
+            <a:off x="914400" y="1508760"/>
             <a:ext cx="4754880" cy="365760"/>
           </a:xfrm>
           <a:prstGeom prst="rect">
@@ -10058,8 +9566,8 @@
         </p:nvSpPr>
         <p:spPr>
           <a:xfrm>
-            <a:off x="914400" y="2011680"/>
-            <a:ext cx="4754880" cy="4114800"/>
+            <a:off x="914400" y="1920240"/>
+            <a:ext cx="4754880" cy="4206240"/>
           </a:xfrm>
           <a:prstGeom prst="rect">
             <a:avLst/>
@@ -10079,7 +9587,7 @@
                   <a:srgbClr val="F8FAFC"/>
                 </a:solidFill>
               </a:rPr>
-              <a:t>• Algorithm Mechanics: </a:t>
+              <a:t>• Mechanics: </a:t>
             </a:r>
             <a:r>
               <a:rPr sz="1300">
@@ -10087,7 +9595,7 @@
                   <a:srgbClr val="94A3B8"/>
                 </a:solidFill>
               </a:rPr>
-              <a:t>Maintains a sorted subarray on the left and iteratively inserts each incoming element into its correct relative position by shifting larger elements right.</a:t>
+              <a:t>Maintains a sorted subarray on the left and iteratively inserts incoming elements by shifting adjacent elements right.</a:t>
             </a:r>
           </a:p>
           <a:p>
@@ -10097,7 +9605,7 @@
                   <a:srgbClr val="F8FAFC"/>
                 </a:solidFill>
               </a:rPr>
-              <a:t>• Bidirectional Sorting: </a:t>
+              <a:t>• Bidirectional Support: </a:t>
             </a:r>
             <a:r>
               <a:rPr sz="1300">
@@ -10105,7 +9613,7 @@
                   <a:srgbClr val="94A3B8"/>
                 </a:solidFill>
               </a:rPr>
-              <a:t>Supports Ascending (lowest to highest balance) and Descending (highest to lowest balance) orders.</a:t>
+              <a:t>Supports Ascending (lowest to highest balance) and Descending (highest to lowest balance) sorting.</a:t>
             </a:r>
           </a:p>
           <a:p>
@@ -10115,7 +9623,7 @@
                   <a:srgbClr val="F8FAFC"/>
                 </a:solidFill>
               </a:rPr>
-              <a:t>• Complexity Analysis: </a:t>
+              <a:t>• Complexity: </a:t>
             </a:r>
             <a:r>
               <a:rPr sz="1300">
@@ -10123,7 +9631,7 @@
                   <a:srgbClr val="94A3B8"/>
                 </a:solidFill>
               </a:rPr>
-              <a:t>Best Case: O(n) when already sorted. Worst/Average Case: O(n^2). Space Complexity: O(1) in-place auxiliary space.</a:t>
+              <a:t>Best Case: O(n) when already sorted. Worst/Average: O(n^2). Auxiliary Space: O(1) in-place sort.</a:t>
             </a:r>
           </a:p>
           <a:p>
@@ -10133,7 +9641,7 @@
                   <a:srgbClr val="F8FAFC"/>
                 </a:solidFill>
               </a:rPr>
-              <a:t>• Banking Utility: </a:t>
+              <a:t>• Practical Role: </a:t>
             </a:r>
             <a:r>
               <a:rPr sz="1300">
@@ -10141,7 +9649,7 @@
                   <a:srgbClr val="94A3B8"/>
                 </a:solidFill>
               </a:rPr>
-              <a:t>Empowers managers to identify high-net-worth customers and low-balance accounts.</a:t>
+              <a:t>Enables portfolio rank ordering to identify high-net-worth customers.</a:t>
             </a:r>
           </a:p>
         </p:txBody>
@@ -10154,18 +9662,18 @@
         </p:nvSpPr>
         <p:spPr>
           <a:xfrm>
-            <a:off x="6309360" y="1463040"/>
-            <a:ext cx="5120640" cy="4846320"/>
+            <a:off x="6309360" y="1371600"/>
+            <a:ext cx="5120640" cy="4937760"/>
           </a:xfrm>
           <a:prstGeom prst="roundRect">
             <a:avLst/>
           </a:prstGeom>
           <a:solidFill>
-            <a:srgbClr val="1C2541"/>
+            <a:srgbClr val="10182C"/>
           </a:solidFill>
           <a:ln w="19050">
             <a:solidFill>
-              <a:srgbClr val="263255"/>
+              <a:srgbClr val="1A2644"/>
             </a:solidFill>
           </a:ln>
         </p:spPr>
@@ -10199,7 +9707,7 @@
         </p:nvSpPr>
         <p:spPr>
           <a:xfrm>
-            <a:off x="6492240" y="1600200"/>
+            <a:off x="6492240" y="1508760"/>
             <a:ext cx="4754880" cy="365760"/>
           </a:xfrm>
           <a:prstGeom prst="rect">
@@ -10235,8 +9743,8 @@
         </p:nvSpPr>
         <p:spPr>
           <a:xfrm>
-            <a:off x="6492240" y="2011680"/>
-            <a:ext cx="4754880" cy="4114800"/>
+            <a:off x="6492240" y="1920240"/>
+            <a:ext cx="4754880" cy="4206240"/>
           </a:xfrm>
           <a:prstGeom prst="rect">
             <a:avLst/>
@@ -10264,7 +9772,7 @@
                   <a:srgbClr val="94A3B8"/>
                 </a:solidFill>
               </a:rPr>
-              <a:t>Utilizes 2D integer arrays (`int mat[2][2]`) to represent regional branch liquidity and cash flow metrics.</a:t>
+              <a:t>Simulates regional branch liquidity using 2x2 integer matrices (`int mat[2][2]`).</a:t>
             </a:r>
           </a:p>
           <a:p>
@@ -10274,7 +9782,7 @@
                   <a:srgbClr val="F8FAFC"/>
                 </a:solidFill>
               </a:rPr>
-              <a:t>• 1. Matrix Addition: </a:t>
+              <a:t>• 1. Matrix Addition (A + B): </a:t>
             </a:r>
             <a:r>
               <a:rPr sz="1300">
@@ -10282,7 +9790,7 @@
                   <a:srgbClr val="94A3B8"/>
                 </a:solidFill>
               </a:rPr>
-              <a:t>`Sum[i][j] = A[i][j] + B[i][j]` to calculate total regional vault assets.</a:t>
+              <a:t>Consolidates total cash reserves across Branch A and Branch B.</a:t>
             </a:r>
           </a:p>
           <a:p>
@@ -10292,7 +9800,7 @@
                   <a:srgbClr val="F8FAFC"/>
                 </a:solidFill>
               </a:rPr>
-              <a:t>• 2. Matrix Subtraction: </a:t>
+              <a:t>• 2. Matrix Subtraction (A - B): </a:t>
             </a:r>
             <a:r>
               <a:rPr sz="1300">
@@ -10300,7 +9808,7 @@
                   <a:srgbClr val="94A3B8"/>
                 </a:solidFill>
               </a:rPr>
-              <a:t>`Diff[i][j] = A[i][j] - B[i][j]` for net disparity analysis.</a:t>
+              <a:t>Evaluates regional asset variance and cash disparities.</a:t>
             </a:r>
           </a:p>
           <a:p>
@@ -10310,7 +9818,7 @@
                   <a:srgbClr val="F8FAFC"/>
                 </a:solidFill>
               </a:rPr>
-              <a:t>• 3. Matrix Multiplication: </a:t>
+              <a:t>• 3. Matrix Multiplication (A * B): </a:t>
             </a:r>
             <a:r>
               <a:rPr sz="1300">
@@ -10318,7 +9826,7 @@
                   <a:srgbClr val="94A3B8"/>
                 </a:solidFill>
               </a:rPr>
-              <a:t>`Mult[i][j] = Sum(A[i][k] * B[k][j])` for linear projection modeling.</a:t>
+              <a:t>Projects compounded multi-period financial liquidity.</a:t>
             </a:r>
           </a:p>
           <a:p>
@@ -10328,7 +9836,7 @@
                   <a:srgbClr val="F8FAFC"/>
                 </a:solidFill>
               </a:rPr>
-              <a:t>• 4. Matrix Transposition: </a:t>
+              <a:t>• 4. Matrix Transpose (A^T): </a:t>
             </a:r>
             <a:r>
               <a:rPr sz="1300">
@@ -10336,7 +9844,7 @@
                   <a:srgbClr val="94A3B8"/>
                 </a:solidFill>
               </a:rPr>
-              <a:t>`Trans[j][i] = A[i][j]` swapping rows and columns for multidimensional ledger reporting.</a:t>
+              <a:t>Exchanges rows and columns for multidimensional financial reporting.</a:t>
             </a:r>
           </a:p>
         </p:txBody>
@@ -10346,6 +9854,9 @@
   <p:clrMapOvr>
     <a:masterClrMapping/>
   </p:clrMapOvr>
+  <p:transition spd="fast">
+    <p:push dir="l"/>
+  </p:transition>
 </p:sld>
 </file>
 
@@ -10374,7 +9885,7 @@
             <a:avLst/>
           </a:prstGeom>
           <a:solidFill>
-            <a:srgbClr val="0B132B"/>
+            <a:srgbClr val="070B16"/>
           </a:solidFill>
           <a:ln>
             <a:noFill/>
@@ -10410,7 +9921,7 @@
         </p:nvSpPr>
         <p:spPr>
           <a:xfrm>
-            <a:off x="731520" y="365760"/>
+            <a:off x="731520" y="347472"/>
             <a:ext cx="10728655" cy="36576"/>
           </a:xfrm>
           <a:prstGeom prst="rect">
@@ -10453,8 +9964,8 @@
         </p:nvSpPr>
         <p:spPr>
           <a:xfrm>
-            <a:off x="731520" y="438912"/>
-            <a:ext cx="10728655" cy="320040"/>
+            <a:off x="731520" y="411480"/>
+            <a:ext cx="10728655" cy="274320"/>
           </a:xfrm>
           <a:prstGeom prst="rect">
             <a:avLst/>
@@ -10489,8 +10000,8 @@
         </p:nvSpPr>
         <p:spPr>
           <a:xfrm>
-            <a:off x="731520" y="713232"/>
-            <a:ext cx="10728655" cy="640080"/>
+            <a:off x="731520" y="685800"/>
+            <a:ext cx="10728655" cy="594360"/>
           </a:xfrm>
           <a:prstGeom prst="rect">
             <a:avLst/>
@@ -10504,7 +10015,7 @@
           <a:lstStyle/>
           <a:p>
             <a:pPr>
-              <a:defRPr sz="2600" b="1">
+              <a:defRPr sz="2400" b="1">
                 <a:solidFill>
                   <a:srgbClr val="F8FAFC"/>
                 </a:solidFill>
@@ -10512,7 +10023,7 @@
               </a:defRPr>
             </a:pPr>
             <a:r>
-              <a:t>Student 4: String Algorithms &amp; Stack ADT</a:t>
+              <a:t>Student 4: Shishira — String Processing &amp; Stack ADT</a:t>
             </a:r>
           </a:p>
         </p:txBody>
@@ -10525,18 +10036,18 @@
         </p:nvSpPr>
         <p:spPr>
           <a:xfrm>
-            <a:off x="731520" y="1463040"/>
-            <a:ext cx="5120640" cy="4846320"/>
+            <a:off x="731520" y="1371600"/>
+            <a:ext cx="5120640" cy="4937760"/>
           </a:xfrm>
           <a:prstGeom prst="roundRect">
             <a:avLst/>
           </a:prstGeom>
           <a:solidFill>
-            <a:srgbClr val="1C2541"/>
+            <a:srgbClr val="10182C"/>
           </a:solidFill>
           <a:ln w="19050">
             <a:solidFill>
-              <a:srgbClr val="263255"/>
+              <a:srgbClr val="1A2644"/>
             </a:solidFill>
           </a:ln>
         </p:spPr>
@@ -10570,7 +10081,7 @@
         </p:nvSpPr>
         <p:spPr>
           <a:xfrm>
-            <a:off x="914400" y="1600200"/>
+            <a:off x="914400" y="1508760"/>
             <a:ext cx="4754880" cy="365760"/>
           </a:xfrm>
           <a:prstGeom prst="rect">
@@ -10606,8 +10117,8 @@
         </p:nvSpPr>
         <p:spPr>
           <a:xfrm>
-            <a:off x="914400" y="2011680"/>
-            <a:ext cx="4754880" cy="4114800"/>
+            <a:off x="914400" y="1920240"/>
+            <a:ext cx="4754880" cy="4206240"/>
           </a:xfrm>
           <a:prstGeom prst="rect">
             <a:avLst/>
@@ -10635,7 +10146,7 @@
                   <a:srgbClr val="94A3B8"/>
                 </a:solidFill>
               </a:rPr>
-              <a:t>Swaps `str[i]` with `str[n-1-i]` moving towards the center in O(n/2) = O(n) time and O(1) space.</a:t>
+              <a:t>Swaps `str[i]` with `str[n-1-i]` moving towards center with O(n/2) = O(n) time and O(1) space.</a:t>
             </a:r>
           </a:p>
           <a:p>
@@ -10653,7 +10164,7 @@
                   <a:srgbClr val="94A3B8"/>
                 </a:solidFill>
               </a:rPr>
-              <a:t>Uses a 256-bucket ASCII direct-address table to tally non-whitespace character occurrences in customer names and records.</a:t>
+              <a:t>Direct-address 256-bucket ASCII array counting character distribution in customer names.</a:t>
             </a:r>
           </a:p>
           <a:p>
@@ -10663,7 +10174,7 @@
                   <a:srgbClr val="F8FAFC"/>
                 </a:solidFill>
               </a:rPr>
-              <a:t>• Naive Substring Pattern Search: </a:t>
+              <a:t>• Naive Substring Matching: </a:t>
             </a:r>
             <a:r>
               <a:rPr sz="1300">
@@ -10671,7 +10182,7 @@
                   <a:srgbClr val="94A3B8"/>
                 </a:solidFill>
               </a:rPr>
-              <a:t>Slides a pattern window across text with `O((n-m+1)*m)` complexity to verify branch codes and customer identifiers.</a:t>
+              <a:t>Sliding-window pattern search verifying account codes and transaction identifiers.</a:t>
             </a:r>
           </a:p>
         </p:txBody>
@@ -10684,18 +10195,18 @@
         </p:nvSpPr>
         <p:spPr>
           <a:xfrm>
-            <a:off x="6309360" y="1463040"/>
-            <a:ext cx="5120640" cy="4846320"/>
+            <a:off x="6309360" y="1371600"/>
+            <a:ext cx="5120640" cy="4937760"/>
           </a:xfrm>
           <a:prstGeom prst="roundRect">
             <a:avLst/>
           </a:prstGeom>
           <a:solidFill>
-            <a:srgbClr val="1C2541"/>
+            <a:srgbClr val="10182C"/>
           </a:solidFill>
           <a:ln w="19050">
             <a:solidFill>
-              <a:srgbClr val="263255"/>
+              <a:srgbClr val="1A2644"/>
             </a:solidFill>
           </a:ln>
         </p:spPr>
@@ -10729,7 +10240,7 @@
         </p:nvSpPr>
         <p:spPr>
           <a:xfrm>
-            <a:off x="6492240" y="1600200"/>
+            <a:off x="6492240" y="1508760"/>
             <a:ext cx="4754880" cy="365760"/>
           </a:xfrm>
           <a:prstGeom prst="rect">
@@ -10765,8 +10276,8 @@
         </p:nvSpPr>
         <p:spPr>
           <a:xfrm>
-            <a:off x="6492240" y="2011680"/>
-            <a:ext cx="4754880" cy="4114800"/>
+            <a:off x="6492240" y="1920240"/>
+            <a:ext cx="4754880" cy="4206240"/>
           </a:xfrm>
           <a:prstGeom prst="rect">
             <a:avLst/>
@@ -10794,7 +10305,7 @@
                   <a:srgbClr val="94A3B8"/>
                 </a:solidFill>
               </a:rPr>
-              <a:t>Implements static `SimpleStack` structure with `top` index pointer managing elements in Last-In, First-Out (LIFO) order.</a:t>
+              <a:t>Implements `SimpleStack` structure with `top` index pointer managing Last-In, First-Out (LIFO) order.</a:t>
             </a:r>
           </a:p>
           <a:p>
@@ -10804,7 +10315,7 @@
                   <a:srgbClr val="F8FAFC"/>
                 </a:solidFill>
               </a:rPr>
-              <a:t>• Fundamental Primitives: </a:t>
+              <a:t>• Stack Primitives: </a:t>
             </a:r>
             <a:r>
               <a:rPr sz="1300">
@@ -10812,7 +10323,7 @@
                   <a:srgbClr val="94A3B8"/>
                 </a:solidFill>
               </a:rPr>
-              <a:t>`initStack()`, `isStackEmpty()`, `isStackFull()`, `push()` with Overflow guard, and `pop()` with Underflow guard.</a:t>
+              <a:t>`initStack()`, `isStackEmpty()`, `isStackFull()`, `push()` with Overflow check, and `pop()` with Underflow guard.</a:t>
             </a:r>
           </a:p>
           <a:p>
@@ -10822,7 +10333,7 @@
                   <a:srgbClr val="F8FAFC"/>
                 </a:solidFill>
               </a:rPr>
-              <a:t>• Parenthesis Balance Verification: </a:t>
+              <a:t>• Parentheses Balance Checker: </a:t>
             </a:r>
             <a:r>
               <a:rPr sz="1300">
@@ -10830,7 +10341,7 @@
                   <a:srgbClr val="94A3B8"/>
                 </a:solidFill>
               </a:rPr>
-              <a:t>Demonstrates real-world Stack application by parsing financial calculation expressions (e.g. `(A+B)*(C-D)`) to guarantee mathematical syntax integrity.</a:t>
+              <a:t>Real-world stack application checking expression balance (e.g. `(A+B)*(C-D)`) for mathematical formula integrity in interest calculations.</a:t>
             </a:r>
           </a:p>
         </p:txBody>
@@ -10840,6 +10351,9 @@
   <p:clrMapOvr>
     <a:masterClrMapping/>
   </p:clrMapOvr>
+  <p:transition spd="fast">
+    <p:push dir="l"/>
+  </p:transition>
 </p:sld>
 </file>
 
@@ -10868,7 +10382,7 @@
             <a:avLst/>
           </a:prstGeom>
           <a:solidFill>
-            <a:srgbClr val="0B132B"/>
+            <a:srgbClr val="070B16"/>
           </a:solidFill>
           <a:ln>
             <a:noFill/>
@@ -10904,7 +10418,7 @@
         </p:nvSpPr>
         <p:spPr>
           <a:xfrm>
-            <a:off x="731520" y="365760"/>
+            <a:off x="731520" y="347472"/>
             <a:ext cx="10728655" cy="36576"/>
           </a:xfrm>
           <a:prstGeom prst="rect">
@@ -10947,8 +10461,8 @@
         </p:nvSpPr>
         <p:spPr>
           <a:xfrm>
-            <a:off x="731520" y="438912"/>
-            <a:ext cx="10728655" cy="320040"/>
+            <a:off x="731520" y="411480"/>
+            <a:ext cx="10728655" cy="274320"/>
           </a:xfrm>
           <a:prstGeom prst="rect">
             <a:avLst/>
@@ -10983,8 +10497,8 @@
         </p:nvSpPr>
         <p:spPr>
           <a:xfrm>
-            <a:off x="731520" y="713232"/>
-            <a:ext cx="10728655" cy="640080"/>
+            <a:off x="731520" y="685800"/>
+            <a:ext cx="10728655" cy="594360"/>
           </a:xfrm>
           <a:prstGeom prst="rect">
             <a:avLst/>
@@ -10998,7 +10512,7 @@
           <a:lstStyle/>
           <a:p>
             <a:pPr>
-              <a:defRPr sz="2600" b="1">
+              <a:defRPr sz="2400" b="1">
                 <a:solidFill>
                   <a:srgbClr val="F8FAFC"/>
                 </a:solidFill>
@@ -11006,7 +10520,7 @@
               </a:defRPr>
             </a:pPr>
             <a:r>
-              <a:t>Student 5: Queue ADT, STL &amp; Driver Controller</a:t>
+              <a:t>Student 5: Chathwik — Queue ADT, STL &amp; Driver Menu</a:t>
             </a:r>
           </a:p>
         </p:txBody>
@@ -11019,18 +10533,18 @@
         </p:nvSpPr>
         <p:spPr>
           <a:xfrm>
-            <a:off x="731520" y="1463040"/>
-            <a:ext cx="5120640" cy="4846320"/>
+            <a:off x="731520" y="1371600"/>
+            <a:ext cx="5120640" cy="4937760"/>
           </a:xfrm>
           <a:prstGeom prst="roundRect">
             <a:avLst/>
           </a:prstGeom>
           <a:solidFill>
-            <a:srgbClr val="1C2541"/>
+            <a:srgbClr val="10182C"/>
           </a:solidFill>
           <a:ln w="19050">
             <a:solidFill>
-              <a:srgbClr val="263255"/>
+              <a:srgbClr val="1A2644"/>
             </a:solidFill>
           </a:ln>
         </p:spPr>
@@ -11064,7 +10578,7 @@
         </p:nvSpPr>
         <p:spPr>
           <a:xfrm>
-            <a:off x="914400" y="1600200"/>
+            <a:off x="914400" y="1508760"/>
             <a:ext cx="4754880" cy="365760"/>
           </a:xfrm>
           <a:prstGeom prst="rect">
@@ -11100,8 +10614,8 @@
         </p:nvSpPr>
         <p:spPr>
           <a:xfrm>
-            <a:off x="914400" y="2011680"/>
-            <a:ext cx="4754880" cy="4114800"/>
+            <a:off x="914400" y="1920240"/>
+            <a:ext cx="4754880" cy="4206240"/>
           </a:xfrm>
           <a:prstGeom prst="rect">
             <a:avLst/>
@@ -11129,7 +10643,7 @@
                   <a:srgbClr val="94A3B8"/>
                 </a:solidFill>
               </a:rPr>
-              <a:t>Implements `LinearQueue` with `front` and `rear` pointers for bank teller token dispatch. Elements are serviced First-In, First-Out.</a:t>
+              <a:t>Implements `LinearQueue` with `front` and `rear` pointers for bank teller customer token management.</a:t>
             </a:r>
           </a:p>
           <a:p>
@@ -11147,7 +10661,7 @@
                   <a:srgbClr val="94A3B8"/>
                 </a:solidFill>
               </a:rPr>
-              <a:t>Solves the 'false overflow' problem of linear queues by recycling vacated array slots using modulo arithmetic: `rear = (rear + 1) % MAX`.</a:t>
+              <a:t>Solves linear queue false-overflow using modulo arithmetic: `rear = (rear + 1) % MAX`.</a:t>
             </a:r>
           </a:p>
           <a:p>
@@ -11157,7 +10671,7 @@
                   <a:srgbClr val="F8FAFC"/>
                 </a:solidFill>
               </a:rPr>
-              <a:t>• Operations: </a:t>
+              <a:t>• Optimal Efficiency: </a:t>
             </a:r>
             <a:r>
               <a:rPr sz="1300">
@@ -11165,7 +10679,7 @@
                   <a:srgbClr val="94A3B8"/>
                 </a:solidFill>
               </a:rPr>
-              <a:t>`circularEnqueue()` and `circularDequeue()` execute with optimal O(1) time complexity.</a:t>
+              <a:t>`circularEnqueue()` and `circularDequeue()` run in guaranteed O(1) time.</a:t>
             </a:r>
           </a:p>
         </p:txBody>
@@ -11178,18 +10692,18 @@
         </p:nvSpPr>
         <p:spPr>
           <a:xfrm>
-            <a:off x="6309360" y="1463040"/>
-            <a:ext cx="5120640" cy="4846320"/>
+            <a:off x="6309360" y="1371600"/>
+            <a:ext cx="5120640" cy="4937760"/>
           </a:xfrm>
           <a:prstGeom prst="roundRect">
             <a:avLst/>
           </a:prstGeom>
           <a:solidFill>
-            <a:srgbClr val="1C2541"/>
+            <a:srgbClr val="10182C"/>
           </a:solidFill>
           <a:ln w="19050">
             <a:solidFill>
-              <a:srgbClr val="263255"/>
+              <a:srgbClr val="1A2644"/>
             </a:solidFill>
           </a:ln>
         </p:spPr>
@@ -11223,7 +10737,7 @@
         </p:nvSpPr>
         <p:spPr>
           <a:xfrm>
-            <a:off x="6492240" y="1600200"/>
+            <a:off x="6492240" y="1508760"/>
             <a:ext cx="4754880" cy="365760"/>
           </a:xfrm>
           <a:prstGeom prst="rect">
@@ -11246,7 +10760,7 @@
               </a:defRPr>
             </a:pPr>
             <a:r>
-              <a:t>STL Containers &amp; Main Driver Loop</a:t>
+              <a:t>STL Containers &amp; Main Controller</a:t>
             </a:r>
           </a:p>
         </p:txBody>
@@ -11259,8 +10773,8 @@
         </p:nvSpPr>
         <p:spPr>
           <a:xfrm>
-            <a:off x="6492240" y="2011680"/>
-            <a:ext cx="4754880" cy="4114800"/>
+            <a:off x="6492240" y="1920240"/>
+            <a:ext cx="4754880" cy="4206240"/>
           </a:xfrm>
           <a:prstGeom prst="rect">
             <a:avLst/>
@@ -11280,7 +10794,7 @@
                   <a:srgbClr val="F8FAFC"/>
                 </a:solidFill>
               </a:rPr>
-              <a:t>• Standard Template Library (Module X): </a:t>
+              <a:t>• STL Demonstration (Module X): </a:t>
             </a:r>
             <a:r>
               <a:rPr sz="1300">
@@ -11288,7 +10802,7 @@
                   <a:srgbClr val="94A3B8"/>
                 </a:solidFill>
               </a:rPr>
-              <a:t>Demonstrates `std::vector` + `std::pair` (account &amp; balance), `std::deque` (VIP priority lines), `std::set` (unique phone numbers), and `std::map` (O(log n) Red-Black Tree key lookups).</a:t>
+              <a:t>Showcases `std::vector` + `std::pair` (account &amp; balance), `std::deque` (VIP priority lines), `std::set` (unique phone numbers), and `std::map` (O(log n) account lookups).</a:t>
             </a:r>
           </a:p>
           <a:p>
@@ -11298,7 +10812,7 @@
                   <a:srgbClr val="F8FAFC"/>
                 </a:solidFill>
               </a:rPr>
-              <a:t>• Menu Interface (printMenu): </a:t>
+              <a:t>• Console Menu Interface: </a:t>
             </a:r>
             <a:r>
               <a:rPr sz="1300">
@@ -11306,7 +10820,7 @@
                   <a:srgbClr val="94A3B8"/>
                 </a:solidFill>
               </a:rPr>
-              <a:t>14-option interactive console dashboard clearly categorized by student responsibilities.</a:t>
+              <a:t>14-option interactive console menu cleanly categorized by student responsibilities.</a:t>
             </a:r>
           </a:p>
           <a:p>
@@ -11316,7 +10830,7 @@
                   <a:srgbClr val="F8FAFC"/>
                 </a:solidFill>
               </a:rPr>
-              <a:t>• Main Application Driver (main()): </a:t>
+              <a:t>• Main Application Driver: </a:t>
             </a:r>
             <a:r>
               <a:rPr sz="1300">
@@ -11324,7 +10838,7 @@
                   <a:srgbClr val="94A3B8"/>
                 </a:solidFill>
               </a:rPr>
-              <a:t>Central event loop handling input sanitization, error checking, and routing requests to all 5 student modules.</a:t>
+              <a:t>Central execution event loop handling error checking and routing requests to all 5 student modules.</a:t>
             </a:r>
           </a:p>
         </p:txBody>
@@ -11334,6 +10848,9 @@
   <p:clrMapOvr>
     <a:masterClrMapping/>
   </p:clrMapOvr>
+  <p:transition spd="fast">
+    <p:push dir="l"/>
+  </p:transition>
 </p:sld>
 </file>
 

--- a/Bank_Management_System_Presentation.pptx
+++ b/Bank_Management_System_Presentation.pptx
@@ -3116,7 +3116,7 @@
             <a:avLst/>
           </a:prstGeom>
           <a:solidFill>
-            <a:srgbClr val="070B16"/>
+            <a:srgbClr val="0A0F1D"/>
           </a:solidFill>
           <a:ln>
             <a:noFill/>
@@ -3146,59 +3146,14 @@
       </p:sp>
       <p:sp>
         <p:nvSpPr>
-          <p:cNvPr id="3" name="Rounded Rectangle 2"/>
-          <p:cNvSpPr/>
+          <p:cNvPr id="3" name="TextBox 2"/>
+          <p:cNvSpPr txBox="1"/>
           <p:nvPr/>
         </p:nvSpPr>
         <p:spPr>
           <a:xfrm>
-            <a:off x="731520" y="731520"/>
-            <a:ext cx="5852160" cy="5394960"/>
-          </a:xfrm>
-          <a:prstGeom prst="roundRect">
-            <a:avLst/>
-          </a:prstGeom>
-          <a:solidFill>
-            <a:srgbClr val="10182C"/>
-          </a:solidFill>
-          <a:ln w="25400">
-            <a:solidFill>
-              <a:srgbClr val="6366F1"/>
-            </a:solidFill>
-          </a:ln>
-        </p:spPr>
-        <p:style>
-          <a:lnRef idx="1">
-            <a:schemeClr val="accent1"/>
-          </a:lnRef>
-          <a:fillRef idx="3">
-            <a:schemeClr val="accent1"/>
-          </a:fillRef>
-          <a:effectRef idx="2">
-            <a:schemeClr val="accent1"/>
-          </a:effectRef>
-          <a:fontRef idx="minor">
-            <a:schemeClr val="lt1"/>
-          </a:fontRef>
-        </p:style>
-        <p:txBody>
-          <a:bodyPr rtlCol="0" anchor="ctr"/>
-          <a:lstStyle/>
-          <a:p>
-            <a:pPr algn="ctr"/>
-          </a:p>
-        </p:txBody>
-      </p:sp>
-      <p:sp>
-        <p:nvSpPr>
-          <p:cNvPr id="4" name="TextBox 3"/>
-          <p:cNvSpPr txBox="1"/>
-          <p:nvPr/>
-        </p:nvSpPr>
-        <p:spPr>
-          <a:xfrm>
-            <a:off x="1005840" y="1005840"/>
-            <a:ext cx="5303520" cy="2011680"/>
+            <a:off x="914400" y="1097280"/>
+            <a:ext cx="5486400" cy="4754880"/>
           </a:xfrm>
           <a:prstGeom prst="rect">
             <a:avLst/>
@@ -3212,217 +3167,144 @@
           <a:lstStyle/>
           <a:p>
             <a:pPr>
-              <a:defRPr sz="1100" b="1">
-                <a:solidFill>
-                  <a:srgbClr val="06B6D4"/>
-                </a:solidFill>
-                <a:latin typeface="Arial"/>
+              <a:defRPr sz="1200" b="1">
+                <a:solidFill>
+                  <a:srgbClr val="38BDF8"/>
+                </a:solidFill>
+                <a:latin typeface="Calibri"/>
               </a:defRPr>
             </a:pPr>
             <a:r>
-              <a:t>CS207 DATA STRUCTURES &amp; ALGORITHMS PROJECT</a:t>
-            </a:r>
-          </a:p>
-          <a:p>
-            <a:pPr>
-              <a:defRPr sz="2800" b="1">
-                <a:solidFill>
-                  <a:srgbClr val="F8FAFC"/>
-                </a:solidFill>
-                <a:latin typeface="Arial"/>
+              <a:t>CS207 DATA STRUCTURES &amp; ALGORITHMS</a:t>
+            </a:r>
+          </a:p>
+          <a:p>
+            <a:pPr>
+              <a:spcBef>
+                <a:spcPts val="800"/>
+              </a:spcBef>
+              <a:spcAft>
+                <a:spcPts val="1600"/>
+              </a:spcAft>
+              <a:defRPr sz="3600" b="1">
+                <a:solidFill>
+                  <a:srgbClr val="FFFFFF"/>
+                </a:solidFill>
+                <a:latin typeface="Calibri"/>
               </a:defRPr>
             </a:pPr>
             <a:r>
-              <a:t>BANK MANAGEMENT SYSTEM</a:t>
-            </a:r>
-          </a:p>
-          <a:p>
-            <a:pPr>
-              <a:defRPr sz="1400">
-                <a:solidFill>
-                  <a:srgbClr val="F59E0B"/>
-                </a:solidFill>
-                <a:latin typeface="Arial"/>
+              <a:t>BANK MANAGEMENT</a:t>
+            </a:r>
+            <a:br/>
+            <a:r>
+              <a:t>SYSTEM</a:t>
+            </a:r>
+          </a:p>
+          <a:p>
+            <a:pPr>
+              <a:spcBef>
+                <a:spcPts val="1400"/>
+              </a:spcBef>
+              <a:spcAft>
+                <a:spcPts val="800"/>
+              </a:spcAft>
+              <a:defRPr sz="1300" b="1">
+                <a:solidFill>
+                  <a:srgbClr val="34D399"/>
+                </a:solidFill>
+                <a:latin typeface="Calibri"/>
               </a:defRPr>
             </a:pPr>
             <a:r>
-              <a:t>Full-Stack C++ Engine &amp; Cloud Architecture</a:t>
-            </a:r>
-          </a:p>
-        </p:txBody>
-      </p:sp>
-      <p:sp>
-        <p:nvSpPr>
-          <p:cNvPr id="5" name="Rectangle 4"/>
-          <p:cNvSpPr/>
-          <p:nvPr/>
-        </p:nvSpPr>
-        <p:spPr>
-          <a:xfrm>
-            <a:off x="1005840" y="2971800"/>
-            <a:ext cx="5303520" cy="18288"/>
-          </a:xfrm>
-          <a:prstGeom prst="rect">
-            <a:avLst/>
-          </a:prstGeom>
-          <a:solidFill>
-            <a:srgbClr val="1A2644"/>
-          </a:solidFill>
-          <a:ln>
-            <a:noFill/>
-          </a:ln>
-        </p:spPr>
-        <p:style>
-          <a:lnRef idx="1">
-            <a:schemeClr val="accent1"/>
-          </a:lnRef>
-          <a:fillRef idx="3">
-            <a:schemeClr val="accent1"/>
-          </a:fillRef>
-          <a:effectRef idx="2">
-            <a:schemeClr val="accent1"/>
-          </a:effectRef>
-          <a:fontRef idx="minor">
-            <a:schemeClr val="lt1"/>
-          </a:fontRef>
-        </p:style>
-        <p:txBody>
-          <a:bodyPr rtlCol="0" anchor="ctr"/>
-          <a:lstStyle/>
-          <a:p>
-            <a:pPr algn="ctr"/>
-          </a:p>
-        </p:txBody>
-      </p:sp>
-      <p:sp>
-        <p:nvSpPr>
-          <p:cNvPr id="6" name="TextBox 5"/>
-          <p:cNvSpPr txBox="1"/>
-          <p:nvPr/>
-        </p:nvSpPr>
-        <p:spPr>
-          <a:xfrm>
-            <a:off x="1005840" y="3154680"/>
-            <a:ext cx="5303520" cy="2834640"/>
-          </a:xfrm>
-          <a:prstGeom prst="rect">
-            <a:avLst/>
-          </a:prstGeom>
-          <a:noFill/>
-        </p:spPr>
-        <p:txBody>
-          <a:bodyPr wrap="square">
-            <a:spAutoFit/>
-          </a:bodyPr>
-          <a:lstStyle/>
-          <a:p>
-            <a:pPr>
-              <a:defRPr sz="1300" b="1">
-                <a:solidFill>
-                  <a:srgbClr val="10B981"/>
-                </a:solidFill>
-                <a:latin typeface="Arial"/>
+              <a:t>GROUP MEMBERS:</a:t>
+            </a:r>
+          </a:p>
+          <a:p>
+            <a:pPr>
+              <a:spcAft>
+                <a:spcPts val="400"/>
+              </a:spcAft>
+              <a:defRPr sz="1500" b="1">
+                <a:solidFill>
+                  <a:srgbClr val="FFFFFF"/>
+                </a:solidFill>
+                <a:latin typeface="Calibri"/>
               </a:defRPr>
             </a:pPr>
             <a:r>
-              <a:t>PROJECT GROUP MEMBERS:</a:t>
-            </a:r>
-          </a:p>
-          <a:p>
-            <a:r>
-              <a:rPr b="1" sz="1200">
-                <a:solidFill>
-                  <a:srgbClr val="F8FAFC"/>
-                </a:solidFill>
-              </a:rPr>
-              <a:t>• 1. Manikanta  </a:t>
-            </a:r>
-            <a:r>
-              <a:rPr sz="1100">
-                <a:solidFill>
-                  <a:srgbClr val="94A3B8"/>
-                </a:solidFill>
-              </a:rPr>
-              <a:t>(Student 1)</a:t>
-            </a:r>
-          </a:p>
-          <a:p>
-            <a:r>
-              <a:rPr b="1" sz="1200">
-                <a:solidFill>
-                  <a:srgbClr val="F8FAFC"/>
-                </a:solidFill>
-              </a:rPr>
-              <a:t>• 2. Lokesh  </a:t>
-            </a:r>
-            <a:r>
-              <a:rPr sz="1100">
-                <a:solidFill>
-                  <a:srgbClr val="94A3B8"/>
-                </a:solidFill>
-              </a:rPr>
-              <a:t>(Student 2)</a:t>
-            </a:r>
-          </a:p>
-          <a:p>
-            <a:r>
-              <a:rPr b="1" sz="1200">
-                <a:solidFill>
-                  <a:srgbClr val="F8FAFC"/>
-                </a:solidFill>
-              </a:rPr>
-              <a:t>• 3. Anil  </a:t>
-            </a:r>
-            <a:r>
-              <a:rPr sz="1100">
-                <a:solidFill>
-                  <a:srgbClr val="94A3B8"/>
-                </a:solidFill>
-              </a:rPr>
-              <a:t>(Student 3)</a:t>
-            </a:r>
-          </a:p>
-          <a:p>
-            <a:r>
-              <a:rPr b="1" sz="1200">
-                <a:solidFill>
-                  <a:srgbClr val="F8FAFC"/>
-                </a:solidFill>
-              </a:rPr>
-              <a:t>• 4. Shishira  </a:t>
-            </a:r>
-            <a:r>
-              <a:rPr sz="1100">
-                <a:solidFill>
-                  <a:srgbClr val="94A3B8"/>
-                </a:solidFill>
-              </a:rPr>
-              <a:t>(Student 4)</a:t>
-            </a:r>
-          </a:p>
-          <a:p>
-            <a:r>
-              <a:rPr b="1" sz="1200">
-                <a:solidFill>
-                  <a:srgbClr val="F8FAFC"/>
-                </a:solidFill>
-              </a:rPr>
-              <a:t>• 5. Chathwik  </a:t>
-            </a:r>
-            <a:r>
-              <a:rPr sz="1100">
-                <a:solidFill>
-                  <a:srgbClr val="94A3B8"/>
-                </a:solidFill>
-              </a:rPr>
-              <a:t>(Student 5)</a:t>
+              <a:t>•  Manikanta</a:t>
+            </a:r>
+          </a:p>
+          <a:p>
+            <a:pPr>
+              <a:spcAft>
+                <a:spcPts val="400"/>
+              </a:spcAft>
+              <a:defRPr sz="1500" b="1">
+                <a:solidFill>
+                  <a:srgbClr val="FFFFFF"/>
+                </a:solidFill>
+                <a:latin typeface="Calibri"/>
+              </a:defRPr>
+            </a:pPr>
+            <a:r>
+              <a:t>•  Lokesh</a:t>
+            </a:r>
+          </a:p>
+          <a:p>
+            <a:pPr>
+              <a:spcAft>
+                <a:spcPts val="400"/>
+              </a:spcAft>
+              <a:defRPr sz="1500" b="1">
+                <a:solidFill>
+                  <a:srgbClr val="FFFFFF"/>
+                </a:solidFill>
+                <a:latin typeface="Calibri"/>
+              </a:defRPr>
+            </a:pPr>
+            <a:r>
+              <a:t>•  Anil</a:t>
+            </a:r>
+          </a:p>
+          <a:p>
+            <a:pPr>
+              <a:spcAft>
+                <a:spcPts val="400"/>
+              </a:spcAft>
+              <a:defRPr sz="1500" b="1">
+                <a:solidFill>
+                  <a:srgbClr val="FFFFFF"/>
+                </a:solidFill>
+                <a:latin typeface="Calibri"/>
+              </a:defRPr>
+            </a:pPr>
+            <a:r>
+              <a:t>•  Shishira</a:t>
+            </a:r>
+          </a:p>
+          <a:p>
+            <a:pPr>
+              <a:spcAft>
+                <a:spcPts val="400"/>
+              </a:spcAft>
+              <a:defRPr sz="1500" b="1">
+                <a:solidFill>
+                  <a:srgbClr val="FFFFFF"/>
+                </a:solidFill>
+                <a:latin typeface="Calibri"/>
+              </a:defRPr>
+            </a:pPr>
+            <a:r>
+              <a:t>•  Chathwik</a:t>
             </a:r>
           </a:p>
         </p:txBody>
       </p:sp>
       <p:pic>
         <p:nvPicPr>
-          <p:cNvPr id="7" name="Picture 6" descr="banking_hero_3d_1791045817805.jpg"/>
+          <p:cNvPr id="4" name="Picture 3" descr="banking_hero_3d_1791045817805.jpg"/>
           <p:cNvPicPr>
             <a:picLocks noChangeAspect="1"/>
           </p:cNvPicPr>
@@ -3436,8 +3318,8 @@
         </p:blipFill>
         <p:spPr>
           <a:xfrm>
-            <a:off x="6858000" y="731520"/>
-            <a:ext cx="4602175" cy="5394960"/>
+            <a:off x="6583680" y="1097280"/>
+            <a:ext cx="4663440" cy="4754880"/>
           </a:xfrm>
           <a:prstGeom prst="rect">
             <a:avLst/>
@@ -3480,7 +3362,7 @@
             <a:avLst/>
           </a:prstGeom>
           <a:solidFill>
-            <a:srgbClr val="070B16"/>
+            <a:srgbClr val="0A0F1D"/>
           </a:solidFill>
           <a:ln>
             <a:noFill/>
@@ -3516,8 +3398,8 @@
         </p:nvSpPr>
         <p:spPr>
           <a:xfrm>
-            <a:off x="731520" y="347472"/>
-            <a:ext cx="10728655" cy="36576"/>
+            <a:off x="914400" y="457200"/>
+            <a:ext cx="10362895" cy="27432"/>
           </a:xfrm>
           <a:prstGeom prst="rect">
             <a:avLst/>
@@ -3559,8 +3441,8 @@
         </p:nvSpPr>
         <p:spPr>
           <a:xfrm>
-            <a:off x="731520" y="411480"/>
-            <a:ext cx="10728655" cy="274320"/>
+            <a:off x="914400" y="594360"/>
+            <a:ext cx="10362895" cy="731520"/>
           </a:xfrm>
           <a:prstGeom prst="rect">
             <a:avLst/>
@@ -3574,15 +3456,28 @@
           <a:lstStyle/>
           <a:p>
             <a:pPr>
-              <a:defRPr sz="1100" b="1">
-                <a:solidFill>
-                  <a:srgbClr val="06B6D4"/>
-                </a:solidFill>
-                <a:latin typeface="Arial"/>
+              <a:defRPr sz="2600" b="1">
+                <a:solidFill>
+                  <a:srgbClr val="FFFFFF"/>
+                </a:solidFill>
+                <a:latin typeface="Calibri"/>
               </a:defRPr>
             </a:pPr>
             <a:r>
-              <a:t>VISUAL ALGORITHMIC MAPPING</a:t>
+              <a:t>Data Structures &amp; Algorithmic Mapping</a:t>
+            </a:r>
+          </a:p>
+          <a:p>
+            <a:pPr>
+              <a:defRPr sz="1300">
+                <a:solidFill>
+                  <a:srgbClr val="38BDF8"/>
+                </a:solidFill>
+                <a:latin typeface="Calibri"/>
+              </a:defRPr>
+            </a:pPr>
+            <a:r>
+              <a:t>Core Algorithmic Foundations</a:t>
             </a:r>
           </a:p>
         </p:txBody>
@@ -3595,8 +3490,8 @@
         </p:nvSpPr>
         <p:spPr>
           <a:xfrm>
-            <a:off x="731520" y="685800"/>
-            <a:ext cx="10728655" cy="594360"/>
+            <a:off x="914400" y="1645920"/>
+            <a:ext cx="5303520" cy="4572000"/>
           </a:xfrm>
           <a:prstGeom prst="rect">
             <a:avLst/>
@@ -3608,201 +3503,104 @@
             <a:spAutoFit/>
           </a:bodyPr>
           <a:lstStyle/>
-          <a:p>
-            <a:pPr>
-              <a:defRPr sz="2400" b="1">
-                <a:solidFill>
-                  <a:srgbClr val="F8FAFC"/>
-                </a:solidFill>
-                <a:latin typeface="Arial"/>
-              </a:defRPr>
-            </a:pPr>
-            <a:r>
-              <a:t>Data Structures &amp; Algorithmic Architecture</a:t>
-            </a:r>
-          </a:p>
-        </p:txBody>
-      </p:sp>
-      <p:sp>
-        <p:nvSpPr>
-          <p:cNvPr id="6" name="Rounded Rectangle 5"/>
-          <p:cNvSpPr/>
-          <p:nvPr/>
-        </p:nvSpPr>
-        <p:spPr>
-          <a:xfrm>
-            <a:off x="731520" y="1371600"/>
-            <a:ext cx="5120640" cy="4937760"/>
-          </a:xfrm>
-          <a:prstGeom prst="roundRect">
-            <a:avLst/>
-          </a:prstGeom>
-          <a:solidFill>
-            <a:srgbClr val="10182C"/>
-          </a:solidFill>
-          <a:ln w="19050">
-            <a:solidFill>
-              <a:srgbClr val="1A2644"/>
-            </a:solidFill>
-          </a:ln>
-        </p:spPr>
-        <p:style>
-          <a:lnRef idx="1">
-            <a:schemeClr val="accent1"/>
-          </a:lnRef>
-          <a:fillRef idx="3">
-            <a:schemeClr val="accent1"/>
-          </a:fillRef>
-          <a:effectRef idx="2">
-            <a:schemeClr val="accent1"/>
-          </a:effectRef>
-          <a:fontRef idx="minor">
-            <a:schemeClr val="lt1"/>
-          </a:fontRef>
-        </p:style>
-        <p:txBody>
-          <a:bodyPr rtlCol="0" anchor="ctr"/>
-          <a:lstStyle/>
-          <a:p>
-            <a:pPr algn="ctr"/>
-          </a:p>
-        </p:txBody>
-      </p:sp>
-      <p:sp>
-        <p:nvSpPr>
-          <p:cNvPr id="7" name="TextBox 6"/>
-          <p:cNvSpPr txBox="1"/>
-          <p:nvPr/>
-        </p:nvSpPr>
-        <p:spPr>
-          <a:xfrm>
-            <a:off x="914400" y="1508760"/>
-            <a:ext cx="4754880" cy="365760"/>
-          </a:xfrm>
-          <a:prstGeom prst="rect">
-            <a:avLst/>
-          </a:prstGeom>
-          <a:noFill/>
-        </p:spPr>
-        <p:txBody>
-          <a:bodyPr wrap="square">
-            <a:spAutoFit/>
-          </a:bodyPr>
-          <a:lstStyle/>
-          <a:p>
-            <a:pPr>
-              <a:defRPr sz="1500" b="1">
-                <a:solidFill>
-                  <a:srgbClr val="06B6D4"/>
-                </a:solidFill>
-                <a:latin typeface="Arial"/>
-              </a:defRPr>
-            </a:pPr>
-            <a:r>
-              <a:t>Core Algorithmic Foundations</a:t>
-            </a:r>
-          </a:p>
-        </p:txBody>
-      </p:sp>
-      <p:sp>
-        <p:nvSpPr>
-          <p:cNvPr id="8" name="TextBox 7"/>
-          <p:cNvSpPr txBox="1"/>
-          <p:nvPr/>
-        </p:nvSpPr>
-        <p:spPr>
-          <a:xfrm>
-            <a:off x="914400" y="1920240"/>
-            <a:ext cx="4754880" cy="4206240"/>
-          </a:xfrm>
-          <a:prstGeom prst="rect">
-            <a:avLst/>
-          </a:prstGeom>
-          <a:noFill/>
-        </p:spPr>
-        <p:txBody>
-          <a:bodyPr wrap="square">
-            <a:spAutoFit/>
-          </a:bodyPr>
-          <a:lstStyle/>
           <a:p/>
           <a:p>
-            <a:r>
-              <a:rPr b="1" sz="1300">
-                <a:solidFill>
-                  <a:srgbClr val="F8FAFC"/>
-                </a:solidFill>
-              </a:rPr>
-              <a:t>• Binary Search Tree Logic: </a:t>
-            </a:r>
-            <a:r>
-              <a:rPr sz="1300">
-                <a:solidFill>
-                  <a:srgbClr val="94A3B8"/>
-                </a:solidFill>
-              </a:rPr>
-              <a:t>Fast divide-and-conquer lookups guaranteeing O(log n) performance for customer identification.</a:t>
-            </a:r>
-          </a:p>
-          <a:p>
-            <a:r>
-              <a:rPr b="1" sz="1300">
-                <a:solidFill>
-                  <a:srgbClr val="F8FAFC"/>
-                </a:solidFill>
-              </a:rPr>
-              <a:t>• LIFO Stack Primitives: </a:t>
-            </a:r>
-            <a:r>
-              <a:rPr sz="1300">
-                <a:solidFill>
-                  <a:srgbClr val="94A3B8"/>
-                </a:solidFill>
-              </a:rPr>
-              <a:t>Memory-safe push and pop execution for financial formula validation.</a:t>
-            </a:r>
-          </a:p>
-          <a:p>
-            <a:r>
-              <a:rPr b="1" sz="1300">
-                <a:solidFill>
-                  <a:srgbClr val="F8FAFC"/>
-                </a:solidFill>
-              </a:rPr>
-              <a:t>• FIFO &amp; Circular Queues: </a:t>
-            </a:r>
-            <a:r>
-              <a:rPr sz="1300">
-                <a:solidFill>
-                  <a:srgbClr val="94A3B8"/>
-                </a:solidFill>
-              </a:rPr>
-              <a:t>Modulo wrap-around token dispatching for zero memory wastage.</a:t>
-            </a:r>
-          </a:p>
-          <a:p>
-            <a:r>
-              <a:rPr b="1" sz="1300">
-                <a:solidFill>
-                  <a:srgbClr val="F8FAFC"/>
-                </a:solidFill>
-              </a:rPr>
-              <a:t>• STL Red-Black Tree Maps: </a:t>
-            </a:r>
-            <a:r>
-              <a:rPr sz="1300">
-                <a:solidFill>
-                  <a:srgbClr val="94A3B8"/>
-                </a:solidFill>
-              </a:rPr>
-              <a:t>High-speed key-value lookups linking account numbers directly to customer names.</a:t>
+            <a:pPr>
+              <a:spcAft>
+                <a:spcPts val="1800"/>
+              </a:spcAft>
+            </a:pPr>
+            <a:r>
+              <a:rPr b="1" sz="1500">
+                <a:solidFill>
+                  <a:srgbClr val="38BDF8"/>
+                </a:solidFill>
+              </a:rPr>
+              <a:t>•  Binary Search Tree Logic: </a:t>
+            </a:r>
+            <a:r>
+              <a:rPr sz="1500">
+                <a:solidFill>
+                  <a:srgbClr val="FFFFFF"/>
+                </a:solidFill>
+              </a:rPr>
+              <a:t>Fast divide-and-conquer lookup in O(log n) time.</a:t>
+            </a:r>
+          </a:p>
+          <a:p>
+            <a:pPr>
+              <a:spcAft>
+                <a:spcPts val="1800"/>
+              </a:spcAft>
+            </a:pPr>
+            <a:r>
+              <a:rPr b="1" sz="1500">
+                <a:solidFill>
+                  <a:srgbClr val="38BDF8"/>
+                </a:solidFill>
+              </a:rPr>
+              <a:t>•  Stack &amp; Queue Primitives: </a:t>
+            </a:r>
+            <a:r>
+              <a:rPr sz="1500">
+                <a:solidFill>
+                  <a:srgbClr val="FFFFFF"/>
+                </a:solidFill>
+              </a:rPr>
+              <a:t>LIFO expression checks and FIFO token dispatching.</a:t>
+            </a:r>
+          </a:p>
+          <a:p>
+            <a:pPr>
+              <a:spcAft>
+                <a:spcPts val="1800"/>
+              </a:spcAft>
+            </a:pPr>
+            <a:r>
+              <a:rPr b="1" sz="1500">
+                <a:solidFill>
+                  <a:srgbClr val="38BDF8"/>
+                </a:solidFill>
+              </a:rPr>
+              <a:t>•  Sorting &amp; Matrix Algebra: </a:t>
+            </a:r>
+            <a:r>
+              <a:rPr sz="1500">
+                <a:solidFill>
+                  <a:srgbClr val="FFFFFF"/>
+                </a:solidFill>
+              </a:rPr>
+              <a:t>In-place insertion sort and 2D cash flow matrix ops.</a:t>
+            </a:r>
+          </a:p>
+          <a:p>
+            <a:pPr>
+              <a:spcAft>
+                <a:spcPts val="1800"/>
+              </a:spcAft>
+            </a:pPr>
+            <a:r>
+              <a:rPr b="1" sz="1500">
+                <a:solidFill>
+                  <a:srgbClr val="38BDF8"/>
+                </a:solidFill>
+              </a:rPr>
+              <a:t>•  STL Red-Black Maps: </a:t>
+            </a:r>
+            <a:r>
+              <a:rPr sz="1500">
+                <a:solidFill>
+                  <a:srgbClr val="FFFFFF"/>
+                </a:solidFill>
+              </a:rPr>
+              <a:t>High-speed key-value linking of Account No to Name.</a:t>
             </a:r>
           </a:p>
         </p:txBody>
       </p:sp>
       <p:pic>
         <p:nvPicPr>
-          <p:cNvPr id="9" name="Picture 8" descr="dsa_algorithms_3d_1791045841436.jpg"/>
+          <p:cNvPr id="6" name="Picture 5" descr="dsa_algorithms_3d_1791045841436.jpg"/>
           <p:cNvPicPr>
             <a:picLocks noChangeAspect="1"/>
           </p:cNvPicPr>
@@ -3816,8 +3614,8 @@
         </p:blipFill>
         <p:spPr>
           <a:xfrm>
-            <a:off x="6309360" y="1371600"/>
-            <a:ext cx="5120640" cy="4937760"/>
+            <a:off x="6583680" y="1463040"/>
+            <a:ext cx="4663440" cy="4572000"/>
           </a:xfrm>
           <a:prstGeom prst="rect">
             <a:avLst/>
@@ -3830,7 +3628,7 @@
     <a:masterClrMapping/>
   </p:clrMapOvr>
   <p:transition spd="fast">
-    <p:wheel spokes="4"/>
+    <p:wipe dir="r"/>
   </p:transition>
 </p:sld>
 </file>
@@ -3860,7 +3658,7 @@
             <a:avLst/>
           </a:prstGeom>
           <a:solidFill>
-            <a:srgbClr val="070B16"/>
+            <a:srgbClr val="0A0F1D"/>
           </a:solidFill>
           <a:ln>
             <a:noFill/>
@@ -3896,8 +3694,8 @@
         </p:nvSpPr>
         <p:spPr>
           <a:xfrm>
-            <a:off x="731520" y="347472"/>
-            <a:ext cx="10728655" cy="36576"/>
+            <a:off x="914400" y="457200"/>
+            <a:ext cx="10362895" cy="27432"/>
           </a:xfrm>
           <a:prstGeom prst="rect">
             <a:avLst/>
@@ -3939,8 +3737,8 @@
         </p:nvSpPr>
         <p:spPr>
           <a:xfrm>
-            <a:off x="731520" y="411480"/>
-            <a:ext cx="10728655" cy="274320"/>
+            <a:off x="914400" y="594360"/>
+            <a:ext cx="10362895" cy="731520"/>
           </a:xfrm>
           <a:prstGeom prst="rect">
             <a:avLst/>
@@ -3954,15 +3752,28 @@
           <a:lstStyle/>
           <a:p>
             <a:pPr>
-              <a:defRPr sz="1100" b="1">
-                <a:solidFill>
-                  <a:srgbClr val="06B6D4"/>
-                </a:solidFill>
-                <a:latin typeface="Arial"/>
+              <a:defRPr sz="2600" b="1">
+                <a:solidFill>
+                  <a:srgbClr val="FFFFFF"/>
+                </a:solidFill>
+                <a:latin typeface="Calibri"/>
               </a:defRPr>
             </a:pPr>
             <a:r>
-              <a:t>REACT 19 + VITE 8 UI ENGINEERING</a:t>
+              <a:t>Modern Web Dashboard &amp; User Experience</a:t>
+            </a:r>
+          </a:p>
+          <a:p>
+            <a:pPr>
+              <a:defRPr sz="1300">
+                <a:solidFill>
+                  <a:srgbClr val="38BDF8"/>
+                </a:solidFill>
+                <a:latin typeface="Calibri"/>
+              </a:defRPr>
+            </a:pPr>
+            <a:r>
+              <a:t>React 19 + Vite 8 UI Engineering</a:t>
             </a:r>
           </a:p>
         </p:txBody>
@@ -3975,8 +3786,8 @@
         </p:nvSpPr>
         <p:spPr>
           <a:xfrm>
-            <a:off x="731520" y="685800"/>
-            <a:ext cx="10728655" cy="594360"/>
+            <a:off x="914400" y="1645920"/>
+            <a:ext cx="5303520" cy="4572000"/>
           </a:xfrm>
           <a:prstGeom prst="rect">
             <a:avLst/>
@@ -3988,201 +3799,104 @@
             <a:spAutoFit/>
           </a:bodyPr>
           <a:lstStyle/>
-          <a:p>
-            <a:pPr>
-              <a:defRPr sz="2400" b="1">
-                <a:solidFill>
-                  <a:srgbClr val="F8FAFC"/>
-                </a:solidFill>
-                <a:latin typeface="Arial"/>
-              </a:defRPr>
-            </a:pPr>
-            <a:r>
-              <a:t>Modern Web Dashboard &amp; User Experience</a:t>
-            </a:r>
-          </a:p>
-        </p:txBody>
-      </p:sp>
-      <p:sp>
-        <p:nvSpPr>
-          <p:cNvPr id="6" name="Rounded Rectangle 5"/>
-          <p:cNvSpPr/>
-          <p:nvPr/>
-        </p:nvSpPr>
-        <p:spPr>
-          <a:xfrm>
-            <a:off x="731520" y="1371600"/>
-            <a:ext cx="5120640" cy="4937760"/>
-          </a:xfrm>
-          <a:prstGeom prst="roundRect">
-            <a:avLst/>
-          </a:prstGeom>
-          <a:solidFill>
-            <a:srgbClr val="10182C"/>
-          </a:solidFill>
-          <a:ln w="19050">
-            <a:solidFill>
-              <a:srgbClr val="1A2644"/>
-            </a:solidFill>
-          </a:ln>
-        </p:spPr>
-        <p:style>
-          <a:lnRef idx="1">
-            <a:schemeClr val="accent1"/>
-          </a:lnRef>
-          <a:fillRef idx="3">
-            <a:schemeClr val="accent1"/>
-          </a:fillRef>
-          <a:effectRef idx="2">
-            <a:schemeClr val="accent1"/>
-          </a:effectRef>
-          <a:fontRef idx="minor">
-            <a:schemeClr val="lt1"/>
-          </a:fontRef>
-        </p:style>
-        <p:txBody>
-          <a:bodyPr rtlCol="0" anchor="ctr"/>
-          <a:lstStyle/>
-          <a:p>
-            <a:pPr algn="ctr"/>
-          </a:p>
-        </p:txBody>
-      </p:sp>
-      <p:sp>
-        <p:nvSpPr>
-          <p:cNvPr id="7" name="TextBox 6"/>
-          <p:cNvSpPr txBox="1"/>
-          <p:nvPr/>
-        </p:nvSpPr>
-        <p:spPr>
-          <a:xfrm>
-            <a:off x="914400" y="1508760"/>
-            <a:ext cx="4754880" cy="365760"/>
-          </a:xfrm>
-          <a:prstGeom prst="rect">
-            <a:avLst/>
-          </a:prstGeom>
-          <a:noFill/>
-        </p:spPr>
-        <p:txBody>
-          <a:bodyPr wrap="square">
-            <a:spAutoFit/>
-          </a:bodyPr>
-          <a:lstStyle/>
-          <a:p>
-            <a:pPr>
-              <a:defRPr sz="1500" b="1">
-                <a:solidFill>
-                  <a:srgbClr val="F59E0B"/>
-                </a:solidFill>
-                <a:latin typeface="Arial"/>
-              </a:defRPr>
-            </a:pPr>
-            <a:r>
-              <a:t>User Experience Innovations</a:t>
-            </a:r>
-          </a:p>
-        </p:txBody>
-      </p:sp>
-      <p:sp>
-        <p:nvSpPr>
-          <p:cNvPr id="8" name="TextBox 7"/>
-          <p:cNvSpPr txBox="1"/>
-          <p:nvPr/>
-        </p:nvSpPr>
-        <p:spPr>
-          <a:xfrm>
-            <a:off x="914400" y="1920240"/>
-            <a:ext cx="4754880" cy="4206240"/>
-          </a:xfrm>
-          <a:prstGeom prst="rect">
-            <a:avLst/>
-          </a:prstGeom>
-          <a:noFill/>
-        </p:spPr>
-        <p:txBody>
-          <a:bodyPr wrap="square">
-            <a:spAutoFit/>
-          </a:bodyPr>
-          <a:lstStyle/>
           <a:p/>
           <a:p>
-            <a:r>
-              <a:rPr b="1" sz="1300">
-                <a:solidFill>
-                  <a:srgbClr val="F8FAFC"/>
-                </a:solidFill>
-              </a:rPr>
-              <a:t>• Initial 6-Account Pagination: </a:t>
-            </a:r>
-            <a:r>
-              <a:rPr sz="1300">
-                <a:solidFill>
-                  <a:srgbClr val="94A3B8"/>
-                </a:solidFill>
-              </a:rPr>
-              <a:t>Renders first 6 accounts on load (`slice(0, 6)`) to maintain clean visual balance.</a:t>
-            </a:r>
-          </a:p>
-          <a:p>
-            <a:r>
-              <a:rPr b="1" sz="1300">
-                <a:solidFill>
-                  <a:srgbClr val="F8FAFC"/>
-                </a:solidFill>
-              </a:rPr>
-              <a:t>• Interactive 'Show More' Toggle: </a:t>
-            </a:r>
-            <a:r>
-              <a:rPr sz="1300">
-                <a:solidFill>
-                  <a:srgbClr val="94A3B8"/>
-                </a:solidFill>
-              </a:rPr>
-              <a:t>Expands to show all remaining accounts upon click and toggles to 'Show Less' to collapse.</a:t>
-            </a:r>
-          </a:p>
-          <a:p>
-            <a:r>
-              <a:rPr b="1" sz="1300">
-                <a:solidFill>
-                  <a:srgbClr val="F8FAFC"/>
-                </a:solidFill>
-              </a:rPr>
-              <a:t>• Money Studio &amp; Presets: </a:t>
-            </a:r>
-            <a:r>
-              <a:rPr sz="1300">
-                <a:solidFill>
-                  <a:srgbClr val="94A3B8"/>
-                </a:solidFill>
-              </a:rPr>
-              <a:t>Dedicated deposit/withdrawal cards with quick presets (+₹500, +₹1,000, +₹5,000, +₹10,000).</a:t>
-            </a:r>
-          </a:p>
-          <a:p>
-            <a:r>
-              <a:rPr b="1" sz="1300">
-                <a:solidFill>
-                  <a:srgbClr val="F8FAFC"/>
-                </a:solidFill>
-              </a:rPr>
-              <a:t>• Confetti &amp; Feedback: </a:t>
-            </a:r>
-            <a:r>
-              <a:rPr sz="1300">
-                <a:solidFill>
-                  <a:srgbClr val="94A3B8"/>
-                </a:solidFill>
-              </a:rPr>
-              <a:t>Interactive particle celebrations on successful transactions and floating toast alert alerts.</a:t>
+            <a:pPr>
+              <a:spcAft>
+                <a:spcPts val="1800"/>
+              </a:spcAft>
+            </a:pPr>
+            <a:r>
+              <a:rPr b="1" sz="1500">
+                <a:solidFill>
+                  <a:srgbClr val="FBBF24"/>
+                </a:solidFill>
+              </a:rPr>
+              <a:t>•  Initial 6-Account Display: </a:t>
+            </a:r>
+            <a:r>
+              <a:rPr sz="1500">
+                <a:solidFill>
+                  <a:srgbClr val="FFFFFF"/>
+                </a:solidFill>
+              </a:rPr>
+              <a:t>Renders only first 6 accounts on load for visual cleanliness.</a:t>
+            </a:r>
+          </a:p>
+          <a:p>
+            <a:pPr>
+              <a:spcAft>
+                <a:spcPts val="1800"/>
+              </a:spcAft>
+            </a:pPr>
+            <a:r>
+              <a:rPr b="1" sz="1500">
+                <a:solidFill>
+                  <a:srgbClr val="FBBF24"/>
+                </a:solidFill>
+              </a:rPr>
+              <a:t>•  Show More / Show Less: </a:t>
+            </a:r>
+            <a:r>
+              <a:rPr sz="1500">
+                <a:solidFill>
+                  <a:srgbClr val="FFFFFF"/>
+                </a:solidFill>
+              </a:rPr>
+              <a:t>Interactive toggle expanding to show remaining accounts.</a:t>
+            </a:r>
+          </a:p>
+          <a:p>
+            <a:pPr>
+              <a:spcAft>
+                <a:spcPts val="1800"/>
+              </a:spcAft>
+            </a:pPr>
+            <a:r>
+              <a:rPr b="1" sz="1500">
+                <a:solidFill>
+                  <a:srgbClr val="FBBF24"/>
+                </a:solidFill>
+              </a:rPr>
+              <a:t>•  Money Studio: </a:t>
+            </a:r>
+            <a:r>
+              <a:rPr sz="1500">
+                <a:solidFill>
+                  <a:srgbClr val="FFFFFF"/>
+                </a:solidFill>
+              </a:rPr>
+              <a:t>Deposit and withdraw cards with quick preset amount pills.</a:t>
+            </a:r>
+          </a:p>
+          <a:p>
+            <a:pPr>
+              <a:spcAft>
+                <a:spcPts val="1800"/>
+              </a:spcAft>
+            </a:pPr>
+            <a:r>
+              <a:rPr b="1" sz="1500">
+                <a:solidFill>
+                  <a:srgbClr val="FBBF24"/>
+                </a:solidFill>
+              </a:rPr>
+              <a:t>•  Live Audit History: </a:t>
+            </a:r>
+            <a:r>
+              <a:rPr sz="1500">
+                <a:solidFill>
+                  <a:srgbClr val="FFFFFF"/>
+                </a:solidFill>
+              </a:rPr>
+              <a:t>Instant transaction ledger search with real-time feedback.</a:t>
             </a:r>
           </a:p>
         </p:txBody>
       </p:sp>
       <p:pic>
         <p:nvPicPr>
-          <p:cNvPr id="9" name="Picture 8" descr="web_dashboard_3d_1791045891344.jpg"/>
+          <p:cNvPr id="6" name="Picture 5" descr="web_dashboard_3d_1791045891344.jpg"/>
           <p:cNvPicPr>
             <a:picLocks noChangeAspect="1"/>
           </p:cNvPicPr>
@@ -4196,8 +3910,8 @@
         </p:blipFill>
         <p:spPr>
           <a:xfrm>
-            <a:off x="6309360" y="1371600"/>
-            <a:ext cx="5120640" cy="4937760"/>
+            <a:off x="6583680" y="1463040"/>
+            <a:ext cx="4663440" cy="4572000"/>
           </a:xfrm>
           <a:prstGeom prst="rect">
             <a:avLst/>
@@ -4240,7 +3954,7 @@
             <a:avLst/>
           </a:prstGeom>
           <a:solidFill>
-            <a:srgbClr val="070B16"/>
+            <a:srgbClr val="0A0F1D"/>
           </a:solidFill>
           <a:ln>
             <a:noFill/>
@@ -4276,8 +3990,8 @@
         </p:nvSpPr>
         <p:spPr>
           <a:xfrm>
-            <a:off x="731520" y="347472"/>
-            <a:ext cx="10728655" cy="36576"/>
+            <a:off x="914400" y="457200"/>
+            <a:ext cx="10362895" cy="27432"/>
           </a:xfrm>
           <a:prstGeom prst="rect">
             <a:avLst/>
@@ -4319,8 +4033,8 @@
         </p:nvSpPr>
         <p:spPr>
           <a:xfrm>
-            <a:off x="731520" y="411480"/>
-            <a:ext cx="10728655" cy="274320"/>
+            <a:off x="914400" y="594360"/>
+            <a:ext cx="10362895" cy="731520"/>
           </a:xfrm>
           <a:prstGeom prst="rect">
             <a:avLst/>
@@ -4334,15 +4048,28 @@
           <a:lstStyle/>
           <a:p>
             <a:pPr>
-              <a:defRPr sz="1100" b="1">
-                <a:solidFill>
-                  <a:srgbClr val="06B6D4"/>
-                </a:solidFill>
-                <a:latin typeface="Arial"/>
+              <a:defRPr sz="2600" b="1">
+                <a:solidFill>
+                  <a:srgbClr val="FFFFFF"/>
+                </a:solidFill>
+                <a:latin typeface="Calibri"/>
               </a:defRPr>
             </a:pPr>
             <a:r>
-              <a:t>MONGODB ATLAS &amp; LOCALHOST FALLBACK</a:t>
+              <a:t>Cloud Persistence &amp; Dual-Sync Engine</a:t>
+            </a:r>
+          </a:p>
+          <a:p>
+            <a:pPr>
+              <a:defRPr sz="1300">
+                <a:solidFill>
+                  <a:srgbClr val="38BDF8"/>
+                </a:solidFill>
+                <a:latin typeface="Calibri"/>
+              </a:defRPr>
+            </a:pPr>
+            <a:r>
+              <a:t>MongoDB Atlas &amp; Local Fallback</a:t>
             </a:r>
           </a:p>
         </p:txBody>
@@ -4355,8 +4082,8 @@
         </p:nvSpPr>
         <p:spPr>
           <a:xfrm>
-            <a:off x="731520" y="685800"/>
-            <a:ext cx="10728655" cy="594360"/>
+            <a:off x="914400" y="1645920"/>
+            <a:ext cx="5303520" cy="4572000"/>
           </a:xfrm>
           <a:prstGeom prst="rect">
             <a:avLst/>
@@ -4368,201 +4095,104 @@
             <a:spAutoFit/>
           </a:bodyPr>
           <a:lstStyle/>
-          <a:p>
-            <a:pPr>
-              <a:defRPr sz="2400" b="1">
-                <a:solidFill>
-                  <a:srgbClr val="F8FAFC"/>
-                </a:solidFill>
-                <a:latin typeface="Arial"/>
-              </a:defRPr>
-            </a:pPr>
-            <a:r>
-              <a:t>Cloud Persistence &amp; Dual-Sync Engine</a:t>
-            </a:r>
-          </a:p>
-        </p:txBody>
-      </p:sp>
-      <p:sp>
-        <p:nvSpPr>
-          <p:cNvPr id="6" name="Rounded Rectangle 5"/>
-          <p:cNvSpPr/>
-          <p:nvPr/>
-        </p:nvSpPr>
-        <p:spPr>
-          <a:xfrm>
-            <a:off x="731520" y="1371600"/>
-            <a:ext cx="5120640" cy="4937760"/>
-          </a:xfrm>
-          <a:prstGeom prst="roundRect">
-            <a:avLst/>
-          </a:prstGeom>
-          <a:solidFill>
-            <a:srgbClr val="10182C"/>
-          </a:solidFill>
-          <a:ln w="19050">
-            <a:solidFill>
-              <a:srgbClr val="1A2644"/>
-            </a:solidFill>
-          </a:ln>
-        </p:spPr>
-        <p:style>
-          <a:lnRef idx="1">
-            <a:schemeClr val="accent1"/>
-          </a:lnRef>
-          <a:fillRef idx="3">
-            <a:schemeClr val="accent1"/>
-          </a:fillRef>
-          <a:effectRef idx="2">
-            <a:schemeClr val="accent1"/>
-          </a:effectRef>
-          <a:fontRef idx="minor">
-            <a:schemeClr val="lt1"/>
-          </a:fontRef>
-        </p:style>
-        <p:txBody>
-          <a:bodyPr rtlCol="0" anchor="ctr"/>
-          <a:lstStyle/>
-          <a:p>
-            <a:pPr algn="ctr"/>
-          </a:p>
-        </p:txBody>
-      </p:sp>
-      <p:sp>
-        <p:nvSpPr>
-          <p:cNvPr id="7" name="TextBox 6"/>
-          <p:cNvSpPr txBox="1"/>
-          <p:nvPr/>
-        </p:nvSpPr>
-        <p:spPr>
-          <a:xfrm>
-            <a:off x="914400" y="1508760"/>
-            <a:ext cx="4754880" cy="365760"/>
-          </a:xfrm>
-          <a:prstGeom prst="rect">
-            <a:avLst/>
-          </a:prstGeom>
-          <a:noFill/>
-        </p:spPr>
-        <p:txBody>
-          <a:bodyPr wrap="square">
-            <a:spAutoFit/>
-          </a:bodyPr>
-          <a:lstStyle/>
-          <a:p>
-            <a:pPr>
-              <a:defRPr sz="1500" b="1">
-                <a:solidFill>
-                  <a:srgbClr val="10B981"/>
-                </a:solidFill>
-                <a:latin typeface="Arial"/>
-              </a:defRPr>
-            </a:pPr>
-            <a:r>
-              <a:t>Dual-Persistence Architecture</a:t>
-            </a:r>
-          </a:p>
-        </p:txBody>
-      </p:sp>
-      <p:sp>
-        <p:nvSpPr>
-          <p:cNvPr id="8" name="TextBox 7"/>
-          <p:cNvSpPr txBox="1"/>
-          <p:nvPr/>
-        </p:nvSpPr>
-        <p:spPr>
-          <a:xfrm>
-            <a:off x="914400" y="1920240"/>
-            <a:ext cx="4754880" cy="4206240"/>
-          </a:xfrm>
-          <a:prstGeom prst="rect">
-            <a:avLst/>
-          </a:prstGeom>
-          <a:noFill/>
-        </p:spPr>
-        <p:txBody>
-          <a:bodyPr wrap="square">
-            <a:spAutoFit/>
-          </a:bodyPr>
-          <a:lstStyle/>
           <a:p/>
           <a:p>
-            <a:r>
-              <a:rPr b="1" sz="1300">
-                <a:solidFill>
-                  <a:srgbClr val="F8FAFC"/>
-                </a:solidFill>
-              </a:rPr>
-              <a:t>• MongoDB Atlas Cloud: </a:t>
-            </a:r>
-            <a:r>
-              <a:rPr sz="1300">
-                <a:solidFill>
-                  <a:srgbClr val="94A3B8"/>
-                </a:solidFill>
-              </a:rPr>
-              <a:t>Primary cloud cluster storing accounts and transaction audit history with Mongoose schema validation.</a:t>
-            </a:r>
-          </a:p>
-          <a:p>
-            <a:r>
-              <a:rPr b="1" sz="1300">
-                <a:solidFill>
-                  <a:srgbClr val="F8FAFC"/>
-                </a:solidFill>
-              </a:rPr>
-              <a:t>• Zero-Downtime Fallback: </a:t>
-            </a:r>
-            <a:r>
-              <a:rPr sz="1300">
-                <a:solidFill>
-                  <a:srgbClr val="94A3B8"/>
-                </a:solidFill>
-              </a:rPr>
-              <a:t>If cloud is unreachable, backend auto-switches to local `data.json` without interrupting user transactions.</a:t>
-            </a:r>
-          </a:p>
-          <a:p>
-            <a:r>
-              <a:rPr b="1" sz="1300">
-                <a:solidFill>
-                  <a:srgbClr val="F8FAFC"/>
-                </a:solidFill>
-              </a:rPr>
-              <a:t>• Integer Currency Accuracy: </a:t>
-            </a:r>
-            <a:r>
-              <a:rPr sz="1300">
-                <a:solidFill>
-                  <a:srgbClr val="94A3B8"/>
-                </a:solidFill>
-              </a:rPr>
-              <a:t>Calculates in integer paise (`balancePaise`) to eliminate floating-point rounding errors.</a:t>
-            </a:r>
-          </a:p>
-          <a:p>
-            <a:r>
-              <a:rPr b="1" sz="1300">
-                <a:solidFill>
-                  <a:srgbClr val="F8FAFC"/>
-                </a:solidFill>
-              </a:rPr>
-              <a:t>• Instant Reconnect: </a:t>
-            </a:r>
-            <a:r>
-              <a:rPr sz="1300">
-                <a:solidFill>
-                  <a:srgbClr val="94A3B8"/>
-                </a:solidFill>
-              </a:rPr>
-              <a:t>One-click reconnect button on dashboard to re-synchronize local data with MongoDB Atlas.</a:t>
+            <a:pPr>
+              <a:spcAft>
+                <a:spcPts val="1800"/>
+              </a:spcAft>
+            </a:pPr>
+            <a:r>
+              <a:rPr b="1" sz="1500">
+                <a:solidFill>
+                  <a:srgbClr val="34D399"/>
+                </a:solidFill>
+              </a:rPr>
+              <a:t>•  MongoDB Atlas Cloud: </a:t>
+            </a:r>
+            <a:r>
+              <a:rPr sz="1500">
+                <a:solidFill>
+                  <a:srgbClr val="FFFFFF"/>
+                </a:solidFill>
+              </a:rPr>
+              <a:t>Primary cloud storage for accounts and audit ledger.</a:t>
+            </a:r>
+          </a:p>
+          <a:p>
+            <a:pPr>
+              <a:spcAft>
+                <a:spcPts val="1800"/>
+              </a:spcAft>
+            </a:pPr>
+            <a:r>
+              <a:rPr b="1" sz="1500">
+                <a:solidFill>
+                  <a:srgbClr val="34D399"/>
+                </a:solidFill>
+              </a:rPr>
+              <a:t>•  Zero-Downtime Fallback: </a:t>
+            </a:r>
+            <a:r>
+              <a:rPr sz="1500">
+                <a:solidFill>
+                  <a:srgbClr val="FFFFFF"/>
+                </a:solidFill>
+              </a:rPr>
+              <a:t>Auto-switches to local `data.json` if cloud connection drops.</a:t>
+            </a:r>
+          </a:p>
+          <a:p>
+            <a:pPr>
+              <a:spcAft>
+                <a:spcPts val="1800"/>
+              </a:spcAft>
+            </a:pPr>
+            <a:r>
+              <a:rPr b="1" sz="1500">
+                <a:solidFill>
+                  <a:srgbClr val="34D399"/>
+                </a:solidFill>
+              </a:rPr>
+              <a:t>•  Integer Currency Accuracy: </a:t>
+            </a:r>
+            <a:r>
+              <a:rPr sz="1500">
+                <a:solidFill>
+                  <a:srgbClr val="FFFFFF"/>
+                </a:solidFill>
+              </a:rPr>
+              <a:t>Calculates in integer paise to eliminate floating-point errors.</a:t>
+            </a:r>
+          </a:p>
+          <a:p>
+            <a:pPr>
+              <a:spcAft>
+                <a:spcPts val="1800"/>
+              </a:spcAft>
+            </a:pPr>
+            <a:r>
+              <a:rPr b="1" sz="1500">
+                <a:solidFill>
+                  <a:srgbClr val="34D399"/>
+                </a:solidFill>
+              </a:rPr>
+              <a:t>•  One-Click Reconnect: </a:t>
+            </a:r>
+            <a:r>
+              <a:rPr sz="1500">
+                <a:solidFill>
+                  <a:srgbClr val="FFFFFF"/>
+                </a:solidFill>
+              </a:rPr>
+              <a:t>Instant cloud re-sync from web dashboard status indicator.</a:t>
             </a:r>
           </a:p>
         </p:txBody>
       </p:sp>
       <p:pic>
         <p:nvPicPr>
-          <p:cNvPr id="9" name="Picture 8" descr="cloud_database_3d_1791045866367.jpg"/>
+          <p:cNvPr id="6" name="Picture 5" descr="cloud_database_3d_1791045866367.jpg"/>
           <p:cNvPicPr>
             <a:picLocks noChangeAspect="1"/>
           </p:cNvPicPr>
@@ -4576,8 +4206,8 @@
         </p:blipFill>
         <p:spPr>
           <a:xfrm>
-            <a:off x="6309360" y="1371600"/>
-            <a:ext cx="5120640" cy="4937760"/>
+            <a:off x="6583680" y="1463040"/>
+            <a:ext cx="4572000" cy="4572000"/>
           </a:xfrm>
           <a:prstGeom prst="rect">
             <a:avLst/>
@@ -4620,7 +4250,7 @@
             <a:avLst/>
           </a:prstGeom>
           <a:solidFill>
-            <a:srgbClr val="070B16"/>
+            <a:srgbClr val="0A0F1D"/>
           </a:solidFill>
           <a:ln>
             <a:noFill/>
@@ -4656,8 +4286,8 @@
         </p:nvSpPr>
         <p:spPr>
           <a:xfrm>
-            <a:off x="731520" y="347472"/>
-            <a:ext cx="10728655" cy="36576"/>
+            <a:off x="914400" y="457200"/>
+            <a:ext cx="10362895" cy="27432"/>
           </a:xfrm>
           <a:prstGeom prst="rect">
             <a:avLst/>
@@ -4699,8 +4329,8 @@
         </p:nvSpPr>
         <p:spPr>
           <a:xfrm>
-            <a:off x="731520" y="411480"/>
-            <a:ext cx="10728655" cy="274320"/>
+            <a:off x="914400" y="594360"/>
+            <a:ext cx="10362895" cy="731520"/>
           </a:xfrm>
           <a:prstGeom prst="rect">
             <a:avLst/>
@@ -4714,66 +4344,43 @@
           <a:lstStyle/>
           <a:p>
             <a:pPr>
-              <a:defRPr sz="1100" b="1">
-                <a:solidFill>
-                  <a:srgbClr val="06B6D4"/>
-                </a:solidFill>
-                <a:latin typeface="Arial"/>
+              <a:defRPr sz="2600" b="1">
+                <a:solidFill>
+                  <a:srgbClr val="FFFFFF"/>
+                </a:solidFill>
+                <a:latin typeface="Calibri"/>
               </a:defRPr>
             </a:pPr>
             <a:r>
-              <a:t>MODULE VII — THEORETICAL &amp; PRACTICAL BENCHMARKS</a:t>
-            </a:r>
-          </a:p>
-        </p:txBody>
-      </p:sp>
-      <p:sp>
-        <p:nvSpPr>
-          <p:cNvPr id="5" name="TextBox 4"/>
-          <p:cNvSpPr txBox="1"/>
-          <p:nvPr/>
-        </p:nvSpPr>
-        <p:spPr>
-          <a:xfrm>
-            <a:off x="731520" y="685800"/>
-            <a:ext cx="10728655" cy="594360"/>
-          </a:xfrm>
-          <a:prstGeom prst="rect">
-            <a:avLst/>
-          </a:prstGeom>
-          <a:noFill/>
-        </p:spPr>
-        <p:txBody>
-          <a:bodyPr wrap="square">
-            <a:spAutoFit/>
-          </a:bodyPr>
-          <a:lstStyle/>
-          <a:p>
-            <a:pPr>
-              <a:defRPr sz="2400" b="1">
-                <a:solidFill>
-                  <a:srgbClr val="F8FAFC"/>
-                </a:solidFill>
-                <a:latin typeface="Arial"/>
+              <a:t>Algorithm Complexity Summary</a:t>
+            </a:r>
+          </a:p>
+          <a:p>
+            <a:pPr>
+              <a:defRPr sz="1300">
+                <a:solidFill>
+                  <a:srgbClr val="38BDF8"/>
+                </a:solidFill>
+                <a:latin typeface="Calibri"/>
               </a:defRPr>
             </a:pPr>
             <a:r>
-              <a:t>Algorithm Complexity &amp; Performance Analysis</a:t>
+              <a:t>Theoretical &amp; Practical Benchmarks</a:t>
             </a:r>
           </a:p>
         </p:txBody>
       </p:sp>
       <p:graphicFrame>
         <p:nvGraphicFramePr>
-          <p:cNvPr id="6" name="Table 5"/>
+          <p:cNvPr id="5" name="Table 4"/>
           <p:cNvGraphicFramePr>
             <a:graphicFrameLocks noGrp="1"/>
           </p:cNvGraphicFramePr>
           <p:nvPr/>
         </p:nvGraphicFramePr>
         <p:xfrm>
-          <a:off x="731520" y="1371600"/>
-          <a:ext cx="10728655" cy="4937760"/>
+          <a:off x="914400" y="1645920"/>
+          <a:ext cx="10362895" cy="4389120"/>
         </p:xfrm>
         <a:graphic>
           <a:graphicData uri="http://schemas.openxmlformats.org/drawingml/2006/table">
@@ -4782,27 +4389,26 @@
                 <a:tableStyleId>{5C22544A-7EE6-4342-B048-85BDC9FD1C3A}</a:tableStyleId>
               </a:tblPr>
               <a:tblGrid>
-                <a:gridCol w="2377440"/>
-                <a:gridCol w="2011680"/>
-                <a:gridCol w="2011680"/>
-                <a:gridCol w="1645920"/>
-                <a:gridCol w="2681935"/>
+                <a:gridCol w="2926080"/>
+                <a:gridCol w="2103120"/>
+                <a:gridCol w="2103120"/>
+                <a:gridCol w="3230575"/>
               </a:tblGrid>
-              <a:tr h="705394">
+              <a:tr h="627017">
                 <a:tc>
                   <a:txBody>
                     <a:bodyPr/>
                     <a:lstStyle/>
                     <a:p>
                       <a:pPr>
-                        <a:defRPr b="1" sz="1200">
+                        <a:defRPr b="1" sz="1300">
                           <a:solidFill>
-                            <a:srgbClr val="F8FAFC"/>
+                            <a:srgbClr val="FFFFFF"/>
                           </a:solidFill>
                         </a:defRPr>
                       </a:pPr>
                       <a:r>
-                        <a:t>Algorithm / Operation</a:t>
+                        <a:t>Operation / Algorithm</a:t>
                       </a:r>
                     </a:p>
                   </a:txBody>
@@ -4818,14 +4424,14 @@
                     <a:lstStyle/>
                     <a:p>
                       <a:pPr>
-                        <a:defRPr b="1" sz="1200">
+                        <a:defRPr b="1" sz="1300">
                           <a:solidFill>
-                            <a:srgbClr val="F8FAFC"/>
+                            <a:srgbClr val="FFFFFF"/>
                           </a:solidFill>
                         </a:defRPr>
                       </a:pPr>
                       <a:r>
-                        <a:t>Best Time</a:t>
+                        <a:t>Time Complexity</a:t>
                       </a:r>
                     </a:p>
                   </a:txBody>
@@ -4841,14 +4447,14 @@
                     <a:lstStyle/>
                     <a:p>
                       <a:pPr>
-                        <a:defRPr b="1" sz="1200">
+                        <a:defRPr b="1" sz="1300">
                           <a:solidFill>
-                            <a:srgbClr val="F8FAFC"/>
+                            <a:srgbClr val="FFFFFF"/>
                           </a:solidFill>
                         </a:defRPr>
                       </a:pPr>
                       <a:r>
-                        <a:t>Worst Time</a:t>
+                        <a:t>Space Complexity</a:t>
                       </a:r>
                     </a:p>
                   </a:txBody>
@@ -4864,37 +4470,14 @@
                     <a:lstStyle/>
                     <a:p>
                       <a:pPr>
-                        <a:defRPr b="1" sz="1200">
+                        <a:defRPr b="1" sz="1300">
                           <a:solidFill>
-                            <a:srgbClr val="F8FAFC"/>
+                            <a:srgbClr val="FFFFFF"/>
                           </a:solidFill>
                         </a:defRPr>
                       </a:pPr>
                       <a:r>
-                        <a:t>Aux Space</a:t>
-                      </a:r>
-                    </a:p>
-                  </a:txBody>
-                  <a:tcPr>
-                    <a:solidFill>
-                      <a:srgbClr val="6366F1"/>
-                    </a:solidFill>
-                  </a:tcPr>
-                </a:tc>
-                <a:tc>
-                  <a:txBody>
-                    <a:bodyPr/>
-                    <a:lstStyle/>
-                    <a:p>
-                      <a:pPr>
-                        <a:defRPr b="1" sz="1200">
-                          <a:solidFill>
-                            <a:srgbClr val="F8FAFC"/>
-                          </a:solidFill>
-                        </a:defRPr>
-                      </a:pPr>
-                      <a:r>
-                        <a:t>Practical Application in Project</a:t>
+                        <a:t>Application</a:t>
                       </a:r>
                     </a:p>
                   </a:txBody>
@@ -4905,16 +4488,16 @@
                   </a:tcPr>
                 </a:tc>
               </a:tr>
-              <a:tr h="705394">
+              <a:tr h="627017">
                 <a:tc>
                   <a:txBody>
                     <a:bodyPr/>
                     <a:lstStyle/>
                     <a:p>
                       <a:pPr>
-                        <a:defRPr sz="1100">
+                        <a:defRPr sz="1200">
                           <a:solidFill>
-                            <a:srgbClr val="F8FAFC"/>
+                            <a:srgbClr val="FFFFFF"/>
                           </a:solidFill>
                         </a:defRPr>
                       </a:pPr>
@@ -4935,14 +4518,14 @@
                     <a:lstStyle/>
                     <a:p>
                       <a:pPr>
-                        <a:defRPr sz="1100">
+                        <a:defRPr sz="1200">
                           <a:solidFill>
-                            <a:srgbClr val="F8FAFC"/>
+                            <a:srgbClr val="FFFFFF"/>
                           </a:solidFill>
                         </a:defRPr>
                       </a:pPr>
                       <a:r>
-                        <a:t>O(1) (First element)</a:t>
+                        <a:t>O(n)</a:t>
                       </a:r>
                     </a:p>
                   </a:txBody>
@@ -4958,32 +4541,9 @@
                     <a:lstStyle/>
                     <a:p>
                       <a:pPr>
-                        <a:defRPr sz="1100">
+                        <a:defRPr sz="1200">
                           <a:solidFill>
-                            <a:srgbClr val="F8FAFC"/>
-                          </a:solidFill>
-                        </a:defRPr>
-                      </a:pPr>
-                      <a:r>
-                        <a:t>O(n) (Last element)</a:t>
-                      </a:r>
-                    </a:p>
-                  </a:txBody>
-                  <a:tcPr>
-                    <a:solidFill>
-                      <a:srgbClr val="10182C"/>
-                    </a:solidFill>
-                  </a:tcPr>
-                </a:tc>
-                <a:tc>
-                  <a:txBody>
-                    <a:bodyPr/>
-                    <a:lstStyle/>
-                    <a:p>
-                      <a:pPr>
-                        <a:defRPr sz="1100">
-                          <a:solidFill>
-                            <a:srgbClr val="F8FAFC"/>
+                            <a:srgbClr val="FFFFFF"/>
                           </a:solidFill>
                         </a:defRPr>
                       </a:pPr>
@@ -5004,14 +4564,14 @@
                     <a:lstStyle/>
                     <a:p>
                       <a:pPr>
-                        <a:defRPr sz="1100">
+                        <a:defRPr sz="1200">
                           <a:solidFill>
-                            <a:srgbClr val="F8FAFC"/>
+                            <a:srgbClr val="FFFFFF"/>
                           </a:solidFill>
                         </a:defRPr>
                       </a:pPr>
                       <a:r>
-                        <a:t>Duplicate phone validation</a:t>
+                        <a:t>Checking duplicate phone numbers</a:t>
                       </a:r>
                     </a:p>
                   </a:txBody>
@@ -5022,16 +4582,16 @@
                   </a:tcPr>
                 </a:tc>
               </a:tr>
-              <a:tr h="705394">
+              <a:tr h="627017">
                 <a:tc>
                   <a:txBody>
                     <a:bodyPr/>
                     <a:lstStyle/>
                     <a:p>
                       <a:pPr>
-                        <a:defRPr sz="1100">
+                        <a:defRPr sz="1200">
                           <a:solidFill>
-                            <a:srgbClr val="F8FAFC"/>
+                            <a:srgbClr val="FFFFFF"/>
                           </a:solidFill>
                         </a:defRPr>
                       </a:pPr>
@@ -5042,7 +4602,7 @@
                   </a:txBody>
                   <a:tcPr>
                     <a:solidFill>
-                      <a:srgbClr val="1A2644"/>
+                      <a:srgbClr val="18223C"/>
                     </a:solidFill>
                   </a:tcPr>
                 </a:tc>
@@ -5052,20 +4612,20 @@
                     <a:lstStyle/>
                     <a:p>
                       <a:pPr>
-                        <a:defRPr sz="1100">
+                        <a:defRPr sz="1200">
                           <a:solidFill>
-                            <a:srgbClr val="F8FAFC"/>
+                            <a:srgbClr val="FFFFFF"/>
                           </a:solidFill>
                         </a:defRPr>
                       </a:pPr>
                       <a:r>
-                        <a:t>O(1) (Mid match)</a:t>
+                        <a:t>O(log n)</a:t>
                       </a:r>
                     </a:p>
                   </a:txBody>
                   <a:tcPr>
                     <a:solidFill>
-                      <a:srgbClr val="1A2644"/>
+                      <a:srgbClr val="18223C"/>
                     </a:solidFill>
                   </a:tcPr>
                 </a:tc>
@@ -5075,32 +4635,9 @@
                     <a:lstStyle/>
                     <a:p>
                       <a:pPr>
-                        <a:defRPr sz="1100">
+                        <a:defRPr sz="1200">
                           <a:solidFill>
-                            <a:srgbClr val="F8FAFC"/>
-                          </a:solidFill>
-                        </a:defRPr>
-                      </a:pPr>
-                      <a:r>
-                        <a:t>O(log n) (Subdivisions)</a:t>
-                      </a:r>
-                    </a:p>
-                  </a:txBody>
-                  <a:tcPr>
-                    <a:solidFill>
-                      <a:srgbClr val="1A2644"/>
-                    </a:solidFill>
-                  </a:tcPr>
-                </a:tc>
-                <a:tc>
-                  <a:txBody>
-                    <a:bodyPr/>
-                    <a:lstStyle/>
-                    <a:p>
-                      <a:pPr>
-                        <a:defRPr sz="1100">
-                          <a:solidFill>
-                            <a:srgbClr val="F8FAFC"/>
+                            <a:srgbClr val="FFFFFF"/>
                           </a:solidFill>
                         </a:defRPr>
                       </a:pPr>
@@ -5111,7 +4648,7 @@
                   </a:txBody>
                   <a:tcPr>
                     <a:solidFill>
-                      <a:srgbClr val="1A2644"/>
+                      <a:srgbClr val="18223C"/>
                     </a:solidFill>
                   </a:tcPr>
                 </a:tc>
@@ -5121,34 +4658,34 @@
                     <a:lstStyle/>
                     <a:p>
                       <a:pPr>
-                        <a:defRPr sz="1100">
+                        <a:defRPr sz="1200">
                           <a:solidFill>
-                            <a:srgbClr val="F8FAFC"/>
+                            <a:srgbClr val="FFFFFF"/>
                           </a:solidFill>
                         </a:defRPr>
                       </a:pPr>
                       <a:r>
-                        <a:t>Fast account lookups &amp; deposits</a:t>
+                        <a:t>Instant account lookup &amp; transactions</a:t>
                       </a:r>
                     </a:p>
                   </a:txBody>
                   <a:tcPr>
                     <a:solidFill>
-                      <a:srgbClr val="1A2644"/>
+                      <a:srgbClr val="18223C"/>
                     </a:solidFill>
                   </a:tcPr>
                 </a:tc>
               </a:tr>
-              <a:tr h="705394">
+              <a:tr h="627017">
                 <a:tc>
                   <a:txBody>
                     <a:bodyPr/>
                     <a:lstStyle/>
                     <a:p>
                       <a:pPr>
-                        <a:defRPr sz="1100">
+                        <a:defRPr sz="1200">
                           <a:solidFill>
-                            <a:srgbClr val="F8FAFC"/>
+                            <a:srgbClr val="FFFFFF"/>
                           </a:solidFill>
                         </a:defRPr>
                       </a:pPr>
@@ -5169,14 +4706,14 @@
                     <a:lstStyle/>
                     <a:p>
                       <a:pPr>
-                        <a:defRPr sz="1100">
+                        <a:defRPr sz="1200">
                           <a:solidFill>
-                            <a:srgbClr val="F8FAFC"/>
+                            <a:srgbClr val="FFFFFF"/>
                           </a:solidFill>
                         </a:defRPr>
                       </a:pPr>
                       <a:r>
-                        <a:t>O(n) (Already sorted)</a:t>
+                        <a:t>O(n^2)</a:t>
                       </a:r>
                     </a:p>
                   </a:txBody>
@@ -5192,32 +4729,9 @@
                     <a:lstStyle/>
                     <a:p>
                       <a:pPr>
-                        <a:defRPr sz="1100">
+                        <a:defRPr sz="1200">
                           <a:solidFill>
-                            <a:srgbClr val="F8FAFC"/>
-                          </a:solidFill>
-                        </a:defRPr>
-                      </a:pPr>
-                      <a:r>
-                        <a:t>O(n^2) (Reversed)</a:t>
-                      </a:r>
-                    </a:p>
-                  </a:txBody>
-                  <a:tcPr>
-                    <a:solidFill>
-                      <a:srgbClr val="10182C"/>
-                    </a:solidFill>
-                  </a:tcPr>
-                </a:tc>
-                <a:tc>
-                  <a:txBody>
-                    <a:bodyPr/>
-                    <a:lstStyle/>
-                    <a:p>
-                      <a:pPr>
-                        <a:defRPr sz="1100">
-                          <a:solidFill>
-                            <a:srgbClr val="F8FAFC"/>
+                            <a:srgbClr val="FFFFFF"/>
                           </a:solidFill>
                         </a:defRPr>
                       </a:pPr>
@@ -5238,14 +4752,14 @@
                     <a:lstStyle/>
                     <a:p>
                       <a:pPr>
-                        <a:defRPr sz="1100">
+                        <a:defRPr sz="1200">
                           <a:solidFill>
-                            <a:srgbClr val="F8FAFC"/>
+                            <a:srgbClr val="FFFFFF"/>
                           </a:solidFill>
                         </a:defRPr>
                       </a:pPr>
                       <a:r>
-                        <a:t>Portfolio balance sorting</a:t>
+                        <a:t>Sorting customer accounts by balance</a:t>
                       </a:r>
                     </a:p>
                   </a:txBody>
@@ -5256,16 +4770,16 @@
                   </a:tcPr>
                 </a:tc>
               </a:tr>
-              <a:tr h="705394">
+              <a:tr h="627017">
                 <a:tc>
                   <a:txBody>
                     <a:bodyPr/>
                     <a:lstStyle/>
                     <a:p>
                       <a:pPr>
-                        <a:defRPr sz="1100">
+                        <a:defRPr sz="1200">
                           <a:solidFill>
-                            <a:srgbClr val="F8FAFC"/>
+                            <a:srgbClr val="FFFFFF"/>
                           </a:solidFill>
                         </a:defRPr>
                       </a:pPr>
@@ -5276,7 +4790,7 @@
                   </a:txBody>
                   <a:tcPr>
                     <a:solidFill>
-                      <a:srgbClr val="1A2644"/>
+                      <a:srgbClr val="18223C"/>
                     </a:solidFill>
                   </a:tcPr>
                 </a:tc>
@@ -5286,9 +4800,9 @@
                     <a:lstStyle/>
                     <a:p>
                       <a:pPr>
-                        <a:defRPr sz="1100">
+                        <a:defRPr sz="1200">
                           <a:solidFill>
-                            <a:srgbClr val="F8FAFC"/>
+                            <a:srgbClr val="FFFFFF"/>
                           </a:solidFill>
                         </a:defRPr>
                       </a:pPr>
@@ -5299,7 +4813,7 @@
                   </a:txBody>
                   <a:tcPr>
                     <a:solidFill>
-                      <a:srgbClr val="1A2644"/>
+                      <a:srgbClr val="18223C"/>
                     </a:solidFill>
                   </a:tcPr>
                 </a:tc>
@@ -5309,32 +4823,9 @@
                     <a:lstStyle/>
                     <a:p>
                       <a:pPr>
-                        <a:defRPr sz="1100">
+                        <a:defRPr sz="1200">
                           <a:solidFill>
-                            <a:srgbClr val="F8FAFC"/>
-                          </a:solidFill>
-                        </a:defRPr>
-                      </a:pPr>
-                      <a:r>
-                        <a:t>O(N^3) / O(N^2)</a:t>
-                      </a:r>
-                    </a:p>
-                  </a:txBody>
-                  <a:tcPr>
-                    <a:solidFill>
-                      <a:srgbClr val="1A2644"/>
-                    </a:solidFill>
-                  </a:tcPr>
-                </a:tc>
-                <a:tc>
-                  <a:txBody>
-                    <a:bodyPr/>
-                    <a:lstStyle/>
-                    <a:p>
-                      <a:pPr>
-                        <a:defRPr sz="1100">
-                          <a:solidFill>
-                            <a:srgbClr val="F8FAFC"/>
+                            <a:srgbClr val="FFFFFF"/>
                           </a:solidFill>
                         </a:defRPr>
                       </a:pPr>
@@ -5345,7 +4836,7 @@
                   </a:txBody>
                   <a:tcPr>
                     <a:solidFill>
-                      <a:srgbClr val="1A2644"/>
+                      <a:srgbClr val="18223C"/>
                     </a:solidFill>
                   </a:tcPr>
                 </a:tc>
@@ -5355,34 +4846,34 @@
                     <a:lstStyle/>
                     <a:p>
                       <a:pPr>
-                        <a:defRPr sz="1100">
+                        <a:defRPr sz="1200">
                           <a:solidFill>
-                            <a:srgbClr val="F8FAFC"/>
+                            <a:srgbClr val="FFFFFF"/>
                           </a:solidFill>
                         </a:defRPr>
                       </a:pPr>
                       <a:r>
-                        <a:t>Branch cash flow simulation</a:t>
+                        <a:t>Branch liquidity &amp; cash flow</a:t>
                       </a:r>
                     </a:p>
                   </a:txBody>
                   <a:tcPr>
                     <a:solidFill>
-                      <a:srgbClr val="1A2644"/>
+                      <a:srgbClr val="18223C"/>
                     </a:solidFill>
                   </a:tcPr>
                 </a:tc>
               </a:tr>
-              <a:tr h="705394">
+              <a:tr h="627017">
                 <a:tc>
                   <a:txBody>
                     <a:bodyPr/>
                     <a:lstStyle/>
                     <a:p>
                       <a:pPr>
-                        <a:defRPr sz="1100">
+                        <a:defRPr sz="1200">
                           <a:solidFill>
-                            <a:srgbClr val="F8FAFC"/>
+                            <a:srgbClr val="FFFFFF"/>
                           </a:solidFill>
                         </a:defRPr>
                       </a:pPr>
@@ -5403,9 +4894,9 @@
                     <a:lstStyle/>
                     <a:p>
                       <a:pPr>
-                        <a:defRPr sz="1100">
+                        <a:defRPr sz="1200">
                           <a:solidFill>
-                            <a:srgbClr val="F8FAFC"/>
+                            <a:srgbClr val="FFFFFF"/>
                           </a:solidFill>
                         </a:defRPr>
                       </a:pPr>
@@ -5426,32 +4917,9 @@
                     <a:lstStyle/>
                     <a:p>
                       <a:pPr>
-                        <a:defRPr sz="1100">
+                        <a:defRPr sz="1200">
                           <a:solidFill>
-                            <a:srgbClr val="F8FAFC"/>
-                          </a:solidFill>
-                        </a:defRPr>
-                      </a:pPr>
-                      <a:r>
-                        <a:t>O(1)</a:t>
-                      </a:r>
-                    </a:p>
-                  </a:txBody>
-                  <a:tcPr>
-                    <a:solidFill>
-                      <a:srgbClr val="10182C"/>
-                    </a:solidFill>
-                  </a:tcPr>
-                </a:tc>
-                <a:tc>
-                  <a:txBody>
-                    <a:bodyPr/>
-                    <a:lstStyle/>
-                    <a:p>
-                      <a:pPr>
-                        <a:defRPr sz="1100">
-                          <a:solidFill>
-                            <a:srgbClr val="F8FAFC"/>
+                            <a:srgbClr val="FFFFFF"/>
                           </a:solidFill>
                         </a:defRPr>
                       </a:pPr>
@@ -5472,14 +4940,14 @@
                     <a:lstStyle/>
                     <a:p>
                       <a:pPr>
-                        <a:defRPr sz="1100">
+                        <a:defRPr sz="1200">
                           <a:solidFill>
-                            <a:srgbClr val="F8FAFC"/>
+                            <a:srgbClr val="FFFFFF"/>
                           </a:solidFill>
                         </a:defRPr>
                       </a:pPr>
                       <a:r>
-                        <a:t>Expression validation</a:t>
+                        <a:t>Parentheses formula validation</a:t>
                       </a:r>
                     </a:p>
                   </a:txBody>
@@ -5490,16 +4958,16 @@
                   </a:tcPr>
                 </a:tc>
               </a:tr>
-              <a:tr h="705396">
+              <a:tr h="627018">
                 <a:tc>
                   <a:txBody>
                     <a:bodyPr/>
                     <a:lstStyle/>
                     <a:p>
                       <a:pPr>
-                        <a:defRPr sz="1100">
+                        <a:defRPr sz="1200">
                           <a:solidFill>
-                            <a:srgbClr val="F8FAFC"/>
+                            <a:srgbClr val="FFFFFF"/>
                           </a:solidFill>
                         </a:defRPr>
                       </a:pPr>
@@ -5510,7 +4978,7 @@
                   </a:txBody>
                   <a:tcPr>
                     <a:solidFill>
-                      <a:srgbClr val="1A2644"/>
+                      <a:srgbClr val="18223C"/>
                     </a:solidFill>
                   </a:tcPr>
                 </a:tc>
@@ -5520,9 +4988,9 @@
                     <a:lstStyle/>
                     <a:p>
                       <a:pPr>
-                        <a:defRPr sz="1100">
+                        <a:defRPr sz="1200">
                           <a:solidFill>
-                            <a:srgbClr val="F8FAFC"/>
+                            <a:srgbClr val="FFFFFF"/>
                           </a:solidFill>
                         </a:defRPr>
                       </a:pPr>
@@ -5533,7 +5001,7 @@
                   </a:txBody>
                   <a:tcPr>
                     <a:solidFill>
-                      <a:srgbClr val="1A2644"/>
+                      <a:srgbClr val="18223C"/>
                     </a:solidFill>
                   </a:tcPr>
                 </a:tc>
@@ -5543,32 +5011,9 @@
                     <a:lstStyle/>
                     <a:p>
                       <a:pPr>
-                        <a:defRPr sz="1100">
+                        <a:defRPr sz="1200">
                           <a:solidFill>
-                            <a:srgbClr val="F8FAFC"/>
-                          </a:solidFill>
-                        </a:defRPr>
-                      </a:pPr>
-                      <a:r>
-                        <a:t>O(1)</a:t>
-                      </a:r>
-                    </a:p>
-                  </a:txBody>
-                  <a:tcPr>
-                    <a:solidFill>
-                      <a:srgbClr val="1A2644"/>
-                    </a:solidFill>
-                  </a:tcPr>
-                </a:tc>
-                <a:tc>
-                  <a:txBody>
-                    <a:bodyPr/>
-                    <a:lstStyle/>
-                    <a:p>
-                      <a:pPr>
-                        <a:defRPr sz="1100">
-                          <a:solidFill>
-                            <a:srgbClr val="F8FAFC"/>
+                            <a:srgbClr val="FFFFFF"/>
                           </a:solidFill>
                         </a:defRPr>
                       </a:pPr>
@@ -5579,7 +5024,7 @@
                   </a:txBody>
                   <a:tcPr>
                     <a:solidFill>
-                      <a:srgbClr val="1A2644"/>
+                      <a:srgbClr val="18223C"/>
                     </a:solidFill>
                   </a:tcPr>
                 </a:tc>
@@ -5589,20 +5034,20 @@
                     <a:lstStyle/>
                     <a:p>
                       <a:pPr>
-                        <a:defRPr sz="1100">
+                        <a:defRPr sz="1200">
                           <a:solidFill>
-                            <a:srgbClr val="F8FAFC"/>
+                            <a:srgbClr val="FFFFFF"/>
                           </a:solidFill>
                         </a:defRPr>
                       </a:pPr>
                       <a:r>
-                        <a:t>Teller token dispatch line</a:t>
+                        <a:t>Bank teller token line</a:t>
                       </a:r>
                     </a:p>
                   </a:txBody>
                   <a:tcPr>
                     <a:solidFill>
-                      <a:srgbClr val="1A2644"/>
+                      <a:srgbClr val="18223C"/>
                     </a:solidFill>
                   </a:tcPr>
                 </a:tc>
@@ -5647,7 +5092,7 @@
             <a:avLst/>
           </a:prstGeom>
           <a:solidFill>
-            <a:srgbClr val="070B16"/>
+            <a:srgbClr val="0A0F1D"/>
           </a:solidFill>
           <a:ln>
             <a:noFill/>
@@ -5683,8 +5128,8 @@
         </p:nvSpPr>
         <p:spPr>
           <a:xfrm>
-            <a:off x="731520" y="347472"/>
-            <a:ext cx="10728655" cy="36576"/>
+            <a:off x="914400" y="457200"/>
+            <a:ext cx="10362895" cy="27432"/>
           </a:xfrm>
           <a:prstGeom prst="rect">
             <a:avLst/>
@@ -5726,8 +5171,8 @@
         </p:nvSpPr>
         <p:spPr>
           <a:xfrm>
-            <a:off x="731520" y="411480"/>
-            <a:ext cx="10728655" cy="274320"/>
+            <a:off x="914400" y="594360"/>
+            <a:ext cx="10362895" cy="731520"/>
           </a:xfrm>
           <a:prstGeom prst="rect">
             <a:avLst/>
@@ -5741,15 +5186,28 @@
           <a:lstStyle/>
           <a:p>
             <a:pPr>
-              <a:defRPr sz="1100" b="1">
-                <a:solidFill>
-                  <a:srgbClr val="06B6D4"/>
-                </a:solidFill>
-                <a:latin typeface="Arial"/>
+              <a:defRPr sz="2600" b="1">
+                <a:solidFill>
+                  <a:srgbClr val="FFFFFF"/>
+                </a:solidFill>
+                <a:latin typeface="Calibri"/>
               </a:defRPr>
             </a:pPr>
             <a:r>
-              <a:t>SUMMARY &amp; EVALUATION Q&amp;A</a:t>
+              <a:t>Conclusion &amp; Q&amp;A</a:t>
+            </a:r>
+          </a:p>
+          <a:p>
+            <a:pPr>
+              <a:defRPr sz="1300">
+                <a:solidFill>
+                  <a:srgbClr val="38BDF8"/>
+                </a:solidFill>
+                <a:latin typeface="Calibri"/>
+              </a:defRPr>
+            </a:pPr>
+            <a:r>
+              <a:t>Summary &amp; Evaluation</a:t>
             </a:r>
           </a:p>
         </p:txBody>
@@ -5762,8 +5220,8 @@
         </p:nvSpPr>
         <p:spPr>
           <a:xfrm>
-            <a:off x="731520" y="685800"/>
-            <a:ext cx="10728655" cy="594360"/>
+            <a:off x="914400" y="1645920"/>
+            <a:ext cx="10362895" cy="4572000"/>
           </a:xfrm>
           <a:prstGeom prst="rect">
             <a:avLst/>
@@ -5775,364 +5233,120 @@
             <a:spAutoFit/>
           </a:bodyPr>
           <a:lstStyle/>
-          <a:p>
-            <a:pPr>
-              <a:defRPr sz="2400" b="1">
-                <a:solidFill>
-                  <a:srgbClr val="F8FAFC"/>
-                </a:solidFill>
-                <a:latin typeface="Arial"/>
-              </a:defRPr>
-            </a:pPr>
-            <a:r>
-              <a:t>Conclusion &amp; Future Enhancements</a:t>
-            </a:r>
-          </a:p>
-        </p:txBody>
-      </p:sp>
-      <p:sp>
-        <p:nvSpPr>
-          <p:cNvPr id="6" name="Rounded Rectangle 5"/>
-          <p:cNvSpPr/>
-          <p:nvPr/>
-        </p:nvSpPr>
-        <p:spPr>
-          <a:xfrm>
-            <a:off x="731520" y="1371600"/>
-            <a:ext cx="5120640" cy="4937760"/>
-          </a:xfrm>
-          <a:prstGeom prst="roundRect">
-            <a:avLst/>
-          </a:prstGeom>
-          <a:solidFill>
-            <a:srgbClr val="10182C"/>
-          </a:solidFill>
-          <a:ln w="19050">
-            <a:solidFill>
-              <a:srgbClr val="1A2644"/>
-            </a:solidFill>
-          </a:ln>
-        </p:spPr>
-        <p:style>
-          <a:lnRef idx="1">
-            <a:schemeClr val="accent1"/>
-          </a:lnRef>
-          <a:fillRef idx="3">
-            <a:schemeClr val="accent1"/>
-          </a:fillRef>
-          <a:effectRef idx="2">
-            <a:schemeClr val="accent1"/>
-          </a:effectRef>
-          <a:fontRef idx="minor">
-            <a:schemeClr val="lt1"/>
-          </a:fontRef>
-        </p:style>
-        <p:txBody>
-          <a:bodyPr rtlCol="0" anchor="ctr"/>
-          <a:lstStyle/>
-          <a:p>
-            <a:pPr algn="ctr"/>
-          </a:p>
-        </p:txBody>
-      </p:sp>
-      <p:sp>
-        <p:nvSpPr>
-          <p:cNvPr id="7" name="TextBox 6"/>
-          <p:cNvSpPr txBox="1"/>
-          <p:nvPr/>
-        </p:nvSpPr>
-        <p:spPr>
-          <a:xfrm>
-            <a:off x="914400" y="1508760"/>
-            <a:ext cx="4754880" cy="365760"/>
-          </a:xfrm>
-          <a:prstGeom prst="rect">
-            <a:avLst/>
-          </a:prstGeom>
-          <a:noFill/>
-        </p:spPr>
-        <p:txBody>
-          <a:bodyPr wrap="square">
-            <a:spAutoFit/>
-          </a:bodyPr>
-          <a:lstStyle/>
-          <a:p>
-            <a:pPr>
-              <a:defRPr sz="1500" b="1">
-                <a:solidFill>
-                  <a:srgbClr val="06B6D4"/>
-                </a:solidFill>
-                <a:latin typeface="Arial"/>
-              </a:defRPr>
-            </a:pPr>
-            <a:r>
-              <a:t>Future Scope &amp; Extensions</a:t>
-            </a:r>
-          </a:p>
-        </p:txBody>
-      </p:sp>
-      <p:sp>
-        <p:nvSpPr>
-          <p:cNvPr id="8" name="TextBox 7"/>
-          <p:cNvSpPr txBox="1"/>
-          <p:nvPr/>
-        </p:nvSpPr>
-        <p:spPr>
-          <a:xfrm>
-            <a:off x="914400" y="1920240"/>
-            <a:ext cx="4754880" cy="4206240"/>
-          </a:xfrm>
-          <a:prstGeom prst="rect">
-            <a:avLst/>
-          </a:prstGeom>
-          <a:noFill/>
-        </p:spPr>
-        <p:txBody>
-          <a:bodyPr wrap="square">
-            <a:spAutoFit/>
-          </a:bodyPr>
-          <a:lstStyle/>
           <a:p/>
           <a:p>
-            <a:r>
-              <a:rPr b="1" sz="1300">
-                <a:solidFill>
-                  <a:srgbClr val="F8FAFC"/>
-                </a:solidFill>
-              </a:rPr>
-              <a:t>• AVL / B-Tree Indexing: </a:t>
-            </a:r>
-            <a:r>
-              <a:rPr sz="1300">
-                <a:solidFill>
-                  <a:srgbClr val="94A3B8"/>
-                </a:solidFill>
-              </a:rPr>
-              <a:t>Integrate self-balancing B+ Trees for large-scale disk-based account index lookups.</a:t>
-            </a:r>
-          </a:p>
-          <a:p>
-            <a:r>
-              <a:rPr b="1" sz="1300">
-                <a:solidFill>
-                  <a:srgbClr val="F8FAFC"/>
-                </a:solidFill>
-              </a:rPr>
-              <a:t>• Multi-Threaded Concurrency: </a:t>
-            </a:r>
-            <a:r>
-              <a:rPr sz="1300">
-                <a:solidFill>
-                  <a:srgbClr val="94A3B8"/>
-                </a:solidFill>
-              </a:rPr>
-              <a:t>Implement POSIX mutex locking for multi-teller transaction safety.</a:t>
-            </a:r>
-          </a:p>
-          <a:p>
-            <a:r>
-              <a:rPr b="1" sz="1300">
-                <a:solidFill>
-                  <a:srgbClr val="F8FAFC"/>
-                </a:solidFill>
-              </a:rPr>
-              <a:t>• AI Anomaly Detection: </a:t>
-            </a:r>
-            <a:r>
-              <a:rPr sz="1300">
-                <a:solidFill>
-                  <a:srgbClr val="94A3B8"/>
-                </a:solidFill>
-              </a:rPr>
-              <a:t>Deploy graph algorithms to detect fraudulent transaction spikes.</a:t>
-            </a:r>
-          </a:p>
-        </p:txBody>
-      </p:sp>
-      <p:sp>
-        <p:nvSpPr>
-          <p:cNvPr id="9" name="Rounded Rectangle 8"/>
-          <p:cNvSpPr/>
-          <p:nvPr/>
-        </p:nvSpPr>
-        <p:spPr>
-          <a:xfrm>
-            <a:off x="6309360" y="1371600"/>
-            <a:ext cx="5120640" cy="4937760"/>
-          </a:xfrm>
-          <a:prstGeom prst="roundRect">
-            <a:avLst/>
-          </a:prstGeom>
-          <a:solidFill>
-            <a:srgbClr val="10182C"/>
-          </a:solidFill>
-          <a:ln w="19050">
-            <a:solidFill>
-              <a:srgbClr val="1A2644"/>
-            </a:solidFill>
-          </a:ln>
-        </p:spPr>
-        <p:style>
-          <a:lnRef idx="1">
-            <a:schemeClr val="accent1"/>
-          </a:lnRef>
-          <a:fillRef idx="3">
-            <a:schemeClr val="accent1"/>
-          </a:fillRef>
-          <a:effectRef idx="2">
-            <a:schemeClr val="accent1"/>
-          </a:effectRef>
-          <a:fontRef idx="minor">
-            <a:schemeClr val="lt1"/>
-          </a:fontRef>
-        </p:style>
-        <p:txBody>
-          <a:bodyPr rtlCol="0" anchor="ctr"/>
-          <a:lstStyle/>
-          <a:p>
-            <a:pPr algn="ctr"/>
-          </a:p>
-        </p:txBody>
-      </p:sp>
-      <p:sp>
-        <p:nvSpPr>
-          <p:cNvPr id="10" name="TextBox 9"/>
-          <p:cNvSpPr txBox="1"/>
-          <p:nvPr/>
-        </p:nvSpPr>
-        <p:spPr>
-          <a:xfrm>
-            <a:off x="6492240" y="1508760"/>
-            <a:ext cx="4754880" cy="365760"/>
-          </a:xfrm>
-          <a:prstGeom prst="rect">
-            <a:avLst/>
-          </a:prstGeom>
-          <a:noFill/>
-        </p:spPr>
-        <p:txBody>
-          <a:bodyPr wrap="square">
-            <a:spAutoFit/>
-          </a:bodyPr>
-          <a:lstStyle/>
-          <a:p>
-            <a:pPr>
-              <a:defRPr sz="1500" b="1">
-                <a:solidFill>
-                  <a:srgbClr val="10B981"/>
-                </a:solidFill>
-                <a:latin typeface="Arial"/>
-              </a:defRPr>
-            </a:pPr>
-            <a:r>
-              <a:t>Thank You &amp; Group Evaluation</a:t>
-            </a:r>
-          </a:p>
-        </p:txBody>
-      </p:sp>
-      <p:sp>
-        <p:nvSpPr>
-          <p:cNvPr id="11" name="TextBox 10"/>
-          <p:cNvSpPr txBox="1"/>
-          <p:nvPr/>
-        </p:nvSpPr>
-        <p:spPr>
-          <a:xfrm>
-            <a:off x="6492240" y="1920240"/>
-            <a:ext cx="4754880" cy="4206240"/>
-          </a:xfrm>
-          <a:prstGeom prst="rect">
-            <a:avLst/>
-          </a:prstGeom>
-          <a:noFill/>
-        </p:spPr>
-        <p:txBody>
-          <a:bodyPr wrap="square">
-            <a:spAutoFit/>
-          </a:bodyPr>
-          <a:lstStyle/>
-          <a:p>
-            <a:pPr>
-              <a:defRPr b="1" sz="1400">
-                <a:solidFill>
-                  <a:srgbClr val="F59E0B"/>
-                </a:solidFill>
-              </a:defRPr>
-            </a:pPr>
-            <a:r>
-              <a:t>Presented by:</a:t>
-            </a:r>
-          </a:p>
-          <a:p>
-            <a:r>
-              <a:rPr b="1" sz="1300">
-                <a:solidFill>
-                  <a:srgbClr val="F8FAFC"/>
-                </a:solidFill>
-              </a:rPr>
-              <a:t>• Group Members: </a:t>
-            </a:r>
-            <a:r>
-              <a:rPr sz="1300">
-                <a:solidFill>
-                  <a:srgbClr val="94A3B8"/>
-                </a:solidFill>
-              </a:rPr>
-              <a:t>Manikanta, Lokesh, Anil, Shishira, Chathwik</a:t>
-            </a:r>
-          </a:p>
-          <a:p>
-            <a:r>
-              <a:rPr b="1" sz="1300">
-                <a:solidFill>
-                  <a:srgbClr val="F8FAFC"/>
-                </a:solidFill>
-              </a:rPr>
-              <a:t>• Source Code: </a:t>
-            </a:r>
-            <a:r>
-              <a:rPr sz="1300">
-                <a:solidFill>
-                  <a:srgbClr val="94A3B8"/>
+            <a:pPr>
+              <a:spcAft>
+                <a:spcPts val="1800"/>
+              </a:spcAft>
+            </a:pPr>
+            <a:r>
+              <a:rPr b="1" sz="1600">
+                <a:solidFill>
+                  <a:srgbClr val="34D399"/>
+                </a:solidFill>
+              </a:rPr>
+              <a:t>•  Complete Syllabus Coverage: </a:t>
+            </a:r>
+            <a:r>
+              <a:rPr sz="1600">
+                <a:solidFill>
+                  <a:srgbClr val="FFFFFF"/>
+                </a:solidFill>
+              </a:rPr>
+              <a:t>All 10 CS207 Data Structures modules implemented in C++.</a:t>
+            </a:r>
+          </a:p>
+          <a:p>
+            <a:pPr>
+              <a:spcAft>
+                <a:spcPts val="1800"/>
+              </a:spcAft>
+            </a:pPr>
+            <a:r>
+              <a:rPr b="1" sz="1600">
+                <a:solidFill>
+                  <a:srgbClr val="34D399"/>
+                </a:solidFill>
+              </a:rPr>
+              <a:t>•  Modular Team Execution: </a:t>
+            </a:r>
+            <a:r>
+              <a:rPr sz="1600">
+                <a:solidFill>
+                  <a:srgbClr val="FFFFFF"/>
+                </a:solidFill>
+              </a:rPr>
+              <a:t>Divided seamlessly among Manikanta, Lokesh, Anil, Shishira, Chathwik.</a:t>
+            </a:r>
+          </a:p>
+          <a:p>
+            <a:pPr>
+              <a:spcAft>
+                <a:spcPts val="1800"/>
+              </a:spcAft>
+            </a:pPr>
+            <a:r>
+              <a:rPr b="1" sz="1600">
+                <a:solidFill>
+                  <a:srgbClr val="34D399"/>
+                </a:solidFill>
+              </a:rPr>
+              <a:t>•  Full-Stack Integration: </a:t>
+            </a:r>
+            <a:r>
+              <a:rPr sz="1600">
+                <a:solidFill>
+                  <a:srgbClr val="FFFFFF"/>
+                </a:solidFill>
+              </a:rPr>
+              <a:t>Production-ready web dashboard with MongoDB cloud persistence.</a:t>
+            </a:r>
+          </a:p>
+          <a:p>
+            <a:pPr>
+              <a:spcAft>
+                <a:spcPts val="1800"/>
+              </a:spcAft>
+            </a:pPr>
+            <a:r>
+              <a:rPr b="1" sz="1600">
+                <a:solidFill>
+                  <a:srgbClr val="34D399"/>
+                </a:solidFill>
+              </a:rPr>
+              <a:t>•  Repository: </a:t>
+            </a:r>
+            <a:r>
+              <a:rPr sz="1600">
+                <a:solidFill>
+                  <a:srgbClr val="FFFFFF"/>
                 </a:solidFill>
               </a:rPr>
               <a:t>github.com/manikantareddemoni-glitch/bank-management-system</a:t>
             </a:r>
           </a:p>
           <a:p>
-            <a:r>
-              <a:rPr b="1" sz="1300">
-                <a:solidFill>
-                  <a:srgbClr val="F8FAFC"/>
-                </a:solidFill>
-              </a:rPr>
-              <a:t>• Live Deployment: </a:t>
-            </a:r>
-            <a:r>
-              <a:rPr sz="1300">
-                <a:solidFill>
-                  <a:srgbClr val="94A3B8"/>
-                </a:solidFill>
-              </a:rPr>
-              <a:t>Dual-Sync Cloud Web Engine</a:t>
-            </a:r>
-          </a:p>
-          <a:p>
-            <a:r>
-              <a:rPr b="1" sz="1300">
-                <a:solidFill>
-                  <a:srgbClr val="F8FAFC"/>
-                </a:solidFill>
-              </a:rPr>
-              <a:t>• Open Floor: </a:t>
-            </a:r>
-            <a:r>
-              <a:rPr sz="1300">
-                <a:solidFill>
-                  <a:srgbClr val="94A3B8"/>
-                </a:solidFill>
-              </a:rPr>
-              <a:t>We welcome your questions and algorithmic evaluation!</a:t>
+            <a:pPr>
+              <a:spcAft>
+                <a:spcPts val="1800"/>
+              </a:spcAft>
+            </a:pPr>
+            <a:r>
+              <a:rPr b="1" sz="1600">
+                <a:solidFill>
+                  <a:srgbClr val="34D399"/>
+                </a:solidFill>
+              </a:rPr>
+              <a:t>•  Thank You: </a:t>
+            </a:r>
+            <a:r>
+              <a:rPr sz="1600">
+                <a:solidFill>
+                  <a:srgbClr val="FFFFFF"/>
+                </a:solidFill>
+              </a:rPr>
+              <a:t>Open for Faculty Evaluation &amp; Questions!</a:t>
             </a:r>
           </a:p>
         </p:txBody>
@@ -6173,7 +5387,7 @@
             <a:avLst/>
           </a:prstGeom>
           <a:solidFill>
-            <a:srgbClr val="070B16"/>
+            <a:srgbClr val="0A0F1D"/>
           </a:solidFill>
           <a:ln>
             <a:noFill/>
@@ -6209,8 +5423,8 @@
         </p:nvSpPr>
         <p:spPr>
           <a:xfrm>
-            <a:off x="731520" y="347472"/>
-            <a:ext cx="10728655" cy="36576"/>
+            <a:off x="914400" y="457200"/>
+            <a:ext cx="10362895" cy="27432"/>
           </a:xfrm>
           <a:prstGeom prst="rect">
             <a:avLst/>
@@ -6252,8 +5466,8 @@
         </p:nvSpPr>
         <p:spPr>
           <a:xfrm>
-            <a:off x="731520" y="411480"/>
-            <a:ext cx="10728655" cy="274320"/>
+            <a:off x="914400" y="594360"/>
+            <a:ext cx="10362895" cy="731520"/>
           </a:xfrm>
           <a:prstGeom prst="rect">
             <a:avLst/>
@@ -6267,15 +5481,28 @@
           <a:lstStyle/>
           <a:p>
             <a:pPr>
-              <a:defRPr sz="1100" b="1">
-                <a:solidFill>
-                  <a:srgbClr val="06B6D4"/>
-                </a:solidFill>
-                <a:latin typeface="Arial"/>
+              <a:defRPr sz="2600" b="1">
+                <a:solidFill>
+                  <a:srgbClr val="FFFFFF"/>
+                </a:solidFill>
+                <a:latin typeface="Calibri"/>
               </a:defRPr>
             </a:pPr>
             <a:r>
-              <a:t>INTRODUCTION &amp; MOTIVATION</a:t>
+              <a:t>Project Overview</a:t>
+            </a:r>
+          </a:p>
+          <a:p>
+            <a:pPr>
+              <a:defRPr sz="1300">
+                <a:solidFill>
+                  <a:srgbClr val="38BDF8"/>
+                </a:solidFill>
+                <a:latin typeface="Calibri"/>
+              </a:defRPr>
+            </a:pPr>
+            <a:r>
+              <a:t>Introduction &amp; Purpose</a:t>
             </a:r>
           </a:p>
         </p:txBody>
@@ -6288,8 +5515,8 @@
         </p:nvSpPr>
         <p:spPr>
           <a:xfrm>
-            <a:off x="731520" y="685800"/>
-            <a:ext cx="10728655" cy="594360"/>
+            <a:off x="914400" y="1645920"/>
+            <a:ext cx="10362895" cy="4572000"/>
           </a:xfrm>
           <a:prstGeom prst="rect">
             <a:avLst/>
@@ -6301,335 +5528,120 @@
             <a:spAutoFit/>
           </a:bodyPr>
           <a:lstStyle/>
-          <a:p>
-            <a:pPr>
-              <a:defRPr sz="2400" b="1">
-                <a:solidFill>
-                  <a:srgbClr val="F8FAFC"/>
-                </a:solidFill>
-                <a:latin typeface="Arial"/>
-              </a:defRPr>
-            </a:pPr>
-            <a:r>
-              <a:t>Project Overview &amp; Engineering Objectives</a:t>
-            </a:r>
-          </a:p>
-        </p:txBody>
-      </p:sp>
-      <p:sp>
-        <p:nvSpPr>
-          <p:cNvPr id="6" name="Rounded Rectangle 5"/>
-          <p:cNvSpPr/>
-          <p:nvPr/>
-        </p:nvSpPr>
-        <p:spPr>
-          <a:xfrm>
-            <a:off x="731520" y="1371600"/>
-            <a:ext cx="5120640" cy="4937760"/>
-          </a:xfrm>
-          <a:prstGeom prst="roundRect">
-            <a:avLst/>
-          </a:prstGeom>
-          <a:solidFill>
-            <a:srgbClr val="10182C"/>
-          </a:solidFill>
-          <a:ln w="19050">
-            <a:solidFill>
-              <a:srgbClr val="1A2644"/>
-            </a:solidFill>
-          </a:ln>
-        </p:spPr>
-        <p:style>
-          <a:lnRef idx="1">
-            <a:schemeClr val="accent1"/>
-          </a:lnRef>
-          <a:fillRef idx="3">
-            <a:schemeClr val="accent1"/>
-          </a:fillRef>
-          <a:effectRef idx="2">
-            <a:schemeClr val="accent1"/>
-          </a:effectRef>
-          <a:fontRef idx="minor">
-            <a:schemeClr val="lt1"/>
-          </a:fontRef>
-        </p:style>
-        <p:txBody>
-          <a:bodyPr rtlCol="0" anchor="ctr"/>
-          <a:lstStyle/>
-          <a:p>
-            <a:pPr algn="ctr"/>
-          </a:p>
-        </p:txBody>
-      </p:sp>
-      <p:sp>
-        <p:nvSpPr>
-          <p:cNvPr id="7" name="TextBox 6"/>
-          <p:cNvSpPr txBox="1"/>
-          <p:nvPr/>
-        </p:nvSpPr>
-        <p:spPr>
-          <a:xfrm>
-            <a:off x="914400" y="1508760"/>
-            <a:ext cx="4754880" cy="365760"/>
-          </a:xfrm>
-          <a:prstGeom prst="rect">
-            <a:avLst/>
-          </a:prstGeom>
-          <a:noFill/>
-        </p:spPr>
-        <p:txBody>
-          <a:bodyPr wrap="square">
-            <a:spAutoFit/>
-          </a:bodyPr>
-          <a:lstStyle/>
-          <a:p>
-            <a:pPr>
-              <a:defRPr sz="1500" b="1">
-                <a:solidFill>
-                  <a:srgbClr val="F43F5E"/>
-                </a:solidFill>
-                <a:latin typeface="Arial"/>
-              </a:defRPr>
-            </a:pPr>
-            <a:r>
-              <a:t>1. Problem Statement &amp; Motivation</a:t>
-            </a:r>
-          </a:p>
-        </p:txBody>
-      </p:sp>
-      <p:sp>
-        <p:nvSpPr>
-          <p:cNvPr id="8" name="TextBox 7"/>
-          <p:cNvSpPr txBox="1"/>
-          <p:nvPr/>
-        </p:nvSpPr>
-        <p:spPr>
-          <a:xfrm>
-            <a:off x="914400" y="1920240"/>
-            <a:ext cx="4754880" cy="4206240"/>
-          </a:xfrm>
-          <a:prstGeom prst="rect">
-            <a:avLst/>
-          </a:prstGeom>
-          <a:noFill/>
-        </p:spPr>
-        <p:txBody>
-          <a:bodyPr wrap="square">
-            <a:spAutoFit/>
-          </a:bodyPr>
-          <a:lstStyle/>
           <a:p/>
           <a:p>
-            <a:r>
-              <a:rPr b="1" sz="1300">
-                <a:solidFill>
-                  <a:srgbClr val="F8FAFC"/>
-                </a:solidFill>
-              </a:rPr>
-              <a:t>• Bridging Theory and Practice: </a:t>
-            </a:r>
-            <a:r>
-              <a:rPr sz="1300">
-                <a:solidFill>
-                  <a:srgbClr val="94A3B8"/>
-                </a:solidFill>
-              </a:rPr>
-              <a:t>Traditional academic DSA assignments are often isolated code snippets. This project binds all concepts into a unified banking software ecosystem.</a:t>
-            </a:r>
-          </a:p>
-          <a:p>
-            <a:r>
-              <a:rPr b="1" sz="1300">
-                <a:solidFill>
-                  <a:srgbClr val="F8FAFC"/>
-                </a:solidFill>
-              </a:rPr>
-              <a:t>• Financial Precision: </a:t>
-            </a:r>
-            <a:r>
-              <a:rPr sz="1300">
-                <a:solidFill>
-                  <a:srgbClr val="94A3B8"/>
-                </a:solidFill>
-              </a:rPr>
-              <a:t>Eliminates floating-point rounding errors by utilizing integer paise calculations (`balancePaise`) for exact currency accounting.</a:t>
-            </a:r>
-          </a:p>
-          <a:p>
-            <a:r>
-              <a:rPr b="1" sz="1300">
-                <a:solidFill>
-                  <a:srgbClr val="F8FAFC"/>
-                </a:solidFill>
-              </a:rPr>
-              <a:t>• Multi-Developer Synergy: </a:t>
-            </a:r>
-            <a:r>
-              <a:rPr sz="1300">
-                <a:solidFill>
-                  <a:srgbClr val="94A3B8"/>
-                </a:solidFill>
-              </a:rPr>
-              <a:t>Modularized across 5 team members with zero variable pollution or header compilation collisions.</a:t>
-            </a:r>
-          </a:p>
-        </p:txBody>
-      </p:sp>
-      <p:sp>
-        <p:nvSpPr>
-          <p:cNvPr id="9" name="Rounded Rectangle 8"/>
-          <p:cNvSpPr/>
-          <p:nvPr/>
-        </p:nvSpPr>
-        <p:spPr>
-          <a:xfrm>
-            <a:off x="6309360" y="1371600"/>
-            <a:ext cx="5120640" cy="4937760"/>
-          </a:xfrm>
-          <a:prstGeom prst="roundRect">
-            <a:avLst/>
-          </a:prstGeom>
-          <a:solidFill>
-            <a:srgbClr val="10182C"/>
-          </a:solidFill>
-          <a:ln w="19050">
-            <a:solidFill>
-              <a:srgbClr val="1A2644"/>
-            </a:solidFill>
-          </a:ln>
-        </p:spPr>
-        <p:style>
-          <a:lnRef idx="1">
-            <a:schemeClr val="accent1"/>
-          </a:lnRef>
-          <a:fillRef idx="3">
-            <a:schemeClr val="accent1"/>
-          </a:fillRef>
-          <a:effectRef idx="2">
-            <a:schemeClr val="accent1"/>
-          </a:effectRef>
-          <a:fontRef idx="minor">
-            <a:schemeClr val="lt1"/>
-          </a:fontRef>
-        </p:style>
-        <p:txBody>
-          <a:bodyPr rtlCol="0" anchor="ctr"/>
-          <a:lstStyle/>
-          <a:p>
-            <a:pPr algn="ctr"/>
-          </a:p>
-        </p:txBody>
-      </p:sp>
-      <p:sp>
-        <p:nvSpPr>
-          <p:cNvPr id="10" name="TextBox 9"/>
-          <p:cNvSpPr txBox="1"/>
-          <p:nvPr/>
-        </p:nvSpPr>
-        <p:spPr>
-          <a:xfrm>
-            <a:off x="6492240" y="1508760"/>
-            <a:ext cx="4754880" cy="365760"/>
-          </a:xfrm>
-          <a:prstGeom prst="rect">
-            <a:avLst/>
-          </a:prstGeom>
-          <a:noFill/>
-        </p:spPr>
-        <p:txBody>
-          <a:bodyPr wrap="square">
-            <a:spAutoFit/>
-          </a:bodyPr>
-          <a:lstStyle/>
-          <a:p>
-            <a:pPr>
-              <a:defRPr sz="1500" b="1">
-                <a:solidFill>
-                  <a:srgbClr val="10B981"/>
-                </a:solidFill>
-                <a:latin typeface="Arial"/>
-              </a:defRPr>
-            </a:pPr>
-            <a:r>
-              <a:t>2. Core Deliverables &amp; Highlights</a:t>
-            </a:r>
-          </a:p>
-        </p:txBody>
-      </p:sp>
-      <p:sp>
-        <p:nvSpPr>
-          <p:cNvPr id="11" name="TextBox 10"/>
-          <p:cNvSpPr txBox="1"/>
-          <p:nvPr/>
-        </p:nvSpPr>
-        <p:spPr>
-          <a:xfrm>
-            <a:off x="6492240" y="1920240"/>
-            <a:ext cx="4754880" cy="4206240"/>
-          </a:xfrm>
-          <a:prstGeom prst="rect">
-            <a:avLst/>
-          </a:prstGeom>
-          <a:noFill/>
-        </p:spPr>
-        <p:txBody>
-          <a:bodyPr wrap="square">
-            <a:spAutoFit/>
-          </a:bodyPr>
-          <a:lstStyle/>
-          <a:p/>
-          <a:p>
-            <a:r>
-              <a:rPr b="1" sz="1300">
-                <a:solidFill>
-                  <a:srgbClr val="F8FAFC"/>
-                </a:solidFill>
-              </a:rPr>
-              <a:t>• 100% Syllabus Coverage: </a:t>
-            </a:r>
-            <a:r>
-              <a:rPr sz="1300">
-                <a:solidFill>
-                  <a:srgbClr val="94A3B8"/>
-                </a:solidFill>
-              </a:rPr>
-              <a:t>Covers Arrays, Structs, Linear/Binary Search, Insertion Sort, 2D Matrices, Strings, Stacks, Queues, and STL Containers.</a:t>
-            </a:r>
-          </a:p>
-          <a:p>
-            <a:r>
-              <a:rPr b="1" sz="1300">
-                <a:solidFill>
-                  <a:srgbClr val="F8FAFC"/>
-                </a:solidFill>
-              </a:rPr>
-              <a:t>• Modular Multi-File C++: </a:t>
-            </a:r>
-            <a:r>
-              <a:rPr sz="1300">
-                <a:solidFill>
-                  <a:srgbClr val="94A3B8"/>
-                </a:solidFill>
-              </a:rPr>
-              <a:t>Organized into `bank.h` and `student1.cpp` through `student5.cpp` for individual student evaluation.</a:t>
-            </a:r>
-          </a:p>
-          <a:p>
-            <a:r>
-              <a:rPr b="1" sz="1300">
-                <a:solidFill>
-                  <a:srgbClr val="F8FAFC"/>
-                </a:solidFill>
-              </a:rPr>
-              <a:t>• Full-Stack Web Interface: </a:t>
-            </a:r>
-            <a:r>
-              <a:rPr sz="1300">
-                <a:solidFill>
-                  <a:srgbClr val="94A3B8"/>
-                </a:solidFill>
-              </a:rPr>
-              <a:t>Paired with a modern React Vite dashboard, REST backend, and MongoDB Atlas dual-sync persistence.</a:t>
+            <a:pPr>
+              <a:spcAft>
+                <a:spcPts val="1800"/>
+              </a:spcAft>
+            </a:pPr>
+            <a:r>
+              <a:rPr b="1" sz="1600">
+                <a:solidFill>
+                  <a:srgbClr val="38BDF8"/>
+                </a:solidFill>
+              </a:rPr>
+              <a:t>•  Core Objective: </a:t>
+            </a:r>
+            <a:r>
+              <a:rPr sz="1600">
+                <a:solidFill>
+                  <a:srgbClr val="FFFFFF"/>
+                </a:solidFill>
+              </a:rPr>
+              <a:t>Build a unified, full-stack banking engine applying core Data Structures &amp; Algorithms.</a:t>
+            </a:r>
+          </a:p>
+          <a:p>
+            <a:pPr>
+              <a:spcAft>
+                <a:spcPts val="1800"/>
+              </a:spcAft>
+            </a:pPr>
+            <a:r>
+              <a:rPr b="1" sz="1600">
+                <a:solidFill>
+                  <a:srgbClr val="38BDF8"/>
+                </a:solidFill>
+              </a:rPr>
+              <a:t>•  Dual Architecture: </a:t>
+            </a:r>
+            <a:r>
+              <a:rPr sz="1600">
+                <a:solidFill>
+                  <a:srgbClr val="FFFFFF"/>
+                </a:solidFill>
+              </a:rPr>
+              <a:t>High-performance modular C++ engine paired with a modern React web dashboard.</a:t>
+            </a:r>
+          </a:p>
+          <a:p>
+            <a:pPr>
+              <a:spcAft>
+                <a:spcPts val="1800"/>
+              </a:spcAft>
+            </a:pPr>
+            <a:r>
+              <a:rPr b="1" sz="1600">
+                <a:solidFill>
+                  <a:srgbClr val="38BDF8"/>
+                </a:solidFill>
+              </a:rPr>
+              <a:t>•  100% Syllabus Coverage: </a:t>
+            </a:r>
+            <a:r>
+              <a:rPr sz="1600">
+                <a:solidFill>
+                  <a:srgbClr val="FFFFFF"/>
+                </a:solidFill>
+              </a:rPr>
+              <a:t>Implements Structs, Searching, Sorting, 2D Matrices, Strings, Stacks, Queues, and STL.</a:t>
+            </a:r>
+          </a:p>
+          <a:p>
+            <a:pPr>
+              <a:spcAft>
+                <a:spcPts val="1800"/>
+              </a:spcAft>
+            </a:pPr>
+            <a:r>
+              <a:rPr b="1" sz="1600">
+                <a:solidFill>
+                  <a:srgbClr val="38BDF8"/>
+                </a:solidFill>
+              </a:rPr>
+              <a:t>•  Financial Precision: </a:t>
+            </a:r>
+            <a:r>
+              <a:rPr sz="1600">
+                <a:solidFill>
+                  <a:srgbClr val="FFFFFF"/>
+                </a:solidFill>
+              </a:rPr>
+              <a:t>Integer paise arithmetic (`balancePaise`) eliminates floating-point rounding errors.</a:t>
+            </a:r>
+          </a:p>
+          <a:p>
+            <a:pPr>
+              <a:spcAft>
+                <a:spcPts val="1800"/>
+              </a:spcAft>
+            </a:pPr>
+            <a:r>
+              <a:rPr b="1" sz="1600">
+                <a:solidFill>
+                  <a:srgbClr val="38BDF8"/>
+                </a:solidFill>
+              </a:rPr>
+              <a:t>•  Cloud Persistence: </a:t>
+            </a:r>
+            <a:r>
+              <a:rPr sz="1600">
+                <a:solidFill>
+                  <a:srgbClr val="FFFFFF"/>
+                </a:solidFill>
+              </a:rPr>
+              <a:t>MongoDB Atlas cloud storage with automated localhost fallback (`data.json`).</a:t>
             </a:r>
           </a:p>
         </p:txBody>
@@ -6670,7 +5682,7 @@
             <a:avLst/>
           </a:prstGeom>
           <a:solidFill>
-            <a:srgbClr val="070B16"/>
+            <a:srgbClr val="0A0F1D"/>
           </a:solidFill>
           <a:ln>
             <a:noFill/>
@@ -6706,8 +5718,8 @@
         </p:nvSpPr>
         <p:spPr>
           <a:xfrm>
-            <a:off x="731520" y="347472"/>
-            <a:ext cx="10728655" cy="36576"/>
+            <a:off x="914400" y="457200"/>
+            <a:ext cx="10362895" cy="27432"/>
           </a:xfrm>
           <a:prstGeom prst="rect">
             <a:avLst/>
@@ -6749,8 +5761,8 @@
         </p:nvSpPr>
         <p:spPr>
           <a:xfrm>
-            <a:off x="731520" y="411480"/>
-            <a:ext cx="10728655" cy="274320"/>
+            <a:off x="914400" y="594360"/>
+            <a:ext cx="10362895" cy="731520"/>
           </a:xfrm>
           <a:prstGeom prst="rect">
             <a:avLst/>
@@ -6764,15 +5776,28 @@
           <a:lstStyle/>
           <a:p>
             <a:pPr>
-              <a:defRPr sz="1100" b="1">
-                <a:solidFill>
-                  <a:srgbClr val="06B6D4"/>
-                </a:solidFill>
-                <a:latin typeface="Arial"/>
+              <a:defRPr sz="2600" b="1">
+                <a:solidFill>
+                  <a:srgbClr val="FFFFFF"/>
+                </a:solidFill>
+                <a:latin typeface="Calibri"/>
               </a:defRPr>
             </a:pPr>
             <a:r>
-              <a:t>ARCHITECTURE &amp; TECHNOLOGY LAYERS</a:t>
+              <a:t>System Architecture</a:t>
+            </a:r>
+          </a:p>
+          <a:p>
+            <a:pPr>
+              <a:defRPr sz="1300">
+                <a:solidFill>
+                  <a:srgbClr val="38BDF8"/>
+                </a:solidFill>
+                <a:latin typeface="Calibri"/>
+              </a:defRPr>
+            </a:pPr>
+            <a:r>
+              <a:t>Multi-Tier Technology Stack</a:t>
             </a:r>
           </a:p>
         </p:txBody>
@@ -6785,8 +5810,8 @@
         </p:nvSpPr>
         <p:spPr>
           <a:xfrm>
-            <a:off x="731520" y="685800"/>
-            <a:ext cx="10728655" cy="594360"/>
+            <a:off x="914400" y="1645920"/>
+            <a:ext cx="10362895" cy="4572000"/>
           </a:xfrm>
           <a:prstGeom prst="rect">
             <a:avLst/>
@@ -6798,677 +5823,97 @@
             <a:spAutoFit/>
           </a:bodyPr>
           <a:lstStyle/>
-          <a:p>
-            <a:pPr>
-              <a:defRPr sz="2400" b="1">
-                <a:solidFill>
-                  <a:srgbClr val="F8FAFC"/>
-                </a:solidFill>
-                <a:latin typeface="Arial"/>
-              </a:defRPr>
-            </a:pPr>
-            <a:r>
-              <a:t>Full-Stack System Architecture &amp; Tech Stack</a:t>
-            </a:r>
-          </a:p>
-        </p:txBody>
-      </p:sp>
-      <p:sp>
-        <p:nvSpPr>
-          <p:cNvPr id="6" name="Rounded Rectangle 5"/>
-          <p:cNvSpPr/>
-          <p:nvPr/>
-        </p:nvSpPr>
-        <p:spPr>
-          <a:xfrm>
-            <a:off x="731520" y="1371600"/>
-            <a:ext cx="2514600" cy="4937760"/>
-          </a:xfrm>
-          <a:prstGeom prst="roundRect">
-            <a:avLst/>
-          </a:prstGeom>
-          <a:solidFill>
-            <a:srgbClr val="10182C"/>
-          </a:solidFill>
-          <a:ln w="19050">
-            <a:solidFill>
-              <a:srgbClr val="1A2644"/>
-            </a:solidFill>
-          </a:ln>
-        </p:spPr>
-        <p:style>
-          <a:lnRef idx="1">
-            <a:schemeClr val="accent1"/>
-          </a:lnRef>
-          <a:fillRef idx="3">
-            <a:schemeClr val="accent1"/>
-          </a:fillRef>
-          <a:effectRef idx="2">
-            <a:schemeClr val="accent1"/>
-          </a:effectRef>
-          <a:fontRef idx="minor">
-            <a:schemeClr val="lt1"/>
-          </a:fontRef>
-        </p:style>
-        <p:txBody>
-          <a:bodyPr rtlCol="0" anchor="ctr"/>
-          <a:lstStyle/>
-          <a:p>
-            <a:pPr algn="ctr"/>
-          </a:p>
-        </p:txBody>
-      </p:sp>
-      <p:sp>
-        <p:nvSpPr>
-          <p:cNvPr id="7" name="TextBox 6"/>
-          <p:cNvSpPr txBox="1"/>
-          <p:nvPr/>
-        </p:nvSpPr>
-        <p:spPr>
-          <a:xfrm>
-            <a:off x="914400" y="1508760"/>
-            <a:ext cx="2148840" cy="365760"/>
-          </a:xfrm>
-          <a:prstGeom prst="rect">
-            <a:avLst/>
-          </a:prstGeom>
-          <a:noFill/>
-        </p:spPr>
-        <p:txBody>
-          <a:bodyPr wrap="square">
-            <a:spAutoFit/>
-          </a:bodyPr>
-          <a:lstStyle/>
-          <a:p>
-            <a:pPr>
-              <a:defRPr sz="1500" b="1">
-                <a:solidFill>
-                  <a:srgbClr val="6366F1"/>
-                </a:solidFill>
-                <a:latin typeface="Arial"/>
-              </a:defRPr>
-            </a:pPr>
-            <a:r>
-              <a:t>Core C++ Engine</a:t>
-            </a:r>
-          </a:p>
-        </p:txBody>
-      </p:sp>
-      <p:sp>
-        <p:nvSpPr>
-          <p:cNvPr id="8" name="TextBox 7"/>
-          <p:cNvSpPr txBox="1"/>
-          <p:nvPr/>
-        </p:nvSpPr>
-        <p:spPr>
-          <a:xfrm>
-            <a:off x="868680" y="1920240"/>
-            <a:ext cx="2240280" cy="4114800"/>
-          </a:xfrm>
-          <a:prstGeom prst="rect">
-            <a:avLst/>
-          </a:prstGeom>
-          <a:noFill/>
-        </p:spPr>
-        <p:txBody>
-          <a:bodyPr wrap="square">
-            <a:spAutoFit/>
-          </a:bodyPr>
-          <a:lstStyle/>
           <a:p/>
           <a:p>
             <a:pPr>
-              <a:defRPr sz="1200">
-                <a:solidFill>
-                  <a:srgbClr val="F8FAFC"/>
-                </a:solidFill>
-              </a:defRPr>
-            </a:pPr>
-            <a:r>
-              <a:t>• Modular 5-file C++ build</a:t>
-            </a:r>
-          </a:p>
-          <a:p>
-            <a:pPr>
-              <a:defRPr sz="1200">
-                <a:solidFill>
-                  <a:srgbClr val="F8FAFC"/>
-                </a:solidFill>
-              </a:defRPr>
-            </a:pPr>
-            <a:r>
-              <a:t>• student1.cpp to student5.cpp</a:t>
-            </a:r>
-          </a:p>
-          <a:p>
-            <a:pPr>
-              <a:defRPr sz="1200">
-                <a:solidFill>
-                  <a:srgbClr val="F8FAFC"/>
-                </a:solidFill>
-              </a:defRPr>
-            </a:pPr>
-            <a:r>
-              <a:t>• In-memory Data Structures</a:t>
-            </a:r>
-          </a:p>
-          <a:p>
-            <a:pPr>
-              <a:defRPr sz="1200">
-                <a:solidFill>
-                  <a:srgbClr val="F8FAFC"/>
-                </a:solidFill>
-              </a:defRPr>
-            </a:pPr>
-            <a:r>
-              <a:t>• Fast O(1) / O(log n) logic</a:t>
-            </a:r>
-          </a:p>
-          <a:p>
-            <a:pPr>
-              <a:defRPr sz="1200">
-                <a:solidFill>
-                  <a:srgbClr val="F8FAFC"/>
-                </a:solidFill>
-              </a:defRPr>
-            </a:pPr>
-            <a:r>
-              <a:t>• Zero memory leak safety</a:t>
-            </a:r>
-          </a:p>
-        </p:txBody>
-      </p:sp>
-      <p:sp>
-        <p:nvSpPr>
-          <p:cNvPr id="9" name="Rounded Rectangle 8"/>
-          <p:cNvSpPr/>
-          <p:nvPr/>
-        </p:nvSpPr>
-        <p:spPr>
-          <a:xfrm>
-            <a:off x="3520440" y="1371600"/>
-            <a:ext cx="2514600" cy="4937760"/>
-          </a:xfrm>
-          <a:prstGeom prst="roundRect">
-            <a:avLst/>
-          </a:prstGeom>
-          <a:solidFill>
-            <a:srgbClr val="10182C"/>
-          </a:solidFill>
-          <a:ln w="19050">
-            <a:solidFill>
-              <a:srgbClr val="1A2644"/>
-            </a:solidFill>
-          </a:ln>
-        </p:spPr>
-        <p:style>
-          <a:lnRef idx="1">
-            <a:schemeClr val="accent1"/>
-          </a:lnRef>
-          <a:fillRef idx="3">
-            <a:schemeClr val="accent1"/>
-          </a:fillRef>
-          <a:effectRef idx="2">
-            <a:schemeClr val="accent1"/>
-          </a:effectRef>
-          <a:fontRef idx="minor">
-            <a:schemeClr val="lt1"/>
-          </a:fontRef>
-        </p:style>
-        <p:txBody>
-          <a:bodyPr rtlCol="0" anchor="ctr"/>
-          <a:lstStyle/>
-          <a:p>
-            <a:pPr algn="ctr"/>
-          </a:p>
-        </p:txBody>
-      </p:sp>
-      <p:sp>
-        <p:nvSpPr>
-          <p:cNvPr id="10" name="TextBox 9"/>
-          <p:cNvSpPr txBox="1"/>
-          <p:nvPr/>
-        </p:nvSpPr>
-        <p:spPr>
-          <a:xfrm>
-            <a:off x="3703320" y="1508760"/>
-            <a:ext cx="2148840" cy="365760"/>
-          </a:xfrm>
-          <a:prstGeom prst="rect">
-            <a:avLst/>
-          </a:prstGeom>
-          <a:noFill/>
-        </p:spPr>
-        <p:txBody>
-          <a:bodyPr wrap="square">
-            <a:spAutoFit/>
-          </a:bodyPr>
-          <a:lstStyle/>
-          <a:p>
-            <a:pPr>
-              <a:defRPr sz="1500" b="1">
-                <a:solidFill>
-                  <a:srgbClr val="06B6D4"/>
-                </a:solidFill>
-                <a:latin typeface="Arial"/>
-              </a:defRPr>
-            </a:pPr>
-            <a:r>
-              <a:t>Node.js REST API</a:t>
-            </a:r>
-          </a:p>
-        </p:txBody>
-      </p:sp>
-      <p:sp>
-        <p:nvSpPr>
-          <p:cNvPr id="11" name="TextBox 10"/>
-          <p:cNvSpPr txBox="1"/>
-          <p:nvPr/>
-        </p:nvSpPr>
-        <p:spPr>
-          <a:xfrm>
-            <a:off x="3657600" y="1920240"/>
-            <a:ext cx="2240280" cy="4114800"/>
-          </a:xfrm>
-          <a:prstGeom prst="rect">
-            <a:avLst/>
-          </a:prstGeom>
-          <a:noFill/>
-        </p:spPr>
-        <p:txBody>
-          <a:bodyPr wrap="square">
-            <a:spAutoFit/>
-          </a:bodyPr>
-          <a:lstStyle/>
-          <a:p/>
-          <a:p>
-            <a:pPr>
-              <a:defRPr sz="1200">
-                <a:solidFill>
-                  <a:srgbClr val="F8FAFC"/>
-                </a:solidFill>
-              </a:defRPr>
-            </a:pPr>
-            <a:r>
-              <a:t>• Express Server Architecture</a:t>
-            </a:r>
-          </a:p>
-          <a:p>
-            <a:pPr>
-              <a:defRPr sz="1200">
-                <a:solidFill>
-                  <a:srgbClr val="F8FAFC"/>
-                </a:solidFill>
-              </a:defRPr>
-            </a:pPr>
-            <a:r>
-              <a:t>• REST API CRUD routes</a:t>
-            </a:r>
-          </a:p>
-          <a:p>
-            <a:pPr>
-              <a:defRPr sz="1200">
-                <a:solidFill>
-                  <a:srgbClr val="F8FAFC"/>
-                </a:solidFill>
-              </a:defRPr>
-            </a:pPr>
-            <a:r>
-              <a:t>• Atomic Deposit &amp; Withdraw</a:t>
-            </a:r>
-          </a:p>
-          <a:p>
-            <a:pPr>
-              <a:defRPr sz="1200">
-                <a:solidFill>
-                  <a:srgbClr val="F8FAFC"/>
-                </a:solidFill>
-              </a:defRPr>
-            </a:pPr>
-            <a:r>
-              <a:t>• Ledger Audit log dispatch</a:t>
-            </a:r>
-          </a:p>
-          <a:p>
-            <a:pPr>
-              <a:defRPr sz="1200">
-                <a:solidFill>
-                  <a:srgbClr val="F8FAFC"/>
-                </a:solidFill>
-              </a:defRPr>
-            </a:pPr>
-            <a:r>
-              <a:t>• Auto-reconnect controller</a:t>
-            </a:r>
-          </a:p>
-        </p:txBody>
-      </p:sp>
-      <p:sp>
-        <p:nvSpPr>
-          <p:cNvPr id="12" name="Rounded Rectangle 11"/>
-          <p:cNvSpPr/>
-          <p:nvPr/>
-        </p:nvSpPr>
-        <p:spPr>
-          <a:xfrm>
-            <a:off x="6309360" y="1371600"/>
-            <a:ext cx="2514600" cy="4937760"/>
-          </a:xfrm>
-          <a:prstGeom prst="roundRect">
-            <a:avLst/>
-          </a:prstGeom>
-          <a:solidFill>
-            <a:srgbClr val="10182C"/>
-          </a:solidFill>
-          <a:ln w="19050">
-            <a:solidFill>
-              <a:srgbClr val="1A2644"/>
-            </a:solidFill>
-          </a:ln>
-        </p:spPr>
-        <p:style>
-          <a:lnRef idx="1">
-            <a:schemeClr val="accent1"/>
-          </a:lnRef>
-          <a:fillRef idx="3">
-            <a:schemeClr val="accent1"/>
-          </a:fillRef>
-          <a:effectRef idx="2">
-            <a:schemeClr val="accent1"/>
-          </a:effectRef>
-          <a:fontRef idx="minor">
-            <a:schemeClr val="lt1"/>
-          </a:fontRef>
-        </p:style>
-        <p:txBody>
-          <a:bodyPr rtlCol="0" anchor="ctr"/>
-          <a:lstStyle/>
-          <a:p>
-            <a:pPr algn="ctr"/>
-          </a:p>
-        </p:txBody>
-      </p:sp>
-      <p:sp>
-        <p:nvSpPr>
-          <p:cNvPr id="13" name="TextBox 12"/>
-          <p:cNvSpPr txBox="1"/>
-          <p:nvPr/>
-        </p:nvSpPr>
-        <p:spPr>
-          <a:xfrm>
-            <a:off x="6492240" y="1508760"/>
-            <a:ext cx="2148840" cy="365760"/>
-          </a:xfrm>
-          <a:prstGeom prst="rect">
-            <a:avLst/>
-          </a:prstGeom>
-          <a:noFill/>
-        </p:spPr>
-        <p:txBody>
-          <a:bodyPr wrap="square">
-            <a:spAutoFit/>
-          </a:bodyPr>
-          <a:lstStyle/>
-          <a:p>
-            <a:pPr>
-              <a:defRPr sz="1500" b="1">
-                <a:solidFill>
-                  <a:srgbClr val="F59E0B"/>
-                </a:solidFill>
-                <a:latin typeface="Arial"/>
-              </a:defRPr>
-            </a:pPr>
-            <a:r>
-              <a:t>React Web Dashboard</a:t>
-            </a:r>
-          </a:p>
-        </p:txBody>
-      </p:sp>
-      <p:sp>
-        <p:nvSpPr>
-          <p:cNvPr id="14" name="TextBox 13"/>
-          <p:cNvSpPr txBox="1"/>
-          <p:nvPr/>
-        </p:nvSpPr>
-        <p:spPr>
-          <a:xfrm>
-            <a:off x="6446520" y="1920240"/>
-            <a:ext cx="2240280" cy="4114800"/>
-          </a:xfrm>
-          <a:prstGeom prst="rect">
-            <a:avLst/>
-          </a:prstGeom>
-          <a:noFill/>
-        </p:spPr>
-        <p:txBody>
-          <a:bodyPr wrap="square">
-            <a:spAutoFit/>
-          </a:bodyPr>
-          <a:lstStyle/>
-          <a:p/>
-          <a:p>
-            <a:pPr>
-              <a:defRPr sz="1200">
-                <a:solidFill>
-                  <a:srgbClr val="F8FAFC"/>
-                </a:solidFill>
-              </a:defRPr>
-            </a:pPr>
-            <a:r>
-              <a:t>• React 19 + Vite 8 SPA</a:t>
-            </a:r>
-          </a:p>
-          <a:p>
-            <a:pPr>
-              <a:defRPr sz="1200">
-                <a:solidFill>
-                  <a:srgbClr val="F8FAFC"/>
-                </a:solidFill>
-              </a:defRPr>
-            </a:pPr>
-            <a:r>
-              <a:t>• Glassmorphic Dark UI</a:t>
-            </a:r>
-          </a:p>
-          <a:p>
-            <a:pPr>
-              <a:defRPr sz="1200">
-                <a:solidFill>
-                  <a:srgbClr val="F8FAFC"/>
-                </a:solidFill>
-              </a:defRPr>
-            </a:pPr>
-            <a:r>
-              <a:t>• 6-Account Pagination</a:t>
-            </a:r>
-          </a:p>
-          <a:p>
-            <a:pPr>
-              <a:defRPr sz="1200">
-                <a:solidFill>
-                  <a:srgbClr val="F8FAFC"/>
-                </a:solidFill>
-              </a:defRPr>
-            </a:pPr>
-            <a:r>
-              <a:t>• Money Studio deposit flow</a:t>
-            </a:r>
-          </a:p>
-          <a:p>
-            <a:pPr>
-              <a:defRPr sz="1200">
-                <a:solidFill>
-                  <a:srgbClr val="F8FAFC"/>
-                </a:solidFill>
-              </a:defRPr>
-            </a:pPr>
-            <a:r>
-              <a:t>• Real-time Toast Alerts</a:t>
-            </a:r>
-          </a:p>
-        </p:txBody>
-      </p:sp>
-      <p:sp>
-        <p:nvSpPr>
-          <p:cNvPr id="15" name="Rounded Rectangle 14"/>
-          <p:cNvSpPr/>
-          <p:nvPr/>
-        </p:nvSpPr>
-        <p:spPr>
-          <a:xfrm>
-            <a:off x="9098280" y="1371600"/>
-            <a:ext cx="2514600" cy="4937760"/>
-          </a:xfrm>
-          <a:prstGeom prst="roundRect">
-            <a:avLst/>
-          </a:prstGeom>
-          <a:solidFill>
-            <a:srgbClr val="10182C"/>
-          </a:solidFill>
-          <a:ln w="19050">
-            <a:solidFill>
-              <a:srgbClr val="1A2644"/>
-            </a:solidFill>
-          </a:ln>
-        </p:spPr>
-        <p:style>
-          <a:lnRef idx="1">
-            <a:schemeClr val="accent1"/>
-          </a:lnRef>
-          <a:fillRef idx="3">
-            <a:schemeClr val="accent1"/>
-          </a:fillRef>
-          <a:effectRef idx="2">
-            <a:schemeClr val="accent1"/>
-          </a:effectRef>
-          <a:fontRef idx="minor">
-            <a:schemeClr val="lt1"/>
-          </a:fontRef>
-        </p:style>
-        <p:txBody>
-          <a:bodyPr rtlCol="0" anchor="ctr"/>
-          <a:lstStyle/>
-          <a:p>
-            <a:pPr algn="ctr"/>
-          </a:p>
-        </p:txBody>
-      </p:sp>
-      <p:sp>
-        <p:nvSpPr>
-          <p:cNvPr id="16" name="TextBox 15"/>
-          <p:cNvSpPr txBox="1"/>
-          <p:nvPr/>
-        </p:nvSpPr>
-        <p:spPr>
-          <a:xfrm>
-            <a:off x="9281160" y="1508760"/>
-            <a:ext cx="2148840" cy="365760"/>
-          </a:xfrm>
-          <a:prstGeom prst="rect">
-            <a:avLst/>
-          </a:prstGeom>
-          <a:noFill/>
-        </p:spPr>
-        <p:txBody>
-          <a:bodyPr wrap="square">
-            <a:spAutoFit/>
-          </a:bodyPr>
-          <a:lstStyle/>
-          <a:p>
-            <a:pPr>
-              <a:defRPr sz="1500" b="1">
-                <a:solidFill>
-                  <a:srgbClr val="10B981"/>
-                </a:solidFill>
-                <a:latin typeface="Arial"/>
-              </a:defRPr>
-            </a:pPr>
-            <a:r>
-              <a:t>Cloud Persistence</a:t>
-            </a:r>
-          </a:p>
-        </p:txBody>
-      </p:sp>
-      <p:sp>
-        <p:nvSpPr>
-          <p:cNvPr id="17" name="TextBox 16"/>
-          <p:cNvSpPr txBox="1"/>
-          <p:nvPr/>
-        </p:nvSpPr>
-        <p:spPr>
-          <a:xfrm>
-            <a:off x="9235440" y="1920240"/>
-            <a:ext cx="2240280" cy="4114800"/>
-          </a:xfrm>
-          <a:prstGeom prst="rect">
-            <a:avLst/>
-          </a:prstGeom>
-          <a:noFill/>
-        </p:spPr>
-        <p:txBody>
-          <a:bodyPr wrap="square">
-            <a:spAutoFit/>
-          </a:bodyPr>
-          <a:lstStyle/>
-          <a:p/>
-          <a:p>
-            <a:pPr>
-              <a:defRPr sz="1200">
-                <a:solidFill>
-                  <a:srgbClr val="F8FAFC"/>
-                </a:solidFill>
-              </a:defRPr>
-            </a:pPr>
-            <a:r>
-              <a:t>• MongoDB Atlas Cluster</a:t>
-            </a:r>
-          </a:p>
-          <a:p>
-            <a:pPr>
-              <a:defRPr sz="1200">
-                <a:solidFill>
-                  <a:srgbClr val="F8FAFC"/>
-                </a:solidFill>
-              </a:defRPr>
-            </a:pPr>
-            <a:r>
-              <a:t>• Mongoose Schema Validation</a:t>
-            </a:r>
-          </a:p>
-          <a:p>
-            <a:pPr>
-              <a:defRPr sz="1200">
-                <a:solidFill>
-                  <a:srgbClr val="F8FAFC"/>
-                </a:solidFill>
-              </a:defRPr>
-            </a:pPr>
-            <a:r>
-              <a:t>• Localhost data.json fallback</a:t>
-            </a:r>
-          </a:p>
-          <a:p>
-            <a:pPr>
-              <a:defRPr sz="1200">
-                <a:solidFill>
-                  <a:srgbClr val="F8FAFC"/>
-                </a:solidFill>
-              </a:defRPr>
-            </a:pPr>
-            <a:r>
-              <a:t>• Immutable Transaction log</a:t>
-            </a:r>
-          </a:p>
-          <a:p>
-            <a:pPr>
-              <a:defRPr sz="1200">
-                <a:solidFill>
-                  <a:srgbClr val="F8FAFC"/>
-                </a:solidFill>
-              </a:defRPr>
-            </a:pPr>
-            <a:r>
-              <a:t>• Fault-tolerant Dual Sync</a:t>
+              <a:spcAft>
+                <a:spcPts val="2000"/>
+              </a:spcAft>
+            </a:pPr>
+            <a:r>
+              <a:rPr b="1" sz="1600">
+                <a:solidFill>
+                  <a:srgbClr val="FBBF24"/>
+                </a:solidFill>
+              </a:rPr>
+              <a:t>•  1. Core Engine (C++): </a:t>
+            </a:r>
+            <a:r>
+              <a:rPr sz="1600">
+                <a:solidFill>
+                  <a:srgbClr val="FFFFFF"/>
+                </a:solidFill>
+              </a:rPr>
+              <a:t>Modular 5-student architecture (`bank.h`, `student1.cpp` to `student5.cpp`).</a:t>
+            </a:r>
+          </a:p>
+          <a:p>
+            <a:pPr>
+              <a:spcAft>
+                <a:spcPts val="2000"/>
+              </a:spcAft>
+            </a:pPr>
+            <a:r>
+              <a:rPr b="1" sz="1600">
+                <a:solidFill>
+                  <a:srgbClr val="FBBF24"/>
+                </a:solidFill>
+              </a:rPr>
+              <a:t>•  2. REST API (Node.js &amp; Express): </a:t>
+            </a:r>
+            <a:r>
+              <a:rPr sz="1600">
+                <a:solidFill>
+                  <a:srgbClr val="FFFFFF"/>
+                </a:solidFill>
+              </a:rPr>
+              <a:t>Endpoints for account onboarding, deposits, withdrawals, and ledger streaming.</a:t>
+            </a:r>
+          </a:p>
+          <a:p>
+            <a:pPr>
+              <a:spcAft>
+                <a:spcPts val="2000"/>
+              </a:spcAft>
+            </a:pPr>
+            <a:r>
+              <a:rPr b="1" sz="1600">
+                <a:solidFill>
+                  <a:srgbClr val="FBBF24"/>
+                </a:solidFill>
+              </a:rPr>
+              <a:t>•  3. Web Frontend (React 19 + Vite 8): </a:t>
+            </a:r>
+            <a:r>
+              <a:rPr sz="1600">
+                <a:solidFill>
+                  <a:srgbClr val="FFFFFF"/>
+                </a:solidFill>
+              </a:rPr>
+              <a:t>Glassmorphic dark dashboard with initial 6-record pagination and analytics.</a:t>
+            </a:r>
+          </a:p>
+          <a:p>
+            <a:pPr>
+              <a:spcAft>
+                <a:spcPts val="2000"/>
+              </a:spcAft>
+            </a:pPr>
+            <a:r>
+              <a:rPr b="1" sz="1600">
+                <a:solidFill>
+                  <a:srgbClr val="FBBF24"/>
+                </a:solidFill>
+              </a:rPr>
+              <a:t>•  4. Database (MongoDB Atlas): </a:t>
+            </a:r>
+            <a:r>
+              <a:rPr sz="1600">
+                <a:solidFill>
+                  <a:srgbClr val="FFFFFF"/>
+                </a:solidFill>
+              </a:rPr>
+              <a:t>Dual-sync cloud cluster persistence with automatic offline recovery.</a:t>
             </a:r>
           </a:p>
         </p:txBody>
@@ -7509,7 +5954,7 @@
             <a:avLst/>
           </a:prstGeom>
           <a:solidFill>
-            <a:srgbClr val="070B16"/>
+            <a:srgbClr val="0A0F1D"/>
           </a:solidFill>
           <a:ln>
             <a:noFill/>
@@ -7545,8 +5990,8 @@
         </p:nvSpPr>
         <p:spPr>
           <a:xfrm>
-            <a:off x="731520" y="347472"/>
-            <a:ext cx="10728655" cy="36576"/>
+            <a:off x="914400" y="457200"/>
+            <a:ext cx="10362895" cy="27432"/>
           </a:xfrm>
           <a:prstGeom prst="rect">
             <a:avLst/>
@@ -7588,8 +6033,8 @@
         </p:nvSpPr>
         <p:spPr>
           <a:xfrm>
-            <a:off x="731520" y="411480"/>
-            <a:ext cx="10728655" cy="274320"/>
+            <a:off x="914400" y="594360"/>
+            <a:ext cx="10362895" cy="731520"/>
           </a:xfrm>
           <a:prstGeom prst="rect">
             <a:avLst/>
@@ -7603,15 +6048,28 @@
           <a:lstStyle/>
           <a:p>
             <a:pPr>
-              <a:defRPr sz="1100" b="1">
-                <a:solidFill>
-                  <a:srgbClr val="06B6D4"/>
-                </a:solidFill>
-                <a:latin typeface="Arial"/>
+              <a:defRPr sz="2600" b="1">
+                <a:solidFill>
+                  <a:srgbClr val="FFFFFF"/>
+                </a:solidFill>
+                <a:latin typeface="Calibri"/>
               </a:defRPr>
             </a:pPr>
             <a:r>
-              <a:t>5-STUDENT WORK BREAKDOWN STRUCTURE</a:t>
+              <a:t>Team Division &amp; Student Responsibilities</a:t>
+            </a:r>
+          </a:p>
+          <a:p>
+            <a:pPr>
+              <a:defRPr sz="1300">
+                <a:solidFill>
+                  <a:srgbClr val="38BDF8"/>
+                </a:solidFill>
+                <a:latin typeface="Calibri"/>
+              </a:defRPr>
+            </a:pPr>
+            <a:r>
+              <a:t>5-Student Modular Work Breakdown</a:t>
             </a:r>
           </a:p>
         </p:txBody>
@@ -7624,8 +6082,8 @@
         </p:nvSpPr>
         <p:spPr>
           <a:xfrm>
-            <a:off x="731520" y="685800"/>
-            <a:ext cx="10728655" cy="594360"/>
+            <a:off x="914400" y="1645920"/>
+            <a:ext cx="10362895" cy="4572000"/>
           </a:xfrm>
           <a:prstGeom prst="rect">
             <a:avLst/>
@@ -7637,680 +6095,131 @@
             <a:spAutoFit/>
           </a:bodyPr>
           <a:lstStyle/>
-          <a:p>
-            <a:pPr>
-              <a:defRPr sz="2400" b="1">
-                <a:solidFill>
-                  <a:srgbClr val="F8FAFC"/>
-                </a:solidFill>
-                <a:latin typeface="Arial"/>
-              </a:defRPr>
-            </a:pPr>
-            <a:r>
-              <a:t>Team Division &amp; Student Responsibilities Matrix</a:t>
-            </a:r>
-          </a:p>
-        </p:txBody>
-      </p:sp>
-      <p:graphicFrame>
-        <p:nvGraphicFramePr>
-          <p:cNvPr id="6" name="Table 5"/>
-          <p:cNvGraphicFramePr>
-            <a:graphicFrameLocks noGrp="1"/>
-          </p:cNvGraphicFramePr>
-          <p:nvPr/>
-        </p:nvGraphicFramePr>
-        <p:xfrm>
-          <a:off x="731520" y="1371600"/>
-          <a:ext cx="10728655" cy="4937760"/>
-        </p:xfrm>
-        <a:graphic>
-          <a:graphicData uri="http://schemas.openxmlformats.org/drawingml/2006/table">
-            <a:tbl>
-              <a:tblPr firstRow="1" bandRow="1">
-                <a:tableStyleId>{5C22544A-7EE6-4342-B048-85BDC9FD1C3A}</a:tableStyleId>
-              </a:tblPr>
-              <a:tblGrid>
-                <a:gridCol w="1828800"/>
-                <a:gridCol w="2468880"/>
-                <a:gridCol w="2286000"/>
-                <a:gridCol w="4144975"/>
-              </a:tblGrid>
-              <a:tr h="822960">
-                <a:tc>
-                  <a:txBody>
-                    <a:bodyPr/>
-                    <a:lstStyle/>
-                    <a:p>
-                      <a:pPr>
-                        <a:defRPr b="1" sz="1200">
-                          <a:solidFill>
-                            <a:srgbClr val="F8FAFC"/>
-                          </a:solidFill>
-                        </a:defRPr>
-                      </a:pPr>
-                      <a:r>
-                        <a:t>Member Name</a:t>
-                      </a:r>
-                    </a:p>
-                  </a:txBody>
-                  <a:tcPr>
-                    <a:solidFill>
-                      <a:srgbClr val="6366F1"/>
-                    </a:solidFill>
-                  </a:tcPr>
-                </a:tc>
-                <a:tc>
-                  <a:txBody>
-                    <a:bodyPr/>
-                    <a:lstStyle/>
-                    <a:p>
-                      <a:pPr>
-                        <a:defRPr b="1" sz="1200">
-                          <a:solidFill>
-                            <a:srgbClr val="F8FAFC"/>
-                          </a:solidFill>
-                        </a:defRPr>
-                      </a:pPr>
-                      <a:r>
-                        <a:t>Module Focus</a:t>
-                      </a:r>
-                    </a:p>
-                  </a:txBody>
-                  <a:tcPr>
-                    <a:solidFill>
-                      <a:srgbClr val="6366F1"/>
-                    </a:solidFill>
-                  </a:tcPr>
-                </a:tc>
-                <a:tc>
-                  <a:txBody>
-                    <a:bodyPr/>
-                    <a:lstStyle/>
-                    <a:p>
-                      <a:pPr>
-                        <a:defRPr b="1" sz="1200">
-                          <a:solidFill>
-                            <a:srgbClr val="F8FAFC"/>
-                          </a:solidFill>
-                        </a:defRPr>
-                      </a:pPr>
-                      <a:r>
-                        <a:t>DSA Concepts</a:t>
-                      </a:r>
-                    </a:p>
-                  </a:txBody>
-                  <a:tcPr>
-                    <a:solidFill>
-                      <a:srgbClr val="6366F1"/>
-                    </a:solidFill>
-                  </a:tcPr>
-                </a:tc>
-                <a:tc>
-                  <a:txBody>
-                    <a:bodyPr/>
-                    <a:lstStyle/>
-                    <a:p>
-                      <a:pPr>
-                        <a:defRPr b="1" sz="1200">
-                          <a:solidFill>
-                            <a:srgbClr val="F8FAFC"/>
-                          </a:solidFill>
-                        </a:defRPr>
-                      </a:pPr>
-                      <a:r>
-                        <a:t>Key Deliverables &amp; Functions</a:t>
-                      </a:r>
-                    </a:p>
-                  </a:txBody>
-                  <a:tcPr>
-                    <a:solidFill>
-                      <a:srgbClr val="6366F1"/>
-                    </a:solidFill>
-                  </a:tcPr>
-                </a:tc>
-              </a:tr>
-              <a:tr h="822960">
-                <a:tc>
-                  <a:txBody>
-                    <a:bodyPr/>
-                    <a:lstStyle/>
-                    <a:p>
-                      <a:pPr>
-                        <a:defRPr sz="1100">
-                          <a:solidFill>
-                            <a:srgbClr val="F8FAFC"/>
-                          </a:solidFill>
-                        </a:defRPr>
-                      </a:pPr>
-                      <a:r>
-                        <a:t>Manikanta</a:t>
-                      </a:r>
-                      <a:br/>
-                      <a:r>
-                        <a:t>(Student 1)</a:t>
-                      </a:r>
-                    </a:p>
-                  </a:txBody>
-                  <a:tcPr>
-                    <a:solidFill>
-                      <a:srgbClr val="10182C"/>
-                    </a:solidFill>
-                  </a:tcPr>
-                </a:tc>
-                <a:tc>
-                  <a:txBody>
-                    <a:bodyPr/>
-                    <a:lstStyle/>
-                    <a:p>
-                      <a:pPr>
-                        <a:defRPr sz="1100">
-                          <a:solidFill>
-                            <a:srgbClr val="F8FAFC"/>
-                          </a:solidFill>
-                        </a:defRPr>
-                      </a:pPr>
-                      <a:r>
-                        <a:t>Account Management &amp;</a:t>
-                      </a:r>
-                      <a:br/>
-                      <a:r>
-                        <a:t>Composite Structures</a:t>
-                      </a:r>
-                    </a:p>
-                  </a:txBody>
-                  <a:tcPr>
-                    <a:solidFill>
-                      <a:srgbClr val="10182C"/>
-                    </a:solidFill>
-                  </a:tcPr>
-                </a:tc>
-                <a:tc>
-                  <a:txBody>
-                    <a:bodyPr/>
-                    <a:lstStyle/>
-                    <a:p>
-                      <a:pPr>
-                        <a:defRPr sz="1100">
-                          <a:solidFill>
-                            <a:srgbClr val="F8FAFC"/>
-                          </a:solidFill>
-                        </a:defRPr>
-                      </a:pPr>
-                      <a:r>
-                        <a:t>Modules I, II, VI</a:t>
-                      </a:r>
-                      <a:br/>
-                      <a:r>
-                        <a:t>Struct Nesting &amp; Vectors</a:t>
-                      </a:r>
-                    </a:p>
-                  </a:txBody>
-                  <a:tcPr>
-                    <a:solidFill>
-                      <a:srgbClr val="10182C"/>
-                    </a:solidFill>
-                  </a:tcPr>
-                </a:tc>
-                <a:tc>
-                  <a:txBody>
-                    <a:bodyPr/>
-                    <a:lstStyle/>
-                    <a:p>
-                      <a:pPr>
-                        <a:defRPr sz="1100">
-                          <a:solidFill>
-                            <a:srgbClr val="F8FAFC"/>
-                          </a:solidFill>
-                        </a:defRPr>
-                      </a:pPr>
-                      <a:r>
-                        <a:t>seedInitialData(), displayAllCustomers(), addNewCustomer(), Date/Address Structs</a:t>
-                      </a:r>
-                    </a:p>
-                  </a:txBody>
-                  <a:tcPr>
-                    <a:solidFill>
-                      <a:srgbClr val="10182C"/>
-                    </a:solidFill>
-                  </a:tcPr>
-                </a:tc>
-              </a:tr>
-              <a:tr h="822960">
-                <a:tc>
-                  <a:txBody>
-                    <a:bodyPr/>
-                    <a:lstStyle/>
-                    <a:p>
-                      <a:pPr>
-                        <a:defRPr sz="1100">
-                          <a:solidFill>
-                            <a:srgbClr val="F8FAFC"/>
-                          </a:solidFill>
-                        </a:defRPr>
-                      </a:pPr>
-                      <a:r>
-                        <a:t>Lokesh</a:t>
-                      </a:r>
-                      <a:br/>
-                      <a:r>
-                        <a:t>(Student 2)</a:t>
-                      </a:r>
-                    </a:p>
-                  </a:txBody>
-                  <a:tcPr>
-                    <a:solidFill>
-                      <a:srgbClr val="1A2644"/>
-                    </a:solidFill>
-                  </a:tcPr>
-                </a:tc>
-                <a:tc>
-                  <a:txBody>
-                    <a:bodyPr/>
-                    <a:lstStyle/>
-                    <a:p>
-                      <a:pPr>
-                        <a:defRPr sz="1100">
-                          <a:solidFill>
-                            <a:srgbClr val="F8FAFC"/>
-                          </a:solidFill>
-                        </a:defRPr>
-                      </a:pPr>
-                      <a:r>
-                        <a:t>Financial Transactions &amp;</a:t>
-                      </a:r>
-                      <a:br/>
-                      <a:r>
-                        <a:t>Search Algorithms</a:t>
-                      </a:r>
-                    </a:p>
-                  </a:txBody>
-                  <a:tcPr>
-                    <a:solidFill>
-                      <a:srgbClr val="1A2644"/>
-                    </a:solidFill>
-                  </a:tcPr>
-                </a:tc>
-                <a:tc>
-                  <a:txBody>
-                    <a:bodyPr/>
-                    <a:lstStyle/>
-                    <a:p>
-                      <a:pPr>
-                        <a:defRPr sz="1100">
-                          <a:solidFill>
-                            <a:srgbClr val="F8FAFC"/>
-                          </a:solidFill>
-                        </a:defRPr>
-                      </a:pPr>
-                      <a:r>
-                        <a:t>Modules II, III, VII</a:t>
-                      </a:r>
-                      <a:br/>
-                      <a:r>
-                        <a:t>Linear &amp; Binary Search</a:t>
-                      </a:r>
-                    </a:p>
-                  </a:txBody>
-                  <a:tcPr>
-                    <a:solidFill>
-                      <a:srgbClr val="1A2644"/>
-                    </a:solidFill>
-                  </a:tcPr>
-                </a:tc>
-                <a:tc>
-                  <a:txBody>
-                    <a:bodyPr/>
-                    <a:lstStyle/>
-                    <a:p>
-                      <a:pPr>
-                        <a:defRPr sz="1100">
-                          <a:solidFill>
-                            <a:srgbClr val="F8FAFC"/>
-                          </a:solidFill>
-                        </a:defRPr>
-                      </a:pPr>
-                      <a:r>
-                        <a:t>linearSearchByPhone() O(n), binarySearchByAccountNo() O(log n), depositFunds(), withdrawFunds()</a:t>
-                      </a:r>
-                    </a:p>
-                  </a:txBody>
-                  <a:tcPr>
-                    <a:solidFill>
-                      <a:srgbClr val="1A2644"/>
-                    </a:solidFill>
-                  </a:tcPr>
-                </a:tc>
-              </a:tr>
-              <a:tr h="822960">
-                <a:tc>
-                  <a:txBody>
-                    <a:bodyPr/>
-                    <a:lstStyle/>
-                    <a:p>
-                      <a:pPr>
-                        <a:defRPr sz="1100">
-                          <a:solidFill>
-                            <a:srgbClr val="F8FAFC"/>
-                          </a:solidFill>
-                        </a:defRPr>
-                      </a:pPr>
-                      <a:r>
-                        <a:t>Anil</a:t>
-                      </a:r>
-                      <a:br/>
-                      <a:r>
-                        <a:t>(Student 3)</a:t>
-                      </a:r>
-                    </a:p>
-                  </a:txBody>
-                  <a:tcPr>
-                    <a:solidFill>
-                      <a:srgbClr val="10182C"/>
-                    </a:solidFill>
-                  </a:tcPr>
-                </a:tc>
-                <a:tc>
-                  <a:txBody>
-                    <a:bodyPr/>
-                    <a:lstStyle/>
-                    <a:p>
-                      <a:pPr>
-                        <a:defRPr sz="1100">
-                          <a:solidFill>
-                            <a:srgbClr val="F8FAFC"/>
-                          </a:solidFill>
-                        </a:defRPr>
-                      </a:pPr>
-                      <a:r>
-                        <a:t>Sorting Algorithms &amp;</a:t>
-                      </a:r>
-                      <a:br/>
-                      <a:r>
-                        <a:t>2D Matrix Algebra</a:t>
-                      </a:r>
-                    </a:p>
-                  </a:txBody>
-                  <a:tcPr>
-                    <a:solidFill>
-                      <a:srgbClr val="10182C"/>
-                    </a:solidFill>
-                  </a:tcPr>
-                </a:tc>
-                <a:tc>
-                  <a:txBody>
-                    <a:bodyPr/>
-                    <a:lstStyle/>
-                    <a:p>
-                      <a:pPr>
-                        <a:defRPr sz="1100">
-                          <a:solidFill>
-                            <a:srgbClr val="F8FAFC"/>
-                          </a:solidFill>
-                        </a:defRPr>
-                      </a:pPr>
-                      <a:r>
-                        <a:t>Modules III, IV, VII</a:t>
-                      </a:r>
-                      <a:br/>
-                      <a:r>
-                        <a:t>Insertion Sort &amp; 2D Array</a:t>
-                      </a:r>
-                    </a:p>
-                  </a:txBody>
-                  <a:tcPr>
-                    <a:solidFill>
-                      <a:srgbClr val="10182C"/>
-                    </a:solidFill>
-                  </a:tcPr>
-                </a:tc>
-                <a:tc>
-                  <a:txBody>
-                    <a:bodyPr/>
-                    <a:lstStyle/>
-                    <a:p>
-                      <a:pPr>
-                        <a:defRPr sz="1100">
-                          <a:solidFill>
-                            <a:srgbClr val="F8FAFC"/>
-                          </a:solidFill>
-                        </a:defRPr>
-                      </a:pPr>
-                      <a:r>
-                        <a:t>insertionSortByBalance() O(n^2), sortCustomers(), Matrix Add/Sub/Mult/Transpose demo</a:t>
-                      </a:r>
-                    </a:p>
-                  </a:txBody>
-                  <a:tcPr>
-                    <a:solidFill>
-                      <a:srgbClr val="10182C"/>
-                    </a:solidFill>
-                  </a:tcPr>
-                </a:tc>
-              </a:tr>
-              <a:tr h="822960">
-                <a:tc>
-                  <a:txBody>
-                    <a:bodyPr/>
-                    <a:lstStyle/>
-                    <a:p>
-                      <a:pPr>
-                        <a:defRPr sz="1100">
-                          <a:solidFill>
-                            <a:srgbClr val="F8FAFC"/>
-                          </a:solidFill>
-                        </a:defRPr>
-                      </a:pPr>
-                      <a:r>
-                        <a:t>Shishira</a:t>
-                      </a:r>
-                      <a:br/>
-                      <a:r>
-                        <a:t>(Student 4)</a:t>
-                      </a:r>
-                    </a:p>
-                  </a:txBody>
-                  <a:tcPr>
-                    <a:solidFill>
-                      <a:srgbClr val="1A2644"/>
-                    </a:solidFill>
-                  </a:tcPr>
-                </a:tc>
-                <a:tc>
-                  <a:txBody>
-                    <a:bodyPr/>
-                    <a:lstStyle/>
-                    <a:p>
-                      <a:pPr>
-                        <a:defRPr sz="1100">
-                          <a:solidFill>
-                            <a:srgbClr val="F8FAFC"/>
-                          </a:solidFill>
-                        </a:defRPr>
-                      </a:pPr>
-                      <a:r>
-                        <a:t>String Processing &amp;</a:t>
-                      </a:r>
-                      <a:br/>
-                      <a:r>
-                        <a:t>Stack ADT (LIFO)</a:t>
-                      </a:r>
-                    </a:p>
-                  </a:txBody>
-                  <a:tcPr>
-                    <a:solidFill>
-                      <a:srgbClr val="1A2644"/>
-                    </a:solidFill>
-                  </a:tcPr>
-                </a:tc>
-                <a:tc>
-                  <a:txBody>
-                    <a:bodyPr/>
-                    <a:lstStyle/>
-                    <a:p>
-                      <a:pPr>
-                        <a:defRPr sz="1100">
-                          <a:solidFill>
-                            <a:srgbClr val="F8FAFC"/>
-                          </a:solidFill>
-                        </a:defRPr>
-                      </a:pPr>
-                      <a:r>
-                        <a:t>Modules V, VIII</a:t>
-                      </a:r>
-                      <a:br/>
-                      <a:r>
-                        <a:t>Strings &amp; Stack (LIFO)</a:t>
-                      </a:r>
-                    </a:p>
-                  </a:txBody>
-                  <a:tcPr>
-                    <a:solidFill>
-                      <a:srgbClr val="1A2644"/>
-                    </a:solidFill>
-                  </a:tcPr>
-                </a:tc>
-                <a:tc>
-                  <a:txBody>
-                    <a:bodyPr/>
-                    <a:lstStyle/>
-                    <a:p>
-                      <a:pPr>
-                        <a:defRPr sz="1100">
-                          <a:solidFill>
-                            <a:srgbClr val="F8FAFC"/>
-                          </a:solidFill>
-                        </a:defRPr>
-                      </a:pPr>
-                      <a:r>
-                        <a:t>reverseString(), countCharacterFrequency(), searchPattern(), Stack ADT &amp; Parenthesis Check</a:t>
-                      </a:r>
-                    </a:p>
-                  </a:txBody>
-                  <a:tcPr>
-                    <a:solidFill>
-                      <a:srgbClr val="1A2644"/>
-                    </a:solidFill>
-                  </a:tcPr>
-                </a:tc>
-              </a:tr>
-              <a:tr h="822960">
-                <a:tc>
-                  <a:txBody>
-                    <a:bodyPr/>
-                    <a:lstStyle/>
-                    <a:p>
-                      <a:pPr>
-                        <a:defRPr sz="1100">
-                          <a:solidFill>
-                            <a:srgbClr val="F8FAFC"/>
-                          </a:solidFill>
-                        </a:defRPr>
-                      </a:pPr>
-                      <a:r>
-                        <a:t>Chathwik</a:t>
-                      </a:r>
-                      <a:br/>
-                      <a:r>
-                        <a:t>(Student 5)</a:t>
-                      </a:r>
-                    </a:p>
-                  </a:txBody>
-                  <a:tcPr>
-                    <a:solidFill>
-                      <a:srgbClr val="10182C"/>
-                    </a:solidFill>
-                  </a:tcPr>
-                </a:tc>
-                <a:tc>
-                  <a:txBody>
-                    <a:bodyPr/>
-                    <a:lstStyle/>
-                    <a:p>
-                      <a:pPr>
-                        <a:defRPr sz="1100">
-                          <a:solidFill>
-                            <a:srgbClr val="F8FAFC"/>
-                          </a:solidFill>
-                        </a:defRPr>
-                      </a:pPr>
-                      <a:r>
-                        <a:t>Queue ADT, STL &amp;</a:t>
-                      </a:r>
-                      <a:br/>
-                      <a:r>
-                        <a:t>Driver Controller</a:t>
-                      </a:r>
-                    </a:p>
-                  </a:txBody>
-                  <a:tcPr>
-                    <a:solidFill>
-                      <a:srgbClr val="10182C"/>
-                    </a:solidFill>
-                  </a:tcPr>
-                </a:tc>
-                <a:tc>
-                  <a:txBody>
-                    <a:bodyPr/>
-                    <a:lstStyle/>
-                    <a:p>
-                      <a:pPr>
-                        <a:defRPr sz="1100">
-                          <a:solidFill>
-                            <a:srgbClr val="F8FAFC"/>
-                          </a:solidFill>
-                        </a:defRPr>
-                      </a:pPr>
-                      <a:r>
-                        <a:t>Modules I, II, IX, X</a:t>
-                      </a:r>
-                      <a:br/>
-                      <a:r>
-                        <a:t>Queues &amp; STL Library</a:t>
-                      </a:r>
-                    </a:p>
-                  </a:txBody>
-                  <a:tcPr>
-                    <a:solidFill>
-                      <a:srgbClr val="10182C"/>
-                    </a:solidFill>
-                  </a:tcPr>
-                </a:tc>
-                <a:tc>
-                  <a:txBody>
-                    <a:bodyPr/>
-                    <a:lstStyle/>
-                    <a:p>
-                      <a:pPr>
-                        <a:defRPr sz="1100">
-                          <a:solidFill>
-                            <a:srgbClr val="F8FAFC"/>
-                          </a:solidFill>
-                        </a:defRPr>
-                      </a:pPr>
-                      <a:r>
-                        <a:t>LinearQueue, CircularQueue with Modulo %, vector/pair/deque/set/map demos, main() menu</a:t>
-                      </a:r>
-                    </a:p>
-                  </a:txBody>
-                  <a:tcPr>
-                    <a:solidFill>
-                      <a:srgbClr val="10182C"/>
-                    </a:solidFill>
-                  </a:tcPr>
-                </a:tc>
-              </a:tr>
-            </a:tbl>
-          </a:graphicData>
-        </a:graphic>
-      </p:graphicFrame>
+          <a:p/>
+          <a:p>
+            <a:pPr>
+              <a:spcAft>
+                <a:spcPts val="1600"/>
+              </a:spcAft>
+            </a:pPr>
+            <a:r>
+              <a:rPr b="1" sz="1600">
+                <a:solidFill>
+                  <a:srgbClr val="38BDF8"/>
+                </a:solidFill>
+              </a:rPr>
+              <a:t>•  Student 1 (Manikanta): </a:t>
+            </a:r>
+            <a:r>
+              <a:rPr sz="1600">
+                <a:solidFill>
+                  <a:srgbClr val="FFFFFF"/>
+                </a:solidFill>
+              </a:rPr>
+              <a:t>Account Management, Composite Structures &amp; Tabular Reporting (`student1.cpp`)</a:t>
+            </a:r>
+          </a:p>
+          <a:p>
+            <a:pPr>
+              <a:spcAft>
+                <a:spcPts val="1600"/>
+              </a:spcAft>
+            </a:pPr>
+            <a:r>
+              <a:rPr b="1" sz="1600">
+                <a:solidFill>
+                  <a:srgbClr val="38BDF8"/>
+                </a:solidFill>
+              </a:rPr>
+              <a:t>•  Student 2 (Lokesh): </a:t>
+            </a:r>
+            <a:r>
+              <a:rPr sz="1600">
+                <a:solidFill>
+                  <a:srgbClr val="FFFFFF"/>
+                </a:solidFill>
+              </a:rPr>
+              <a:t>Linear Search, Binary Search, Deposit/Withdraw Transactions (`student2.cpp`)</a:t>
+            </a:r>
+          </a:p>
+          <a:p>
+            <a:pPr>
+              <a:spcAft>
+                <a:spcPts val="1600"/>
+              </a:spcAft>
+            </a:pPr>
+            <a:r>
+              <a:rPr b="1" sz="1600">
+                <a:solidFill>
+                  <a:srgbClr val="38BDF8"/>
+                </a:solidFill>
+              </a:rPr>
+              <a:t>•  Student 3 (Anil): </a:t>
+            </a:r>
+            <a:r>
+              <a:rPr sz="1600">
+                <a:solidFill>
+                  <a:srgbClr val="FFFFFF"/>
+                </a:solidFill>
+              </a:rPr>
+              <a:t>Insertion Sort (Asc/Desc) &amp; 2D Matrix Cash Flow Algebra (`student3.cpp`)</a:t>
+            </a:r>
+          </a:p>
+          <a:p>
+            <a:pPr>
+              <a:spcAft>
+                <a:spcPts val="1600"/>
+              </a:spcAft>
+            </a:pPr>
+            <a:r>
+              <a:rPr b="1" sz="1600">
+                <a:solidFill>
+                  <a:srgbClr val="38BDF8"/>
+                </a:solidFill>
+              </a:rPr>
+              <a:t>•  Student 4 (Shishira): </a:t>
+            </a:r>
+            <a:r>
+              <a:rPr sz="1600">
+                <a:solidFill>
+                  <a:srgbClr val="FFFFFF"/>
+                </a:solidFill>
+              </a:rPr>
+              <a:t>String Algorithms, Frequency Analysis &amp; Stack ADT (`student4.cpp`)</a:t>
+            </a:r>
+          </a:p>
+          <a:p>
+            <a:pPr>
+              <a:spcAft>
+                <a:spcPts val="1600"/>
+              </a:spcAft>
+            </a:pPr>
+            <a:r>
+              <a:rPr b="1" sz="1600">
+                <a:solidFill>
+                  <a:srgbClr val="38BDF8"/>
+                </a:solidFill>
+              </a:rPr>
+              <a:t>•  Student 5 (Chathwik): </a:t>
+            </a:r>
+            <a:r>
+              <a:rPr sz="1600">
+                <a:solidFill>
+                  <a:srgbClr val="FFFFFF"/>
+                </a:solidFill>
+              </a:rPr>
+              <a:t>Linear &amp; Circular Queue ADT, STL Containers &amp; Main Controller (`student5.cpp`)</a:t>
+            </a:r>
+          </a:p>
+        </p:txBody>
+      </p:sp>
     </p:spTree>
   </p:cSld>
   <p:clrMapOvr>
     <a:masterClrMapping/>
   </p:clrMapOvr>
   <p:transition spd="fast">
-    <p:cover dir="l"/>
+    <p:push dir="l"/>
   </p:transition>
 </p:sld>
 </file>
@@ -8340,7 +6249,7 @@
             <a:avLst/>
           </a:prstGeom>
           <a:solidFill>
-            <a:srgbClr val="070B16"/>
+            <a:srgbClr val="0A0F1D"/>
           </a:solidFill>
           <a:ln>
             <a:noFill/>
@@ -8376,8 +6285,8 @@
         </p:nvSpPr>
         <p:spPr>
           <a:xfrm>
-            <a:off x="731520" y="347472"/>
-            <a:ext cx="10728655" cy="36576"/>
+            <a:off x="914400" y="457200"/>
+            <a:ext cx="10362895" cy="27432"/>
           </a:xfrm>
           <a:prstGeom prst="rect">
             <a:avLst/>
@@ -8419,8 +6328,8 @@
         </p:nvSpPr>
         <p:spPr>
           <a:xfrm>
-            <a:off x="731520" y="411480"/>
-            <a:ext cx="10728655" cy="274320"/>
+            <a:off x="914400" y="594360"/>
+            <a:ext cx="10362895" cy="731520"/>
           </a:xfrm>
           <a:prstGeom prst="rect">
             <a:avLst/>
@@ -8434,15 +6343,28 @@
           <a:lstStyle/>
           <a:p>
             <a:pPr>
-              <a:defRPr sz="1100" b="1">
-                <a:solidFill>
-                  <a:srgbClr val="06B6D4"/>
-                </a:solidFill>
-                <a:latin typeface="Arial"/>
+              <a:defRPr sz="2600" b="1">
+                <a:solidFill>
+                  <a:srgbClr val="FFFFFF"/>
+                </a:solidFill>
+                <a:latin typeface="Calibri"/>
               </a:defRPr>
             </a:pPr>
             <a:r>
-              <a:t>MODULES I, II, VI — STUDENT1.CPP</a:t>
+              <a:t>Student 1: Manikanta</a:t>
+            </a:r>
+          </a:p>
+          <a:p>
+            <a:pPr>
+              <a:defRPr sz="1300">
+                <a:solidFill>
+                  <a:srgbClr val="38BDF8"/>
+                </a:solidFill>
+                <a:latin typeface="Calibri"/>
+              </a:defRPr>
+            </a:pPr>
+            <a:r>
+              <a:t>Account Management &amp; Data Structures (Modules I, II, VI)</a:t>
             </a:r>
           </a:p>
         </p:txBody>
@@ -8455,8 +6377,8 @@
         </p:nvSpPr>
         <p:spPr>
           <a:xfrm>
-            <a:off x="731520" y="685800"/>
-            <a:ext cx="10728655" cy="594360"/>
+            <a:off x="914400" y="1645920"/>
+            <a:ext cx="10362895" cy="4572000"/>
           </a:xfrm>
           <a:prstGeom prst="rect">
             <a:avLst/>
@@ -8468,335 +6390,97 @@
             <a:spAutoFit/>
           </a:bodyPr>
           <a:lstStyle/>
-          <a:p>
-            <a:pPr>
-              <a:defRPr sz="2400" b="1">
-                <a:solidFill>
-                  <a:srgbClr val="F8FAFC"/>
-                </a:solidFill>
-                <a:latin typeface="Arial"/>
-              </a:defRPr>
-            </a:pPr>
-            <a:r>
-              <a:t>Student 1: Manikanta — Account Management &amp; Structs</a:t>
-            </a:r>
-          </a:p>
-        </p:txBody>
-      </p:sp>
-      <p:sp>
-        <p:nvSpPr>
-          <p:cNvPr id="6" name="Rounded Rectangle 5"/>
-          <p:cNvSpPr/>
-          <p:nvPr/>
-        </p:nvSpPr>
-        <p:spPr>
-          <a:xfrm>
-            <a:off x="731520" y="1371600"/>
-            <a:ext cx="5120640" cy="4937760"/>
-          </a:xfrm>
-          <a:prstGeom prst="roundRect">
-            <a:avLst/>
-          </a:prstGeom>
-          <a:solidFill>
-            <a:srgbClr val="10182C"/>
-          </a:solidFill>
-          <a:ln w="19050">
-            <a:solidFill>
-              <a:srgbClr val="1A2644"/>
-            </a:solidFill>
-          </a:ln>
-        </p:spPr>
-        <p:style>
-          <a:lnRef idx="1">
-            <a:schemeClr val="accent1"/>
-          </a:lnRef>
-          <a:fillRef idx="3">
-            <a:schemeClr val="accent1"/>
-          </a:fillRef>
-          <a:effectRef idx="2">
-            <a:schemeClr val="accent1"/>
-          </a:effectRef>
-          <a:fontRef idx="minor">
-            <a:schemeClr val="lt1"/>
-          </a:fontRef>
-        </p:style>
-        <p:txBody>
-          <a:bodyPr rtlCol="0" anchor="ctr"/>
-          <a:lstStyle/>
-          <a:p>
-            <a:pPr algn="ctr"/>
-          </a:p>
-        </p:txBody>
-      </p:sp>
-      <p:sp>
-        <p:nvSpPr>
-          <p:cNvPr id="7" name="TextBox 6"/>
-          <p:cNvSpPr txBox="1"/>
-          <p:nvPr/>
-        </p:nvSpPr>
-        <p:spPr>
-          <a:xfrm>
-            <a:off x="914400" y="1508760"/>
-            <a:ext cx="4754880" cy="365760"/>
-          </a:xfrm>
-          <a:prstGeom prst="rect">
-            <a:avLst/>
-          </a:prstGeom>
-          <a:noFill/>
-        </p:spPr>
-        <p:txBody>
-          <a:bodyPr wrap="square">
-            <a:spAutoFit/>
-          </a:bodyPr>
-          <a:lstStyle/>
-          <a:p>
-            <a:pPr>
-              <a:defRPr sz="1500" b="1">
-                <a:solidFill>
-                  <a:srgbClr val="06B6D4"/>
-                </a:solidFill>
-                <a:latin typeface="Arial"/>
-              </a:defRPr>
-            </a:pPr>
-            <a:r>
-              <a:t>Core Composite Structures</a:t>
-            </a:r>
-          </a:p>
-        </p:txBody>
-      </p:sp>
-      <p:sp>
-        <p:nvSpPr>
-          <p:cNvPr id="8" name="TextBox 7"/>
-          <p:cNvSpPr txBox="1"/>
-          <p:nvPr/>
-        </p:nvSpPr>
-        <p:spPr>
-          <a:xfrm>
-            <a:off x="914400" y="1920240"/>
-            <a:ext cx="4754880" cy="4206240"/>
-          </a:xfrm>
-          <a:prstGeom prst="rect">
-            <a:avLst/>
-          </a:prstGeom>
-          <a:noFill/>
-        </p:spPr>
-        <p:txBody>
-          <a:bodyPr wrap="square">
-            <a:spAutoFit/>
-          </a:bodyPr>
-          <a:lstStyle/>
           <a:p/>
           <a:p>
-            <a:r>
-              <a:rPr b="1" sz="1300">
-                <a:solidFill>
-                  <a:srgbClr val="F8FAFC"/>
-                </a:solidFill>
-              </a:rPr>
-              <a:t>• Composite Entity Architecture: </a:t>
-            </a:r>
-            <a:r>
-              <a:rPr sz="1300">
-                <a:solidFill>
-                  <a:srgbClr val="94A3B8"/>
-                </a:solidFill>
-              </a:rPr>
-              <a:t>Defined `Customer` struct combining primitive types with nested `Date` (day, month, year) and `Address` (city, state, pincode) structs.</a:t>
-            </a:r>
-          </a:p>
-          <a:p>
-            <a:r>
-              <a:rPr b="1" sz="1300">
-                <a:solidFill>
-                  <a:srgbClr val="F8FAFC"/>
-                </a:solidFill>
-              </a:rPr>
-              <a:t>• Audit Record Entity: </a:t>
-            </a:r>
-            <a:r>
-              <a:rPr sz="1300">
-                <a:solidFill>
-                  <a:srgbClr val="94A3B8"/>
-                </a:solidFill>
-              </a:rPr>
-              <a:t>Engineered `Transaction` struct recording `txnId`, `accountNo`, `type` (OPENING, DEPOSIT, WITHDRAW), `amount`, and `balanceAfter`.</a:t>
-            </a:r>
-          </a:p>
-          <a:p>
-            <a:r>
-              <a:rPr b="1" sz="1300">
-                <a:solidFill>
-                  <a:srgbClr val="F8FAFC"/>
-                </a:solidFill>
-              </a:rPr>
-              <a:t>• Global Data Storage: </a:t>
-            </a:r>
-            <a:r>
-              <a:rPr sz="1300">
-                <a:solidFill>
-                  <a:srgbClr val="94A3B8"/>
-                </a:solidFill>
-              </a:rPr>
-              <a:t>Maintains master collections `customerList` and `transactionList` vectors with auto-increment ID counters.</a:t>
-            </a:r>
-          </a:p>
-        </p:txBody>
-      </p:sp>
-      <p:sp>
-        <p:nvSpPr>
-          <p:cNvPr id="9" name="Rounded Rectangle 8"/>
-          <p:cNvSpPr/>
-          <p:nvPr/>
-        </p:nvSpPr>
-        <p:spPr>
-          <a:xfrm>
-            <a:off x="6309360" y="1371600"/>
-            <a:ext cx="5120640" cy="4937760"/>
-          </a:xfrm>
-          <a:prstGeom prst="roundRect">
-            <a:avLst/>
-          </a:prstGeom>
-          <a:solidFill>
-            <a:srgbClr val="10182C"/>
-          </a:solidFill>
-          <a:ln w="19050">
-            <a:solidFill>
-              <a:srgbClr val="1A2644"/>
-            </a:solidFill>
-          </a:ln>
-        </p:spPr>
-        <p:style>
-          <a:lnRef idx="1">
-            <a:schemeClr val="accent1"/>
-          </a:lnRef>
-          <a:fillRef idx="3">
-            <a:schemeClr val="accent1"/>
-          </a:fillRef>
-          <a:effectRef idx="2">
-            <a:schemeClr val="accent1"/>
-          </a:effectRef>
-          <a:fontRef idx="minor">
-            <a:schemeClr val="lt1"/>
-          </a:fontRef>
-        </p:style>
-        <p:txBody>
-          <a:bodyPr rtlCol="0" anchor="ctr"/>
-          <a:lstStyle/>
-          <a:p>
-            <a:pPr algn="ctr"/>
-          </a:p>
-        </p:txBody>
-      </p:sp>
-      <p:sp>
-        <p:nvSpPr>
-          <p:cNvPr id="10" name="TextBox 9"/>
-          <p:cNvSpPr txBox="1"/>
-          <p:nvPr/>
-        </p:nvSpPr>
-        <p:spPr>
-          <a:xfrm>
-            <a:off x="6492240" y="1508760"/>
-            <a:ext cx="4754880" cy="365760"/>
-          </a:xfrm>
-          <a:prstGeom prst="rect">
-            <a:avLst/>
-          </a:prstGeom>
-          <a:noFill/>
-        </p:spPr>
-        <p:txBody>
-          <a:bodyPr wrap="square">
-            <a:spAutoFit/>
-          </a:bodyPr>
-          <a:lstStyle/>
-          <a:p>
-            <a:pPr>
-              <a:defRPr sz="1500" b="1">
-                <a:solidFill>
-                  <a:srgbClr val="10B981"/>
-                </a:solidFill>
-                <a:latin typeface="Arial"/>
-              </a:defRPr>
-            </a:pPr>
-            <a:r>
-              <a:t>Key Functions &amp; Implementations</a:t>
-            </a:r>
-          </a:p>
-        </p:txBody>
-      </p:sp>
-      <p:sp>
-        <p:nvSpPr>
-          <p:cNvPr id="11" name="TextBox 10"/>
-          <p:cNvSpPr txBox="1"/>
-          <p:nvPr/>
-        </p:nvSpPr>
-        <p:spPr>
-          <a:xfrm>
-            <a:off x="6492240" y="1920240"/>
-            <a:ext cx="4754880" cy="4206240"/>
-          </a:xfrm>
-          <a:prstGeom prst="rect">
-            <a:avLst/>
-          </a:prstGeom>
-          <a:noFill/>
-        </p:spPr>
-        <p:txBody>
-          <a:bodyPr wrap="square">
-            <a:spAutoFit/>
-          </a:bodyPr>
-          <a:lstStyle/>
-          <a:p/>
-          <a:p>
-            <a:r>
-              <a:rPr b="1" sz="1300">
-                <a:solidFill>
-                  <a:srgbClr val="F8FAFC"/>
-                </a:solidFill>
-              </a:rPr>
-              <a:t>• seedInitialData(): </a:t>
-            </a:r>
-            <a:r>
-              <a:rPr sz="1300">
-                <a:solidFill>
-                  <a:srgbClr val="94A3B8"/>
-                </a:solidFill>
-              </a:rPr>
-              <a:t>Pre-populates the database with 6 benchmark customer records and initial transaction audit logs for instant demonstration.</a:t>
-            </a:r>
-          </a:p>
-          <a:p>
-            <a:r>
-              <a:rPr b="1" sz="1300">
-                <a:solidFill>
-                  <a:srgbClr val="F8FAFC"/>
-                </a:solidFill>
-              </a:rPr>
-              <a:t>• displayAllCustomers(): </a:t>
-            </a:r>
-            <a:r>
-              <a:rPr sz="1300">
-                <a:solidFill>
-                  <a:srgbClr val="94A3B8"/>
-                </a:solidFill>
-              </a:rPr>
-              <a:t>Generates formatted tabular reports using `&lt;iomanip&gt;` (`setw`, `left`, `right`, `fixed`, `setprecision`).</a:t>
-            </a:r>
-          </a:p>
-          <a:p>
-            <a:r>
-              <a:rPr b="1" sz="1300">
-                <a:solidFill>
-                  <a:srgbClr val="F8FAFC"/>
-                </a:solidFill>
-              </a:rPr>
-              <a:t>• addNewCustomer(): </a:t>
-            </a:r>
-            <a:r>
-              <a:rPr sz="1300">
-                <a:solidFill>
-                  <a:srgbClr val="94A3B8"/>
-                </a:solidFill>
-              </a:rPr>
-              <a:t>Enforces strict input validation: minimum ₹500 initial deposit for SAVINGS accounts, verifies phone uniqueness, and auto-journals the opening transaction.</a:t>
+            <a:pPr>
+              <a:spcAft>
+                <a:spcPts val="1800"/>
+              </a:spcAft>
+            </a:pPr>
+            <a:r>
+              <a:rPr b="1" sz="1600">
+                <a:solidFill>
+                  <a:srgbClr val="34D399"/>
+                </a:solidFill>
+              </a:rPr>
+              <a:t>•  Composite Structures: </a:t>
+            </a:r>
+            <a:r>
+              <a:rPr sz="1600">
+                <a:solidFill>
+                  <a:srgbClr val="FFFFFF"/>
+                </a:solidFill>
+              </a:rPr>
+              <a:t>Nested `Date` and `Address` structs inside the core `Customer` entity.</a:t>
+            </a:r>
+          </a:p>
+          <a:p>
+            <a:pPr>
+              <a:spcAft>
+                <a:spcPts val="1800"/>
+              </a:spcAft>
+            </a:pPr>
+            <a:r>
+              <a:rPr b="1" sz="1600">
+                <a:solidFill>
+                  <a:srgbClr val="34D399"/>
+                </a:solidFill>
+              </a:rPr>
+              <a:t>•  Demo Initialization (`seedInitialData`): </a:t>
+            </a:r>
+            <a:r>
+              <a:rPr sz="1600">
+                <a:solidFill>
+                  <a:srgbClr val="FFFFFF"/>
+                </a:solidFill>
+              </a:rPr>
+              <a:t>Pre-loads 6 benchmark accounts and opening ledger logs.</a:t>
+            </a:r>
+          </a:p>
+          <a:p>
+            <a:pPr>
+              <a:spcAft>
+                <a:spcPts val="1800"/>
+              </a:spcAft>
+            </a:pPr>
+            <a:r>
+              <a:rPr b="1" sz="1600">
+                <a:solidFill>
+                  <a:srgbClr val="34D399"/>
+                </a:solidFill>
+              </a:rPr>
+              <a:t>•  Account Onboarding (`addNewCustomer`): </a:t>
+            </a:r>
+            <a:r>
+              <a:rPr sz="1600">
+                <a:solidFill>
+                  <a:srgbClr val="FFFFFF"/>
+                </a:solidFill>
+              </a:rPr>
+              <a:t>Enforces ₹500 minimum initial deposit and duplicate phone checks.</a:t>
+            </a:r>
+          </a:p>
+          <a:p>
+            <a:pPr>
+              <a:spcAft>
+                <a:spcPts val="1800"/>
+              </a:spcAft>
+            </a:pPr>
+            <a:r>
+              <a:rPr b="1" sz="1600">
+                <a:solidFill>
+                  <a:srgbClr val="34D399"/>
+                </a:solidFill>
+              </a:rPr>
+              <a:t>•  Formatted Reports (`displayAllCustomers`): </a:t>
+            </a:r>
+            <a:r>
+              <a:rPr sz="1600">
+                <a:solidFill>
+                  <a:srgbClr val="FFFFFF"/>
+                </a:solidFill>
+              </a:rPr>
+              <a:t>Tabular console formatting with `&lt;iomanip&gt;` (`setw`, `fixed`).</a:t>
             </a:r>
           </a:p>
         </p:txBody>
@@ -8837,7 +6521,7 @@
             <a:avLst/>
           </a:prstGeom>
           <a:solidFill>
-            <a:srgbClr val="070B16"/>
+            <a:srgbClr val="0A0F1D"/>
           </a:solidFill>
           <a:ln>
             <a:noFill/>
@@ -8873,8 +6557,8 @@
         </p:nvSpPr>
         <p:spPr>
           <a:xfrm>
-            <a:off x="731520" y="347472"/>
-            <a:ext cx="10728655" cy="36576"/>
+            <a:off x="914400" y="457200"/>
+            <a:ext cx="10362895" cy="27432"/>
           </a:xfrm>
           <a:prstGeom prst="rect">
             <a:avLst/>
@@ -8916,8 +6600,8 @@
         </p:nvSpPr>
         <p:spPr>
           <a:xfrm>
-            <a:off x="731520" y="411480"/>
-            <a:ext cx="10728655" cy="274320"/>
+            <a:off x="914400" y="594360"/>
+            <a:ext cx="10362895" cy="731520"/>
           </a:xfrm>
           <a:prstGeom prst="rect">
             <a:avLst/>
@@ -8931,15 +6615,28 @@
           <a:lstStyle/>
           <a:p>
             <a:pPr>
-              <a:defRPr sz="1100" b="1">
-                <a:solidFill>
-                  <a:srgbClr val="06B6D4"/>
-                </a:solidFill>
-                <a:latin typeface="Arial"/>
+              <a:defRPr sz="2600" b="1">
+                <a:solidFill>
+                  <a:srgbClr val="FFFFFF"/>
+                </a:solidFill>
+                <a:latin typeface="Calibri"/>
               </a:defRPr>
             </a:pPr>
             <a:r>
-              <a:t>MODULES II, III, VII — STUDENT2.CPP</a:t>
+              <a:t>Student 2: Lokesh</a:t>
+            </a:r>
+          </a:p>
+          <a:p>
+            <a:pPr>
+              <a:defRPr sz="1300">
+                <a:solidFill>
+                  <a:srgbClr val="38BDF8"/>
+                </a:solidFill>
+                <a:latin typeface="Calibri"/>
+              </a:defRPr>
+            </a:pPr>
+            <a:r>
+              <a:t>Financial Transactions &amp; Search Algorithms (Modules II, III, VII)</a:t>
             </a:r>
           </a:p>
         </p:txBody>
@@ -8952,8 +6649,8 @@
         </p:nvSpPr>
         <p:spPr>
           <a:xfrm>
-            <a:off x="731520" y="685800"/>
-            <a:ext cx="10728655" cy="594360"/>
+            <a:off x="914400" y="1645920"/>
+            <a:ext cx="10362895" cy="4572000"/>
           </a:xfrm>
           <a:prstGeom prst="rect">
             <a:avLst/>
@@ -8965,335 +6662,97 @@
             <a:spAutoFit/>
           </a:bodyPr>
           <a:lstStyle/>
-          <a:p>
-            <a:pPr>
-              <a:defRPr sz="2400" b="1">
-                <a:solidFill>
-                  <a:srgbClr val="F8FAFC"/>
-                </a:solidFill>
-                <a:latin typeface="Arial"/>
-              </a:defRPr>
-            </a:pPr>
-            <a:r>
-              <a:t>Student 2: Lokesh — Search Algorithms &amp; Transactions</a:t>
-            </a:r>
-          </a:p>
-        </p:txBody>
-      </p:sp>
-      <p:sp>
-        <p:nvSpPr>
-          <p:cNvPr id="6" name="Rounded Rectangle 5"/>
-          <p:cNvSpPr/>
-          <p:nvPr/>
-        </p:nvSpPr>
-        <p:spPr>
-          <a:xfrm>
-            <a:off x="731520" y="1371600"/>
-            <a:ext cx="5120640" cy="4937760"/>
-          </a:xfrm>
-          <a:prstGeom prst="roundRect">
-            <a:avLst/>
-          </a:prstGeom>
-          <a:solidFill>
-            <a:srgbClr val="10182C"/>
-          </a:solidFill>
-          <a:ln w="19050">
-            <a:solidFill>
-              <a:srgbClr val="1A2644"/>
-            </a:solidFill>
-          </a:ln>
-        </p:spPr>
-        <p:style>
-          <a:lnRef idx="1">
-            <a:schemeClr val="accent1"/>
-          </a:lnRef>
-          <a:fillRef idx="3">
-            <a:schemeClr val="accent1"/>
-          </a:fillRef>
-          <a:effectRef idx="2">
-            <a:schemeClr val="accent1"/>
-          </a:effectRef>
-          <a:fontRef idx="minor">
-            <a:schemeClr val="lt1"/>
-          </a:fontRef>
-        </p:style>
-        <p:txBody>
-          <a:bodyPr rtlCol="0" anchor="ctr"/>
-          <a:lstStyle/>
-          <a:p>
-            <a:pPr algn="ctr"/>
-          </a:p>
-        </p:txBody>
-      </p:sp>
-      <p:sp>
-        <p:nvSpPr>
-          <p:cNvPr id="7" name="TextBox 6"/>
-          <p:cNvSpPr txBox="1"/>
-          <p:nvPr/>
-        </p:nvSpPr>
-        <p:spPr>
-          <a:xfrm>
-            <a:off x="914400" y="1508760"/>
-            <a:ext cx="4754880" cy="365760"/>
-          </a:xfrm>
-          <a:prstGeom prst="rect">
-            <a:avLst/>
-          </a:prstGeom>
-          <a:noFill/>
-        </p:spPr>
-        <p:txBody>
-          <a:bodyPr wrap="square">
-            <a:spAutoFit/>
-          </a:bodyPr>
-          <a:lstStyle/>
-          <a:p>
-            <a:pPr>
-              <a:defRPr sz="1500" b="1">
-                <a:solidFill>
-                  <a:srgbClr val="6366F1"/>
-                </a:solidFill>
-                <a:latin typeface="Arial"/>
-              </a:defRPr>
-            </a:pPr>
-            <a:r>
-              <a:t>Searching Algorithms &amp; Complexity</a:t>
-            </a:r>
-          </a:p>
-        </p:txBody>
-      </p:sp>
-      <p:sp>
-        <p:nvSpPr>
-          <p:cNvPr id="8" name="TextBox 7"/>
-          <p:cNvSpPr txBox="1"/>
-          <p:nvPr/>
-        </p:nvSpPr>
-        <p:spPr>
-          <a:xfrm>
-            <a:off x="914400" y="1920240"/>
-            <a:ext cx="4754880" cy="4206240"/>
-          </a:xfrm>
-          <a:prstGeom prst="rect">
-            <a:avLst/>
-          </a:prstGeom>
-          <a:noFill/>
-        </p:spPr>
-        <p:txBody>
-          <a:bodyPr wrap="square">
-            <a:spAutoFit/>
-          </a:bodyPr>
-          <a:lstStyle/>
           <a:p/>
           <a:p>
-            <a:r>
-              <a:rPr b="1" sz="1300">
-                <a:solidFill>
-                  <a:srgbClr val="F8FAFC"/>
-                </a:solidFill>
-              </a:rPr>
-              <a:t>• Linear Search (Phone Numbers): </a:t>
-            </a:r>
-            <a:r>
-              <a:rPr sz="1300">
-                <a:solidFill>
-                  <a:srgbClr val="94A3B8"/>
-                </a:solidFill>
-              </a:rPr>
-              <a:t>Performs sequential scan across unsorted `phone` records. Time Complexity: O(n), Space Complexity: O(1). Used for duplicate phone checks.</a:t>
-            </a:r>
-          </a:p>
-          <a:p>
-            <a:r>
-              <a:rPr b="1" sz="1300">
-                <a:solidFill>
-                  <a:srgbClr val="F8FAFC"/>
-                </a:solidFill>
-              </a:rPr>
-              <a:t>• Binary Search (Account Numbers): </a:t>
-            </a:r>
-            <a:r>
-              <a:rPr sz="1300">
-                <a:solidFill>
-                  <a:srgbClr val="94A3B8"/>
-                </a:solidFill>
-              </a:rPr>
-              <a:t>Divide-and-conquer search on sorted `accountNo`. Computes `mid = low + (high - low) / 2` to eliminate half the search space per iteration. Time Complexity: O(log n), Space: O(1).</a:t>
-            </a:r>
-          </a:p>
-          <a:p>
-            <a:r>
-              <a:rPr b="1" sz="1300">
-                <a:solidFill>
-                  <a:srgbClr val="F8FAFC"/>
-                </a:solidFill>
-              </a:rPr>
-              <a:t>• Lookup Efficiency: </a:t>
-            </a:r>
-            <a:r>
-              <a:rPr sz="1300">
-                <a:solidFill>
-                  <a:srgbClr val="94A3B8"/>
-                </a:solidFill>
-              </a:rPr>
-              <a:t>Guarantees logarithmic response time even with large account volumes.</a:t>
-            </a:r>
-          </a:p>
-        </p:txBody>
-      </p:sp>
-      <p:sp>
-        <p:nvSpPr>
-          <p:cNvPr id="9" name="Rounded Rectangle 8"/>
-          <p:cNvSpPr/>
-          <p:nvPr/>
-        </p:nvSpPr>
-        <p:spPr>
-          <a:xfrm>
-            <a:off x="6309360" y="1371600"/>
-            <a:ext cx="5120640" cy="4937760"/>
-          </a:xfrm>
-          <a:prstGeom prst="roundRect">
-            <a:avLst/>
-          </a:prstGeom>
-          <a:solidFill>
-            <a:srgbClr val="10182C"/>
-          </a:solidFill>
-          <a:ln w="19050">
-            <a:solidFill>
-              <a:srgbClr val="1A2644"/>
-            </a:solidFill>
-          </a:ln>
-        </p:spPr>
-        <p:style>
-          <a:lnRef idx="1">
-            <a:schemeClr val="accent1"/>
-          </a:lnRef>
-          <a:fillRef idx="3">
-            <a:schemeClr val="accent1"/>
-          </a:fillRef>
-          <a:effectRef idx="2">
-            <a:schemeClr val="accent1"/>
-          </a:effectRef>
-          <a:fontRef idx="minor">
-            <a:schemeClr val="lt1"/>
-          </a:fontRef>
-        </p:style>
-        <p:txBody>
-          <a:bodyPr rtlCol="0" anchor="ctr"/>
-          <a:lstStyle/>
-          <a:p>
-            <a:pPr algn="ctr"/>
-          </a:p>
-        </p:txBody>
-      </p:sp>
-      <p:sp>
-        <p:nvSpPr>
-          <p:cNvPr id="10" name="TextBox 9"/>
-          <p:cNvSpPr txBox="1"/>
-          <p:nvPr/>
-        </p:nvSpPr>
-        <p:spPr>
-          <a:xfrm>
-            <a:off x="6492240" y="1508760"/>
-            <a:ext cx="4754880" cy="365760"/>
-          </a:xfrm>
-          <a:prstGeom prst="rect">
-            <a:avLst/>
-          </a:prstGeom>
-          <a:noFill/>
-        </p:spPr>
-        <p:txBody>
-          <a:bodyPr wrap="square">
-            <a:spAutoFit/>
-          </a:bodyPr>
-          <a:lstStyle/>
-          <a:p>
-            <a:pPr>
-              <a:defRPr sz="1500" b="1">
-                <a:solidFill>
-                  <a:srgbClr val="F59E0B"/>
-                </a:solidFill>
-                <a:latin typeface="Arial"/>
-              </a:defRPr>
-            </a:pPr>
-            <a:r>
-              <a:t>Financial Transactions &amp; Audit Trail</a:t>
-            </a:r>
-          </a:p>
-        </p:txBody>
-      </p:sp>
-      <p:sp>
-        <p:nvSpPr>
-          <p:cNvPr id="11" name="TextBox 10"/>
-          <p:cNvSpPr txBox="1"/>
-          <p:nvPr/>
-        </p:nvSpPr>
-        <p:spPr>
-          <a:xfrm>
-            <a:off x="6492240" y="1920240"/>
-            <a:ext cx="4754880" cy="4206240"/>
-          </a:xfrm>
-          <a:prstGeom prst="rect">
-            <a:avLst/>
-          </a:prstGeom>
-          <a:noFill/>
-        </p:spPr>
-        <p:txBody>
-          <a:bodyPr wrap="square">
-            <a:spAutoFit/>
-          </a:bodyPr>
-          <a:lstStyle/>
-          <a:p/>
-          <a:p>
-            <a:r>
-              <a:rPr b="1" sz="1300">
-                <a:solidFill>
-                  <a:srgbClr val="F8FAFC"/>
-                </a:solidFill>
-              </a:rPr>
-              <a:t>• depositFunds(): </a:t>
-            </a:r>
-            <a:r>
-              <a:rPr sz="1300">
-                <a:solidFill>
-                  <a:srgbClr val="94A3B8"/>
-                </a:solidFill>
-              </a:rPr>
-              <a:t>Locates account via Binary Search, increases balance, and journals transaction log to `transactionList`.</a:t>
-            </a:r>
-          </a:p>
-          <a:p>
-            <a:r>
-              <a:rPr b="1" sz="1300">
-                <a:solidFill>
-                  <a:srgbClr val="F8FAFC"/>
-                </a:solidFill>
-              </a:rPr>
-              <a:t>• withdrawFunds(): </a:t>
-            </a:r>
-            <a:r>
-              <a:rPr sz="1300">
-                <a:solidFill>
-                  <a:srgbClr val="94A3B8"/>
-                </a:solidFill>
-              </a:rPr>
-              <a:t>Validates positive amount, overdraft protection, and enforces that SAVINGS account balance cannot fall below ₹500.00.</a:t>
-            </a:r>
-          </a:p>
-          <a:p>
-            <a:r>
-              <a:rPr b="1" sz="1300">
-                <a:solidFill>
-                  <a:srgbClr val="F8FAFC"/>
-                </a:solidFill>
-              </a:rPr>
-              <a:t>• viewTransactionHistory(): </a:t>
-            </a:r>
-            <a:r>
-              <a:rPr sz="1300">
-                <a:solidFill>
-                  <a:srgbClr val="94A3B8"/>
-                </a:solidFill>
-              </a:rPr>
-              <a:t>Displays chronological transaction ledger for any account with timestamp, amount, and updated balance.</a:t>
+            <a:pPr>
+              <a:spcAft>
+                <a:spcPts val="1800"/>
+              </a:spcAft>
+            </a:pPr>
+            <a:r>
+              <a:rPr b="1" sz="1600">
+                <a:solidFill>
+                  <a:srgbClr val="34D399"/>
+                </a:solidFill>
+              </a:rPr>
+              <a:t>•  Linear Search (O(n)): </a:t>
+            </a:r>
+            <a:r>
+              <a:rPr sz="1600">
+                <a:solidFill>
+                  <a:srgbClr val="FFFFFF"/>
+                </a:solidFill>
+              </a:rPr>
+              <a:t>Sequential scan across customer phone numbers for duplicate detection.</a:t>
+            </a:r>
+          </a:p>
+          <a:p>
+            <a:pPr>
+              <a:spcAft>
+                <a:spcPts val="1800"/>
+              </a:spcAft>
+            </a:pPr>
+            <a:r>
+              <a:rPr b="1" sz="1600">
+                <a:solidFill>
+                  <a:srgbClr val="34D399"/>
+                </a:solidFill>
+              </a:rPr>
+              <a:t>•  Binary Search (O(log n)): </a:t>
+            </a:r>
+            <a:r>
+              <a:rPr sz="1600">
+                <a:solidFill>
+                  <a:srgbClr val="FFFFFF"/>
+                </a:solidFill>
+              </a:rPr>
+              <a:t>Divide-and-conquer search on sorted account numbers for instant lookup.</a:t>
+            </a:r>
+          </a:p>
+          <a:p>
+            <a:pPr>
+              <a:spcAft>
+                <a:spcPts val="1800"/>
+              </a:spcAft>
+            </a:pPr>
+            <a:r>
+              <a:rPr b="1" sz="1600">
+                <a:solidFill>
+                  <a:srgbClr val="34D399"/>
+                </a:solidFill>
+              </a:rPr>
+              <a:t>•  Deposit &amp; Withdraw Engine: </a:t>
+            </a:r>
+            <a:r>
+              <a:rPr sz="1600">
+                <a:solidFill>
+                  <a:srgbClr val="FFFFFF"/>
+                </a:solidFill>
+              </a:rPr>
+              <a:t>Validates positive amount and enforces ₹500 minimum balance for Savings.</a:t>
+            </a:r>
+          </a:p>
+          <a:p>
+            <a:pPr>
+              <a:spcAft>
+                <a:spcPts val="1800"/>
+              </a:spcAft>
+            </a:pPr>
+            <a:r>
+              <a:rPr b="1" sz="1600">
+                <a:solidFill>
+                  <a:srgbClr val="34D399"/>
+                </a:solidFill>
+              </a:rPr>
+              <a:t>•  Audit History Ledger: </a:t>
+            </a:r>
+            <a:r>
+              <a:rPr sz="1600">
+                <a:solidFill>
+                  <a:srgbClr val="FFFFFF"/>
+                </a:solidFill>
+              </a:rPr>
+              <a:t>Generates chronological transaction logs for account deposits and withdrawals.</a:t>
             </a:r>
           </a:p>
         </p:txBody>
@@ -9334,7 +6793,7 @@
             <a:avLst/>
           </a:prstGeom>
           <a:solidFill>
-            <a:srgbClr val="070B16"/>
+            <a:srgbClr val="0A0F1D"/>
           </a:solidFill>
           <a:ln>
             <a:noFill/>
@@ -9370,8 +6829,8 @@
         </p:nvSpPr>
         <p:spPr>
           <a:xfrm>
-            <a:off x="731520" y="347472"/>
-            <a:ext cx="10728655" cy="36576"/>
+            <a:off x="914400" y="457200"/>
+            <a:ext cx="10362895" cy="27432"/>
           </a:xfrm>
           <a:prstGeom prst="rect">
             <a:avLst/>
@@ -9413,8 +6872,8 @@
         </p:nvSpPr>
         <p:spPr>
           <a:xfrm>
-            <a:off x="731520" y="411480"/>
-            <a:ext cx="10728655" cy="274320"/>
+            <a:off x="914400" y="594360"/>
+            <a:ext cx="10362895" cy="731520"/>
           </a:xfrm>
           <a:prstGeom prst="rect">
             <a:avLst/>
@@ -9428,15 +6887,28 @@
           <a:lstStyle/>
           <a:p>
             <a:pPr>
-              <a:defRPr sz="1100" b="1">
-                <a:solidFill>
-                  <a:srgbClr val="06B6D4"/>
-                </a:solidFill>
-                <a:latin typeface="Arial"/>
+              <a:defRPr sz="2600" b="1">
+                <a:solidFill>
+                  <a:srgbClr val="FFFFFF"/>
+                </a:solidFill>
+                <a:latin typeface="Calibri"/>
               </a:defRPr>
             </a:pPr>
             <a:r>
-              <a:t>MODULES III, IV, VII — STUDENT3.CPP</a:t>
+              <a:t>Student 3: Anil</a:t>
+            </a:r>
+          </a:p>
+          <a:p>
+            <a:pPr>
+              <a:defRPr sz="1300">
+                <a:solidFill>
+                  <a:srgbClr val="38BDF8"/>
+                </a:solidFill>
+                <a:latin typeface="Calibri"/>
+              </a:defRPr>
+            </a:pPr>
+            <a:r>
+              <a:t>Sorting Algorithms &amp; 2D Matrix Math (Modules III, IV, VII)</a:t>
             </a:r>
           </a:p>
         </p:txBody>
@@ -9449,8 +6921,8 @@
         </p:nvSpPr>
         <p:spPr>
           <a:xfrm>
-            <a:off x="731520" y="685800"/>
-            <a:ext cx="10728655" cy="594360"/>
+            <a:off x="914400" y="1645920"/>
+            <a:ext cx="10362895" cy="4572000"/>
           </a:xfrm>
           <a:prstGeom prst="rect">
             <a:avLst/>
@@ -9462,389 +6934,97 @@
             <a:spAutoFit/>
           </a:bodyPr>
           <a:lstStyle/>
-          <a:p>
-            <a:pPr>
-              <a:defRPr sz="2400" b="1">
-                <a:solidFill>
-                  <a:srgbClr val="F8FAFC"/>
-                </a:solidFill>
-                <a:latin typeface="Arial"/>
-              </a:defRPr>
-            </a:pPr>
-            <a:r>
-              <a:t>Student 3: Anil — Sorting Algorithms &amp; 2D Matrix Math</a:t>
-            </a:r>
-          </a:p>
-        </p:txBody>
-      </p:sp>
-      <p:sp>
-        <p:nvSpPr>
-          <p:cNvPr id="6" name="Rounded Rectangle 5"/>
-          <p:cNvSpPr/>
-          <p:nvPr/>
-        </p:nvSpPr>
-        <p:spPr>
-          <a:xfrm>
-            <a:off x="731520" y="1371600"/>
-            <a:ext cx="5120640" cy="4937760"/>
-          </a:xfrm>
-          <a:prstGeom prst="roundRect">
-            <a:avLst/>
-          </a:prstGeom>
-          <a:solidFill>
-            <a:srgbClr val="10182C"/>
-          </a:solidFill>
-          <a:ln w="19050">
-            <a:solidFill>
-              <a:srgbClr val="1A2644"/>
-            </a:solidFill>
-          </a:ln>
-        </p:spPr>
-        <p:style>
-          <a:lnRef idx="1">
-            <a:schemeClr val="accent1"/>
-          </a:lnRef>
-          <a:fillRef idx="3">
-            <a:schemeClr val="accent1"/>
-          </a:fillRef>
-          <a:effectRef idx="2">
-            <a:schemeClr val="accent1"/>
-          </a:effectRef>
-          <a:fontRef idx="minor">
-            <a:schemeClr val="lt1"/>
-          </a:fontRef>
-        </p:style>
-        <p:txBody>
-          <a:bodyPr rtlCol="0" anchor="ctr"/>
-          <a:lstStyle/>
-          <a:p>
-            <a:pPr algn="ctr"/>
-          </a:p>
-        </p:txBody>
-      </p:sp>
-      <p:sp>
-        <p:nvSpPr>
-          <p:cNvPr id="7" name="TextBox 6"/>
-          <p:cNvSpPr txBox="1"/>
-          <p:nvPr/>
-        </p:nvSpPr>
-        <p:spPr>
-          <a:xfrm>
-            <a:off x="914400" y="1508760"/>
-            <a:ext cx="4754880" cy="365760"/>
-          </a:xfrm>
-          <a:prstGeom prst="rect">
-            <a:avLst/>
-          </a:prstGeom>
-          <a:noFill/>
-        </p:spPr>
-        <p:txBody>
-          <a:bodyPr wrap="square">
-            <a:spAutoFit/>
-          </a:bodyPr>
-          <a:lstStyle/>
-          <a:p>
-            <a:pPr>
-              <a:defRPr sz="1500" b="1">
-                <a:solidFill>
-                  <a:srgbClr val="06B6D4"/>
-                </a:solidFill>
-                <a:latin typeface="Arial"/>
-              </a:defRPr>
-            </a:pPr>
-            <a:r>
-              <a:t>Insertion Sort Algorithm</a:t>
-            </a:r>
-          </a:p>
-        </p:txBody>
-      </p:sp>
-      <p:sp>
-        <p:nvSpPr>
-          <p:cNvPr id="8" name="TextBox 7"/>
-          <p:cNvSpPr txBox="1"/>
-          <p:nvPr/>
-        </p:nvSpPr>
-        <p:spPr>
-          <a:xfrm>
-            <a:off x="914400" y="1920240"/>
-            <a:ext cx="4754880" cy="4206240"/>
-          </a:xfrm>
-          <a:prstGeom prst="rect">
-            <a:avLst/>
-          </a:prstGeom>
-          <a:noFill/>
-        </p:spPr>
-        <p:txBody>
-          <a:bodyPr wrap="square">
-            <a:spAutoFit/>
-          </a:bodyPr>
-          <a:lstStyle/>
           <a:p/>
           <a:p>
-            <a:r>
-              <a:rPr b="1" sz="1300">
-                <a:solidFill>
-                  <a:srgbClr val="F8FAFC"/>
-                </a:solidFill>
-              </a:rPr>
-              <a:t>• Mechanics: </a:t>
-            </a:r>
-            <a:r>
-              <a:rPr sz="1300">
-                <a:solidFill>
-                  <a:srgbClr val="94A3B8"/>
-                </a:solidFill>
-              </a:rPr>
-              <a:t>Maintains a sorted subarray on the left and iteratively inserts incoming elements by shifting adjacent elements right.</a:t>
-            </a:r>
-          </a:p>
-          <a:p>
-            <a:r>
-              <a:rPr b="1" sz="1300">
-                <a:solidFill>
-                  <a:srgbClr val="F8FAFC"/>
-                </a:solidFill>
-              </a:rPr>
-              <a:t>• Bidirectional Support: </a:t>
-            </a:r>
-            <a:r>
-              <a:rPr sz="1300">
-                <a:solidFill>
-                  <a:srgbClr val="94A3B8"/>
-                </a:solidFill>
-              </a:rPr>
-              <a:t>Supports Ascending (lowest to highest balance) and Descending (highest to lowest balance) sorting.</a:t>
-            </a:r>
-          </a:p>
-          <a:p>
-            <a:r>
-              <a:rPr b="1" sz="1300">
-                <a:solidFill>
-                  <a:srgbClr val="F8FAFC"/>
-                </a:solidFill>
-              </a:rPr>
-              <a:t>• Complexity: </a:t>
-            </a:r>
-            <a:r>
-              <a:rPr sz="1300">
-                <a:solidFill>
-                  <a:srgbClr val="94A3B8"/>
-                </a:solidFill>
-              </a:rPr>
-              <a:t>Best Case: O(n) when already sorted. Worst/Average: O(n^2). Auxiliary Space: O(1) in-place sort.</a:t>
-            </a:r>
-          </a:p>
-          <a:p>
-            <a:r>
-              <a:rPr b="1" sz="1300">
-                <a:solidFill>
-                  <a:srgbClr val="F8FAFC"/>
-                </a:solidFill>
-              </a:rPr>
-              <a:t>• Practical Role: </a:t>
-            </a:r>
-            <a:r>
-              <a:rPr sz="1300">
-                <a:solidFill>
-                  <a:srgbClr val="94A3B8"/>
-                </a:solidFill>
-              </a:rPr>
-              <a:t>Enables portfolio rank ordering to identify high-net-worth customers.</a:t>
-            </a:r>
-          </a:p>
-        </p:txBody>
-      </p:sp>
-      <p:sp>
-        <p:nvSpPr>
-          <p:cNvPr id="9" name="Rounded Rectangle 8"/>
-          <p:cNvSpPr/>
-          <p:nvPr/>
-        </p:nvSpPr>
-        <p:spPr>
-          <a:xfrm>
-            <a:off x="6309360" y="1371600"/>
-            <a:ext cx="5120640" cy="4937760"/>
-          </a:xfrm>
-          <a:prstGeom prst="roundRect">
-            <a:avLst/>
-          </a:prstGeom>
-          <a:solidFill>
-            <a:srgbClr val="10182C"/>
-          </a:solidFill>
-          <a:ln w="19050">
-            <a:solidFill>
-              <a:srgbClr val="1A2644"/>
-            </a:solidFill>
-          </a:ln>
-        </p:spPr>
-        <p:style>
-          <a:lnRef idx="1">
-            <a:schemeClr val="accent1"/>
-          </a:lnRef>
-          <a:fillRef idx="3">
-            <a:schemeClr val="accent1"/>
-          </a:fillRef>
-          <a:effectRef idx="2">
-            <a:schemeClr val="accent1"/>
-          </a:effectRef>
-          <a:fontRef idx="minor">
-            <a:schemeClr val="lt1"/>
-          </a:fontRef>
-        </p:style>
-        <p:txBody>
-          <a:bodyPr rtlCol="0" anchor="ctr"/>
-          <a:lstStyle/>
-          <a:p>
-            <a:pPr algn="ctr"/>
-          </a:p>
-        </p:txBody>
-      </p:sp>
-      <p:sp>
-        <p:nvSpPr>
-          <p:cNvPr id="10" name="TextBox 9"/>
-          <p:cNvSpPr txBox="1"/>
-          <p:nvPr/>
-        </p:nvSpPr>
-        <p:spPr>
-          <a:xfrm>
-            <a:off x="6492240" y="1508760"/>
-            <a:ext cx="4754880" cy="365760"/>
-          </a:xfrm>
-          <a:prstGeom prst="rect">
-            <a:avLst/>
-          </a:prstGeom>
-          <a:noFill/>
-        </p:spPr>
-        <p:txBody>
-          <a:bodyPr wrap="square">
-            <a:spAutoFit/>
-          </a:bodyPr>
-          <a:lstStyle/>
-          <a:p>
-            <a:pPr>
-              <a:defRPr sz="1500" b="1">
-                <a:solidFill>
-                  <a:srgbClr val="F43F5E"/>
-                </a:solidFill>
-                <a:latin typeface="Arial"/>
-              </a:defRPr>
-            </a:pPr>
-            <a:r>
-              <a:t>2D Numeric Array Matrix Operations</a:t>
-            </a:r>
-          </a:p>
-        </p:txBody>
-      </p:sp>
-      <p:sp>
-        <p:nvSpPr>
-          <p:cNvPr id="11" name="TextBox 10"/>
-          <p:cNvSpPr txBox="1"/>
-          <p:nvPr/>
-        </p:nvSpPr>
-        <p:spPr>
-          <a:xfrm>
-            <a:off x="6492240" y="1920240"/>
-            <a:ext cx="4754880" cy="4206240"/>
-          </a:xfrm>
-          <a:prstGeom prst="rect">
-            <a:avLst/>
-          </a:prstGeom>
-          <a:noFill/>
-        </p:spPr>
-        <p:txBody>
-          <a:bodyPr wrap="square">
-            <a:spAutoFit/>
-          </a:bodyPr>
-          <a:lstStyle/>
-          <a:p/>
-          <a:p>
-            <a:r>
-              <a:rPr b="1" sz="1300">
-                <a:solidFill>
-                  <a:srgbClr val="F8FAFC"/>
-                </a:solidFill>
-              </a:rPr>
-              <a:t>• Branch Cash Flow Modeling: </a:t>
-            </a:r>
-            <a:r>
-              <a:rPr sz="1300">
-                <a:solidFill>
-                  <a:srgbClr val="94A3B8"/>
-                </a:solidFill>
-              </a:rPr>
-              <a:t>Simulates regional branch liquidity using 2x2 integer matrices (`int mat[2][2]`).</a:t>
-            </a:r>
-          </a:p>
-          <a:p>
-            <a:r>
-              <a:rPr b="1" sz="1300">
-                <a:solidFill>
-                  <a:srgbClr val="F8FAFC"/>
-                </a:solidFill>
-              </a:rPr>
-              <a:t>• 1. Matrix Addition (A + B): </a:t>
-            </a:r>
-            <a:r>
-              <a:rPr sz="1300">
-                <a:solidFill>
-                  <a:srgbClr val="94A3B8"/>
-                </a:solidFill>
-              </a:rPr>
-              <a:t>Consolidates total cash reserves across Branch A and Branch B.</a:t>
-            </a:r>
-          </a:p>
-          <a:p>
-            <a:r>
-              <a:rPr b="1" sz="1300">
-                <a:solidFill>
-                  <a:srgbClr val="F8FAFC"/>
-                </a:solidFill>
-              </a:rPr>
-              <a:t>• 2. Matrix Subtraction (A - B): </a:t>
-            </a:r>
-            <a:r>
-              <a:rPr sz="1300">
-                <a:solidFill>
-                  <a:srgbClr val="94A3B8"/>
-                </a:solidFill>
-              </a:rPr>
-              <a:t>Evaluates regional asset variance and cash disparities.</a:t>
-            </a:r>
-          </a:p>
-          <a:p>
-            <a:r>
-              <a:rPr b="1" sz="1300">
-                <a:solidFill>
-                  <a:srgbClr val="F8FAFC"/>
-                </a:solidFill>
-              </a:rPr>
-              <a:t>• 3. Matrix Multiplication (A * B): </a:t>
-            </a:r>
-            <a:r>
-              <a:rPr sz="1300">
-                <a:solidFill>
-                  <a:srgbClr val="94A3B8"/>
-                </a:solidFill>
-              </a:rPr>
-              <a:t>Projects compounded multi-period financial liquidity.</a:t>
-            </a:r>
-          </a:p>
-          <a:p>
-            <a:r>
-              <a:rPr b="1" sz="1300">
-                <a:solidFill>
-                  <a:srgbClr val="F8FAFC"/>
-                </a:solidFill>
-              </a:rPr>
-              <a:t>• 4. Matrix Transpose (A^T): </a:t>
-            </a:r>
-            <a:r>
-              <a:rPr sz="1300">
-                <a:solidFill>
-                  <a:srgbClr val="94A3B8"/>
-                </a:solidFill>
-              </a:rPr>
-              <a:t>Exchanges rows and columns for multidimensional financial reporting.</a:t>
+            <a:pPr>
+              <a:spcAft>
+                <a:spcPts val="1800"/>
+              </a:spcAft>
+            </a:pPr>
+            <a:r>
+              <a:rPr b="1" sz="1600">
+                <a:solidFill>
+                  <a:srgbClr val="34D399"/>
+                </a:solidFill>
+              </a:rPr>
+              <a:t>•  Insertion Sort (O(n^2)): </a:t>
+            </a:r>
+            <a:r>
+              <a:rPr sz="1600">
+                <a:solidFill>
+                  <a:srgbClr val="FFFFFF"/>
+                </a:solidFill>
+              </a:rPr>
+              <a:t>In-place balance sorting supporting Ascending and Descending order.</a:t>
+            </a:r>
+          </a:p>
+          <a:p>
+            <a:pPr>
+              <a:spcAft>
+                <a:spcPts val="1800"/>
+              </a:spcAft>
+            </a:pPr>
+            <a:r>
+              <a:rPr b="1" sz="1600">
+                <a:solidFill>
+                  <a:srgbClr val="34D399"/>
+                </a:solidFill>
+              </a:rPr>
+              <a:t>•  Portfolio Rank Ordering: </a:t>
+            </a:r>
+            <a:r>
+              <a:rPr sz="1600">
+                <a:solidFill>
+                  <a:srgbClr val="FFFFFF"/>
+                </a:solidFill>
+              </a:rPr>
+              <a:t>Enables bank managers to identify high-net-worth customer tiers.</a:t>
+            </a:r>
+          </a:p>
+          <a:p>
+            <a:pPr>
+              <a:spcAft>
+                <a:spcPts val="1800"/>
+              </a:spcAft>
+            </a:pPr>
+            <a:r>
+              <a:rPr b="1" sz="1600">
+                <a:solidFill>
+                  <a:srgbClr val="34D399"/>
+                </a:solidFill>
+              </a:rPr>
+              <a:t>•  2D Numeric Matrix Operations: </a:t>
+            </a:r>
+            <a:r>
+              <a:rPr sz="1600">
+                <a:solidFill>
+                  <a:srgbClr val="FFFFFF"/>
+                </a:solidFill>
+              </a:rPr>
+              <a:t>Simulates regional branch cash flow using 2x2 integer arrays.</a:t>
+            </a:r>
+          </a:p>
+          <a:p>
+            <a:pPr>
+              <a:spcAft>
+                <a:spcPts val="1800"/>
+              </a:spcAft>
+            </a:pPr>
+            <a:r>
+              <a:rPr b="1" sz="1600">
+                <a:solidFill>
+                  <a:srgbClr val="34D399"/>
+                </a:solidFill>
+              </a:rPr>
+              <a:t>•  Matrix Algebra (Module IV): </a:t>
+            </a:r>
+            <a:r>
+              <a:rPr sz="1600">
+                <a:solidFill>
+                  <a:srgbClr val="FFFFFF"/>
+                </a:solidFill>
+              </a:rPr>
+              <a:t>Implements Matrix Addition, Subtraction, Multiplication, and Transposition.</a:t>
             </a:r>
           </a:p>
         </p:txBody>
@@ -9885,7 +7065,7 @@
             <a:avLst/>
           </a:prstGeom>
           <a:solidFill>
-            <a:srgbClr val="070B16"/>
+            <a:srgbClr val="0A0F1D"/>
           </a:solidFill>
           <a:ln>
             <a:noFill/>
@@ -9921,8 +7101,8 @@
         </p:nvSpPr>
         <p:spPr>
           <a:xfrm>
-            <a:off x="731520" y="347472"/>
-            <a:ext cx="10728655" cy="36576"/>
+            <a:off x="914400" y="457200"/>
+            <a:ext cx="10362895" cy="27432"/>
           </a:xfrm>
           <a:prstGeom prst="rect">
             <a:avLst/>
@@ -9964,8 +7144,8 @@
         </p:nvSpPr>
         <p:spPr>
           <a:xfrm>
-            <a:off x="731520" y="411480"/>
-            <a:ext cx="10728655" cy="274320"/>
+            <a:off x="914400" y="594360"/>
+            <a:ext cx="10362895" cy="731520"/>
           </a:xfrm>
           <a:prstGeom prst="rect">
             <a:avLst/>
@@ -9979,15 +7159,28 @@
           <a:lstStyle/>
           <a:p>
             <a:pPr>
-              <a:defRPr sz="1100" b="1">
-                <a:solidFill>
-                  <a:srgbClr val="06B6D4"/>
-                </a:solidFill>
-                <a:latin typeface="Arial"/>
+              <a:defRPr sz="2600" b="1">
+                <a:solidFill>
+                  <a:srgbClr val="FFFFFF"/>
+                </a:solidFill>
+                <a:latin typeface="Calibri"/>
               </a:defRPr>
             </a:pPr>
             <a:r>
-              <a:t>MODULES V, VIII — STUDENT4.CPP</a:t>
+              <a:t>Student 4: Shishira</a:t>
+            </a:r>
+          </a:p>
+          <a:p>
+            <a:pPr>
+              <a:defRPr sz="1300">
+                <a:solidFill>
+                  <a:srgbClr val="38BDF8"/>
+                </a:solidFill>
+                <a:latin typeface="Calibri"/>
+              </a:defRPr>
+            </a:pPr>
+            <a:r>
+              <a:t>String Algorithms &amp; Stack ADT (Modules V, VIII)</a:t>
             </a:r>
           </a:p>
         </p:txBody>
@@ -10000,8 +7193,8 @@
         </p:nvSpPr>
         <p:spPr>
           <a:xfrm>
-            <a:off x="731520" y="685800"/>
-            <a:ext cx="10728655" cy="594360"/>
+            <a:off x="914400" y="1645920"/>
+            <a:ext cx="10362895" cy="4572000"/>
           </a:xfrm>
           <a:prstGeom prst="rect">
             <a:avLst/>
@@ -10013,335 +7206,97 @@
             <a:spAutoFit/>
           </a:bodyPr>
           <a:lstStyle/>
-          <a:p>
-            <a:pPr>
-              <a:defRPr sz="2400" b="1">
-                <a:solidFill>
-                  <a:srgbClr val="F8FAFC"/>
-                </a:solidFill>
-                <a:latin typeface="Arial"/>
-              </a:defRPr>
-            </a:pPr>
-            <a:r>
-              <a:t>Student 4: Shishira — String Processing &amp; Stack ADT</a:t>
-            </a:r>
-          </a:p>
-        </p:txBody>
-      </p:sp>
-      <p:sp>
-        <p:nvSpPr>
-          <p:cNvPr id="6" name="Rounded Rectangle 5"/>
-          <p:cNvSpPr/>
-          <p:nvPr/>
-        </p:nvSpPr>
-        <p:spPr>
-          <a:xfrm>
-            <a:off x="731520" y="1371600"/>
-            <a:ext cx="5120640" cy="4937760"/>
-          </a:xfrm>
-          <a:prstGeom prst="roundRect">
-            <a:avLst/>
-          </a:prstGeom>
-          <a:solidFill>
-            <a:srgbClr val="10182C"/>
-          </a:solidFill>
-          <a:ln w="19050">
-            <a:solidFill>
-              <a:srgbClr val="1A2644"/>
-            </a:solidFill>
-          </a:ln>
-        </p:spPr>
-        <p:style>
-          <a:lnRef idx="1">
-            <a:schemeClr val="accent1"/>
-          </a:lnRef>
-          <a:fillRef idx="3">
-            <a:schemeClr val="accent1"/>
-          </a:fillRef>
-          <a:effectRef idx="2">
-            <a:schemeClr val="accent1"/>
-          </a:effectRef>
-          <a:fontRef idx="minor">
-            <a:schemeClr val="lt1"/>
-          </a:fontRef>
-        </p:style>
-        <p:txBody>
-          <a:bodyPr rtlCol="0" anchor="ctr"/>
-          <a:lstStyle/>
-          <a:p>
-            <a:pPr algn="ctr"/>
-          </a:p>
-        </p:txBody>
-      </p:sp>
-      <p:sp>
-        <p:nvSpPr>
-          <p:cNvPr id="7" name="TextBox 6"/>
-          <p:cNvSpPr txBox="1"/>
-          <p:nvPr/>
-        </p:nvSpPr>
-        <p:spPr>
-          <a:xfrm>
-            <a:off x="914400" y="1508760"/>
-            <a:ext cx="4754880" cy="365760"/>
-          </a:xfrm>
-          <a:prstGeom prst="rect">
-            <a:avLst/>
-          </a:prstGeom>
-          <a:noFill/>
-        </p:spPr>
-        <p:txBody>
-          <a:bodyPr wrap="square">
-            <a:spAutoFit/>
-          </a:bodyPr>
-          <a:lstStyle/>
-          <a:p>
-            <a:pPr>
-              <a:defRPr sz="1500" b="1">
-                <a:solidFill>
-                  <a:srgbClr val="10B981"/>
-                </a:solidFill>
-                <a:latin typeface="Arial"/>
-              </a:defRPr>
-            </a:pPr>
-            <a:r>
-              <a:t>String Algorithms &amp; Analysis</a:t>
-            </a:r>
-          </a:p>
-        </p:txBody>
-      </p:sp>
-      <p:sp>
-        <p:nvSpPr>
-          <p:cNvPr id="8" name="TextBox 7"/>
-          <p:cNvSpPr txBox="1"/>
-          <p:nvPr/>
-        </p:nvSpPr>
-        <p:spPr>
-          <a:xfrm>
-            <a:off x="914400" y="1920240"/>
-            <a:ext cx="4754880" cy="4206240"/>
-          </a:xfrm>
-          <a:prstGeom prst="rect">
-            <a:avLst/>
-          </a:prstGeom>
-          <a:noFill/>
-        </p:spPr>
-        <p:txBody>
-          <a:bodyPr wrap="square">
-            <a:spAutoFit/>
-          </a:bodyPr>
-          <a:lstStyle/>
           <a:p/>
           <a:p>
-            <a:r>
-              <a:rPr b="1" sz="1300">
-                <a:solidFill>
-                  <a:srgbClr val="F8FAFC"/>
-                </a:solidFill>
-              </a:rPr>
-              <a:t>• In-Place String Reversal: </a:t>
-            </a:r>
-            <a:r>
-              <a:rPr sz="1300">
-                <a:solidFill>
-                  <a:srgbClr val="94A3B8"/>
-                </a:solidFill>
-              </a:rPr>
-              <a:t>Swaps `str[i]` with `str[n-1-i]` moving towards center with O(n/2) = O(n) time and O(1) space.</a:t>
-            </a:r>
-          </a:p>
-          <a:p>
-            <a:r>
-              <a:rPr b="1" sz="1300">
-                <a:solidFill>
-                  <a:srgbClr val="F8FAFC"/>
-                </a:solidFill>
-              </a:rPr>
-              <a:t>• Character Frequency Histogram: </a:t>
-            </a:r>
-            <a:r>
-              <a:rPr sz="1300">
-                <a:solidFill>
-                  <a:srgbClr val="94A3B8"/>
-                </a:solidFill>
-              </a:rPr>
-              <a:t>Direct-address 256-bucket ASCII array counting character distribution in customer names.</a:t>
-            </a:r>
-          </a:p>
-          <a:p>
-            <a:r>
-              <a:rPr b="1" sz="1300">
-                <a:solidFill>
-                  <a:srgbClr val="F8FAFC"/>
-                </a:solidFill>
-              </a:rPr>
-              <a:t>• Naive Substring Matching: </a:t>
-            </a:r>
-            <a:r>
-              <a:rPr sz="1300">
-                <a:solidFill>
-                  <a:srgbClr val="94A3B8"/>
-                </a:solidFill>
-              </a:rPr>
-              <a:t>Sliding-window pattern search verifying account codes and transaction identifiers.</a:t>
-            </a:r>
-          </a:p>
-        </p:txBody>
-      </p:sp>
-      <p:sp>
-        <p:nvSpPr>
-          <p:cNvPr id="9" name="Rounded Rectangle 8"/>
-          <p:cNvSpPr/>
-          <p:nvPr/>
-        </p:nvSpPr>
-        <p:spPr>
-          <a:xfrm>
-            <a:off x="6309360" y="1371600"/>
-            <a:ext cx="5120640" cy="4937760"/>
-          </a:xfrm>
-          <a:prstGeom prst="roundRect">
-            <a:avLst/>
-          </a:prstGeom>
-          <a:solidFill>
-            <a:srgbClr val="10182C"/>
-          </a:solidFill>
-          <a:ln w="19050">
-            <a:solidFill>
-              <a:srgbClr val="1A2644"/>
-            </a:solidFill>
-          </a:ln>
-        </p:spPr>
-        <p:style>
-          <a:lnRef idx="1">
-            <a:schemeClr val="accent1"/>
-          </a:lnRef>
-          <a:fillRef idx="3">
-            <a:schemeClr val="accent1"/>
-          </a:fillRef>
-          <a:effectRef idx="2">
-            <a:schemeClr val="accent1"/>
-          </a:effectRef>
-          <a:fontRef idx="minor">
-            <a:schemeClr val="lt1"/>
-          </a:fontRef>
-        </p:style>
-        <p:txBody>
-          <a:bodyPr rtlCol="0" anchor="ctr"/>
-          <a:lstStyle/>
-          <a:p>
-            <a:pPr algn="ctr"/>
-          </a:p>
-        </p:txBody>
-      </p:sp>
-      <p:sp>
-        <p:nvSpPr>
-          <p:cNvPr id="10" name="TextBox 9"/>
-          <p:cNvSpPr txBox="1"/>
-          <p:nvPr/>
-        </p:nvSpPr>
-        <p:spPr>
-          <a:xfrm>
-            <a:off x="6492240" y="1508760"/>
-            <a:ext cx="4754880" cy="365760"/>
-          </a:xfrm>
-          <a:prstGeom prst="rect">
-            <a:avLst/>
-          </a:prstGeom>
-          <a:noFill/>
-        </p:spPr>
-        <p:txBody>
-          <a:bodyPr wrap="square">
-            <a:spAutoFit/>
-          </a:bodyPr>
-          <a:lstStyle/>
-          <a:p>
-            <a:pPr>
-              <a:defRPr sz="1500" b="1">
-                <a:solidFill>
-                  <a:srgbClr val="6366F1"/>
-                </a:solidFill>
-                <a:latin typeface="Arial"/>
-              </a:defRPr>
-            </a:pPr>
-            <a:r>
-              <a:t>Stack Abstract Data Type (LIFO)</a:t>
-            </a:r>
-          </a:p>
-        </p:txBody>
-      </p:sp>
-      <p:sp>
-        <p:nvSpPr>
-          <p:cNvPr id="11" name="TextBox 10"/>
-          <p:cNvSpPr txBox="1"/>
-          <p:nvPr/>
-        </p:nvSpPr>
-        <p:spPr>
-          <a:xfrm>
-            <a:off x="6492240" y="1920240"/>
-            <a:ext cx="4754880" cy="4206240"/>
-          </a:xfrm>
-          <a:prstGeom prst="rect">
-            <a:avLst/>
-          </a:prstGeom>
-          <a:noFill/>
-        </p:spPr>
-        <p:txBody>
-          <a:bodyPr wrap="square">
-            <a:spAutoFit/>
-          </a:bodyPr>
-          <a:lstStyle/>
-          <a:p/>
-          <a:p>
-            <a:r>
-              <a:rPr b="1" sz="1300">
-                <a:solidFill>
-                  <a:srgbClr val="F8FAFC"/>
-                </a:solidFill>
-              </a:rPr>
-              <a:t>• Array-Based Stack ADT: </a:t>
-            </a:r>
-            <a:r>
-              <a:rPr sz="1300">
-                <a:solidFill>
-                  <a:srgbClr val="94A3B8"/>
-                </a:solidFill>
-              </a:rPr>
-              <a:t>Implements `SimpleStack` structure with `top` index pointer managing Last-In, First-Out (LIFO) order.</a:t>
-            </a:r>
-          </a:p>
-          <a:p>
-            <a:r>
-              <a:rPr b="1" sz="1300">
-                <a:solidFill>
-                  <a:srgbClr val="F8FAFC"/>
-                </a:solidFill>
-              </a:rPr>
-              <a:t>• Stack Primitives: </a:t>
-            </a:r>
-            <a:r>
-              <a:rPr sz="1300">
-                <a:solidFill>
-                  <a:srgbClr val="94A3B8"/>
-                </a:solidFill>
-              </a:rPr>
-              <a:t>`initStack()`, `isStackEmpty()`, `isStackFull()`, `push()` with Overflow check, and `pop()` with Underflow guard.</a:t>
-            </a:r>
-          </a:p>
-          <a:p>
-            <a:r>
-              <a:rPr b="1" sz="1300">
-                <a:solidFill>
-                  <a:srgbClr val="F8FAFC"/>
-                </a:solidFill>
-              </a:rPr>
-              <a:t>• Parentheses Balance Checker: </a:t>
-            </a:r>
-            <a:r>
-              <a:rPr sz="1300">
-                <a:solidFill>
-                  <a:srgbClr val="94A3B8"/>
-                </a:solidFill>
-              </a:rPr>
-              <a:t>Real-world stack application checking expression balance (e.g. `(A+B)*(C-D)`) for mathematical formula integrity in interest calculations.</a:t>
+            <a:pPr>
+              <a:spcAft>
+                <a:spcPts val="1800"/>
+              </a:spcAft>
+            </a:pPr>
+            <a:r>
+              <a:rPr b="1" sz="1600">
+                <a:solidFill>
+                  <a:srgbClr val="34D399"/>
+                </a:solidFill>
+              </a:rPr>
+              <a:t>•  In-Place String Reversal: </a:t>
+            </a:r>
+            <a:r>
+              <a:rPr sz="1600">
+                <a:solidFill>
+                  <a:srgbClr val="FFFFFF"/>
+                </a:solidFill>
+              </a:rPr>
+              <a:t>Two-pointer swap algorithm reversing text in O(n) time and O(1) space.</a:t>
+            </a:r>
+          </a:p>
+          <a:p>
+            <a:pPr>
+              <a:spcAft>
+                <a:spcPts val="1800"/>
+              </a:spcAft>
+            </a:pPr>
+            <a:r>
+              <a:rPr b="1" sz="1600">
+                <a:solidFill>
+                  <a:srgbClr val="34D399"/>
+                </a:solidFill>
+              </a:rPr>
+              <a:t>•  Frequency Histogram: </a:t>
+            </a:r>
+            <a:r>
+              <a:rPr sz="1600">
+                <a:solidFill>
+                  <a:srgbClr val="FFFFFF"/>
+                </a:solidFill>
+              </a:rPr>
+              <a:t>Direct-address 256-bucket ASCII array counting character distribution.</a:t>
+            </a:r>
+          </a:p>
+          <a:p>
+            <a:pPr>
+              <a:spcAft>
+                <a:spcPts val="1800"/>
+              </a:spcAft>
+            </a:pPr>
+            <a:r>
+              <a:rPr b="1" sz="1600">
+                <a:solidFill>
+                  <a:srgbClr val="34D399"/>
+                </a:solidFill>
+              </a:rPr>
+              <a:t>•  Stack ADT (LIFO): </a:t>
+            </a:r>
+            <a:r>
+              <a:rPr sz="1600">
+                <a:solidFill>
+                  <a:srgbClr val="FFFFFF"/>
+                </a:solidFill>
+              </a:rPr>
+              <a:t>Array-based stack implementing `push`, `pop`, `isFull`, and `isEmpty`.</a:t>
+            </a:r>
+          </a:p>
+          <a:p>
+            <a:pPr>
+              <a:spcAft>
+                <a:spcPts val="1800"/>
+              </a:spcAft>
+            </a:pPr>
+            <a:r>
+              <a:rPr b="1" sz="1600">
+                <a:solidFill>
+                  <a:srgbClr val="34D399"/>
+                </a:solidFill>
+              </a:rPr>
+              <a:t>•  Parenthesis Balance Checker: </a:t>
+            </a:r>
+            <a:r>
+              <a:rPr sz="1600">
+                <a:solidFill>
+                  <a:srgbClr val="FFFFFF"/>
+                </a:solidFill>
+              </a:rPr>
+              <a:t>Stack application validating mathematical formula syntax in calculations.</a:t>
             </a:r>
           </a:p>
         </p:txBody>
@@ -10382,7 +7337,7 @@
             <a:avLst/>
           </a:prstGeom>
           <a:solidFill>
-            <a:srgbClr val="070B16"/>
+            <a:srgbClr val="0A0F1D"/>
           </a:solidFill>
           <a:ln>
             <a:noFill/>
@@ -10418,8 +7373,8 @@
         </p:nvSpPr>
         <p:spPr>
           <a:xfrm>
-            <a:off x="731520" y="347472"/>
-            <a:ext cx="10728655" cy="36576"/>
+            <a:off x="914400" y="457200"/>
+            <a:ext cx="10362895" cy="27432"/>
           </a:xfrm>
           <a:prstGeom prst="rect">
             <a:avLst/>
@@ -10461,8 +7416,8 @@
         </p:nvSpPr>
         <p:spPr>
           <a:xfrm>
-            <a:off x="731520" y="411480"/>
-            <a:ext cx="10728655" cy="274320"/>
+            <a:off x="914400" y="594360"/>
+            <a:ext cx="10362895" cy="731520"/>
           </a:xfrm>
           <a:prstGeom prst="rect">
             <a:avLst/>
@@ -10476,15 +7431,28 @@
           <a:lstStyle/>
           <a:p>
             <a:pPr>
-              <a:defRPr sz="1100" b="1">
-                <a:solidFill>
-                  <a:srgbClr val="06B6D4"/>
-                </a:solidFill>
-                <a:latin typeface="Arial"/>
+              <a:defRPr sz="2600" b="1">
+                <a:solidFill>
+                  <a:srgbClr val="FFFFFF"/>
+                </a:solidFill>
+                <a:latin typeface="Calibri"/>
               </a:defRPr>
             </a:pPr>
             <a:r>
-              <a:t>MODULES I, II, IX, X — STUDENT5.CPP</a:t>
+              <a:t>Student 5: Chathwik</a:t>
+            </a:r>
+          </a:p>
+          <a:p>
+            <a:pPr>
+              <a:defRPr sz="1300">
+                <a:solidFill>
+                  <a:srgbClr val="38BDF8"/>
+                </a:solidFill>
+                <a:latin typeface="Calibri"/>
+              </a:defRPr>
+            </a:pPr>
+            <a:r>
+              <a:t>Queue ADT, STL Containers &amp; Driver Menu (Modules I, II, IX, X)</a:t>
             </a:r>
           </a:p>
         </p:txBody>
@@ -10497,8 +7465,8 @@
         </p:nvSpPr>
         <p:spPr>
           <a:xfrm>
-            <a:off x="731520" y="685800"/>
-            <a:ext cx="10728655" cy="594360"/>
+            <a:off x="914400" y="1645920"/>
+            <a:ext cx="10362895" cy="4572000"/>
           </a:xfrm>
           <a:prstGeom prst="rect">
             <a:avLst/>
@@ -10510,335 +7478,97 @@
             <a:spAutoFit/>
           </a:bodyPr>
           <a:lstStyle/>
-          <a:p>
-            <a:pPr>
-              <a:defRPr sz="2400" b="1">
-                <a:solidFill>
-                  <a:srgbClr val="F8FAFC"/>
-                </a:solidFill>
-                <a:latin typeface="Arial"/>
-              </a:defRPr>
-            </a:pPr>
-            <a:r>
-              <a:t>Student 5: Chathwik — Queue ADT, STL &amp; Driver Menu</a:t>
-            </a:r>
-          </a:p>
-        </p:txBody>
-      </p:sp>
-      <p:sp>
-        <p:nvSpPr>
-          <p:cNvPr id="6" name="Rounded Rectangle 5"/>
-          <p:cNvSpPr/>
-          <p:nvPr/>
-        </p:nvSpPr>
-        <p:spPr>
-          <a:xfrm>
-            <a:off x="731520" y="1371600"/>
-            <a:ext cx="5120640" cy="4937760"/>
-          </a:xfrm>
-          <a:prstGeom prst="roundRect">
-            <a:avLst/>
-          </a:prstGeom>
-          <a:solidFill>
-            <a:srgbClr val="10182C"/>
-          </a:solidFill>
-          <a:ln w="19050">
-            <a:solidFill>
-              <a:srgbClr val="1A2644"/>
-            </a:solidFill>
-          </a:ln>
-        </p:spPr>
-        <p:style>
-          <a:lnRef idx="1">
-            <a:schemeClr val="accent1"/>
-          </a:lnRef>
-          <a:fillRef idx="3">
-            <a:schemeClr val="accent1"/>
-          </a:fillRef>
-          <a:effectRef idx="2">
-            <a:schemeClr val="accent1"/>
-          </a:effectRef>
-          <a:fontRef idx="minor">
-            <a:schemeClr val="lt1"/>
-          </a:fontRef>
-        </p:style>
-        <p:txBody>
-          <a:bodyPr rtlCol="0" anchor="ctr"/>
-          <a:lstStyle/>
-          <a:p>
-            <a:pPr algn="ctr"/>
-          </a:p>
-        </p:txBody>
-      </p:sp>
-      <p:sp>
-        <p:nvSpPr>
-          <p:cNvPr id="7" name="TextBox 6"/>
-          <p:cNvSpPr txBox="1"/>
-          <p:nvPr/>
-        </p:nvSpPr>
-        <p:spPr>
-          <a:xfrm>
-            <a:off x="914400" y="1508760"/>
-            <a:ext cx="4754880" cy="365760"/>
-          </a:xfrm>
-          <a:prstGeom prst="rect">
-            <a:avLst/>
-          </a:prstGeom>
-          <a:noFill/>
-        </p:spPr>
-        <p:txBody>
-          <a:bodyPr wrap="square">
-            <a:spAutoFit/>
-          </a:bodyPr>
-          <a:lstStyle/>
-          <a:p>
-            <a:pPr>
-              <a:defRPr sz="1500" b="1">
-                <a:solidFill>
-                  <a:srgbClr val="F59E0B"/>
-                </a:solidFill>
-                <a:latin typeface="Arial"/>
-              </a:defRPr>
-            </a:pPr>
-            <a:r>
-              <a:t>Queue ADT (Linear &amp; Circular)</a:t>
-            </a:r>
-          </a:p>
-        </p:txBody>
-      </p:sp>
-      <p:sp>
-        <p:nvSpPr>
-          <p:cNvPr id="8" name="TextBox 7"/>
-          <p:cNvSpPr txBox="1"/>
-          <p:nvPr/>
-        </p:nvSpPr>
-        <p:spPr>
-          <a:xfrm>
-            <a:off x="914400" y="1920240"/>
-            <a:ext cx="4754880" cy="4206240"/>
-          </a:xfrm>
-          <a:prstGeom prst="rect">
-            <a:avLst/>
-          </a:prstGeom>
-          <a:noFill/>
-        </p:spPr>
-        <p:txBody>
-          <a:bodyPr wrap="square">
-            <a:spAutoFit/>
-          </a:bodyPr>
-          <a:lstStyle/>
           <a:p/>
           <a:p>
-            <a:r>
-              <a:rPr b="1" sz="1300">
-                <a:solidFill>
-                  <a:srgbClr val="F8FAFC"/>
-                </a:solidFill>
-              </a:rPr>
-              <a:t>• Linear Queue (FIFO): </a:t>
-            </a:r>
-            <a:r>
-              <a:rPr sz="1300">
-                <a:solidFill>
-                  <a:srgbClr val="94A3B8"/>
-                </a:solidFill>
-              </a:rPr>
-              <a:t>Implements `LinearQueue` with `front` and `rear` pointers for bank teller customer token management.</a:t>
-            </a:r>
-          </a:p>
-          <a:p>
-            <a:r>
-              <a:rPr b="1" sz="1300">
-                <a:solidFill>
-                  <a:srgbClr val="F8FAFC"/>
-                </a:solidFill>
-              </a:rPr>
-              <a:t>• Circular Queue (Modulo Wraparound): </a:t>
-            </a:r>
-            <a:r>
-              <a:rPr sz="1300">
-                <a:solidFill>
-                  <a:srgbClr val="94A3B8"/>
-                </a:solidFill>
-              </a:rPr>
-              <a:t>Solves linear queue false-overflow using modulo arithmetic: `rear = (rear + 1) % MAX`.</a:t>
-            </a:r>
-          </a:p>
-          <a:p>
-            <a:r>
-              <a:rPr b="1" sz="1300">
-                <a:solidFill>
-                  <a:srgbClr val="F8FAFC"/>
-                </a:solidFill>
-              </a:rPr>
-              <a:t>• Optimal Efficiency: </a:t>
-            </a:r>
-            <a:r>
-              <a:rPr sz="1300">
-                <a:solidFill>
-                  <a:srgbClr val="94A3B8"/>
-                </a:solidFill>
-              </a:rPr>
-              <a:t>`circularEnqueue()` and `circularDequeue()` run in guaranteed O(1) time.</a:t>
-            </a:r>
-          </a:p>
-        </p:txBody>
-      </p:sp>
-      <p:sp>
-        <p:nvSpPr>
-          <p:cNvPr id="9" name="Rounded Rectangle 8"/>
-          <p:cNvSpPr/>
-          <p:nvPr/>
-        </p:nvSpPr>
-        <p:spPr>
-          <a:xfrm>
-            <a:off x="6309360" y="1371600"/>
-            <a:ext cx="5120640" cy="4937760"/>
-          </a:xfrm>
-          <a:prstGeom prst="roundRect">
-            <a:avLst/>
-          </a:prstGeom>
-          <a:solidFill>
-            <a:srgbClr val="10182C"/>
-          </a:solidFill>
-          <a:ln w="19050">
-            <a:solidFill>
-              <a:srgbClr val="1A2644"/>
-            </a:solidFill>
-          </a:ln>
-        </p:spPr>
-        <p:style>
-          <a:lnRef idx="1">
-            <a:schemeClr val="accent1"/>
-          </a:lnRef>
-          <a:fillRef idx="3">
-            <a:schemeClr val="accent1"/>
-          </a:fillRef>
-          <a:effectRef idx="2">
-            <a:schemeClr val="accent1"/>
-          </a:effectRef>
-          <a:fontRef idx="minor">
-            <a:schemeClr val="lt1"/>
-          </a:fontRef>
-        </p:style>
-        <p:txBody>
-          <a:bodyPr rtlCol="0" anchor="ctr"/>
-          <a:lstStyle/>
-          <a:p>
-            <a:pPr algn="ctr"/>
-          </a:p>
-        </p:txBody>
-      </p:sp>
-      <p:sp>
-        <p:nvSpPr>
-          <p:cNvPr id="10" name="TextBox 9"/>
-          <p:cNvSpPr txBox="1"/>
-          <p:nvPr/>
-        </p:nvSpPr>
-        <p:spPr>
-          <a:xfrm>
-            <a:off x="6492240" y="1508760"/>
-            <a:ext cx="4754880" cy="365760"/>
-          </a:xfrm>
-          <a:prstGeom prst="rect">
-            <a:avLst/>
-          </a:prstGeom>
-          <a:noFill/>
-        </p:spPr>
-        <p:txBody>
-          <a:bodyPr wrap="square">
-            <a:spAutoFit/>
-          </a:bodyPr>
-          <a:lstStyle/>
-          <a:p>
-            <a:pPr>
-              <a:defRPr sz="1500" b="1">
-                <a:solidFill>
-                  <a:srgbClr val="06B6D4"/>
-                </a:solidFill>
-                <a:latin typeface="Arial"/>
-              </a:defRPr>
-            </a:pPr>
-            <a:r>
-              <a:t>STL Containers &amp; Main Controller</a:t>
-            </a:r>
-          </a:p>
-        </p:txBody>
-      </p:sp>
-      <p:sp>
-        <p:nvSpPr>
-          <p:cNvPr id="11" name="TextBox 10"/>
-          <p:cNvSpPr txBox="1"/>
-          <p:nvPr/>
-        </p:nvSpPr>
-        <p:spPr>
-          <a:xfrm>
-            <a:off x="6492240" y="1920240"/>
-            <a:ext cx="4754880" cy="4206240"/>
-          </a:xfrm>
-          <a:prstGeom prst="rect">
-            <a:avLst/>
-          </a:prstGeom>
-          <a:noFill/>
-        </p:spPr>
-        <p:txBody>
-          <a:bodyPr wrap="square">
-            <a:spAutoFit/>
-          </a:bodyPr>
-          <a:lstStyle/>
-          <a:p/>
-          <a:p>
-            <a:r>
-              <a:rPr b="1" sz="1300">
-                <a:solidFill>
-                  <a:srgbClr val="F8FAFC"/>
-                </a:solidFill>
-              </a:rPr>
-              <a:t>• STL Demonstration (Module X): </a:t>
-            </a:r>
-            <a:r>
-              <a:rPr sz="1300">
-                <a:solidFill>
-                  <a:srgbClr val="94A3B8"/>
-                </a:solidFill>
-              </a:rPr>
-              <a:t>Showcases `std::vector` + `std::pair` (account &amp; balance), `std::deque` (VIP priority lines), `std::set` (unique phone numbers), and `std::map` (O(log n) account lookups).</a:t>
-            </a:r>
-          </a:p>
-          <a:p>
-            <a:r>
-              <a:rPr b="1" sz="1300">
-                <a:solidFill>
-                  <a:srgbClr val="F8FAFC"/>
-                </a:solidFill>
-              </a:rPr>
-              <a:t>• Console Menu Interface: </a:t>
-            </a:r>
-            <a:r>
-              <a:rPr sz="1300">
-                <a:solidFill>
-                  <a:srgbClr val="94A3B8"/>
-                </a:solidFill>
-              </a:rPr>
-              <a:t>14-option interactive console menu cleanly categorized by student responsibilities.</a:t>
-            </a:r>
-          </a:p>
-          <a:p>
-            <a:r>
-              <a:rPr b="1" sz="1300">
-                <a:solidFill>
-                  <a:srgbClr val="F8FAFC"/>
-                </a:solidFill>
-              </a:rPr>
-              <a:t>• Main Application Driver: </a:t>
-            </a:r>
-            <a:r>
-              <a:rPr sz="1300">
-                <a:solidFill>
-                  <a:srgbClr val="94A3B8"/>
-                </a:solidFill>
-              </a:rPr>
-              <a:t>Central execution event loop handling error checking and routing requests to all 5 student modules.</a:t>
+            <a:pPr>
+              <a:spcAft>
+                <a:spcPts val="1800"/>
+              </a:spcAft>
+            </a:pPr>
+            <a:r>
+              <a:rPr b="1" sz="1600">
+                <a:solidFill>
+                  <a:srgbClr val="34D399"/>
+                </a:solidFill>
+              </a:rPr>
+              <a:t>•  Linear Queue (FIFO): </a:t>
+            </a:r>
+            <a:r>
+              <a:rPr sz="1600">
+                <a:solidFill>
+                  <a:srgbClr val="FFFFFF"/>
+                </a:solidFill>
+              </a:rPr>
+              <a:t>Bank teller token queue servicing customers First-In, First-Out.</a:t>
+            </a:r>
+          </a:p>
+          <a:p>
+            <a:pPr>
+              <a:spcAft>
+                <a:spcPts val="1800"/>
+              </a:spcAft>
+            </a:pPr>
+            <a:r>
+              <a:rPr b="1" sz="1600">
+                <a:solidFill>
+                  <a:srgbClr val="34D399"/>
+                </a:solidFill>
+              </a:rPr>
+              <a:t>•  Circular Queue (Modulo %): </a:t>
+            </a:r>
+            <a:r>
+              <a:rPr sz="1600">
+                <a:solidFill>
+                  <a:srgbClr val="FFFFFF"/>
+                </a:solidFill>
+              </a:rPr>
+              <a:t>Recycles memory using `(rear + 1) % MAX` to prevent false overflow.</a:t>
+            </a:r>
+          </a:p>
+          <a:p>
+            <a:pPr>
+              <a:spcAft>
+                <a:spcPts val="1800"/>
+              </a:spcAft>
+            </a:pPr>
+            <a:r>
+              <a:rPr b="1" sz="1600">
+                <a:solidFill>
+                  <a:srgbClr val="34D399"/>
+                </a:solidFill>
+              </a:rPr>
+              <a:t>•  STL Containers (Module X): </a:t>
+            </a:r>
+            <a:r>
+              <a:rPr sz="1600">
+                <a:solidFill>
+                  <a:srgbClr val="FFFFFF"/>
+                </a:solidFill>
+              </a:rPr>
+              <a:t>Demonstrates `std::vector`, `std::deque`, `std::set`, and `std::map`.</a:t>
+            </a:r>
+          </a:p>
+          <a:p>
+            <a:pPr>
+              <a:spcAft>
+                <a:spcPts val="1800"/>
+              </a:spcAft>
+            </a:pPr>
+            <a:r>
+              <a:rPr b="1" sz="1600">
+                <a:solidFill>
+                  <a:srgbClr val="34D399"/>
+                </a:solidFill>
+              </a:rPr>
+              <a:t>•  Main Application Driver: </a:t>
+            </a:r>
+            <a:r>
+              <a:rPr sz="1600">
+                <a:solidFill>
+                  <a:srgbClr val="FFFFFF"/>
+                </a:solidFill>
+              </a:rPr>
+              <a:t>14-option interactive console controller routing all module actions.</a:t>
             </a:r>
           </a:p>
         </p:txBody>
